--- a/docs/public/course-assets/course-pptx/in-009.pptx
+++ b/docs/public/course-assets/course-pptx/in-009.pptx
@@ -2,25 +2,25 @@
 <file path=ppt/presentation.xml><?xml version="1.0" encoding="utf-8"?>
 <p:presentation xmlns:p="http://schemas.openxmlformats.org/presentationml/2006/main">
   <p:sldMasterIdLst>
-    <p:sldMasterId xmlns:r="http://schemas.openxmlformats.org/officeDocument/2006/relationships" id="2147483648" r:id="R23048da17c2f4133"/>
+    <p:sldMasterId xmlns:r="http://schemas.openxmlformats.org/officeDocument/2006/relationships" id="2147483648" r:id="Re4af1516abef4f34"/>
   </p:sldMasterIdLst>
   <p:notesMasterIdLst>
-    <p:notesMasterId xmlns:r="http://schemas.openxmlformats.org/officeDocument/2006/relationships" r:id="Reb46dd9374b948f1"/>
+    <p:notesMasterId xmlns:r="http://schemas.openxmlformats.org/officeDocument/2006/relationships" r:id="Rbaf27e9de4554c0f"/>
   </p:notesMasterIdLst>
   <p:sldIdLst>
-    <p:sldId xmlns:r="http://schemas.openxmlformats.org/officeDocument/2006/relationships" id="256" r:id="R422a57799af14857"/>
-    <p:sldId xmlns:r="http://schemas.openxmlformats.org/officeDocument/2006/relationships" id="257" r:id="Rc45ff337b8174008"/>
-    <p:sldId xmlns:r="http://schemas.openxmlformats.org/officeDocument/2006/relationships" id="258" r:id="R59bc62f9c2f44d0f"/>
-    <p:sldId xmlns:r="http://schemas.openxmlformats.org/officeDocument/2006/relationships" id="259" r:id="R1f704452a8834f72"/>
-    <p:sldId xmlns:r="http://schemas.openxmlformats.org/officeDocument/2006/relationships" id="260" r:id="R00ada50cdb7246a4"/>
-    <p:sldId xmlns:r="http://schemas.openxmlformats.org/officeDocument/2006/relationships" id="261" r:id="R99ec76d6cf43429f"/>
-    <p:sldId xmlns:r="http://schemas.openxmlformats.org/officeDocument/2006/relationships" id="262" r:id="R8355d938c30e4962"/>
-    <p:sldId xmlns:r="http://schemas.openxmlformats.org/officeDocument/2006/relationships" id="263" r:id="R9209ffe434254a81"/>
-    <p:sldId xmlns:r="http://schemas.openxmlformats.org/officeDocument/2006/relationships" id="264" r:id="Rcde218ef2d25425c"/>
-    <p:sldId xmlns:r="http://schemas.openxmlformats.org/officeDocument/2006/relationships" id="265" r:id="R2ca076d95ccd4b21"/>
-    <p:sldId xmlns:r="http://schemas.openxmlformats.org/officeDocument/2006/relationships" id="266" r:id="R21ade94a61ee4983"/>
-    <p:sldId xmlns:r="http://schemas.openxmlformats.org/officeDocument/2006/relationships" id="267" r:id="R8d50dab8ffed4d9f"/>
-    <p:sldId xmlns:r="http://schemas.openxmlformats.org/officeDocument/2006/relationships" id="268" r:id="R8bb3d09550c841f9"/>
+    <p:sldId xmlns:r="http://schemas.openxmlformats.org/officeDocument/2006/relationships" id="256" r:id="R36911a7c2804483f"/>
+    <p:sldId xmlns:r="http://schemas.openxmlformats.org/officeDocument/2006/relationships" id="257" r:id="R14492666b6fe42d6"/>
+    <p:sldId xmlns:r="http://schemas.openxmlformats.org/officeDocument/2006/relationships" id="258" r:id="R42b6cc83b62840d5"/>
+    <p:sldId xmlns:r="http://schemas.openxmlformats.org/officeDocument/2006/relationships" id="259" r:id="R567423042c374ffa"/>
+    <p:sldId xmlns:r="http://schemas.openxmlformats.org/officeDocument/2006/relationships" id="260" r:id="R212054dbc17c4552"/>
+    <p:sldId xmlns:r="http://schemas.openxmlformats.org/officeDocument/2006/relationships" id="261" r:id="R543c53a9600d44ee"/>
+    <p:sldId xmlns:r="http://schemas.openxmlformats.org/officeDocument/2006/relationships" id="262" r:id="R532ffd849d414898"/>
+    <p:sldId xmlns:r="http://schemas.openxmlformats.org/officeDocument/2006/relationships" id="263" r:id="R11dbb40b457b477c"/>
+    <p:sldId xmlns:r="http://schemas.openxmlformats.org/officeDocument/2006/relationships" id="264" r:id="R334e5fa25cdd44df"/>
+    <p:sldId xmlns:r="http://schemas.openxmlformats.org/officeDocument/2006/relationships" id="265" r:id="R530d9b6ffeb94e50"/>
+    <p:sldId xmlns:r="http://schemas.openxmlformats.org/officeDocument/2006/relationships" id="266" r:id="Recf09f30b5b14625"/>
+    <p:sldId xmlns:r="http://schemas.openxmlformats.org/officeDocument/2006/relationships" id="267" r:id="Rf35b56bbaa78487e"/>
+    <p:sldId xmlns:r="http://schemas.openxmlformats.org/officeDocument/2006/relationships" id="268" r:id="R756fe8d0bae748aa"/>
   </p:sldIdLst>
   <p:sldSz cx="12192000" cy="6858000"/>
   <p:notesSz cx="6858000" cy="9144000"/>
@@ -1405,7 +1405,7 @@
   </p:cSld>
   <p:clrMap bg1="lt1" tx1="dk1" bg2="lt2" tx2="dk2" accent1="accent1" accent2="accent2" accent3="accent3" accent4="accent4" accent5="accent5" accent6="accent6" hlink="hlink" folHlink="folHlink"/>
   <p:sldLayoutIdLst>
-    <p:sldLayoutId xmlns:r="http://schemas.openxmlformats.org/officeDocument/2006/relationships" id="2147483649" r:id="Rb41d3641dc864cac"/>
+    <p:sldLayoutId xmlns:r="http://schemas.openxmlformats.org/officeDocument/2006/relationships" id="2147483649" r:id="R2d7ad5a46fda4a20"/>
   </p:sldLayoutIdLst>
   <p:txStyles>
     <p:titleStyle>
@@ -1956,7 +1956,7 @@
           <p:cNvPr id="1" name="cover-rule">
             <a:extLst xmlns:a="http://schemas.openxmlformats.org/drawingml/2006/main">
               <a:ext uri="{FF2B5EF4-FFF2-40B4-BE49-F238E27FC236}">
-                <a16:creationId xmlns:a16="http://schemas.microsoft.com/office/drawing/2014/main" id="{F5AF0E83-0A34-4FA4-A630-180D45F17107}"/>
+                <a16:creationId xmlns:a16="http://schemas.microsoft.com/office/drawing/2014/main" id="{74F10B2B-6DE8-4DA0-9E59-CD4C37CE7050}"/>
               </a:ext>
             </a:extLst>
           </p:cNvPr>
@@ -1989,7 +1989,7 @@
           <p:cNvPr id="2" name="cover-ring-1">
             <a:extLst xmlns:a="http://schemas.openxmlformats.org/drawingml/2006/main">
               <a:ext uri="{FF2B5EF4-FFF2-40B4-BE49-F238E27FC236}">
-                <a16:creationId xmlns:a16="http://schemas.microsoft.com/office/drawing/2014/main" id="{A300CB81-FA5D-4AB7-A03C-3B06531FF61F}"/>
+                <a16:creationId xmlns:a16="http://schemas.microsoft.com/office/drawing/2014/main" id="{F726086B-1C93-4AE1-B153-71821EE3EB0E}"/>
               </a:ext>
             </a:extLst>
           </p:cNvPr>
@@ -2020,7 +2020,7 @@
           <p:cNvPr id="3" name="cover-ring-2">
             <a:extLst xmlns:a="http://schemas.openxmlformats.org/drawingml/2006/main">
               <a:ext uri="{FF2B5EF4-FFF2-40B4-BE49-F238E27FC236}">
-                <a16:creationId xmlns:a16="http://schemas.microsoft.com/office/drawing/2014/main" id="{1ECC9733-3380-487B-ABEC-BCF5F324CF64}"/>
+                <a16:creationId xmlns:a16="http://schemas.microsoft.com/office/drawing/2014/main" id="{9BAD4855-56B6-49DC-A9BB-4A00AEFDEC66}"/>
               </a:ext>
             </a:extLst>
           </p:cNvPr>
@@ -2051,7 +2051,7 @@
           <p:cNvPr id="4" name="cover-core">
             <a:extLst xmlns:a="http://schemas.openxmlformats.org/drawingml/2006/main">
               <a:ext uri="{FF2B5EF4-FFF2-40B4-BE49-F238E27FC236}">
-                <a16:creationId xmlns:a16="http://schemas.microsoft.com/office/drawing/2014/main" id="{A35341BD-52EB-4AF1-92CC-48B61ADBF9C4}"/>
+                <a16:creationId xmlns:a16="http://schemas.microsoft.com/office/drawing/2014/main" id="{2D072D37-5F5C-4D1B-B5F4-924A3862E22B}"/>
               </a:ext>
             </a:extLst>
           </p:cNvPr>
@@ -2084,7 +2084,7 @@
           <p:cNvPr id="5" name="cover-line-1">
             <a:extLst xmlns:a="http://schemas.openxmlformats.org/drawingml/2006/main">
               <a:ext uri="{FF2B5EF4-FFF2-40B4-BE49-F238E27FC236}">
-                <a16:creationId xmlns:a16="http://schemas.microsoft.com/office/drawing/2014/main" id="{A8713135-E3B5-4B62-8E79-2AC7FB5AC202}"/>
+                <a16:creationId xmlns:a16="http://schemas.microsoft.com/office/drawing/2014/main" id="{4BD1FCB0-6E58-49A0-B89E-AFD4B68C1984}"/>
               </a:ext>
             </a:extLst>
           </p:cNvPr>
@@ -2115,7 +2115,7 @@
           <p:cNvPr id="6" name="cover-line-2">
             <a:extLst xmlns:a="http://schemas.openxmlformats.org/drawingml/2006/main">
               <a:ext uri="{FF2B5EF4-FFF2-40B4-BE49-F238E27FC236}">
-                <a16:creationId xmlns:a16="http://schemas.microsoft.com/office/drawing/2014/main" id="{D5BC6D1A-DA1F-49B7-BAFB-188D7AB8EAD0}"/>
+                <a16:creationId xmlns:a16="http://schemas.microsoft.com/office/drawing/2014/main" id="{2B6CEE48-22DC-49F7-990E-5BB7551F58D9}"/>
               </a:ext>
             </a:extLst>
           </p:cNvPr>
@@ -2146,7 +2146,7 @@
           <p:cNvPr id="7" name="cover-eyebrow">
             <a:extLst xmlns:a="http://schemas.openxmlformats.org/drawingml/2006/main">
               <a:ext uri="{FF2B5EF4-FFF2-40B4-BE49-F238E27FC236}">
-                <a16:creationId xmlns:a16="http://schemas.microsoft.com/office/drawing/2014/main" id="{892D49E2-8FF1-4016-9E2E-12034E6762EC}"/>
+                <a16:creationId xmlns:a16="http://schemas.microsoft.com/office/drawing/2014/main" id="{28EAFEBB-5B5B-4A9A-A949-0D040BBCF13F}"/>
               </a:ext>
             </a:extLst>
           </p:cNvPr>
@@ -2204,7 +2204,7 @@
           <p:cNvPr id="8" name="cover-title">
             <a:extLst xmlns:a="http://schemas.openxmlformats.org/drawingml/2006/main">
               <a:ext uri="{FF2B5EF4-FFF2-40B4-BE49-F238E27FC236}">
-                <a16:creationId xmlns:a16="http://schemas.microsoft.com/office/drawing/2014/main" id="{E01AAEDF-CFBB-4579-BAD4-3C2C9E2B37FA}"/>
+                <a16:creationId xmlns:a16="http://schemas.microsoft.com/office/drawing/2014/main" id="{DCAA744B-7597-4B3A-B0F2-3275AB83099A}"/>
               </a:ext>
             </a:extLst>
           </p:cNvPr>
@@ -2262,7 +2262,7 @@
           <p:cNvPr id="9" name="cover-subtitle">
             <a:extLst xmlns:a="http://schemas.openxmlformats.org/drawingml/2006/main">
               <a:ext uri="{FF2B5EF4-FFF2-40B4-BE49-F238E27FC236}">
-                <a16:creationId xmlns:a16="http://schemas.microsoft.com/office/drawing/2014/main" id="{A49442E4-7365-4D34-BADF-1003236D9579}"/>
+                <a16:creationId xmlns:a16="http://schemas.microsoft.com/office/drawing/2014/main" id="{DAC525D1-BB58-486E-8E16-CC3647A7044D}"/>
               </a:ext>
             </a:extLst>
           </p:cNvPr>
@@ -2324,7 +2324,7 @@
           <p:cNvPr id="10" name="cover-lead">
             <a:extLst xmlns:a="http://schemas.openxmlformats.org/drawingml/2006/main">
               <a:ext uri="{FF2B5EF4-FFF2-40B4-BE49-F238E27FC236}">
-                <a16:creationId xmlns:a16="http://schemas.microsoft.com/office/drawing/2014/main" id="{9162C781-0AE3-4DA5-B802-FF6837E804AB}"/>
+                <a16:creationId xmlns:a16="http://schemas.microsoft.com/office/drawing/2014/main" id="{C35DA056-0042-4D43-9BF2-FCBC644249F6}"/>
               </a:ext>
             </a:extLst>
           </p:cNvPr>
@@ -2372,7 +2372,7 @@
                 <a:ea typeface="PingFang SC"/>
                 <a:cs typeface="PingFang SC"/>
               </a:rPr>
-              <a:t>文旅景区、展厅和智慧建筑都在经营“人与空间的关系”。游客希望少迷路、少等待、得到与兴趣和时间匹配的内容；运营人员则要维护地图、展项、活动、设备和安全秩序。导览机器人、移动应用…</a:t>
+              <a:t>文旅景区、展厅和智慧建筑都在经营“人与空间的关系”；游客希望少迷路、少等待、得到与兴趣和时间匹配的内容；运营人员则要维护地图、展项、活动、设备和安全秩序</a:t>
             </a:r>
           </a:p>
         </p:txBody>
@@ -2382,7 +2382,7 @@
           <p:cNvPr id="11" name="cover-course">
             <a:extLst xmlns:a="http://schemas.openxmlformats.org/drawingml/2006/main">
               <a:ext uri="{FF2B5EF4-FFF2-40B4-BE49-F238E27FC236}">
-                <a16:creationId xmlns:a16="http://schemas.microsoft.com/office/drawing/2014/main" id="{2DD9F1CF-8F15-454F-8F84-5E77DD2CDF24}"/>
+                <a16:creationId xmlns:a16="http://schemas.microsoft.com/office/drawing/2014/main" id="{4CCEF49A-389C-4D15-A770-5C82F149F8B7}"/>
               </a:ext>
             </a:extLst>
           </p:cNvPr>
@@ -2440,7 +2440,7 @@
           <p:cNvPr id="12" name="cover-id">
             <a:extLst xmlns:a="http://schemas.openxmlformats.org/drawingml/2006/main">
               <a:ext uri="{FF2B5EF4-FFF2-40B4-BE49-F238E27FC236}">
-                <a16:creationId xmlns:a16="http://schemas.microsoft.com/office/drawing/2014/main" id="{745B2003-07F5-47E1-B1AB-FFD03E59BD95}"/>
+                <a16:creationId xmlns:a16="http://schemas.microsoft.com/office/drawing/2014/main" id="{7A515E1C-FB2A-49CA-85B3-04ACAD057298}"/>
               </a:ext>
             </a:extLst>
           </p:cNvPr>
@@ -2496,7 +2496,7 @@
     </p:spTree>
     <p:extLst>
       <p:ext uri="{BB962C8B-B14F-4D97-AF65-F5344CB8AC3E}">
-        <p14:creationId xmlns:p14="http://schemas.microsoft.com/office/powerpoint/2010/main" val="1578486626"/>
+        <p14:creationId xmlns:p14="http://schemas.microsoft.com/office/powerpoint/2010/main" val="427725955"/>
       </p:ext>
     </p:extLst>
   </p:cSld>
@@ -2527,7 +2527,7 @@
           <p:cNvPr id="1" name="s10-rule">
             <a:extLst xmlns:a="http://schemas.openxmlformats.org/drawingml/2006/main">
               <a:ext uri="{FF2B5EF4-FFF2-40B4-BE49-F238E27FC236}">
-                <a16:creationId xmlns:a16="http://schemas.microsoft.com/office/drawing/2014/main" id="{FC5D5921-9F78-4282-80A4-18EBABF46762}"/>
+                <a16:creationId xmlns:a16="http://schemas.microsoft.com/office/drawing/2014/main" id="{EB146700-DFDE-4037-A6E2-05E759B9E6DC}"/>
               </a:ext>
             </a:extLst>
           </p:cNvPr>
@@ -2560,7 +2560,7 @@
           <p:cNvPr id="2" name="s10-eyebrow">
             <a:extLst xmlns:a="http://schemas.openxmlformats.org/drawingml/2006/main">
               <a:ext uri="{FF2B5EF4-FFF2-40B4-BE49-F238E27FC236}">
-                <a16:creationId xmlns:a16="http://schemas.microsoft.com/office/drawing/2014/main" id="{C46B1BB9-BB0A-4BA4-8768-1CA79293201B}"/>
+                <a16:creationId xmlns:a16="http://schemas.microsoft.com/office/drawing/2014/main" id="{BE0E815D-F1A4-4688-AE1D-466899450C2B}"/>
               </a:ext>
             </a:extLst>
           </p:cNvPr>
@@ -2618,7 +2618,7 @@
           <p:cNvPr id="3" name="s10-title">
             <a:extLst xmlns:a="http://schemas.openxmlformats.org/drawingml/2006/main">
               <a:ext uri="{FF2B5EF4-FFF2-40B4-BE49-F238E27FC236}">
-                <a16:creationId xmlns:a16="http://schemas.microsoft.com/office/drawing/2014/main" id="{C042980F-782C-4748-89A0-208B1FC60795}"/>
+                <a16:creationId xmlns:a16="http://schemas.microsoft.com/office/drawing/2014/main" id="{5C8D91D9-FCE4-4030-9CFC-F4C402EB4C3B}"/>
               </a:ext>
             </a:extLst>
           </p:cNvPr>
@@ -2666,7 +2666,7 @@
                 <a:ea typeface="PingFang SC"/>
                 <a:cs typeface="PingFang SC"/>
               </a:rPr>
-              <a:t>智慧建筑中的设备与空间联动必须经过边界验证</a:t>
+              <a:t>建筑联动建议必须经过现场核验与授权</a:t>
             </a:r>
           </a:p>
         </p:txBody>
@@ -2676,7 +2676,7 @@
           <p:cNvPr id="4" name="s10-footer">
             <a:extLst xmlns:a="http://schemas.openxmlformats.org/drawingml/2006/main">
               <a:ext uri="{FF2B5EF4-FFF2-40B4-BE49-F238E27FC236}">
-                <a16:creationId xmlns:a16="http://schemas.microsoft.com/office/drawing/2014/main" id="{5FE55A7D-F8CB-4328-9C1C-A373CF4F1BF7}"/>
+                <a16:creationId xmlns:a16="http://schemas.microsoft.com/office/drawing/2014/main" id="{92EB38CA-F489-49DC-80DE-CADE877132C6}"/>
               </a:ext>
             </a:extLst>
           </p:cNvPr>
@@ -2707,7 +2707,7 @@
           <p:cNvPr id="5" name="s10-identity">
             <a:extLst xmlns:a="http://schemas.openxmlformats.org/drawingml/2006/main">
               <a:ext uri="{FF2B5EF4-FFF2-40B4-BE49-F238E27FC236}">
-                <a16:creationId xmlns:a16="http://schemas.microsoft.com/office/drawing/2014/main" id="{0F249F2E-FD55-4B8B-9837-B373BD38ED52}"/>
+                <a16:creationId xmlns:a16="http://schemas.microsoft.com/office/drawing/2014/main" id="{0C49D0C5-76EB-409D-8357-F8FA74576425}"/>
               </a:ext>
             </a:extLst>
           </p:cNvPr>
@@ -2765,7 +2765,7 @@
           <p:cNvPr id="6" name="case-title">
             <a:extLst xmlns:a="http://schemas.openxmlformats.org/drawingml/2006/main">
               <a:ext uri="{FF2B5EF4-FFF2-40B4-BE49-F238E27FC236}">
-                <a16:creationId xmlns:a16="http://schemas.microsoft.com/office/drawing/2014/main" id="{4C6CF547-613C-4758-9D76-0B530BA12D2F}"/>
+                <a16:creationId xmlns:a16="http://schemas.microsoft.com/office/drawing/2014/main" id="{1281590B-7CE5-482C-A4E5-705970BB1AFB}"/>
               </a:ext>
             </a:extLst>
           </p:cNvPr>
@@ -2829,23 +2829,23 @@
           <p:cNvPr id="7" name="case-row-0">
             <a:extLst xmlns:a="http://schemas.openxmlformats.org/drawingml/2006/main">
               <a:ext uri="{FF2B5EF4-FFF2-40B4-BE49-F238E27FC236}">
-                <a16:creationId xmlns:a16="http://schemas.microsoft.com/office/drawing/2014/main" id="{B1BCDEEC-EFBD-4350-8EFE-3318EB57BCDA}"/>
-              </a:ext>
-            </a:extLst>
-          </p:cNvPr>
-          <p:cNvSpPr>
-            <a:spLocks xmlns:a="http://schemas.openxmlformats.org/drawingml/2006/main" noGrp="1"/>
-          </p:cNvSpPr>
-          <p:nvPr/>
-        </p:nvSpPr>
-        <p:spPr>
-          <a:xfrm xmlns:a="http://schemas.openxmlformats.org/drawingml/2006/main">
-            <a:off x="4286250" y="2228850"/>
-            <a:ext cx="6534150" cy="1238250"/>
+                <a16:creationId xmlns:a16="http://schemas.microsoft.com/office/drawing/2014/main" id="{2E90E14C-3C76-4D64-A15B-E8C7DB87D77A}"/>
+              </a:ext>
+            </a:extLst>
+          </p:cNvPr>
+          <p:cNvSpPr>
+            <a:spLocks xmlns:a="http://schemas.openxmlformats.org/drawingml/2006/main" noGrp="1"/>
+          </p:cNvSpPr>
+          <p:nvPr/>
+        </p:nvSpPr>
+        <p:spPr>
+          <a:xfrm xmlns:a="http://schemas.openxmlformats.org/drawingml/2006/main">
+            <a:off x="4286250" y="2057400"/>
+            <a:ext cx="6534150" cy="838200"/>
           </a:xfrm>
           <a:prstGeom xmlns:a="http://schemas.openxmlformats.org/drawingml/2006/main" prst="roundRect">
             <a:avLst>
-              <a:gd name="adj" fmla="val 10000"/>
+              <a:gd name="adj" fmla="val 14773"/>
             </a:avLst>
           </a:prstGeom>
           <a:solidFill xmlns:a="http://schemas.openxmlformats.org/drawingml/2006/main">
@@ -2893,23 +2893,87 @@
           <p:cNvPr id="8" name="case-row-1">
             <a:extLst xmlns:a="http://schemas.openxmlformats.org/drawingml/2006/main">
               <a:ext uri="{FF2B5EF4-FFF2-40B4-BE49-F238E27FC236}">
-                <a16:creationId xmlns:a16="http://schemas.microsoft.com/office/drawing/2014/main" id="{337E8277-F432-4310-8A7B-0CD4CC1C3A13}"/>
-              </a:ext>
-            </a:extLst>
-          </p:cNvPr>
-          <p:cNvSpPr>
-            <a:spLocks xmlns:a="http://schemas.openxmlformats.org/drawingml/2006/main" noGrp="1"/>
-          </p:cNvSpPr>
-          <p:nvPr/>
-        </p:nvSpPr>
-        <p:spPr>
-          <a:xfrm xmlns:a="http://schemas.openxmlformats.org/drawingml/2006/main">
-            <a:off x="4286250" y="3714750"/>
-            <a:ext cx="6534150" cy="1238250"/>
+                <a16:creationId xmlns:a16="http://schemas.microsoft.com/office/drawing/2014/main" id="{0C5587F0-71E3-4D91-A96B-59CC6271FD02}"/>
+              </a:ext>
+            </a:extLst>
+          </p:cNvPr>
+          <p:cNvSpPr>
+            <a:spLocks xmlns:a="http://schemas.openxmlformats.org/drawingml/2006/main" noGrp="1"/>
+          </p:cNvSpPr>
+          <p:nvPr/>
+        </p:nvSpPr>
+        <p:spPr>
+          <a:xfrm xmlns:a="http://schemas.openxmlformats.org/drawingml/2006/main">
+            <a:off x="4286250" y="3086100"/>
+            <a:ext cx="6534150" cy="838200"/>
           </a:xfrm>
           <a:prstGeom xmlns:a="http://schemas.openxmlformats.org/drawingml/2006/main" prst="roundRect">
             <a:avLst>
-              <a:gd name="adj" fmla="val 10000"/>
+              <a:gd name="adj" fmla="val 14773"/>
+            </a:avLst>
+          </a:prstGeom>
+          <a:solidFill xmlns:a="http://schemas.openxmlformats.org/drawingml/2006/main">
+            <a:srgbClr val="FFFFFF"/>
+          </a:solidFill>
+          <a:ln xmlns:a="http://schemas.openxmlformats.org/drawingml/2006/main" w="9525">
+            <a:solidFill>
+              <a:srgbClr val="D8E0E8"/>
+            </a:solidFill>
+            <a:prstDash val="solid"/>
+          </a:ln>
+        </p:spPr>
+        <p:txBody>
+          <a:bodyPr xmlns:a="http://schemas.openxmlformats.org/drawingml/2006/main" lIns="152400" tIns="133350" rIns="152400" bIns="133350" anchor="ctr">
+            <a:normAutofit fontScale="100000"/>
+          </a:bodyPr>
+          <a:lstStyle xmlns:a="http://schemas.openxmlformats.org/drawingml/2006/main"/>
+          <a:p xmlns:a="http://schemas.openxmlformats.org/drawingml/2006/main">
+            <a:pPr algn="l">
+              <a:defRPr sz="1575" b="0">
+                <a:solidFill>
+                  <a:srgbClr val="10233F"/>
+                </a:solidFill>
+                <a:latin typeface="PingFang SC"/>
+                <a:ea typeface="PingFang SC"/>
+                <a:cs typeface="PingFang SC"/>
+              </a:defRPr>
+            </a:pPr>
+            <a:r>
+              <a:rPr sz="1575" b="0">
+                <a:solidFill>
+                  <a:srgbClr val="10233F"/>
+                </a:solidFill>
+                <a:latin typeface="PingFang SC"/>
+                <a:ea typeface="PingFang SC"/>
+                <a:cs typeface="PingFang SC"/>
+              </a:rPr>
+              <a:t>辅助｜数字孪生关联房间、传感器、相关设备、维护记录和活动安排，展示数据时间与未关闭工单</a:t>
+            </a:r>
+          </a:p>
+        </p:txBody>
+      </p:sp>
+      <p:sp>
+        <p:nvSpPr>
+          <p:cNvPr id="9" name="case-row-2">
+            <a:extLst xmlns:a="http://schemas.openxmlformats.org/drawingml/2006/main">
+              <a:ext uri="{FF2B5EF4-FFF2-40B4-BE49-F238E27FC236}">
+                <a16:creationId xmlns:a16="http://schemas.microsoft.com/office/drawing/2014/main" id="{C4F6CD6F-1456-4D4E-9717-9F99877372F8}"/>
+              </a:ext>
+            </a:extLst>
+          </p:cNvPr>
+          <p:cNvSpPr>
+            <a:spLocks xmlns:a="http://schemas.openxmlformats.org/drawingml/2006/main" noGrp="1"/>
+          </p:cNvSpPr>
+          <p:nvPr/>
+        </p:nvSpPr>
+        <p:spPr>
+          <a:xfrm xmlns:a="http://schemas.openxmlformats.org/drawingml/2006/main">
+            <a:off x="4286250" y="4114800"/>
+            <a:ext cx="6534150" cy="838200"/>
+          </a:xfrm>
+          <a:prstGeom xmlns:a="http://schemas.openxmlformats.org/drawingml/2006/main" prst="roundRect">
+            <a:avLst>
+              <a:gd name="adj" fmla="val 14773"/>
             </a:avLst>
           </a:prstGeom>
           <a:solidFill xmlns:a="http://schemas.openxmlformats.org/drawingml/2006/main">
@@ -2917,7 +2981,7 @@
           </a:solidFill>
           <a:ln xmlns:a="http://schemas.openxmlformats.org/drawingml/2006/main" w="9525">
             <a:solidFill>
-              <a:srgbClr val="E5783F"/>
+              <a:srgbClr val="9A3F16"/>
             </a:solidFill>
             <a:prstDash val="solid"/>
           </a:ln>
@@ -2947,17 +3011,17 @@
                 <a:ea typeface="PingFang SC"/>
                 <a:cs typeface="PingFang SC"/>
               </a:rPr>
-              <a:t>验证｜验收“智慧建筑中的设备与空间联动”时，要同时记录适用场景、证据来源、失败条件与人工责任</a:t>
-            </a:r>
-          </a:p>
-        </p:txBody>
-      </p:sp>
-      <p:sp>
-        <p:nvSpPr>
-          <p:cNvPr id="9" name="s10-takeaway-rule">
-            <a:extLst xmlns:a="http://schemas.openxmlformats.org/drawingml/2006/main">
-              <a:ext uri="{FF2B5EF4-FFF2-40B4-BE49-F238E27FC236}">
-                <a16:creationId xmlns:a16="http://schemas.microsoft.com/office/drawing/2014/main" id="{CE016AC3-6243-4D6C-A839-8A1F7066CE4A}"/>
+              <a:t>决定｜设施人员现场复核后选择维修、调整空间或启用替代区域；系统不根据单个传感器自动改变安全策略</a:t>
+            </a:r>
+          </a:p>
+        </p:txBody>
+      </p:sp>
+      <p:sp>
+        <p:nvSpPr>
+          <p:cNvPr id="10" name="s10-takeaway-rule">
+            <a:extLst xmlns:a="http://schemas.openxmlformats.org/drawingml/2006/main">
+              <a:ext uri="{FF2B5EF4-FFF2-40B4-BE49-F238E27FC236}">
+                <a16:creationId xmlns:a16="http://schemas.microsoft.com/office/drawing/2014/main" id="{28A8C7A4-22F4-4C69-AC3B-3FC6FFB0BF4D}"/>
               </a:ext>
             </a:extLst>
           </p:cNvPr>
@@ -2987,10 +3051,10 @@
       </p:sp>
       <p:sp>
         <p:nvSpPr>
-          <p:cNvPr id="10" name="s10-takeaway">
-            <a:extLst xmlns:a="http://schemas.openxmlformats.org/drawingml/2006/main">
-              <a:ext uri="{FF2B5EF4-FFF2-40B4-BE49-F238E27FC236}">
-                <a16:creationId xmlns:a16="http://schemas.microsoft.com/office/drawing/2014/main" id="{4C845EA0-81BD-41CF-883D-5A3E052AD6F1}"/>
+          <p:cNvPr id="11" name="s10-takeaway">
+            <a:extLst xmlns:a="http://schemas.openxmlformats.org/drawingml/2006/main">
+              <a:ext uri="{FF2B5EF4-FFF2-40B4-BE49-F238E27FC236}">
+                <a16:creationId xmlns:a16="http://schemas.microsoft.com/office/drawing/2014/main" id="{7B553296-D708-4BC2-8B90-63E2ED8FCFDD}"/>
               </a:ext>
             </a:extLst>
           </p:cNvPr>
@@ -3038,7 +3102,7 @@
                 <a:ea typeface="PingFang SC"/>
                 <a:cs typeface="PingFang SC"/>
               </a:rPr>
-              <a:t>智慧建筑中的设备与空间联动必须经过边界验证</a:t>
+              <a:t>建筑联动建议必须经过现场核验与授权</a:t>
             </a:r>
           </a:p>
         </p:txBody>
@@ -3046,7 +3110,7 @@
     </p:spTree>
     <p:extLst>
       <p:ext uri="{BB962C8B-B14F-4D97-AF65-F5344CB8AC3E}">
-        <p14:creationId xmlns:p14="http://schemas.microsoft.com/office/powerpoint/2010/main" val="808911390"/>
+        <p14:creationId xmlns:p14="http://schemas.microsoft.com/office/powerpoint/2010/main" val="640933912"/>
       </p:ext>
     </p:extLst>
   </p:cSld>
@@ -3077,7 +3141,7 @@
           <p:cNvPr id="1" name="s11-rule">
             <a:extLst xmlns:a="http://schemas.openxmlformats.org/drawingml/2006/main">
               <a:ext uri="{FF2B5EF4-FFF2-40B4-BE49-F238E27FC236}">
-                <a16:creationId xmlns:a16="http://schemas.microsoft.com/office/drawing/2014/main" id="{496D4656-B0FB-4D15-B423-409446E1BA69}"/>
+                <a16:creationId xmlns:a16="http://schemas.microsoft.com/office/drawing/2014/main" id="{6FC51A46-11ED-4029-B718-E9FC2ACBDC51}"/>
               </a:ext>
             </a:extLst>
           </p:cNvPr>
@@ -3110,7 +3174,7 @@
           <p:cNvPr id="2" name="s11-eyebrow">
             <a:extLst xmlns:a="http://schemas.openxmlformats.org/drawingml/2006/main">
               <a:ext uri="{FF2B5EF4-FFF2-40B4-BE49-F238E27FC236}">
-                <a16:creationId xmlns:a16="http://schemas.microsoft.com/office/drawing/2014/main" id="{7F59393E-9312-4D87-8EF1-6724285FC38C}"/>
+                <a16:creationId xmlns:a16="http://schemas.microsoft.com/office/drawing/2014/main" id="{B4018ADF-8492-43BC-9A53-B97D11F67888}"/>
               </a:ext>
             </a:extLst>
           </p:cNvPr>
@@ -3168,7 +3232,7 @@
           <p:cNvPr id="3" name="s11-title">
             <a:extLst xmlns:a="http://schemas.openxmlformats.org/drawingml/2006/main">
               <a:ext uri="{FF2B5EF4-FFF2-40B4-BE49-F238E27FC236}">
-                <a16:creationId xmlns:a16="http://schemas.microsoft.com/office/drawing/2014/main" id="{09F68D61-A18A-4611-BED5-05F47FCA9943}"/>
+                <a16:creationId xmlns:a16="http://schemas.microsoft.com/office/drawing/2014/main" id="{A63C9D0F-73DF-43DE-8482-F5A48BC39477}"/>
               </a:ext>
             </a:extLst>
           </p:cNvPr>
@@ -3216,7 +3280,7 @@
                 <a:ea typeface="PingFang SC"/>
                 <a:cs typeface="PingFang SC"/>
               </a:rPr>
-              <a:t>把方法落实为可验证的行动</a:t>
+              <a:t>文旅、展厅与智慧建筑：一次可验收练习</a:t>
             </a:r>
           </a:p>
         </p:txBody>
@@ -3226,7 +3290,7 @@
           <p:cNvPr id="4" name="s11-footer">
             <a:extLst xmlns:a="http://schemas.openxmlformats.org/drawingml/2006/main">
               <a:ext uri="{FF2B5EF4-FFF2-40B4-BE49-F238E27FC236}">
-                <a16:creationId xmlns:a16="http://schemas.microsoft.com/office/drawing/2014/main" id="{983B2CB9-3C55-48AD-9929-4CDABD9C189A}"/>
+                <a16:creationId xmlns:a16="http://schemas.microsoft.com/office/drawing/2014/main" id="{914AE7B0-F528-41BD-B518-101F7D8AA17A}"/>
               </a:ext>
             </a:extLst>
           </p:cNvPr>
@@ -3257,7 +3321,7 @@
           <p:cNvPr id="5" name="s11-identity">
             <a:extLst xmlns:a="http://schemas.openxmlformats.org/drawingml/2006/main">
               <a:ext uri="{FF2B5EF4-FFF2-40B4-BE49-F238E27FC236}">
-                <a16:creationId xmlns:a16="http://schemas.microsoft.com/office/drawing/2014/main" id="{B2030EBD-8D2D-4513-91EF-F98128DDA387}"/>
+                <a16:creationId xmlns:a16="http://schemas.microsoft.com/office/drawing/2014/main" id="{CF3595D0-EAD4-46E9-B4DE-F06377DEBC35}"/>
               </a:ext>
             </a:extLst>
           </p:cNvPr>
@@ -3315,7 +3379,7 @@
           <p:cNvPr id="6" name="practice-circle-0">
             <a:extLst xmlns:a="http://schemas.openxmlformats.org/drawingml/2006/main">
               <a:ext uri="{FF2B5EF4-FFF2-40B4-BE49-F238E27FC236}">
-                <a16:creationId xmlns:a16="http://schemas.microsoft.com/office/drawing/2014/main" id="{5FB64E75-C1C6-44DC-BA2C-E365515B0A84}"/>
+                <a16:creationId xmlns:a16="http://schemas.microsoft.com/office/drawing/2014/main" id="{DBF35111-155D-4FFA-A06A-887073C04C5E}"/>
               </a:ext>
             </a:extLst>
           </p:cNvPr>
@@ -3348,7 +3412,7 @@
           <p:cNvPr id="7" name="practice-number-0">
             <a:extLst xmlns:a="http://schemas.openxmlformats.org/drawingml/2006/main">
               <a:ext uri="{FF2B5EF4-FFF2-40B4-BE49-F238E27FC236}">
-                <a16:creationId xmlns:a16="http://schemas.microsoft.com/office/drawing/2014/main" id="{9C95C160-BF8D-4863-9509-179F02E6BC3A}"/>
+                <a16:creationId xmlns:a16="http://schemas.microsoft.com/office/drawing/2014/main" id="{AEA04388-7FDF-4CDA-BE8B-9DF0CABBF5B5}"/>
               </a:ext>
             </a:extLst>
           </p:cNvPr>
@@ -3406,7 +3470,7 @@
           <p:cNvPr id="8" name="practice-item-0">
             <a:extLst xmlns:a="http://schemas.openxmlformats.org/drawingml/2006/main">
               <a:ext uri="{FF2B5EF4-FFF2-40B4-BE49-F238E27FC236}">
-                <a16:creationId xmlns:a16="http://schemas.microsoft.com/office/drawing/2014/main" id="{C7E6D293-BCD0-4DBA-AE21-CF22E75CD79C}"/>
+                <a16:creationId xmlns:a16="http://schemas.microsoft.com/office/drawing/2014/main" id="{3A4BAAA1-0A02-42D2-A0DF-18964BF73C31}"/>
               </a:ext>
             </a:extLst>
           </p:cNvPr>
@@ -3470,7 +3534,7 @@
           <p:cNvPr id="9" name="practice-connector-0">
             <a:extLst xmlns:a="http://schemas.openxmlformats.org/drawingml/2006/main">
               <a:ext uri="{FF2B5EF4-FFF2-40B4-BE49-F238E27FC236}">
-                <a16:creationId xmlns:a16="http://schemas.microsoft.com/office/drawing/2014/main" id="{126713BD-AB4E-4ED8-B2D9-23E3B3983652}"/>
+                <a16:creationId xmlns:a16="http://schemas.microsoft.com/office/drawing/2014/main" id="{39034BA9-5C13-4E2E-868B-EECBF1804090}"/>
               </a:ext>
             </a:extLst>
           </p:cNvPr>
@@ -3490,7 +3554,7 @@
           <a:noFill xmlns:a="http://schemas.openxmlformats.org/drawingml/2006/main"/>
           <a:ln xmlns:a="http://schemas.openxmlformats.org/drawingml/2006/main" w="28575">
             <a:solidFill>
-              <a:srgbClr val="E5783F"/>
+              <a:srgbClr val="9A3F16"/>
             </a:solidFill>
             <a:prstDash val="solid"/>
           </a:ln>
@@ -3501,7 +3565,7 @@
           <p:cNvPr id="10" name="practice-circle-1">
             <a:extLst xmlns:a="http://schemas.openxmlformats.org/drawingml/2006/main">
               <a:ext uri="{FF2B5EF4-FFF2-40B4-BE49-F238E27FC236}">
-                <a16:creationId xmlns:a16="http://schemas.microsoft.com/office/drawing/2014/main" id="{4A4BC703-4E0C-40C4-8759-77D7D2E13704}"/>
+                <a16:creationId xmlns:a16="http://schemas.microsoft.com/office/drawing/2014/main" id="{503D9F27-67AD-4F09-9EFB-37B244DB9236}"/>
               </a:ext>
             </a:extLst>
           </p:cNvPr>
@@ -3534,7 +3598,7 @@
           <p:cNvPr id="11" name="practice-number-1">
             <a:extLst xmlns:a="http://schemas.openxmlformats.org/drawingml/2006/main">
               <a:ext uri="{FF2B5EF4-FFF2-40B4-BE49-F238E27FC236}">
-                <a16:creationId xmlns:a16="http://schemas.microsoft.com/office/drawing/2014/main" id="{F3B696FB-C6E4-478A-A0C3-7BB7A8363E8D}"/>
+                <a16:creationId xmlns:a16="http://schemas.microsoft.com/office/drawing/2014/main" id="{F4864203-0F44-4F66-9A6A-AECCC6755AAD}"/>
               </a:ext>
             </a:extLst>
           </p:cNvPr>
@@ -3592,7 +3656,7 @@
           <p:cNvPr id="12" name="practice-item-1">
             <a:extLst xmlns:a="http://schemas.openxmlformats.org/drawingml/2006/main">
               <a:ext uri="{FF2B5EF4-FFF2-40B4-BE49-F238E27FC236}">
-                <a16:creationId xmlns:a16="http://schemas.microsoft.com/office/drawing/2014/main" id="{5AF2DA63-E57B-4C09-BD76-927FB6E1CFAA}"/>
+                <a16:creationId xmlns:a16="http://schemas.microsoft.com/office/drawing/2014/main" id="{745F9F48-5F28-4560-8FAB-005951F40815}"/>
               </a:ext>
             </a:extLst>
           </p:cNvPr>
@@ -3656,7 +3720,7 @@
           <p:cNvPr id="13" name="practice-connector-1">
             <a:extLst xmlns:a="http://schemas.openxmlformats.org/drawingml/2006/main">
               <a:ext uri="{FF2B5EF4-FFF2-40B4-BE49-F238E27FC236}">
-                <a16:creationId xmlns:a16="http://schemas.microsoft.com/office/drawing/2014/main" id="{0671B21A-C5F7-43AF-85B9-03B7C4E5CE58}"/>
+                <a16:creationId xmlns:a16="http://schemas.microsoft.com/office/drawing/2014/main" id="{79CE02A6-4978-43B9-8664-F7AE6706FDAD}"/>
               </a:ext>
             </a:extLst>
           </p:cNvPr>
@@ -3676,7 +3740,7 @@
           <a:noFill xmlns:a="http://schemas.openxmlformats.org/drawingml/2006/main"/>
           <a:ln xmlns:a="http://schemas.openxmlformats.org/drawingml/2006/main" w="28575">
             <a:solidFill>
-              <a:srgbClr val="E5783F"/>
+              <a:srgbClr val="9A3F16"/>
             </a:solidFill>
             <a:prstDash val="solid"/>
           </a:ln>
@@ -3687,7 +3751,7 @@
           <p:cNvPr id="14" name="practice-circle-2">
             <a:extLst xmlns:a="http://schemas.openxmlformats.org/drawingml/2006/main">
               <a:ext uri="{FF2B5EF4-FFF2-40B4-BE49-F238E27FC236}">
-                <a16:creationId xmlns:a16="http://schemas.microsoft.com/office/drawing/2014/main" id="{D6259478-D36C-4C34-A460-E49DCCEF9CBB}"/>
+                <a16:creationId xmlns:a16="http://schemas.microsoft.com/office/drawing/2014/main" id="{04BA8D56-3B78-42F4-9F9C-7300498C8EB0}"/>
               </a:ext>
             </a:extLst>
           </p:cNvPr>
@@ -3705,7 +3769,7 @@
             <a:avLst/>
           </a:prstGeom>
           <a:solidFill xmlns:a="http://schemas.openxmlformats.org/drawingml/2006/main">
-            <a:srgbClr val="E5783F"/>
+            <a:srgbClr val="9A3F16"/>
           </a:solidFill>
           <a:ln xmlns:a="http://schemas.openxmlformats.org/drawingml/2006/main" w="28575">
             <a:solidFill>
@@ -3720,7 +3784,7 @@
           <p:cNvPr id="15" name="practice-number-2">
             <a:extLst xmlns:a="http://schemas.openxmlformats.org/drawingml/2006/main">
               <a:ext uri="{FF2B5EF4-FFF2-40B4-BE49-F238E27FC236}">
-                <a16:creationId xmlns:a16="http://schemas.microsoft.com/office/drawing/2014/main" id="{AE338B42-ECC5-4215-B6EB-F87030CC7519}"/>
+                <a16:creationId xmlns:a16="http://schemas.microsoft.com/office/drawing/2014/main" id="{41C279A7-95CE-467B-AB53-B943F7015FBC}"/>
               </a:ext>
             </a:extLst>
           </p:cNvPr>
@@ -3778,7 +3842,7 @@
           <p:cNvPr id="16" name="practice-item-2">
             <a:extLst xmlns:a="http://schemas.openxmlformats.org/drawingml/2006/main">
               <a:ext uri="{FF2B5EF4-FFF2-40B4-BE49-F238E27FC236}">
-                <a16:creationId xmlns:a16="http://schemas.microsoft.com/office/drawing/2014/main" id="{3280D343-035E-4883-83CC-3D3BD40E1E12}"/>
+                <a16:creationId xmlns:a16="http://schemas.microsoft.com/office/drawing/2014/main" id="{CD46EBF2-B3AA-42F3-A815-067A93505E5A}"/>
               </a:ext>
             </a:extLst>
           </p:cNvPr>
@@ -3802,7 +3866,7 @@
           </a:solidFill>
           <a:ln xmlns:a="http://schemas.openxmlformats.org/drawingml/2006/main" w="19050">
             <a:solidFill>
-              <a:srgbClr val="E5783F"/>
+              <a:srgbClr val="9A3F16"/>
             </a:solidFill>
             <a:prstDash val="solid"/>
           </a:ln>
@@ -3840,7 +3904,7 @@
     </p:spTree>
     <p:extLst>
       <p:ext uri="{BB962C8B-B14F-4D97-AF65-F5344CB8AC3E}">
-        <p14:creationId xmlns:p14="http://schemas.microsoft.com/office/powerpoint/2010/main" val="130162899"/>
+        <p14:creationId xmlns:p14="http://schemas.microsoft.com/office/powerpoint/2010/main" val="1549653193"/>
       </p:ext>
     </p:extLst>
   </p:cSld>
@@ -3871,7 +3935,7 @@
           <p:cNvPr id="1" name="s12-rule">
             <a:extLst xmlns:a="http://schemas.openxmlformats.org/drawingml/2006/main">
               <a:ext uri="{FF2B5EF4-FFF2-40B4-BE49-F238E27FC236}">
-                <a16:creationId xmlns:a16="http://schemas.microsoft.com/office/drawing/2014/main" id="{5D5C4EA0-815A-44DC-8B66-0DC29EE39917}"/>
+                <a16:creationId xmlns:a16="http://schemas.microsoft.com/office/drawing/2014/main" id="{9BDB3AC7-DAF1-402B-BA6D-CFB68896345A}"/>
               </a:ext>
             </a:extLst>
           </p:cNvPr>
@@ -3904,7 +3968,7 @@
           <p:cNvPr id="2" name="s12-eyebrow">
             <a:extLst xmlns:a="http://schemas.openxmlformats.org/drawingml/2006/main">
               <a:ext uri="{FF2B5EF4-FFF2-40B4-BE49-F238E27FC236}">
-                <a16:creationId xmlns:a16="http://schemas.microsoft.com/office/drawing/2014/main" id="{38D86FBE-847F-4C92-8D2C-BC31DF4B6DB2}"/>
+                <a16:creationId xmlns:a16="http://schemas.microsoft.com/office/drawing/2014/main" id="{90185FA6-F773-466E-AF8E-27B5943A09AF}"/>
               </a:ext>
             </a:extLst>
           </p:cNvPr>
@@ -3962,7 +4026,7 @@
           <p:cNvPr id="3" name="s12-title">
             <a:extLst xmlns:a="http://schemas.openxmlformats.org/drawingml/2006/main">
               <a:ext uri="{FF2B5EF4-FFF2-40B4-BE49-F238E27FC236}">
-                <a16:creationId xmlns:a16="http://schemas.microsoft.com/office/drawing/2014/main" id="{78E6A8CE-FAD1-4F12-AD86-EFC760880885}"/>
+                <a16:creationId xmlns:a16="http://schemas.microsoft.com/office/drawing/2014/main" id="{E565D740-1C0B-49F3-A632-0048278D13D2}"/>
               </a:ext>
             </a:extLst>
           </p:cNvPr>
@@ -4010,7 +4074,7 @@
                 <a:ea typeface="PingFang SC"/>
                 <a:cs typeface="PingFang SC"/>
               </a:rPr>
-              <a:t>带走三条可复用的判断原则</a:t>
+              <a:t>文旅、展厅与智慧建筑：判断时先抓住三点</a:t>
             </a:r>
           </a:p>
         </p:txBody>
@@ -4020,7 +4084,7 @@
           <p:cNvPr id="4" name="s12-footer">
             <a:extLst xmlns:a="http://schemas.openxmlformats.org/drawingml/2006/main">
               <a:ext uri="{FF2B5EF4-FFF2-40B4-BE49-F238E27FC236}">
-                <a16:creationId xmlns:a16="http://schemas.microsoft.com/office/drawing/2014/main" id="{C35D0F77-00BA-4A11-B971-BE48569F9766}"/>
+                <a16:creationId xmlns:a16="http://schemas.microsoft.com/office/drawing/2014/main" id="{4DA66F5B-0CC2-4C6B-9AA7-252FCCCF8A78}"/>
               </a:ext>
             </a:extLst>
           </p:cNvPr>
@@ -4051,7 +4115,7 @@
           <p:cNvPr id="5" name="s12-identity">
             <a:extLst xmlns:a="http://schemas.openxmlformats.org/drawingml/2006/main">
               <a:ext uri="{FF2B5EF4-FFF2-40B4-BE49-F238E27FC236}">
-                <a16:creationId xmlns:a16="http://schemas.microsoft.com/office/drawing/2014/main" id="{D66C71C6-4D5D-4A32-B46F-173C68EE3E71}"/>
+                <a16:creationId xmlns:a16="http://schemas.microsoft.com/office/drawing/2014/main" id="{4ED33DB1-AB63-441E-9C85-469C08B9F4C4}"/>
               </a:ext>
             </a:extLst>
           </p:cNvPr>
@@ -4109,7 +4173,7 @@
           <p:cNvPr id="6" name="recap-circle-0">
             <a:extLst xmlns:a="http://schemas.openxmlformats.org/drawingml/2006/main">
               <a:ext uri="{FF2B5EF4-FFF2-40B4-BE49-F238E27FC236}">
-                <a16:creationId xmlns:a16="http://schemas.microsoft.com/office/drawing/2014/main" id="{EA54B6E0-5787-471A-990D-41E9E95D484A}"/>
+                <a16:creationId xmlns:a16="http://schemas.microsoft.com/office/drawing/2014/main" id="{B8D4ABD1-7525-4A2B-9AC0-BB39F40CB6A5}"/>
               </a:ext>
             </a:extLst>
           </p:cNvPr>
@@ -4142,7 +4206,7 @@
           <p:cNvPr id="7" name="recap-number-0">
             <a:extLst xmlns:a="http://schemas.openxmlformats.org/drawingml/2006/main">
               <a:ext uri="{FF2B5EF4-FFF2-40B4-BE49-F238E27FC236}">
-                <a16:creationId xmlns:a16="http://schemas.microsoft.com/office/drawing/2014/main" id="{A149BAE2-FED4-4A9E-BFBE-6FF04E9CD1D3}"/>
+                <a16:creationId xmlns:a16="http://schemas.microsoft.com/office/drawing/2014/main" id="{06D14DDE-E1EB-47C1-BA9E-8E04E7613C24}"/>
               </a:ext>
             </a:extLst>
           </p:cNvPr>
@@ -4200,7 +4264,7 @@
           <p:cNvPr id="8" name="recap-item-0">
             <a:extLst xmlns:a="http://schemas.openxmlformats.org/drawingml/2006/main">
               <a:ext uri="{FF2B5EF4-FFF2-40B4-BE49-F238E27FC236}">
-                <a16:creationId xmlns:a16="http://schemas.microsoft.com/office/drawing/2014/main" id="{874E7ACC-806B-4E6B-8593-6C98C3DAA5BC}"/>
+                <a16:creationId xmlns:a16="http://schemas.microsoft.com/office/drawing/2014/main" id="{5E4DD291-51EC-489B-8337-66E8FB2F174B}"/>
               </a:ext>
             </a:extLst>
           </p:cNvPr>
@@ -4254,7 +4318,7 @@
                 <a:ea typeface="PingFang SC"/>
                 <a:cs typeface="PingFang SC"/>
               </a:rPr>
-              <a:t>行前阶段帮助用户了解主题、开放安排、交通、无障碍条件和参观限制</a:t>
+              <a:t>游客旅程要同时覆盖行前、在场与离场</a:t>
             </a:r>
           </a:p>
         </p:txBody>
@@ -4264,7 +4328,7 @@
           <p:cNvPr id="9" name="recap-connector-0">
             <a:extLst xmlns:a="http://schemas.openxmlformats.org/drawingml/2006/main">
               <a:ext uri="{FF2B5EF4-FFF2-40B4-BE49-F238E27FC236}">
-                <a16:creationId xmlns:a16="http://schemas.microsoft.com/office/drawing/2014/main" id="{96EA0029-4E24-4AB2-9893-842BEF2ADF30}"/>
+                <a16:creationId xmlns:a16="http://schemas.microsoft.com/office/drawing/2014/main" id="{F036E790-D3BC-4781-B98D-FD58669106ED}"/>
               </a:ext>
             </a:extLst>
           </p:cNvPr>
@@ -4284,7 +4348,7 @@
           <a:noFill xmlns:a="http://schemas.openxmlformats.org/drawingml/2006/main"/>
           <a:ln xmlns:a="http://schemas.openxmlformats.org/drawingml/2006/main" w="28575">
             <a:solidFill>
-              <a:srgbClr val="E5783F"/>
+              <a:srgbClr val="9A3F16"/>
             </a:solidFill>
             <a:prstDash val="solid"/>
           </a:ln>
@@ -4295,7 +4359,7 @@
           <p:cNvPr id="10" name="recap-circle-1">
             <a:extLst xmlns:a="http://schemas.openxmlformats.org/drawingml/2006/main">
               <a:ext uri="{FF2B5EF4-FFF2-40B4-BE49-F238E27FC236}">
-                <a16:creationId xmlns:a16="http://schemas.microsoft.com/office/drawing/2014/main" id="{B014DD3A-3B09-48EA-8096-A989F7F82B85}"/>
+                <a16:creationId xmlns:a16="http://schemas.microsoft.com/office/drawing/2014/main" id="{72D84879-9CB5-416A-A777-0F13BA591942}"/>
               </a:ext>
             </a:extLst>
           </p:cNvPr>
@@ -4328,7 +4392,7 @@
           <p:cNvPr id="11" name="recap-number-1">
             <a:extLst xmlns:a="http://schemas.openxmlformats.org/drawingml/2006/main">
               <a:ext uri="{FF2B5EF4-FFF2-40B4-BE49-F238E27FC236}">
-                <a16:creationId xmlns:a16="http://schemas.microsoft.com/office/drawing/2014/main" id="{9AA687E7-30B4-4874-8976-54F448EE7AF2}"/>
+                <a16:creationId xmlns:a16="http://schemas.microsoft.com/office/drawing/2014/main" id="{B6E82E58-4871-46D3-A7F2-79A5F77E2DEF}"/>
               </a:ext>
             </a:extLst>
           </p:cNvPr>
@@ -4386,7 +4450,7 @@
           <p:cNvPr id="12" name="recap-item-1">
             <a:extLst xmlns:a="http://schemas.openxmlformats.org/drawingml/2006/main">
               <a:ext uri="{FF2B5EF4-FFF2-40B4-BE49-F238E27FC236}">
-                <a16:creationId xmlns:a16="http://schemas.microsoft.com/office/drawing/2014/main" id="{B21DB80A-6344-4D0A-8469-45592D39E165}"/>
+                <a16:creationId xmlns:a16="http://schemas.microsoft.com/office/drawing/2014/main" id="{B267BDFD-E12B-4BDA-B19C-63BCED3EB3D2}"/>
               </a:ext>
             </a:extLst>
           </p:cNvPr>
@@ -4440,7 +4504,7 @@
                 <a:ea typeface="PingFang SC"/>
                 <a:cs typeface="PingFang SC"/>
               </a:rPr>
-              <a:t>展项知识可拆成事实、故事、术语、媒体、常见问题和可公开限制</a:t>
+              <a:t>内容资产应支持多入口交付与统一更新</a:t>
             </a:r>
           </a:p>
         </p:txBody>
@@ -4450,7 +4514,7 @@
           <p:cNvPr id="13" name="recap-connector-1">
             <a:extLst xmlns:a="http://schemas.openxmlformats.org/drawingml/2006/main">
               <a:ext uri="{FF2B5EF4-FFF2-40B4-BE49-F238E27FC236}">
-                <a16:creationId xmlns:a16="http://schemas.microsoft.com/office/drawing/2014/main" id="{E6F01A36-EF1B-4B5A-97B9-CA7C3F2004AB}"/>
+                <a16:creationId xmlns:a16="http://schemas.microsoft.com/office/drawing/2014/main" id="{FF6B190B-0DE4-46A8-B06D-2190FC93E9E4}"/>
               </a:ext>
             </a:extLst>
           </p:cNvPr>
@@ -4470,7 +4534,7 @@
           <a:noFill xmlns:a="http://schemas.openxmlformats.org/drawingml/2006/main"/>
           <a:ln xmlns:a="http://schemas.openxmlformats.org/drawingml/2006/main" w="28575">
             <a:solidFill>
-              <a:srgbClr val="E5783F"/>
+              <a:srgbClr val="9A3F16"/>
             </a:solidFill>
             <a:prstDash val="solid"/>
           </a:ln>
@@ -4481,7 +4545,7 @@
           <p:cNvPr id="14" name="recap-circle-2">
             <a:extLst xmlns:a="http://schemas.openxmlformats.org/drawingml/2006/main">
               <a:ext uri="{FF2B5EF4-FFF2-40B4-BE49-F238E27FC236}">
-                <a16:creationId xmlns:a16="http://schemas.microsoft.com/office/drawing/2014/main" id="{49A06AEE-2DFF-4E4D-9DA4-D11EAC24FA74}"/>
+                <a16:creationId xmlns:a16="http://schemas.microsoft.com/office/drawing/2014/main" id="{7ED4BC7F-F7D0-4267-9288-314280A484F5}"/>
               </a:ext>
             </a:extLst>
           </p:cNvPr>
@@ -4499,7 +4563,7 @@
             <a:avLst/>
           </a:prstGeom>
           <a:solidFill xmlns:a="http://schemas.openxmlformats.org/drawingml/2006/main">
-            <a:srgbClr val="E5783F"/>
+            <a:srgbClr val="9A3F16"/>
           </a:solidFill>
           <a:ln xmlns:a="http://schemas.openxmlformats.org/drawingml/2006/main" w="28575">
             <a:solidFill>
@@ -4514,7 +4578,7 @@
           <p:cNvPr id="15" name="recap-number-2">
             <a:extLst xmlns:a="http://schemas.openxmlformats.org/drawingml/2006/main">
               <a:ext uri="{FF2B5EF4-FFF2-40B4-BE49-F238E27FC236}">
-                <a16:creationId xmlns:a16="http://schemas.microsoft.com/office/drawing/2014/main" id="{ACD8E2C6-AD97-49AF-A156-205664F83B1A}"/>
+                <a16:creationId xmlns:a16="http://schemas.microsoft.com/office/drawing/2014/main" id="{7310048F-777E-495A-A143-777670001CCF}"/>
               </a:ext>
             </a:extLst>
           </p:cNvPr>
@@ -4572,7 +4636,7 @@
           <p:cNvPr id="16" name="recap-item-2">
             <a:extLst xmlns:a="http://schemas.openxmlformats.org/drawingml/2006/main">
               <a:ext uri="{FF2B5EF4-FFF2-40B4-BE49-F238E27FC236}">
-                <a16:creationId xmlns:a16="http://schemas.microsoft.com/office/drawing/2014/main" id="{AEC32CB4-5F14-4000-9685-2B4FB8F8FC27}"/>
+                <a16:creationId xmlns:a16="http://schemas.microsoft.com/office/drawing/2014/main" id="{77652BD4-E40E-4046-AAC5-85AC4E1399C6}"/>
               </a:ext>
             </a:extLst>
           </p:cNvPr>
@@ -4596,7 +4660,7 @@
           </a:solidFill>
           <a:ln xmlns:a="http://schemas.openxmlformats.org/drawingml/2006/main" w="19050">
             <a:solidFill>
-              <a:srgbClr val="E5783F"/>
+              <a:srgbClr val="9A3F16"/>
             </a:solidFill>
             <a:prstDash val="solid"/>
           </a:ln>
@@ -4634,7 +4698,7 @@
     </p:spTree>
     <p:extLst>
       <p:ext uri="{BB962C8B-B14F-4D97-AF65-F5344CB8AC3E}">
-        <p14:creationId xmlns:p14="http://schemas.microsoft.com/office/powerpoint/2010/main" val="482200950"/>
+        <p14:creationId xmlns:p14="http://schemas.microsoft.com/office/powerpoint/2010/main" val="510858768"/>
       </p:ext>
     </p:extLst>
   </p:cSld>
@@ -4665,7 +4729,7 @@
           <p:cNvPr id="1" name="s13-rule">
             <a:extLst xmlns:a="http://schemas.openxmlformats.org/drawingml/2006/main">
               <a:ext uri="{FF2B5EF4-FFF2-40B4-BE49-F238E27FC236}">
-                <a16:creationId xmlns:a16="http://schemas.microsoft.com/office/drawing/2014/main" id="{150F912B-D82E-401F-A468-2917E596B385}"/>
+                <a16:creationId xmlns:a16="http://schemas.microsoft.com/office/drawing/2014/main" id="{2BA1D112-EBDB-42FD-A3CB-81659B4C5EEA}"/>
               </a:ext>
             </a:extLst>
           </p:cNvPr>
@@ -4698,7 +4762,7 @@
           <p:cNvPr id="2" name="s13-eyebrow">
             <a:extLst xmlns:a="http://schemas.openxmlformats.org/drawingml/2006/main">
               <a:ext uri="{FF2B5EF4-FFF2-40B4-BE49-F238E27FC236}">
-                <a16:creationId xmlns:a16="http://schemas.microsoft.com/office/drawing/2014/main" id="{3865E6C1-B42B-4D5C-974B-20F1766E4455}"/>
+                <a16:creationId xmlns:a16="http://schemas.microsoft.com/office/drawing/2014/main" id="{16CAEA1B-F4BB-4409-8A2F-C901E9C98743}"/>
               </a:ext>
             </a:extLst>
           </p:cNvPr>
@@ -4756,7 +4820,7 @@
           <p:cNvPr id="3" name="s13-title">
             <a:extLst xmlns:a="http://schemas.openxmlformats.org/drawingml/2006/main">
               <a:ext uri="{FF2B5EF4-FFF2-40B4-BE49-F238E27FC236}">
-                <a16:creationId xmlns:a16="http://schemas.microsoft.com/office/drawing/2014/main" id="{9919A418-AC88-475F-86C5-C0BB6104B794}"/>
+                <a16:creationId xmlns:a16="http://schemas.microsoft.com/office/drawing/2014/main" id="{4F71E3A8-7541-400B-8D06-D793942F6742}"/>
               </a:ext>
             </a:extLst>
           </p:cNvPr>
@@ -4804,7 +4868,7 @@
                 <a:ea typeface="PingFang SC"/>
                 <a:cs typeface="PingFang SC"/>
               </a:rPr>
-              <a:t>从公开重制课件回到可核对的学习资料</a:t>
+              <a:t>文旅、展厅与智慧建筑：依据、边界与延伸</a:t>
             </a:r>
           </a:p>
         </p:txBody>
@@ -4814,7 +4878,7 @@
           <p:cNvPr id="4" name="s13-footer">
             <a:extLst xmlns:a="http://schemas.openxmlformats.org/drawingml/2006/main">
               <a:ext uri="{FF2B5EF4-FFF2-40B4-BE49-F238E27FC236}">
-                <a16:creationId xmlns:a16="http://schemas.microsoft.com/office/drawing/2014/main" id="{0C1F32CA-8D51-47DA-9844-67585017EB50}"/>
+                <a16:creationId xmlns:a16="http://schemas.microsoft.com/office/drawing/2014/main" id="{20F69C37-3E8F-4D72-AB64-70507C5DFB3D}"/>
               </a:ext>
             </a:extLst>
           </p:cNvPr>
@@ -4845,7 +4909,7 @@
           <p:cNvPr id="5" name="s13-identity">
             <a:extLst xmlns:a="http://schemas.openxmlformats.org/drawingml/2006/main">
               <a:ext uri="{FF2B5EF4-FFF2-40B4-BE49-F238E27FC236}">
-                <a16:creationId xmlns:a16="http://schemas.microsoft.com/office/drawing/2014/main" id="{F34F1BEA-423C-49D9-8B50-151C5690AE2D}"/>
+                <a16:creationId xmlns:a16="http://schemas.microsoft.com/office/drawing/2014/main" id="{2A3F00CC-ACB4-4652-83B1-A2B79C409298}"/>
               </a:ext>
             </a:extLst>
           </p:cNvPr>
@@ -4903,7 +4967,7 @@
           <p:cNvPr id="6" name="source-0">
             <a:extLst xmlns:a="http://schemas.openxmlformats.org/drawingml/2006/main">
               <a:ext uri="{FF2B5EF4-FFF2-40B4-BE49-F238E27FC236}">
-                <a16:creationId xmlns:a16="http://schemas.microsoft.com/office/drawing/2014/main" id="{A0D4393D-1CB2-46FE-8F7E-5AD734D33AB9}"/>
+                <a16:creationId xmlns:a16="http://schemas.microsoft.com/office/drawing/2014/main" id="{3FC85677-682D-4C73-8407-DC4E53A8D8A6}"/>
               </a:ext>
             </a:extLst>
           </p:cNvPr>
@@ -4927,7 +4991,7 @@
           </a:solidFill>
           <a:ln xmlns:a="http://schemas.openxmlformats.org/drawingml/2006/main" w="9525">
             <a:solidFill>
-              <a:srgbClr val="E5783F"/>
+              <a:srgbClr val="9A3F16"/>
             </a:solidFill>
             <a:prstDash val="solid"/>
           </a:ln>
@@ -4967,7 +5031,7 @@
           <p:cNvPr id="7" name="source-1">
             <a:extLst xmlns:a="http://schemas.openxmlformats.org/drawingml/2006/main">
               <a:ext uri="{FF2B5EF4-FFF2-40B4-BE49-F238E27FC236}">
-                <a16:creationId xmlns:a16="http://schemas.microsoft.com/office/drawing/2014/main" id="{C4DE94DC-4193-42A5-8255-8BC806D5CF32}"/>
+                <a16:creationId xmlns:a16="http://schemas.microsoft.com/office/drawing/2014/main" id="{291573D1-E651-433F-B356-2AA35E33BE00}"/>
               </a:ext>
             </a:extLst>
           </p:cNvPr>
@@ -5031,7 +5095,7 @@
           <p:cNvPr id="8" name="source-2">
             <a:extLst xmlns:a="http://schemas.openxmlformats.org/drawingml/2006/main">
               <a:ext uri="{FF2B5EF4-FFF2-40B4-BE49-F238E27FC236}">
-                <a16:creationId xmlns:a16="http://schemas.microsoft.com/office/drawing/2014/main" id="{FA73755C-3553-4AD1-85A3-2CAAA2894BEA}"/>
+                <a16:creationId xmlns:a16="http://schemas.microsoft.com/office/drawing/2014/main" id="{0CA019EE-068C-4FBB-A319-6BEFF3FFD3CA}"/>
               </a:ext>
             </a:extLst>
           </p:cNvPr>
@@ -5095,7 +5159,7 @@
           <p:cNvPr id="9" name="source-3">
             <a:extLst xmlns:a="http://schemas.openxmlformats.org/drawingml/2006/main">
               <a:ext uri="{FF2B5EF4-FFF2-40B4-BE49-F238E27FC236}">
-                <a16:creationId xmlns:a16="http://schemas.microsoft.com/office/drawing/2014/main" id="{086B3BE7-0B12-487D-A762-11A61442BCA3}"/>
+                <a16:creationId xmlns:a16="http://schemas.microsoft.com/office/drawing/2014/main" id="{DEDA7E9D-82BA-4951-B69B-BD0C74BF66B9}"/>
               </a:ext>
             </a:extLst>
           </p:cNvPr>
@@ -5159,7 +5223,7 @@
           <p:cNvPr id="10" name="source-4">
             <a:extLst xmlns:a="http://schemas.openxmlformats.org/drawingml/2006/main">
               <a:ext uri="{FF2B5EF4-FFF2-40B4-BE49-F238E27FC236}">
-                <a16:creationId xmlns:a16="http://schemas.microsoft.com/office/drawing/2014/main" id="{63B16034-6EEB-4E8A-930C-2F5626370169}"/>
+                <a16:creationId xmlns:a16="http://schemas.microsoft.com/office/drawing/2014/main" id="{4EB14913-76C8-47CA-AC80-6442D66B91BE}"/>
               </a:ext>
             </a:extLst>
           </p:cNvPr>
@@ -5223,7 +5287,7 @@
           <p:cNvPr id="11" name="s13-takeaway-rule">
             <a:extLst xmlns:a="http://schemas.openxmlformats.org/drawingml/2006/main">
               <a:ext uri="{FF2B5EF4-FFF2-40B4-BE49-F238E27FC236}">
-                <a16:creationId xmlns:a16="http://schemas.microsoft.com/office/drawing/2014/main" id="{01745500-42E6-4BC5-A53A-3995BF3E5045}"/>
+                <a16:creationId xmlns:a16="http://schemas.microsoft.com/office/drawing/2014/main" id="{37278D89-F330-4DA5-ADC7-34D2C80A6FB6}"/>
               </a:ext>
             </a:extLst>
           </p:cNvPr>
@@ -5256,7 +5320,7 @@
           <p:cNvPr id="12" name="s13-takeaway">
             <a:extLst xmlns:a="http://schemas.openxmlformats.org/drawingml/2006/main">
               <a:ext uri="{FF2B5EF4-FFF2-40B4-BE49-F238E27FC236}">
-                <a16:creationId xmlns:a16="http://schemas.microsoft.com/office/drawing/2014/main" id="{86345973-3004-4D6A-9AF3-85FC337D1E5A}"/>
+                <a16:creationId xmlns:a16="http://schemas.microsoft.com/office/drawing/2014/main" id="{29EBB81C-A2D0-4886-9BBF-8856C1959627}"/>
               </a:ext>
             </a:extLst>
           </p:cNvPr>
@@ -5312,7 +5376,7 @@
     </p:spTree>
     <p:extLst>
       <p:ext uri="{BB962C8B-B14F-4D97-AF65-F5344CB8AC3E}">
-        <p14:creationId xmlns:p14="http://schemas.microsoft.com/office/powerpoint/2010/main" val="1418422313"/>
+        <p14:creationId xmlns:p14="http://schemas.microsoft.com/office/powerpoint/2010/main" val="1586405581"/>
       </p:ext>
     </p:extLst>
   </p:cSld>
@@ -5343,7 +5407,7 @@
           <p:cNvPr id="1" name="s2-rule">
             <a:extLst xmlns:a="http://schemas.openxmlformats.org/drawingml/2006/main">
               <a:ext uri="{FF2B5EF4-FFF2-40B4-BE49-F238E27FC236}">
-                <a16:creationId xmlns:a16="http://schemas.microsoft.com/office/drawing/2014/main" id="{B51E1FEA-F4FD-4DCA-A3E6-A3FFD4C6D814}"/>
+                <a16:creationId xmlns:a16="http://schemas.microsoft.com/office/drawing/2014/main" id="{AF6867FA-2EFA-40BB-9338-3DCECBDF2861}"/>
               </a:ext>
             </a:extLst>
           </p:cNvPr>
@@ -5376,7 +5440,7 @@
           <p:cNvPr id="2" name="s2-eyebrow">
             <a:extLst xmlns:a="http://schemas.openxmlformats.org/drawingml/2006/main">
               <a:ext uri="{FF2B5EF4-FFF2-40B4-BE49-F238E27FC236}">
-                <a16:creationId xmlns:a16="http://schemas.microsoft.com/office/drawing/2014/main" id="{429EB71F-30D9-4E54-9F1F-7F50B17D47F1}"/>
+                <a16:creationId xmlns:a16="http://schemas.microsoft.com/office/drawing/2014/main" id="{310EE9C7-FD9F-4281-B199-5C80AC1D20A2}"/>
               </a:ext>
             </a:extLst>
           </p:cNvPr>
@@ -5434,7 +5498,7 @@
           <p:cNvPr id="3" name="s2-title">
             <a:extLst xmlns:a="http://schemas.openxmlformats.org/drawingml/2006/main">
               <a:ext uri="{FF2B5EF4-FFF2-40B4-BE49-F238E27FC236}">
-                <a16:creationId xmlns:a16="http://schemas.microsoft.com/office/drawing/2014/main" id="{EC9382B1-2E49-47E7-A194-62F6080A80CF}"/>
+                <a16:creationId xmlns:a16="http://schemas.microsoft.com/office/drawing/2014/main" id="{63A86673-70D7-4060-80A6-703B69386A82}"/>
               </a:ext>
             </a:extLst>
           </p:cNvPr>
@@ -5482,7 +5546,7 @@
                 <a:ea typeface="PingFang SC"/>
                 <a:cs typeface="PingFang SC"/>
               </a:rPr>
-              <a:t>学完这一节，你能完成这些判断与行动</a:t>
+              <a:t>文旅、展厅与智慧建筑：4项学习结果</a:t>
             </a:r>
           </a:p>
         </p:txBody>
@@ -5492,7 +5556,7 @@
           <p:cNvPr id="4" name="s2-footer">
             <a:extLst xmlns:a="http://schemas.openxmlformats.org/drawingml/2006/main">
               <a:ext uri="{FF2B5EF4-FFF2-40B4-BE49-F238E27FC236}">
-                <a16:creationId xmlns:a16="http://schemas.microsoft.com/office/drawing/2014/main" id="{6714FEC4-15D9-4EE8-80EF-2309306CD484}"/>
+                <a16:creationId xmlns:a16="http://schemas.microsoft.com/office/drawing/2014/main" id="{1C84370F-D701-4D7F-B87A-E6999E3A8A86}"/>
               </a:ext>
             </a:extLst>
           </p:cNvPr>
@@ -5523,7 +5587,7 @@
           <p:cNvPr id="5" name="s2-identity">
             <a:extLst xmlns:a="http://schemas.openxmlformats.org/drawingml/2006/main">
               <a:ext uri="{FF2B5EF4-FFF2-40B4-BE49-F238E27FC236}">
-                <a16:creationId xmlns:a16="http://schemas.microsoft.com/office/drawing/2014/main" id="{E1A760FC-690D-411A-807A-3FC244F9D674}"/>
+                <a16:creationId xmlns:a16="http://schemas.microsoft.com/office/drawing/2014/main" id="{C95C01A3-7EED-4BD3-8F1C-A1A11C620233}"/>
               </a:ext>
             </a:extLst>
           </p:cNvPr>
@@ -5581,7 +5645,7 @@
           <p:cNvPr id="6" name="objective-1">
             <a:extLst xmlns:a="http://schemas.openxmlformats.org/drawingml/2006/main">
               <a:ext uri="{FF2B5EF4-FFF2-40B4-BE49-F238E27FC236}">
-                <a16:creationId xmlns:a16="http://schemas.microsoft.com/office/drawing/2014/main" id="{243122E3-5A47-4E0B-8FF2-EE64FBD17A0E}"/>
+                <a16:creationId xmlns:a16="http://schemas.microsoft.com/office/drawing/2014/main" id="{7387CAA8-38C2-41D8-880A-F12A34E6DD25}"/>
               </a:ext>
             </a:extLst>
           </p:cNvPr>
@@ -5668,7 +5732,7 @@
           <p:cNvPr id="7" name="objective-2">
             <a:extLst xmlns:a="http://schemas.openxmlformats.org/drawingml/2006/main">
               <a:ext uri="{FF2B5EF4-FFF2-40B4-BE49-F238E27FC236}">
-                <a16:creationId xmlns:a16="http://schemas.microsoft.com/office/drawing/2014/main" id="{BBE8178A-1552-47B3-BE3D-B68CB45B0178}"/>
+                <a16:creationId xmlns:a16="http://schemas.microsoft.com/office/drawing/2014/main" id="{9128F08F-60E4-4430-A341-6B1A72B089D4}"/>
               </a:ext>
             </a:extLst>
           </p:cNvPr>
@@ -5755,7 +5819,7 @@
           <p:cNvPr id="8" name="objective-3">
             <a:extLst xmlns:a="http://schemas.openxmlformats.org/drawingml/2006/main">
               <a:ext uri="{FF2B5EF4-FFF2-40B4-BE49-F238E27FC236}">
-                <a16:creationId xmlns:a16="http://schemas.microsoft.com/office/drawing/2014/main" id="{EC7D5C98-242E-4564-AF65-09999CEC411F}"/>
+                <a16:creationId xmlns:a16="http://schemas.microsoft.com/office/drawing/2014/main" id="{7024F26D-3CCE-4EA5-A830-BBB011AB6B38}"/>
               </a:ext>
             </a:extLst>
           </p:cNvPr>
@@ -5842,7 +5906,7 @@
           <p:cNvPr id="9" name="objective-4">
             <a:extLst xmlns:a="http://schemas.openxmlformats.org/drawingml/2006/main">
               <a:ext uri="{FF2B5EF4-FFF2-40B4-BE49-F238E27FC236}">
-                <a16:creationId xmlns:a16="http://schemas.microsoft.com/office/drawing/2014/main" id="{E652869A-E098-4762-B550-9C70C0DA9FB0}"/>
+                <a16:creationId xmlns:a16="http://schemas.microsoft.com/office/drawing/2014/main" id="{9C215BCC-E796-4F0D-8673-1EC238B5D57F}"/>
               </a:ext>
             </a:extLst>
           </p:cNvPr>
@@ -5866,7 +5930,7 @@
           </a:solidFill>
           <a:ln xmlns:a="http://schemas.openxmlformats.org/drawingml/2006/main" w="19050">
             <a:solidFill>
-              <a:srgbClr val="E5783F"/>
+              <a:srgbClr val="9A3F16"/>
             </a:solidFill>
             <a:prstDash val="solid"/>
           </a:ln>
@@ -5927,7 +5991,7 @@
     </p:spTree>
     <p:extLst>
       <p:ext uri="{BB962C8B-B14F-4D97-AF65-F5344CB8AC3E}">
-        <p14:creationId xmlns:p14="http://schemas.microsoft.com/office/powerpoint/2010/main" val="1533203622"/>
+        <p14:creationId xmlns:p14="http://schemas.microsoft.com/office/powerpoint/2010/main" val="285036088"/>
       </p:ext>
     </p:extLst>
   </p:cSld>
@@ -5958,7 +6022,7 @@
           <p:cNvPr id="1" name="s3-rule">
             <a:extLst xmlns:a="http://schemas.openxmlformats.org/drawingml/2006/main">
               <a:ext uri="{FF2B5EF4-FFF2-40B4-BE49-F238E27FC236}">
-                <a16:creationId xmlns:a16="http://schemas.microsoft.com/office/drawing/2014/main" id="{A77ECEB2-FD87-4467-B90F-AC4506652227}"/>
+                <a16:creationId xmlns:a16="http://schemas.microsoft.com/office/drawing/2014/main" id="{AE9D4EAE-2402-4201-A9DA-E05BB94BFEC1}"/>
               </a:ext>
             </a:extLst>
           </p:cNvPr>
@@ -5991,7 +6055,7 @@
           <p:cNvPr id="2" name="s3-eyebrow">
             <a:extLst xmlns:a="http://schemas.openxmlformats.org/drawingml/2006/main">
               <a:ext uri="{FF2B5EF4-FFF2-40B4-BE49-F238E27FC236}">
-                <a16:creationId xmlns:a16="http://schemas.microsoft.com/office/drawing/2014/main" id="{1F5FD15A-A34B-4825-8133-BE2CD205B4F7}"/>
+                <a16:creationId xmlns:a16="http://schemas.microsoft.com/office/drawing/2014/main" id="{8095A448-7CA1-4420-BE54-05E62A7B712A}"/>
               </a:ext>
             </a:extLst>
           </p:cNvPr>
@@ -6049,7 +6113,7 @@
           <p:cNvPr id="3" name="s3-title">
             <a:extLst xmlns:a="http://schemas.openxmlformats.org/drawingml/2006/main">
               <a:ext uri="{FF2B5EF4-FFF2-40B4-BE49-F238E27FC236}">
-                <a16:creationId xmlns:a16="http://schemas.microsoft.com/office/drawing/2014/main" id="{D92EF67F-D03B-42E8-B7A7-A359328687CD}"/>
+                <a16:creationId xmlns:a16="http://schemas.microsoft.com/office/drawing/2014/main" id="{9E313E09-C30D-4BAA-84F3-FBC01723CEBA}"/>
               </a:ext>
             </a:extLst>
           </p:cNvPr>
@@ -6074,7 +6138,7 @@
         </p:spPr>
         <p:txBody>
           <a:bodyPr xmlns:a="http://schemas.openxmlformats.org/drawingml/2006/main" lIns="0" tIns="0" rIns="0" bIns="0" anchor="ctr">
-            <a:normAutofit fontScale="81381"/>
+            <a:normAutofit fontScale="100000"/>
           </a:bodyPr>
           <a:lstStyle xmlns:a="http://schemas.openxmlformats.org/drawingml/2006/main"/>
           <a:p xmlns:a="http://schemas.openxmlformats.org/drawingml/2006/main">
@@ -6097,7 +6161,7 @@
                 <a:ea typeface="PingFang SC"/>
                 <a:cs typeface="PingFang SC"/>
               </a:rPr>
-              <a:t>行前阶段帮助用户了解主题、开放安排、交通、无障碍条件和参观限制</a:t>
+              <a:t>游客旅程要同时覆盖行前、在场与离场</a:t>
             </a:r>
           </a:p>
         </p:txBody>
@@ -6107,7 +6171,7 @@
           <p:cNvPr id="4" name="s3-footer">
             <a:extLst xmlns:a="http://schemas.openxmlformats.org/drawingml/2006/main">
               <a:ext uri="{FF2B5EF4-FFF2-40B4-BE49-F238E27FC236}">
-                <a16:creationId xmlns:a16="http://schemas.microsoft.com/office/drawing/2014/main" id="{E8BAAC38-4DF9-4D7B-A909-33019A58F907}"/>
+                <a16:creationId xmlns:a16="http://schemas.microsoft.com/office/drawing/2014/main" id="{31F86418-A101-40F6-A853-D832A8A7C608}"/>
               </a:ext>
             </a:extLst>
           </p:cNvPr>
@@ -6138,7 +6202,7 @@
           <p:cNvPr id="5" name="s3-identity">
             <a:extLst xmlns:a="http://schemas.openxmlformats.org/drawingml/2006/main">
               <a:ext uri="{FF2B5EF4-FFF2-40B4-BE49-F238E27FC236}">
-                <a16:creationId xmlns:a16="http://schemas.microsoft.com/office/drawing/2014/main" id="{746E979C-3936-48B5-88FB-95DDB6FFE9BC}"/>
+                <a16:creationId xmlns:a16="http://schemas.microsoft.com/office/drawing/2014/main" id="{8370652C-6957-4DE7-81DA-130D1A65CE80}"/>
               </a:ext>
             </a:extLst>
           </p:cNvPr>
@@ -6196,7 +6260,7 @@
           <p:cNvPr id="6" name="core-no-0">
             <a:extLst xmlns:a="http://schemas.openxmlformats.org/drawingml/2006/main">
               <a:ext uri="{FF2B5EF4-FFF2-40B4-BE49-F238E27FC236}">
-                <a16:creationId xmlns:a16="http://schemas.microsoft.com/office/drawing/2014/main" id="{C3A97599-3A15-4CA5-BFD3-B1022375385A}"/>
+                <a16:creationId xmlns:a16="http://schemas.microsoft.com/office/drawing/2014/main" id="{41149FE1-CA6B-4FF9-BAE7-87B3A3DBF794}"/>
               </a:ext>
             </a:extLst>
           </p:cNvPr>
@@ -6228,7 +6292,7 @@
             <a:pPr algn="l">
               <a:defRPr sz="2250" b="1">
                 <a:solidFill>
-                  <a:srgbClr val="E5783F"/>
+                  <a:srgbClr val="9A3F16"/>
                 </a:solidFill>
                 <a:latin typeface="PingFang SC"/>
                 <a:ea typeface="PingFang SC"/>
@@ -6238,7 +6302,7 @@
             <a:r>
               <a:rPr sz="2250" b="1">
                 <a:solidFill>
-                  <a:srgbClr val="E5783F"/>
+                  <a:srgbClr val="9A3F16"/>
                 </a:solidFill>
                 <a:latin typeface="PingFang SC"/>
                 <a:ea typeface="PingFang SC"/>
@@ -6254,7 +6318,7 @@
           <p:cNvPr id="7" name="core-label-0">
             <a:extLst xmlns:a="http://schemas.openxmlformats.org/drawingml/2006/main">
               <a:ext uri="{FF2B5EF4-FFF2-40B4-BE49-F238E27FC236}">
-                <a16:creationId xmlns:a16="http://schemas.microsoft.com/office/drawing/2014/main" id="{3491D2CF-BB85-462C-9B92-08422060B1EE}"/>
+                <a16:creationId xmlns:a16="http://schemas.microsoft.com/office/drawing/2014/main" id="{1F50B823-06A1-406B-A739-0F4346F40E6A}"/>
               </a:ext>
             </a:extLst>
           </p:cNvPr>
@@ -6312,7 +6376,7 @@
           <p:cNvPr id="8" name="core-body-0">
             <a:extLst xmlns:a="http://schemas.openxmlformats.org/drawingml/2006/main">
               <a:ext uri="{FF2B5EF4-FFF2-40B4-BE49-F238E27FC236}">
-                <a16:creationId xmlns:a16="http://schemas.microsoft.com/office/drawing/2014/main" id="{8912E027-C007-48E7-9C58-91DDD195CE13}"/>
+                <a16:creationId xmlns:a16="http://schemas.microsoft.com/office/drawing/2014/main" id="{772C55EE-0584-4FC3-894B-4C3E38D2B303}"/>
               </a:ext>
             </a:extLst>
           </p:cNvPr>
@@ -6336,7 +6400,7 @@
           </a:solidFill>
           <a:ln xmlns:a="http://schemas.openxmlformats.org/drawingml/2006/main" w="19050">
             <a:solidFill>
-              <a:srgbClr val="E5783F"/>
+              <a:srgbClr val="9A3F16"/>
             </a:solidFill>
             <a:prstDash val="solid"/>
           </a:ln>
@@ -6366,7 +6430,7 @@
                 <a:ea typeface="PingFang SC"/>
                 <a:cs typeface="PingFang SC"/>
               </a:rPr>
-              <a:t>行前阶段帮助用户了解主题、开放安排、交通、无障碍条件和参观限制；到达阶段完成定位、入场和路线选择；在场阶段提供导航、讲解、问答、排队信息与现场求助；离场后可提供内容回顾、反馈和再次访问入口…</a:t>
+              <a:t>行前阶段帮助用户了解主题、开放安排、交通、无障碍条件和参观限制；到达阶段完成定位、入场和路线选择；在场阶段提供导航、讲解、问答、排队信息与现场求助；离场后可提供内容回顾、反馈和再次访问入口</a:t>
             </a:r>
           </a:p>
         </p:txBody>
@@ -6376,7 +6440,7 @@
           <p:cNvPr id="9" name="core-no-1">
             <a:extLst xmlns:a="http://schemas.openxmlformats.org/drawingml/2006/main">
               <a:ext uri="{FF2B5EF4-FFF2-40B4-BE49-F238E27FC236}">
-                <a16:creationId xmlns:a16="http://schemas.microsoft.com/office/drawing/2014/main" id="{C24510AC-2F19-4F23-900E-292A08E1EC34}"/>
+                <a16:creationId xmlns:a16="http://schemas.microsoft.com/office/drawing/2014/main" id="{4EA5BE65-F853-4874-ADE7-621B18197A30}"/>
               </a:ext>
             </a:extLst>
           </p:cNvPr>
@@ -6408,7 +6472,7 @@
             <a:pPr algn="l">
               <a:defRPr sz="2250" b="1">
                 <a:solidFill>
-                  <a:srgbClr val="E5783F"/>
+                  <a:srgbClr val="9A3F16"/>
                 </a:solidFill>
                 <a:latin typeface="PingFang SC"/>
                 <a:ea typeface="PingFang SC"/>
@@ -6418,7 +6482,7 @@
             <a:r>
               <a:rPr sz="2250" b="1">
                 <a:solidFill>
-                  <a:srgbClr val="E5783F"/>
+                  <a:srgbClr val="9A3F16"/>
                 </a:solidFill>
                 <a:latin typeface="PingFang SC"/>
                 <a:ea typeface="PingFang SC"/>
@@ -6434,7 +6498,7 @@
           <p:cNvPr id="10" name="core-body-1">
             <a:extLst xmlns:a="http://schemas.openxmlformats.org/drawingml/2006/main">
               <a:ext uri="{FF2B5EF4-FFF2-40B4-BE49-F238E27FC236}">
-                <a16:creationId xmlns:a16="http://schemas.microsoft.com/office/drawing/2014/main" id="{5C248C59-6A57-4F14-8C57-D441DD79B601}"/>
+                <a16:creationId xmlns:a16="http://schemas.microsoft.com/office/drawing/2014/main" id="{14E55701-5649-41E7-9FA6-CE813769B528}"/>
               </a:ext>
             </a:extLst>
           </p:cNvPr>
@@ -6488,7 +6552,7 @@
                 <a:ea typeface="PingFang SC"/>
                 <a:cs typeface="PingFang SC"/>
               </a:rPr>
-              <a:t>个性化不等于收集越多越好。路线推荐可以根据用户主动选择的时长、主题、语言和无障碍需求工作，不必长期追踪身份。客流数据宜优先采用匿名或聚合统计，并明确用途和保存时间。涉及儿童、位置轨迹…</a:t>
+              <a:t>个性化不等于收集越多越好；路线推荐可以根据用户主动选择的时长、主题、语言和无障碍需求工作；不必长期追踪身份，客流数据宜优先采用匿名或聚合统计；并明确用途和保存时间</a:t>
             </a:r>
           </a:p>
         </p:txBody>
@@ -6498,7 +6562,7 @@
           <p:cNvPr id="11" name="core-no-2">
             <a:extLst xmlns:a="http://schemas.openxmlformats.org/drawingml/2006/main">
               <a:ext uri="{FF2B5EF4-FFF2-40B4-BE49-F238E27FC236}">
-                <a16:creationId xmlns:a16="http://schemas.microsoft.com/office/drawing/2014/main" id="{5B223B02-03DA-4C42-BB4D-73CE5B4D1382}"/>
+                <a16:creationId xmlns:a16="http://schemas.microsoft.com/office/drawing/2014/main" id="{54DCE34F-1BD4-4F61-A48E-02BE955D8C46}"/>
               </a:ext>
             </a:extLst>
           </p:cNvPr>
@@ -6530,7 +6594,7 @@
             <a:pPr algn="l">
               <a:defRPr sz="2250" b="1">
                 <a:solidFill>
-                  <a:srgbClr val="E5783F"/>
+                  <a:srgbClr val="9A3F16"/>
                 </a:solidFill>
                 <a:latin typeface="PingFang SC"/>
                 <a:ea typeface="PingFang SC"/>
@@ -6540,7 +6604,7 @@
             <a:r>
               <a:rPr sz="2250" b="1">
                 <a:solidFill>
-                  <a:srgbClr val="E5783F"/>
+                  <a:srgbClr val="9A3F16"/>
                 </a:solidFill>
                 <a:latin typeface="PingFang SC"/>
                 <a:ea typeface="PingFang SC"/>
@@ -6556,7 +6620,7 @@
           <p:cNvPr id="12" name="core-body-2">
             <a:extLst xmlns:a="http://schemas.openxmlformats.org/drawingml/2006/main">
               <a:ext uri="{FF2B5EF4-FFF2-40B4-BE49-F238E27FC236}">
-                <a16:creationId xmlns:a16="http://schemas.microsoft.com/office/drawing/2014/main" id="{6814ED19-21E3-4C87-B878-5C683601FE89}"/>
+                <a16:creationId xmlns:a16="http://schemas.microsoft.com/office/drawing/2014/main" id="{4FFD71C6-8FAC-4008-8010-603C49201CA8}"/>
               </a:ext>
             </a:extLst>
           </p:cNvPr>
@@ -6620,7 +6684,7 @@
           <p:cNvPr id="13" name="s3-takeaway-rule">
             <a:extLst xmlns:a="http://schemas.openxmlformats.org/drawingml/2006/main">
               <a:ext uri="{FF2B5EF4-FFF2-40B4-BE49-F238E27FC236}">
-                <a16:creationId xmlns:a16="http://schemas.microsoft.com/office/drawing/2014/main" id="{B36A71B8-C9C9-4120-BE09-40688F601815}"/>
+                <a16:creationId xmlns:a16="http://schemas.microsoft.com/office/drawing/2014/main" id="{ADAA611D-E9D1-4EE6-A9D0-6BA121B5ECE8}"/>
               </a:ext>
             </a:extLst>
           </p:cNvPr>
@@ -6653,7 +6717,7 @@
           <p:cNvPr id="14" name="s3-takeaway">
             <a:extLst xmlns:a="http://schemas.openxmlformats.org/drawingml/2006/main">
               <a:ext uri="{FF2B5EF4-FFF2-40B4-BE49-F238E27FC236}">
-                <a16:creationId xmlns:a16="http://schemas.microsoft.com/office/drawing/2014/main" id="{979E95E7-35F2-4F4D-860B-6362169CC283}"/>
+                <a16:creationId xmlns:a16="http://schemas.microsoft.com/office/drawing/2014/main" id="{FDD55FB6-DD3B-44FA-90C4-EF0B79B30CA1}"/>
               </a:ext>
             </a:extLst>
           </p:cNvPr>
@@ -6701,7 +6765,7 @@
                 <a:ea typeface="PingFang SC"/>
                 <a:cs typeface="PingFang SC"/>
               </a:rPr>
-              <a:t>行前阶段帮助用户了解主题、开放安排、交通、无障碍条件和参观限制</a:t>
+              <a:t>游客旅程要同时覆盖行前、在场与离场</a:t>
             </a:r>
           </a:p>
         </p:txBody>
@@ -6709,7 +6773,7 @@
     </p:spTree>
     <p:extLst>
       <p:ext uri="{BB962C8B-B14F-4D97-AF65-F5344CB8AC3E}">
-        <p14:creationId xmlns:p14="http://schemas.microsoft.com/office/powerpoint/2010/main" val="911671313"/>
+        <p14:creationId xmlns:p14="http://schemas.microsoft.com/office/powerpoint/2010/main" val="861759879"/>
       </p:ext>
     </p:extLst>
   </p:cSld>
@@ -6740,7 +6804,7 @@
           <p:cNvPr id="1" name="s4-rule">
             <a:extLst xmlns:a="http://schemas.openxmlformats.org/drawingml/2006/main">
               <a:ext uri="{FF2B5EF4-FFF2-40B4-BE49-F238E27FC236}">
-                <a16:creationId xmlns:a16="http://schemas.microsoft.com/office/drawing/2014/main" id="{558D0B6A-2C69-4042-B4BD-CDEFECB2F762}"/>
+                <a16:creationId xmlns:a16="http://schemas.microsoft.com/office/drawing/2014/main" id="{904729D9-2637-4172-A8BD-9F9FB7C39802}"/>
               </a:ext>
             </a:extLst>
           </p:cNvPr>
@@ -6773,7 +6837,7 @@
           <p:cNvPr id="2" name="s4-eyebrow">
             <a:extLst xmlns:a="http://schemas.openxmlformats.org/drawingml/2006/main">
               <a:ext uri="{FF2B5EF4-FFF2-40B4-BE49-F238E27FC236}">
-                <a16:creationId xmlns:a16="http://schemas.microsoft.com/office/drawing/2014/main" id="{91C57505-DE56-456F-85CC-2BD15D015030}"/>
+                <a16:creationId xmlns:a16="http://schemas.microsoft.com/office/drawing/2014/main" id="{076CFE9F-C3ED-4487-9578-0B9EBCF51710}"/>
               </a:ext>
             </a:extLst>
           </p:cNvPr>
@@ -6831,7 +6895,7 @@
           <p:cNvPr id="3" name="s4-title">
             <a:extLst xmlns:a="http://schemas.openxmlformats.org/drawingml/2006/main">
               <a:ext uri="{FF2B5EF4-FFF2-40B4-BE49-F238E27FC236}">
-                <a16:creationId xmlns:a16="http://schemas.microsoft.com/office/drawing/2014/main" id="{BB02E3E6-C388-474B-8F6D-73EE04DB6FE6}"/>
+                <a16:creationId xmlns:a16="http://schemas.microsoft.com/office/drawing/2014/main" id="{5F3B95C6-443C-44A0-9D38-A529519A138D}"/>
               </a:ext>
             </a:extLst>
           </p:cNvPr>
@@ -6889,7 +6953,7 @@
           <p:cNvPr id="4" name="s4-footer">
             <a:extLst xmlns:a="http://schemas.openxmlformats.org/drawingml/2006/main">
               <a:ext uri="{FF2B5EF4-FFF2-40B4-BE49-F238E27FC236}">
-                <a16:creationId xmlns:a16="http://schemas.microsoft.com/office/drawing/2014/main" id="{5B93DEE9-3C8B-4A00-87D1-FF02D003682B}"/>
+                <a16:creationId xmlns:a16="http://schemas.microsoft.com/office/drawing/2014/main" id="{39EA06BD-4A1D-4F94-8DC2-E8D89DBE69BD}"/>
               </a:ext>
             </a:extLst>
           </p:cNvPr>
@@ -6920,7 +6984,7 @@
           <p:cNvPr id="5" name="s4-identity">
             <a:extLst xmlns:a="http://schemas.openxmlformats.org/drawingml/2006/main">
               <a:ext uri="{FF2B5EF4-FFF2-40B4-BE49-F238E27FC236}">
-                <a16:creationId xmlns:a16="http://schemas.microsoft.com/office/drawing/2014/main" id="{75137224-8B94-4DD6-88C3-253899E14B28}"/>
+                <a16:creationId xmlns:a16="http://schemas.microsoft.com/office/drawing/2014/main" id="{2DFC0750-A21C-49B9-806B-6208C3B05B33}"/>
               </a:ext>
             </a:extLst>
           </p:cNvPr>
@@ -6978,7 +7042,7 @@
           <p:cNvPr id="6" name="core-no-0">
             <a:extLst xmlns:a="http://schemas.openxmlformats.org/drawingml/2006/main">
               <a:ext uri="{FF2B5EF4-FFF2-40B4-BE49-F238E27FC236}">
-                <a16:creationId xmlns:a16="http://schemas.microsoft.com/office/drawing/2014/main" id="{AAC853B8-2277-499D-9FA7-CB774797E9F6}"/>
+                <a16:creationId xmlns:a16="http://schemas.microsoft.com/office/drawing/2014/main" id="{94413210-C8D3-4D34-BC07-F8230C513CE9}"/>
               </a:ext>
             </a:extLst>
           </p:cNvPr>
@@ -7010,7 +7074,7 @@
             <a:pPr algn="l">
               <a:defRPr sz="2250" b="1">
                 <a:solidFill>
-                  <a:srgbClr val="E5783F"/>
+                  <a:srgbClr val="9A3F16"/>
                 </a:solidFill>
                 <a:latin typeface="PingFang SC"/>
                 <a:ea typeface="PingFang SC"/>
@@ -7020,7 +7084,7 @@
             <a:r>
               <a:rPr sz="2250" b="1">
                 <a:solidFill>
-                  <a:srgbClr val="E5783F"/>
+                  <a:srgbClr val="9A3F16"/>
                 </a:solidFill>
                 <a:latin typeface="PingFang SC"/>
                 <a:ea typeface="PingFang SC"/>
@@ -7036,7 +7100,7 @@
           <p:cNvPr id="7" name="core-label-0">
             <a:extLst xmlns:a="http://schemas.openxmlformats.org/drawingml/2006/main">
               <a:ext uri="{FF2B5EF4-FFF2-40B4-BE49-F238E27FC236}">
-                <a16:creationId xmlns:a16="http://schemas.microsoft.com/office/drawing/2014/main" id="{0B46EAE7-633D-491E-9D29-A66B4648BEC5}"/>
+                <a16:creationId xmlns:a16="http://schemas.microsoft.com/office/drawing/2014/main" id="{5FF638D3-9F71-49F3-A332-AE1F2F1D67A7}"/>
               </a:ext>
             </a:extLst>
           </p:cNvPr>
@@ -7094,7 +7158,7 @@
           <p:cNvPr id="8" name="core-body-0">
             <a:extLst xmlns:a="http://schemas.openxmlformats.org/drawingml/2006/main">
               <a:ext uri="{FF2B5EF4-FFF2-40B4-BE49-F238E27FC236}">
-                <a16:creationId xmlns:a16="http://schemas.microsoft.com/office/drawing/2014/main" id="{B0868E19-F46D-4189-AA4C-FBB60060B194}"/>
+                <a16:creationId xmlns:a16="http://schemas.microsoft.com/office/drawing/2014/main" id="{4F13849C-C784-4C74-9E24-277BF27EC7D1}"/>
               </a:ext>
             </a:extLst>
           </p:cNvPr>
@@ -7118,7 +7182,7 @@
           </a:solidFill>
           <a:ln xmlns:a="http://schemas.openxmlformats.org/drawingml/2006/main" w="19050">
             <a:solidFill>
-              <a:srgbClr val="E5783F"/>
+              <a:srgbClr val="9A3F16"/>
             </a:solidFill>
             <a:prstDash val="solid"/>
           </a:ln>
@@ -7148,7 +7212,7 @@
                 <a:ea typeface="PingFang SC"/>
                 <a:cs typeface="PingFang SC"/>
               </a:rPr>
-              <a:t>基础地图应包含入口、出口、展项、楼层连接、服务设施、无障碍路径、禁行区和紧急设施。路线算法不仅计算距离，还要考虑开放状态、容量、坡度或电梯需求、临时施工、活动时间与人流方向…</a:t>
+              <a:t>基础地图应包含入口、出口、展项、楼层连接、服务设施、无障碍路径、禁行区和紧急设施；路线算法不仅计算距离；还要考虑开放状态、容量、坡度或电梯需求、临时施工、活动时间与人流方向</a:t>
             </a:r>
           </a:p>
         </p:txBody>
@@ -7158,7 +7222,7 @@
           <p:cNvPr id="9" name="core-no-1">
             <a:extLst xmlns:a="http://schemas.openxmlformats.org/drawingml/2006/main">
               <a:ext uri="{FF2B5EF4-FFF2-40B4-BE49-F238E27FC236}">
-                <a16:creationId xmlns:a16="http://schemas.microsoft.com/office/drawing/2014/main" id="{14B32C9C-F1F2-4FF6-93A1-C785220C1D7F}"/>
+                <a16:creationId xmlns:a16="http://schemas.microsoft.com/office/drawing/2014/main" id="{6CF752CC-D854-4410-BE85-57B64F043AFF}"/>
               </a:ext>
             </a:extLst>
           </p:cNvPr>
@@ -7190,7 +7254,7 @@
             <a:pPr algn="l">
               <a:defRPr sz="2250" b="1">
                 <a:solidFill>
-                  <a:srgbClr val="E5783F"/>
+                  <a:srgbClr val="9A3F16"/>
                 </a:solidFill>
                 <a:latin typeface="PingFang SC"/>
                 <a:ea typeface="PingFang SC"/>
@@ -7200,7 +7264,7 @@
             <a:r>
               <a:rPr sz="2250" b="1">
                 <a:solidFill>
-                  <a:srgbClr val="E5783F"/>
+                  <a:srgbClr val="9A3F16"/>
                 </a:solidFill>
                 <a:latin typeface="PingFang SC"/>
                 <a:ea typeface="PingFang SC"/>
@@ -7216,7 +7280,7 @@
           <p:cNvPr id="10" name="core-body-1">
             <a:extLst xmlns:a="http://schemas.openxmlformats.org/drawingml/2006/main">
               <a:ext uri="{FF2B5EF4-FFF2-40B4-BE49-F238E27FC236}">
-                <a16:creationId xmlns:a16="http://schemas.microsoft.com/office/drawing/2014/main" id="{A93C0AF7-9449-4AE0-949C-FEF415E771BF}"/>
+                <a16:creationId xmlns:a16="http://schemas.microsoft.com/office/drawing/2014/main" id="{789ED20A-7DE0-4285-A637-34916AAB8CEB}"/>
               </a:ext>
             </a:extLst>
           </p:cNvPr>
@@ -7270,7 +7334,7 @@
                 <a:ea typeface="PingFang SC"/>
                 <a:cs typeface="PingFang SC"/>
               </a:rPr>
-              <a:t>客流数据可以帮助发现拥堵和调整推荐，但传感器存在遮挡、重复计数和离线情况。系统应显示数据新鲜度和质量，不能把估计值当作精确人数。安全疏散和现场管制必须依照正式预案与人员指挥…</a:t>
+              <a:t>客流数据可以帮助发现拥堵和调整推荐；但传感器存在遮挡、重复计数和离线情况；系统应显示数据新鲜度和质量；不能把估计值当作精确人数；安全疏散和现场管制必须依照正式预案与人员指挥</a:t>
             </a:r>
           </a:p>
         </p:txBody>
@@ -7280,7 +7344,7 @@
           <p:cNvPr id="11" name="core-no-2">
             <a:extLst xmlns:a="http://schemas.openxmlformats.org/drawingml/2006/main">
               <a:ext uri="{FF2B5EF4-FFF2-40B4-BE49-F238E27FC236}">
-                <a16:creationId xmlns:a16="http://schemas.microsoft.com/office/drawing/2014/main" id="{AA5B40DE-918C-47EB-B5B0-A9E26C8D7A9D}"/>
+                <a16:creationId xmlns:a16="http://schemas.microsoft.com/office/drawing/2014/main" id="{DD47A95E-89FF-473F-9718-961CA8467D6E}"/>
               </a:ext>
             </a:extLst>
           </p:cNvPr>
@@ -7312,7 +7376,7 @@
             <a:pPr algn="l">
               <a:defRPr sz="2250" b="1">
                 <a:solidFill>
-                  <a:srgbClr val="E5783F"/>
+                  <a:srgbClr val="9A3F16"/>
                 </a:solidFill>
                 <a:latin typeface="PingFang SC"/>
                 <a:ea typeface="PingFang SC"/>
@@ -7322,7 +7386,7 @@
             <a:r>
               <a:rPr sz="2250" b="1">
                 <a:solidFill>
-                  <a:srgbClr val="E5783F"/>
+                  <a:srgbClr val="9A3F16"/>
                 </a:solidFill>
                 <a:latin typeface="PingFang SC"/>
                 <a:ea typeface="PingFang SC"/>
@@ -7338,7 +7402,7 @@
           <p:cNvPr id="12" name="core-body-2">
             <a:extLst xmlns:a="http://schemas.openxmlformats.org/drawingml/2006/main">
               <a:ext uri="{FF2B5EF4-FFF2-40B4-BE49-F238E27FC236}">
-                <a16:creationId xmlns:a16="http://schemas.microsoft.com/office/drawing/2014/main" id="{62DC25DB-B3B6-4CA1-A2E1-9DF882BA32DE}"/>
+                <a16:creationId xmlns:a16="http://schemas.microsoft.com/office/drawing/2014/main" id="{C3E78AFE-72CE-41DA-A758-3D1A683C0A3A}"/>
               </a:ext>
             </a:extLst>
           </p:cNvPr>
@@ -7402,7 +7466,7 @@
           <p:cNvPr id="13" name="s4-takeaway-rule">
             <a:extLst xmlns:a="http://schemas.openxmlformats.org/drawingml/2006/main">
               <a:ext uri="{FF2B5EF4-FFF2-40B4-BE49-F238E27FC236}">
-                <a16:creationId xmlns:a16="http://schemas.microsoft.com/office/drawing/2014/main" id="{38BAEDD7-F325-4FB1-A7FC-E3A15987F098}"/>
+                <a16:creationId xmlns:a16="http://schemas.microsoft.com/office/drawing/2014/main" id="{10C84B74-B67D-4120-9E7F-165207F5ED87}"/>
               </a:ext>
             </a:extLst>
           </p:cNvPr>
@@ -7435,7 +7499,7 @@
           <p:cNvPr id="14" name="s4-takeaway">
             <a:extLst xmlns:a="http://schemas.openxmlformats.org/drawingml/2006/main">
               <a:ext uri="{FF2B5EF4-FFF2-40B4-BE49-F238E27FC236}">
-                <a16:creationId xmlns:a16="http://schemas.microsoft.com/office/drawing/2014/main" id="{3F948580-A433-4E5D-B6E2-29F80E737A0B}"/>
+                <a16:creationId xmlns:a16="http://schemas.microsoft.com/office/drawing/2014/main" id="{E03EB2FE-EEC1-4D13-B677-F42153B7960D}"/>
               </a:ext>
             </a:extLst>
           </p:cNvPr>
@@ -7491,7 +7555,7 @@
     </p:spTree>
     <p:extLst>
       <p:ext uri="{BB962C8B-B14F-4D97-AF65-F5344CB8AC3E}">
-        <p14:creationId xmlns:p14="http://schemas.microsoft.com/office/powerpoint/2010/main" val="2021052732"/>
+        <p14:creationId xmlns:p14="http://schemas.microsoft.com/office/powerpoint/2010/main" val="1783566863"/>
       </p:ext>
     </p:extLst>
   </p:cSld>
@@ -7522,7 +7586,7 @@
           <p:cNvPr id="1" name="s5-rule">
             <a:extLst xmlns:a="http://schemas.openxmlformats.org/drawingml/2006/main">
               <a:ext uri="{FF2B5EF4-FFF2-40B4-BE49-F238E27FC236}">
-                <a16:creationId xmlns:a16="http://schemas.microsoft.com/office/drawing/2014/main" id="{8AF8ADC8-23A9-43CE-AE35-EBF59701E2C3}"/>
+                <a16:creationId xmlns:a16="http://schemas.microsoft.com/office/drawing/2014/main" id="{E15D9117-369A-41A1-821B-CB6638B6D110}"/>
               </a:ext>
             </a:extLst>
           </p:cNvPr>
@@ -7555,7 +7619,7 @@
           <p:cNvPr id="2" name="s5-eyebrow">
             <a:extLst xmlns:a="http://schemas.openxmlformats.org/drawingml/2006/main">
               <a:ext uri="{FF2B5EF4-FFF2-40B4-BE49-F238E27FC236}">
-                <a16:creationId xmlns:a16="http://schemas.microsoft.com/office/drawing/2014/main" id="{E6246A1E-7508-4EBD-9145-7CE685AFECD6}"/>
+                <a16:creationId xmlns:a16="http://schemas.microsoft.com/office/drawing/2014/main" id="{02B75F4C-B7B7-4724-9B3F-32A292B558CE}"/>
               </a:ext>
             </a:extLst>
           </p:cNvPr>
@@ -7613,7 +7677,7 @@
           <p:cNvPr id="3" name="s5-title">
             <a:extLst xmlns:a="http://schemas.openxmlformats.org/drawingml/2006/main">
               <a:ext uri="{FF2B5EF4-FFF2-40B4-BE49-F238E27FC236}">
-                <a16:creationId xmlns:a16="http://schemas.microsoft.com/office/drawing/2014/main" id="{FC7F937C-541E-4C68-8EC6-8B49D659640D}"/>
+                <a16:creationId xmlns:a16="http://schemas.microsoft.com/office/drawing/2014/main" id="{46419783-564B-4406-83E2-88A3EC833B35}"/>
               </a:ext>
             </a:extLst>
           </p:cNvPr>
@@ -7638,7 +7702,7 @@
         </p:spPr>
         <p:txBody>
           <a:bodyPr xmlns:a="http://schemas.openxmlformats.org/drawingml/2006/main" lIns="0" tIns="0" rIns="0" bIns="0" anchor="ctr">
-            <a:normAutofit fontScale="86983"/>
+            <a:normAutofit fontScale="100000"/>
           </a:bodyPr>
           <a:lstStyle xmlns:a="http://schemas.openxmlformats.org/drawingml/2006/main"/>
           <a:p xmlns:a="http://schemas.openxmlformats.org/drawingml/2006/main">
@@ -7661,7 +7725,7 @@
                 <a:ea typeface="PingFang SC"/>
                 <a:cs typeface="PingFang SC"/>
               </a:rPr>
-              <a:t>展项知识可拆成事实、故事、术语、媒体、常见问题和可公开限制</a:t>
+              <a:t>内容资产应支持多入口交付与统一更新</a:t>
             </a:r>
           </a:p>
         </p:txBody>
@@ -7671,7 +7735,7 @@
           <p:cNvPr id="4" name="s5-footer">
             <a:extLst xmlns:a="http://schemas.openxmlformats.org/drawingml/2006/main">
               <a:ext uri="{FF2B5EF4-FFF2-40B4-BE49-F238E27FC236}">
-                <a16:creationId xmlns:a16="http://schemas.microsoft.com/office/drawing/2014/main" id="{DEC50644-EC00-45DF-AD74-D095032B3E68}"/>
+                <a16:creationId xmlns:a16="http://schemas.microsoft.com/office/drawing/2014/main" id="{36BA3AD2-21F0-455A-96D6-20C510E50170}"/>
               </a:ext>
             </a:extLst>
           </p:cNvPr>
@@ -7702,7 +7766,7 @@
           <p:cNvPr id="5" name="s5-identity">
             <a:extLst xmlns:a="http://schemas.openxmlformats.org/drawingml/2006/main">
               <a:ext uri="{FF2B5EF4-FFF2-40B4-BE49-F238E27FC236}">
-                <a16:creationId xmlns:a16="http://schemas.microsoft.com/office/drawing/2014/main" id="{F9AE592E-CB3A-41CC-89E6-7E8D36D8B589}"/>
+                <a16:creationId xmlns:a16="http://schemas.microsoft.com/office/drawing/2014/main" id="{0B1C2C2C-024A-4455-A1C5-078C6E76AD58}"/>
               </a:ext>
             </a:extLst>
           </p:cNvPr>
@@ -7760,7 +7824,7 @@
           <p:cNvPr id="6" name="core-no-0">
             <a:extLst xmlns:a="http://schemas.openxmlformats.org/drawingml/2006/main">
               <a:ext uri="{FF2B5EF4-FFF2-40B4-BE49-F238E27FC236}">
-                <a16:creationId xmlns:a16="http://schemas.microsoft.com/office/drawing/2014/main" id="{534099A2-0DDE-4B29-BC65-8CED77454578}"/>
+                <a16:creationId xmlns:a16="http://schemas.microsoft.com/office/drawing/2014/main" id="{A91D3191-3932-4E2B-B12A-5ABAF40B7BD4}"/>
               </a:ext>
             </a:extLst>
           </p:cNvPr>
@@ -7792,7 +7856,7 @@
             <a:pPr algn="l">
               <a:defRPr sz="2250" b="1">
                 <a:solidFill>
-                  <a:srgbClr val="E5783F"/>
+                  <a:srgbClr val="9A3F16"/>
                 </a:solidFill>
                 <a:latin typeface="PingFang SC"/>
                 <a:ea typeface="PingFang SC"/>
@@ -7802,7 +7866,7 @@
             <a:r>
               <a:rPr sz="2250" b="1">
                 <a:solidFill>
-                  <a:srgbClr val="E5783F"/>
+                  <a:srgbClr val="9A3F16"/>
                 </a:solidFill>
                 <a:latin typeface="PingFang SC"/>
                 <a:ea typeface="PingFang SC"/>
@@ -7818,7 +7882,7 @@
           <p:cNvPr id="7" name="core-label-0">
             <a:extLst xmlns:a="http://schemas.openxmlformats.org/drawingml/2006/main">
               <a:ext uri="{FF2B5EF4-FFF2-40B4-BE49-F238E27FC236}">
-                <a16:creationId xmlns:a16="http://schemas.microsoft.com/office/drawing/2014/main" id="{9D023C38-5062-495A-BF71-B7621947AAC5}"/>
+                <a16:creationId xmlns:a16="http://schemas.microsoft.com/office/drawing/2014/main" id="{33953C5C-9F73-4159-9951-DB4832CBDCC8}"/>
               </a:ext>
             </a:extLst>
           </p:cNvPr>
@@ -7876,7 +7940,7 @@
           <p:cNvPr id="8" name="core-body-0">
             <a:extLst xmlns:a="http://schemas.openxmlformats.org/drawingml/2006/main">
               <a:ext uri="{FF2B5EF4-FFF2-40B4-BE49-F238E27FC236}">
-                <a16:creationId xmlns:a16="http://schemas.microsoft.com/office/drawing/2014/main" id="{5F6ADAD0-A911-4E4A-9BBE-E53B43343B0B}"/>
+                <a16:creationId xmlns:a16="http://schemas.microsoft.com/office/drawing/2014/main" id="{CB314385-3D05-473E-B2C4-2C6AD5A80169}"/>
               </a:ext>
             </a:extLst>
           </p:cNvPr>
@@ -7900,7 +7964,7 @@
           </a:solidFill>
           <a:ln xmlns:a="http://schemas.openxmlformats.org/drawingml/2006/main" w="19050">
             <a:solidFill>
-              <a:srgbClr val="E5783F"/>
+              <a:srgbClr val="9A3F16"/>
             </a:solidFill>
             <a:prstDash val="solid"/>
           </a:ln>
@@ -7930,7 +7994,7 @@
                 <a:ea typeface="PingFang SC"/>
                 <a:cs typeface="PingFang SC"/>
               </a:rPr>
-              <a:t>展项知识可拆成事实、故事、术语、媒体、常见问题和可公开限制。每条内容应有来源、责任编辑、语言版本、生效时间和复审日期。AI 可以生成不同长度、语言与年龄层的草稿，但专有名词、历史事实…</a:t>
+              <a:t>展项知识可拆成事实、故事、术语、媒体、常见问题和可公开限制；每条内容应有来源、责任编辑、语言版本、生效时间和复审日期；AI 可以生成不同长度、语言与年龄层的草稿</a:t>
             </a:r>
           </a:p>
         </p:txBody>
@@ -7940,7 +8004,7 @@
           <p:cNvPr id="9" name="core-no-1">
             <a:extLst xmlns:a="http://schemas.openxmlformats.org/drawingml/2006/main">
               <a:ext uri="{FF2B5EF4-FFF2-40B4-BE49-F238E27FC236}">
-                <a16:creationId xmlns:a16="http://schemas.microsoft.com/office/drawing/2014/main" id="{9A9DAEFE-6E91-4243-91CC-3CD10382B120}"/>
+                <a16:creationId xmlns:a16="http://schemas.microsoft.com/office/drawing/2014/main" id="{518EFC0D-9C01-4E1C-99E8-ECCD2A6BA921}"/>
               </a:ext>
             </a:extLst>
           </p:cNvPr>
@@ -7972,7 +8036,7 @@
             <a:pPr algn="l">
               <a:defRPr sz="2250" b="1">
                 <a:solidFill>
-                  <a:srgbClr val="E5783F"/>
+                  <a:srgbClr val="9A3F16"/>
                 </a:solidFill>
                 <a:latin typeface="PingFang SC"/>
                 <a:ea typeface="PingFang SC"/>
@@ -7982,7 +8046,7 @@
             <a:r>
               <a:rPr sz="2250" b="1">
                 <a:solidFill>
-                  <a:srgbClr val="E5783F"/>
+                  <a:srgbClr val="9A3F16"/>
                 </a:solidFill>
                 <a:latin typeface="PingFang SC"/>
                 <a:ea typeface="PingFang SC"/>
@@ -7998,7 +8062,7 @@
           <p:cNvPr id="10" name="core-body-1">
             <a:extLst xmlns:a="http://schemas.openxmlformats.org/drawingml/2006/main">
               <a:ext uri="{FF2B5EF4-FFF2-40B4-BE49-F238E27FC236}">
-                <a16:creationId xmlns:a16="http://schemas.microsoft.com/office/drawing/2014/main" id="{2750C155-02ED-4468-AE23-D6396FDEF7E1}"/>
+                <a16:creationId xmlns:a16="http://schemas.microsoft.com/office/drawing/2014/main" id="{11F7B0A5-6889-43A9-97BA-C470C38A6963}"/>
               </a:ext>
             </a:extLst>
           </p:cNvPr>
@@ -8052,7 +8116,7 @@
                 <a:ea typeface="PingFang SC"/>
                 <a:cs typeface="PingFang SC"/>
               </a:rPr>
-              <a:t>机器人、网页、应用和交互屏应读取同一批准内容，不要各自维护互相冲突的文本。活动结束、展品更换或权利到期时，相关内容应自动停止交付。对外说明中的票务、开放安排和服务承诺应来自业务系统…</a:t>
+              <a:t>机器人、网页、应用和交互屏应读取同一批准内容；不要各自维护互相冲突的文本；活动结束、展品更换或权利到期时；相关内容应自动停止交付；对外说明中的票务、开放安排和服务承诺应来自业务系统</a:t>
             </a:r>
           </a:p>
         </p:txBody>
@@ -8062,7 +8126,7 @@
           <p:cNvPr id="11" name="core-no-2">
             <a:extLst xmlns:a="http://schemas.openxmlformats.org/drawingml/2006/main">
               <a:ext uri="{FF2B5EF4-FFF2-40B4-BE49-F238E27FC236}">
-                <a16:creationId xmlns:a16="http://schemas.microsoft.com/office/drawing/2014/main" id="{516EBD17-0BCE-4E06-89D8-7E2B25D0306B}"/>
+                <a16:creationId xmlns:a16="http://schemas.microsoft.com/office/drawing/2014/main" id="{A82A8916-7497-4F9E-A226-86EF861916A4}"/>
               </a:ext>
             </a:extLst>
           </p:cNvPr>
@@ -8094,7 +8158,7 @@
             <a:pPr algn="l">
               <a:defRPr sz="2250" b="1">
                 <a:solidFill>
-                  <a:srgbClr val="E5783F"/>
+                  <a:srgbClr val="9A3F16"/>
                 </a:solidFill>
                 <a:latin typeface="PingFang SC"/>
                 <a:ea typeface="PingFang SC"/>
@@ -8104,7 +8168,7 @@
             <a:r>
               <a:rPr sz="2250" b="1">
                 <a:solidFill>
-                  <a:srgbClr val="E5783F"/>
+                  <a:srgbClr val="9A3F16"/>
                 </a:solidFill>
                 <a:latin typeface="PingFang SC"/>
                 <a:ea typeface="PingFang SC"/>
@@ -8120,7 +8184,7 @@
           <p:cNvPr id="12" name="core-body-2">
             <a:extLst xmlns:a="http://schemas.openxmlformats.org/drawingml/2006/main">
               <a:ext uri="{FF2B5EF4-FFF2-40B4-BE49-F238E27FC236}">
-                <a16:creationId xmlns:a16="http://schemas.microsoft.com/office/drawing/2014/main" id="{1E3B6E26-6CCB-43D8-A54C-C894BA874FD2}"/>
+                <a16:creationId xmlns:a16="http://schemas.microsoft.com/office/drawing/2014/main" id="{F4444011-8A27-47C7-8631-C828481538E5}"/>
               </a:ext>
             </a:extLst>
           </p:cNvPr>
@@ -8184,7 +8248,7 @@
           <p:cNvPr id="13" name="s5-takeaway-rule">
             <a:extLst xmlns:a="http://schemas.openxmlformats.org/drawingml/2006/main">
               <a:ext uri="{FF2B5EF4-FFF2-40B4-BE49-F238E27FC236}">
-                <a16:creationId xmlns:a16="http://schemas.microsoft.com/office/drawing/2014/main" id="{BF6E55C3-17F6-4086-B253-022D43479BEC}"/>
+                <a16:creationId xmlns:a16="http://schemas.microsoft.com/office/drawing/2014/main" id="{430E9DD8-4CB1-481A-874E-F1EC4DEF83BC}"/>
               </a:ext>
             </a:extLst>
           </p:cNvPr>
@@ -8217,7 +8281,7 @@
           <p:cNvPr id="14" name="s5-takeaway">
             <a:extLst xmlns:a="http://schemas.openxmlformats.org/drawingml/2006/main">
               <a:ext uri="{FF2B5EF4-FFF2-40B4-BE49-F238E27FC236}">
-                <a16:creationId xmlns:a16="http://schemas.microsoft.com/office/drawing/2014/main" id="{532F406A-2896-4A68-B0BF-6F526AAC8003}"/>
+                <a16:creationId xmlns:a16="http://schemas.microsoft.com/office/drawing/2014/main" id="{FE8DCA28-E994-47AA-8F98-9E56BFB027CA}"/>
               </a:ext>
             </a:extLst>
           </p:cNvPr>
@@ -8265,7 +8329,7 @@
                 <a:ea typeface="PingFang SC"/>
                 <a:cs typeface="PingFang SC"/>
               </a:rPr>
-              <a:t>展项知识可拆成事实、故事、术语、媒体、常见问题和可公开限制</a:t>
+              <a:t>内容资产应支持多入口交付与统一更新</a:t>
             </a:r>
           </a:p>
         </p:txBody>
@@ -8273,7 +8337,7 @@
     </p:spTree>
     <p:extLst>
       <p:ext uri="{BB962C8B-B14F-4D97-AF65-F5344CB8AC3E}">
-        <p14:creationId xmlns:p14="http://schemas.microsoft.com/office/powerpoint/2010/main" val="1071708153"/>
+        <p14:creationId xmlns:p14="http://schemas.microsoft.com/office/powerpoint/2010/main" val="672366816"/>
       </p:ext>
     </p:extLst>
   </p:cSld>
@@ -8304,7 +8368,7 @@
           <p:cNvPr id="1" name="s6-rule">
             <a:extLst xmlns:a="http://schemas.openxmlformats.org/drawingml/2006/main">
               <a:ext uri="{FF2B5EF4-FFF2-40B4-BE49-F238E27FC236}">
-                <a16:creationId xmlns:a16="http://schemas.microsoft.com/office/drawing/2014/main" id="{4F730EA5-11A4-45B3-9D3F-F9EA2CFD9ACF}"/>
+                <a16:creationId xmlns:a16="http://schemas.microsoft.com/office/drawing/2014/main" id="{5B5F310E-E132-47DE-8748-CF86A817D7A5}"/>
               </a:ext>
             </a:extLst>
           </p:cNvPr>
@@ -8337,7 +8401,7 @@
           <p:cNvPr id="2" name="s6-eyebrow">
             <a:extLst xmlns:a="http://schemas.openxmlformats.org/drawingml/2006/main">
               <a:ext uri="{FF2B5EF4-FFF2-40B4-BE49-F238E27FC236}">
-                <a16:creationId xmlns:a16="http://schemas.microsoft.com/office/drawing/2014/main" id="{6D3A8B84-51A2-446C-A3D2-108EDA44607A}"/>
+                <a16:creationId xmlns:a16="http://schemas.microsoft.com/office/drawing/2014/main" id="{CDB89FD4-E7A0-4542-B8E8-7482A9211767}"/>
               </a:ext>
             </a:extLst>
           </p:cNvPr>
@@ -8395,7 +8459,7 @@
           <p:cNvPr id="3" name="s6-title">
             <a:extLst xmlns:a="http://schemas.openxmlformats.org/drawingml/2006/main">
               <a:ext uri="{FF2B5EF4-FFF2-40B4-BE49-F238E27FC236}">
-                <a16:creationId xmlns:a16="http://schemas.microsoft.com/office/drawing/2014/main" id="{6641FA22-E0FB-41DA-988E-C773B6DC13BD}"/>
+                <a16:creationId xmlns:a16="http://schemas.microsoft.com/office/drawing/2014/main" id="{0737DFEC-45B2-44EB-89FD-5CE55CB74548}"/>
               </a:ext>
             </a:extLst>
           </p:cNvPr>
@@ -8420,7 +8484,7 @@
         </p:spPr>
         <p:txBody>
           <a:bodyPr xmlns:a="http://schemas.openxmlformats.org/drawingml/2006/main" lIns="0" tIns="0" rIns="0" bIns="0" anchor="ctr">
-            <a:normAutofit fontScale="81381"/>
+            <a:normAutofit fontScale="100000"/>
           </a:bodyPr>
           <a:lstStyle xmlns:a="http://schemas.openxmlformats.org/drawingml/2006/main"/>
           <a:p xmlns:a="http://schemas.openxmlformats.org/drawingml/2006/main">
@@ -8443,7 +8507,7 @@
                 <a:ea typeface="PingFang SC"/>
                 <a:cs typeface="PingFang SC"/>
               </a:rPr>
-              <a:t>问答系统先识别问题属于展项知识、路线服务、运营信息还是现场求助</a:t>
+              <a:t>问答系统必须区分知识、服务与现场求助</a:t>
             </a:r>
           </a:p>
         </p:txBody>
@@ -8453,7 +8517,7 @@
           <p:cNvPr id="4" name="s6-footer">
             <a:extLst xmlns:a="http://schemas.openxmlformats.org/drawingml/2006/main">
               <a:ext uri="{FF2B5EF4-FFF2-40B4-BE49-F238E27FC236}">
-                <a16:creationId xmlns:a16="http://schemas.microsoft.com/office/drawing/2014/main" id="{EAC5FF1F-EBD3-4B08-8468-A609CCC68938}"/>
+                <a16:creationId xmlns:a16="http://schemas.microsoft.com/office/drawing/2014/main" id="{1EB9830E-966A-44C2-8455-D4084DEAB8DB}"/>
               </a:ext>
             </a:extLst>
           </p:cNvPr>
@@ -8484,7 +8548,7 @@
           <p:cNvPr id="5" name="s6-identity">
             <a:extLst xmlns:a="http://schemas.openxmlformats.org/drawingml/2006/main">
               <a:ext uri="{FF2B5EF4-FFF2-40B4-BE49-F238E27FC236}">
-                <a16:creationId xmlns:a16="http://schemas.microsoft.com/office/drawing/2014/main" id="{8428DBA1-DDFC-4058-BC3D-B2E67CE0E02A}"/>
+                <a16:creationId xmlns:a16="http://schemas.microsoft.com/office/drawing/2014/main" id="{293BE10A-BEDD-421B-BE03-F2F3631BAF2B}"/>
               </a:ext>
             </a:extLst>
           </p:cNvPr>
@@ -8542,7 +8606,7 @@
           <p:cNvPr id="6" name="core-no-0">
             <a:extLst xmlns:a="http://schemas.openxmlformats.org/drawingml/2006/main">
               <a:ext uri="{FF2B5EF4-FFF2-40B4-BE49-F238E27FC236}">
-                <a16:creationId xmlns:a16="http://schemas.microsoft.com/office/drawing/2014/main" id="{4A50834A-6537-47DE-B0E6-BD90EAB418B2}"/>
+                <a16:creationId xmlns:a16="http://schemas.microsoft.com/office/drawing/2014/main" id="{AF0F52C3-6EBD-4790-A84D-93D91A4E8B55}"/>
               </a:ext>
             </a:extLst>
           </p:cNvPr>
@@ -8574,7 +8638,7 @@
             <a:pPr algn="l">
               <a:defRPr sz="2250" b="1">
                 <a:solidFill>
-                  <a:srgbClr val="E5783F"/>
+                  <a:srgbClr val="9A3F16"/>
                 </a:solidFill>
                 <a:latin typeface="PingFang SC"/>
                 <a:ea typeface="PingFang SC"/>
@@ -8584,7 +8648,7 @@
             <a:r>
               <a:rPr sz="2250" b="1">
                 <a:solidFill>
-                  <a:srgbClr val="E5783F"/>
+                  <a:srgbClr val="9A3F16"/>
                 </a:solidFill>
                 <a:latin typeface="PingFang SC"/>
                 <a:ea typeface="PingFang SC"/>
@@ -8600,7 +8664,7 @@
           <p:cNvPr id="7" name="core-label-0">
             <a:extLst xmlns:a="http://schemas.openxmlformats.org/drawingml/2006/main">
               <a:ext uri="{FF2B5EF4-FFF2-40B4-BE49-F238E27FC236}">
-                <a16:creationId xmlns:a16="http://schemas.microsoft.com/office/drawing/2014/main" id="{E980A616-FDCA-492F-AA94-D885D47FC0DF}"/>
+                <a16:creationId xmlns:a16="http://schemas.microsoft.com/office/drawing/2014/main" id="{1CEF7E3E-5E92-416E-A04D-529F9D4822A1}"/>
               </a:ext>
             </a:extLst>
           </p:cNvPr>
@@ -8658,7 +8722,7 @@
           <p:cNvPr id="8" name="core-body-0">
             <a:extLst xmlns:a="http://schemas.openxmlformats.org/drawingml/2006/main">
               <a:ext uri="{FF2B5EF4-FFF2-40B4-BE49-F238E27FC236}">
-                <a16:creationId xmlns:a16="http://schemas.microsoft.com/office/drawing/2014/main" id="{6AA3EA85-585E-4CF9-A605-8B0D40E9A4ED}"/>
+                <a16:creationId xmlns:a16="http://schemas.microsoft.com/office/drawing/2014/main" id="{EA61E96B-EC5C-41E7-B573-EAC23CBBA317}"/>
               </a:ext>
             </a:extLst>
           </p:cNvPr>
@@ -8682,7 +8746,7 @@
           </a:solidFill>
           <a:ln xmlns:a="http://schemas.openxmlformats.org/drawingml/2006/main" w="19050">
             <a:solidFill>
-              <a:srgbClr val="E5783F"/>
+              <a:srgbClr val="9A3F16"/>
             </a:solidFill>
             <a:prstDash val="solid"/>
           </a:ln>
@@ -8722,7 +8786,7 @@
           <p:cNvPr id="9" name="core-no-1">
             <a:extLst xmlns:a="http://schemas.openxmlformats.org/drawingml/2006/main">
               <a:ext uri="{FF2B5EF4-FFF2-40B4-BE49-F238E27FC236}">
-                <a16:creationId xmlns:a16="http://schemas.microsoft.com/office/drawing/2014/main" id="{E533D666-4F74-4625-B60E-21C739B32C82}"/>
+                <a16:creationId xmlns:a16="http://schemas.microsoft.com/office/drawing/2014/main" id="{12B8F596-BBF1-4DD8-B4E7-DB4D40AFEA5B}"/>
               </a:ext>
             </a:extLst>
           </p:cNvPr>
@@ -8754,7 +8818,7 @@
             <a:pPr algn="l">
               <a:defRPr sz="2250" b="1">
                 <a:solidFill>
-                  <a:srgbClr val="E5783F"/>
+                  <a:srgbClr val="9A3F16"/>
                 </a:solidFill>
                 <a:latin typeface="PingFang SC"/>
                 <a:ea typeface="PingFang SC"/>
@@ -8764,7 +8828,7 @@
             <a:r>
               <a:rPr sz="2250" b="1">
                 <a:solidFill>
-                  <a:srgbClr val="E5783F"/>
+                  <a:srgbClr val="9A3F16"/>
                 </a:solidFill>
                 <a:latin typeface="PingFang SC"/>
                 <a:ea typeface="PingFang SC"/>
@@ -8780,7 +8844,7 @@
           <p:cNvPr id="10" name="core-body-1">
             <a:extLst xmlns:a="http://schemas.openxmlformats.org/drawingml/2006/main">
               <a:ext uri="{FF2B5EF4-FFF2-40B4-BE49-F238E27FC236}">
-                <a16:creationId xmlns:a16="http://schemas.microsoft.com/office/drawing/2014/main" id="{50BF4C4E-0511-4837-B1CB-1427C12A865C}"/>
+                <a16:creationId xmlns:a16="http://schemas.microsoft.com/office/drawing/2014/main" id="{B0E0C4D2-2089-49D9-8C2C-1A3997983661}"/>
               </a:ext>
             </a:extLst>
           </p:cNvPr>
@@ -8834,7 +8898,7 @@
                 <a:ea typeface="PingFang SC"/>
                 <a:cs typeface="PingFang SC"/>
               </a:rPr>
-              <a:t>涉及失物、投诉、支付、个人信息、身体不适、儿童走失、安全隐患或紧急情况时，应快速转现场人员或正式求助渠道。接管不是显示一个电话号码就结束：系统应传递必要的上下文和位置…</a:t>
+              <a:t>涉及失物、投诉、支付、个人信息、身体不适、儿童走失、安全隐患或紧急情况时；应快速转现场人员或正式求助渠道；接管不是显示一个电话号码就结束；系统应传递必要的上下文和位置</a:t>
             </a:r>
           </a:p>
         </p:txBody>
@@ -8844,7 +8908,7 @@
           <p:cNvPr id="11" name="core-no-2">
             <a:extLst xmlns:a="http://schemas.openxmlformats.org/drawingml/2006/main">
               <a:ext uri="{FF2B5EF4-FFF2-40B4-BE49-F238E27FC236}">
-                <a16:creationId xmlns:a16="http://schemas.microsoft.com/office/drawing/2014/main" id="{34829AAB-FDA5-4DC7-A9A2-C89515A0AA23}"/>
+                <a16:creationId xmlns:a16="http://schemas.microsoft.com/office/drawing/2014/main" id="{E42BF4AC-5581-4FFB-8968-2061FEAF2319}"/>
               </a:ext>
             </a:extLst>
           </p:cNvPr>
@@ -8876,7 +8940,7 @@
             <a:pPr algn="l">
               <a:defRPr sz="2250" b="1">
                 <a:solidFill>
-                  <a:srgbClr val="E5783F"/>
+                  <a:srgbClr val="9A3F16"/>
                 </a:solidFill>
                 <a:latin typeface="PingFang SC"/>
                 <a:ea typeface="PingFang SC"/>
@@ -8886,7 +8950,7 @@
             <a:r>
               <a:rPr sz="2250" b="1">
                 <a:solidFill>
-                  <a:srgbClr val="E5783F"/>
+                  <a:srgbClr val="9A3F16"/>
                 </a:solidFill>
                 <a:latin typeface="PingFang SC"/>
                 <a:ea typeface="PingFang SC"/>
@@ -8902,7 +8966,7 @@
           <p:cNvPr id="12" name="core-body-2">
             <a:extLst xmlns:a="http://schemas.openxmlformats.org/drawingml/2006/main">
               <a:ext uri="{FF2B5EF4-FFF2-40B4-BE49-F238E27FC236}">
-                <a16:creationId xmlns:a16="http://schemas.microsoft.com/office/drawing/2014/main" id="{E563FBFE-4440-4393-BB01-93AED7245E08}"/>
+                <a16:creationId xmlns:a16="http://schemas.microsoft.com/office/drawing/2014/main" id="{DA0FD112-4E86-4BB9-A3C0-4EF661DA2A85}"/>
               </a:ext>
             </a:extLst>
           </p:cNvPr>
@@ -8966,7 +9030,7 @@
           <p:cNvPr id="13" name="s6-takeaway-rule">
             <a:extLst xmlns:a="http://schemas.openxmlformats.org/drawingml/2006/main">
               <a:ext uri="{FF2B5EF4-FFF2-40B4-BE49-F238E27FC236}">
-                <a16:creationId xmlns:a16="http://schemas.microsoft.com/office/drawing/2014/main" id="{5C12C72A-A422-4958-8E11-21B753BF42BC}"/>
+                <a16:creationId xmlns:a16="http://schemas.microsoft.com/office/drawing/2014/main" id="{5D5D4DC2-6EE2-4F8A-B25D-310C4C4313D9}"/>
               </a:ext>
             </a:extLst>
           </p:cNvPr>
@@ -8999,7 +9063,7 @@
           <p:cNvPr id="14" name="s6-takeaway">
             <a:extLst xmlns:a="http://schemas.openxmlformats.org/drawingml/2006/main">
               <a:ext uri="{FF2B5EF4-FFF2-40B4-BE49-F238E27FC236}">
-                <a16:creationId xmlns:a16="http://schemas.microsoft.com/office/drawing/2014/main" id="{340A9202-9932-4589-A30C-38526D6638CF}"/>
+                <a16:creationId xmlns:a16="http://schemas.microsoft.com/office/drawing/2014/main" id="{F21B4B4C-365E-492B-A91C-37491B34548F}"/>
               </a:ext>
             </a:extLst>
           </p:cNvPr>
@@ -9047,7 +9111,7 @@
                 <a:ea typeface="PingFang SC"/>
                 <a:cs typeface="PingFang SC"/>
               </a:rPr>
-              <a:t>问答系统先识别问题属于展项知识、路线服务、运营信息还是现场求助</a:t>
+              <a:t>问答系统必须区分知识、服务与现场求助</a:t>
             </a:r>
           </a:p>
         </p:txBody>
@@ -9055,7 +9119,7 @@
     </p:spTree>
     <p:extLst>
       <p:ext uri="{BB962C8B-B14F-4D97-AF65-F5344CB8AC3E}">
-        <p14:creationId xmlns:p14="http://schemas.microsoft.com/office/powerpoint/2010/main" val="1174042626"/>
+        <p14:creationId xmlns:p14="http://schemas.microsoft.com/office/powerpoint/2010/main" val="1108289046"/>
       </p:ext>
     </p:extLst>
   </p:cSld>
@@ -9086,7 +9150,7 @@
           <p:cNvPr id="1" name="s7-rule">
             <a:extLst xmlns:a="http://schemas.openxmlformats.org/drawingml/2006/main">
               <a:ext uri="{FF2B5EF4-FFF2-40B4-BE49-F238E27FC236}">
-                <a16:creationId xmlns:a16="http://schemas.microsoft.com/office/drawing/2014/main" id="{F1351279-D292-40B6-BFF2-E357285D2638}"/>
+                <a16:creationId xmlns:a16="http://schemas.microsoft.com/office/drawing/2014/main" id="{54F82A9F-7A21-4C71-B7B3-CFC6FF68FB74}"/>
               </a:ext>
             </a:extLst>
           </p:cNvPr>
@@ -9119,7 +9183,7 @@
           <p:cNvPr id="2" name="s7-eyebrow">
             <a:extLst xmlns:a="http://schemas.openxmlformats.org/drawingml/2006/main">
               <a:ext uri="{FF2B5EF4-FFF2-40B4-BE49-F238E27FC236}">
-                <a16:creationId xmlns:a16="http://schemas.microsoft.com/office/drawing/2014/main" id="{3298B2EE-3E37-4B21-A97D-2BAF65CCB229}"/>
+                <a16:creationId xmlns:a16="http://schemas.microsoft.com/office/drawing/2014/main" id="{4937717C-2325-489B-9C5F-A313E9C175AE}"/>
               </a:ext>
             </a:extLst>
           </p:cNvPr>
@@ -9177,7 +9241,7 @@
           <p:cNvPr id="3" name="s7-title">
             <a:extLst xmlns:a="http://schemas.openxmlformats.org/drawingml/2006/main">
               <a:ext uri="{FF2B5EF4-FFF2-40B4-BE49-F238E27FC236}">
-                <a16:creationId xmlns:a16="http://schemas.microsoft.com/office/drawing/2014/main" id="{09FB6819-ADF7-48FD-8C70-0C222E8A980E}"/>
+                <a16:creationId xmlns:a16="http://schemas.microsoft.com/office/drawing/2014/main" id="{8488A91D-74D3-4E89-9792-CFE98A4B1716}"/>
               </a:ext>
             </a:extLst>
           </p:cNvPr>
@@ -9235,7 +9299,7 @@
           <p:cNvPr id="4" name="s7-footer">
             <a:extLst xmlns:a="http://schemas.openxmlformats.org/drawingml/2006/main">
               <a:ext uri="{FF2B5EF4-FFF2-40B4-BE49-F238E27FC236}">
-                <a16:creationId xmlns:a16="http://schemas.microsoft.com/office/drawing/2014/main" id="{B5D4FB5E-0C3B-4A89-8BBE-98FA6B18D194}"/>
+                <a16:creationId xmlns:a16="http://schemas.microsoft.com/office/drawing/2014/main" id="{4E0FF994-5AAB-4648-A746-E3382B7D7FE4}"/>
               </a:ext>
             </a:extLst>
           </p:cNvPr>
@@ -9266,7 +9330,7 @@
           <p:cNvPr id="5" name="s7-identity">
             <a:extLst xmlns:a="http://schemas.openxmlformats.org/drawingml/2006/main">
               <a:ext uri="{FF2B5EF4-FFF2-40B4-BE49-F238E27FC236}">
-                <a16:creationId xmlns:a16="http://schemas.microsoft.com/office/drawing/2014/main" id="{D8D07687-B04D-4C5E-8D08-EFC96EBC6A53}"/>
+                <a16:creationId xmlns:a16="http://schemas.microsoft.com/office/drawing/2014/main" id="{03479402-3E12-4487-BAC5-D173098733BB}"/>
               </a:ext>
             </a:extLst>
           </p:cNvPr>
@@ -9324,7 +9388,7 @@
           <p:cNvPr id="6" name="core-no-0">
             <a:extLst xmlns:a="http://schemas.openxmlformats.org/drawingml/2006/main">
               <a:ext uri="{FF2B5EF4-FFF2-40B4-BE49-F238E27FC236}">
-                <a16:creationId xmlns:a16="http://schemas.microsoft.com/office/drawing/2014/main" id="{B6420553-EB48-41BE-918B-3FB0B064B6DC}"/>
+                <a16:creationId xmlns:a16="http://schemas.microsoft.com/office/drawing/2014/main" id="{5A744919-CE78-4797-87E1-AD1F17427AAC}"/>
               </a:ext>
             </a:extLst>
           </p:cNvPr>
@@ -9356,7 +9420,7 @@
             <a:pPr algn="l">
               <a:defRPr sz="2250" b="1">
                 <a:solidFill>
-                  <a:srgbClr val="E5783F"/>
+                  <a:srgbClr val="9A3F16"/>
                 </a:solidFill>
                 <a:latin typeface="PingFang SC"/>
                 <a:ea typeface="PingFang SC"/>
@@ -9366,7 +9430,7 @@
             <a:r>
               <a:rPr sz="2250" b="1">
                 <a:solidFill>
-                  <a:srgbClr val="E5783F"/>
+                  <a:srgbClr val="9A3F16"/>
                 </a:solidFill>
                 <a:latin typeface="PingFang SC"/>
                 <a:ea typeface="PingFang SC"/>
@@ -9382,7 +9446,7 @@
           <p:cNvPr id="7" name="core-label-0">
             <a:extLst xmlns:a="http://schemas.openxmlformats.org/drawingml/2006/main">
               <a:ext uri="{FF2B5EF4-FFF2-40B4-BE49-F238E27FC236}">
-                <a16:creationId xmlns:a16="http://schemas.microsoft.com/office/drawing/2014/main" id="{F23F8EF5-DD21-4BD7-B660-C6D7909EB55E}"/>
+                <a16:creationId xmlns:a16="http://schemas.microsoft.com/office/drawing/2014/main" id="{43ED1E32-7DB5-4C6F-8D0D-5D4D8F477EAC}"/>
               </a:ext>
             </a:extLst>
           </p:cNvPr>
@@ -9440,7 +9504,7 @@
           <p:cNvPr id="8" name="core-body-0">
             <a:extLst xmlns:a="http://schemas.openxmlformats.org/drawingml/2006/main">
               <a:ext uri="{FF2B5EF4-FFF2-40B4-BE49-F238E27FC236}">
-                <a16:creationId xmlns:a16="http://schemas.microsoft.com/office/drawing/2014/main" id="{1AF150CA-19CC-404B-A08C-648268D6C6E6}"/>
+                <a16:creationId xmlns:a16="http://schemas.microsoft.com/office/drawing/2014/main" id="{227627D6-E41F-4754-B458-9609FACF27A8}"/>
               </a:ext>
             </a:extLst>
           </p:cNvPr>
@@ -9464,7 +9528,7 @@
           </a:solidFill>
           <a:ln xmlns:a="http://schemas.openxmlformats.org/drawingml/2006/main" w="19050">
             <a:solidFill>
-              <a:srgbClr val="E5783F"/>
+              <a:srgbClr val="9A3F16"/>
             </a:solidFill>
             <a:prstDash val="solid"/>
           </a:ln>
@@ -9504,7 +9568,7 @@
           <p:cNvPr id="9" name="core-no-1">
             <a:extLst xmlns:a="http://schemas.openxmlformats.org/drawingml/2006/main">
               <a:ext uri="{FF2B5EF4-FFF2-40B4-BE49-F238E27FC236}">
-                <a16:creationId xmlns:a16="http://schemas.microsoft.com/office/drawing/2014/main" id="{2425D65E-6203-4AEF-ACEF-DC4A91502453}"/>
+                <a16:creationId xmlns:a16="http://schemas.microsoft.com/office/drawing/2014/main" id="{06720A33-2B7C-47A2-B4B2-CB40A7051704}"/>
               </a:ext>
             </a:extLst>
           </p:cNvPr>
@@ -9536,7 +9600,7 @@
             <a:pPr algn="l">
               <a:defRPr sz="2250" b="1">
                 <a:solidFill>
-                  <a:srgbClr val="E5783F"/>
+                  <a:srgbClr val="9A3F16"/>
                 </a:solidFill>
                 <a:latin typeface="PingFang SC"/>
                 <a:ea typeface="PingFang SC"/>
@@ -9546,7 +9610,7 @@
             <a:r>
               <a:rPr sz="2250" b="1">
                 <a:solidFill>
-                  <a:srgbClr val="E5783F"/>
+                  <a:srgbClr val="9A3F16"/>
                 </a:solidFill>
                 <a:latin typeface="PingFang SC"/>
                 <a:ea typeface="PingFang SC"/>
@@ -9562,7 +9626,7 @@
           <p:cNvPr id="10" name="core-body-1">
             <a:extLst xmlns:a="http://schemas.openxmlformats.org/drawingml/2006/main">
               <a:ext uri="{FF2B5EF4-FFF2-40B4-BE49-F238E27FC236}">
-                <a16:creationId xmlns:a16="http://schemas.microsoft.com/office/drawing/2014/main" id="{73F0BF06-C256-4DBD-A11E-FEAAA2E52B75}"/>
+                <a16:creationId xmlns:a16="http://schemas.microsoft.com/office/drawing/2014/main" id="{698CFB76-FA5C-446B-8BCF-7373D7ECC588}"/>
               </a:ext>
             </a:extLst>
           </p:cNvPr>
@@ -9616,7 +9680,7 @@
                 <a:ea typeface="PingFang SC"/>
                 <a:cs typeface="PingFang SC"/>
               </a:rPr>
-              <a:t>三维外观只是表达层。更重要的是对象身份、数据时间、状态来源和业务关系。例如，地图显示某电梯可用时，应知道状态来自哪个系统、多久前更新、故障工单是否仍未关闭…</a:t>
+              <a:t>三维外观只是表达层；更重要的是对象身份、数据时间、状态来源和业务关系；例如，地图显示某电梯可用时；应知道状态来自哪个系统、多久前更新、故障工单是否仍未关闭</a:t>
             </a:r>
           </a:p>
         </p:txBody>
@@ -9626,7 +9690,7 @@
           <p:cNvPr id="11" name="core-no-2">
             <a:extLst xmlns:a="http://schemas.openxmlformats.org/drawingml/2006/main">
               <a:ext uri="{FF2B5EF4-FFF2-40B4-BE49-F238E27FC236}">
-                <a16:creationId xmlns:a16="http://schemas.microsoft.com/office/drawing/2014/main" id="{E2E8887E-DAF7-4E6F-A64D-06B3C4E2D1D3}"/>
+                <a16:creationId xmlns:a16="http://schemas.microsoft.com/office/drawing/2014/main" id="{BE3CBBA7-AF42-4007-8EF3-A68C2607AABF}"/>
               </a:ext>
             </a:extLst>
           </p:cNvPr>
@@ -9658,7 +9722,7 @@
             <a:pPr algn="l">
               <a:defRPr sz="2250" b="1">
                 <a:solidFill>
-                  <a:srgbClr val="E5783F"/>
+                  <a:srgbClr val="9A3F16"/>
                 </a:solidFill>
                 <a:latin typeface="PingFang SC"/>
                 <a:ea typeface="PingFang SC"/>
@@ -9668,7 +9732,7 @@
             <a:r>
               <a:rPr sz="2250" b="1">
                 <a:solidFill>
-                  <a:srgbClr val="E5783F"/>
+                  <a:srgbClr val="9A3F16"/>
                 </a:solidFill>
                 <a:latin typeface="PingFang SC"/>
                 <a:ea typeface="PingFang SC"/>
@@ -9684,7 +9748,7 @@
           <p:cNvPr id="12" name="core-body-2">
             <a:extLst xmlns:a="http://schemas.openxmlformats.org/drawingml/2006/main">
               <a:ext uri="{FF2B5EF4-FFF2-40B4-BE49-F238E27FC236}">
-                <a16:creationId xmlns:a16="http://schemas.microsoft.com/office/drawing/2014/main" id="{6993CACA-AFA5-470E-B6EA-063FDB1773BB}"/>
+                <a16:creationId xmlns:a16="http://schemas.microsoft.com/office/drawing/2014/main" id="{EB53ABCF-D5BC-4785-A29F-614EE0D1F15E}"/>
               </a:ext>
             </a:extLst>
           </p:cNvPr>
@@ -9748,7 +9812,7 @@
           <p:cNvPr id="13" name="s7-takeaway-rule">
             <a:extLst xmlns:a="http://schemas.openxmlformats.org/drawingml/2006/main">
               <a:ext uri="{FF2B5EF4-FFF2-40B4-BE49-F238E27FC236}">
-                <a16:creationId xmlns:a16="http://schemas.microsoft.com/office/drawing/2014/main" id="{431A0581-F4B4-454B-92EE-D0DDEC1DD408}"/>
+                <a16:creationId xmlns:a16="http://schemas.microsoft.com/office/drawing/2014/main" id="{2E340A7C-4E63-4448-9CCE-746CBC3599E3}"/>
               </a:ext>
             </a:extLst>
           </p:cNvPr>
@@ -9781,7 +9845,7 @@
           <p:cNvPr id="14" name="s7-takeaway">
             <a:extLst xmlns:a="http://schemas.openxmlformats.org/drawingml/2006/main">
               <a:ext uri="{FF2B5EF4-FFF2-40B4-BE49-F238E27FC236}">
-                <a16:creationId xmlns:a16="http://schemas.microsoft.com/office/drawing/2014/main" id="{E0294F8A-8EB5-4C3F-869B-BE0FD6D8CDE0}"/>
+                <a16:creationId xmlns:a16="http://schemas.microsoft.com/office/drawing/2014/main" id="{0FFCF442-A0D8-4140-A6D8-0BE9DAB21A65}"/>
               </a:ext>
             </a:extLst>
           </p:cNvPr>
@@ -9837,7 +9901,7 @@
     </p:spTree>
     <p:extLst>
       <p:ext uri="{BB962C8B-B14F-4D97-AF65-F5344CB8AC3E}">
-        <p14:creationId xmlns:p14="http://schemas.microsoft.com/office/powerpoint/2010/main" val="590284860"/>
+        <p14:creationId xmlns:p14="http://schemas.microsoft.com/office/powerpoint/2010/main" val="136562460"/>
       </p:ext>
     </p:extLst>
   </p:cSld>
@@ -9868,7 +9932,7 @@
           <p:cNvPr id="1" name="s8-rule">
             <a:extLst xmlns:a="http://schemas.openxmlformats.org/drawingml/2006/main">
               <a:ext uri="{FF2B5EF4-FFF2-40B4-BE49-F238E27FC236}">
-                <a16:creationId xmlns:a16="http://schemas.microsoft.com/office/drawing/2014/main" id="{92D79A7B-33FD-49DA-99F6-825D93DE03E5}"/>
+                <a16:creationId xmlns:a16="http://schemas.microsoft.com/office/drawing/2014/main" id="{644F81B7-7343-44BA-A581-5CC92B6F4F51}"/>
               </a:ext>
             </a:extLst>
           </p:cNvPr>
@@ -9901,7 +9965,7 @@
           <p:cNvPr id="2" name="s8-eyebrow">
             <a:extLst xmlns:a="http://schemas.openxmlformats.org/drawingml/2006/main">
               <a:ext uri="{FF2B5EF4-FFF2-40B4-BE49-F238E27FC236}">
-                <a16:creationId xmlns:a16="http://schemas.microsoft.com/office/drawing/2014/main" id="{B9CC1698-7F97-47C0-8194-1444DD1BB17D}"/>
+                <a16:creationId xmlns:a16="http://schemas.microsoft.com/office/drawing/2014/main" id="{7F7C075C-4428-4912-B3E0-EF332E2021DB}"/>
               </a:ext>
             </a:extLst>
           </p:cNvPr>
@@ -9959,7 +10023,7 @@
           <p:cNvPr id="3" name="s8-title">
             <a:extLst xmlns:a="http://schemas.openxmlformats.org/drawingml/2006/main">
               <a:ext uri="{FF2B5EF4-FFF2-40B4-BE49-F238E27FC236}">
-                <a16:creationId xmlns:a16="http://schemas.microsoft.com/office/drawing/2014/main" id="{A9172F71-C20B-44C0-892D-00EDF4B5053D}"/>
+                <a16:creationId xmlns:a16="http://schemas.microsoft.com/office/drawing/2014/main" id="{6401D681-D2AD-48F8-8E96-BAD3A9EAC40A}"/>
               </a:ext>
             </a:extLst>
           </p:cNvPr>
@@ -10017,7 +10081,7 @@
           <p:cNvPr id="4" name="s8-footer">
             <a:extLst xmlns:a="http://schemas.openxmlformats.org/drawingml/2006/main">
               <a:ext uri="{FF2B5EF4-FFF2-40B4-BE49-F238E27FC236}">
-                <a16:creationId xmlns:a16="http://schemas.microsoft.com/office/drawing/2014/main" id="{20ACEF7A-B89A-493F-BC18-84F1071955DB}"/>
+                <a16:creationId xmlns:a16="http://schemas.microsoft.com/office/drawing/2014/main" id="{C51AD06C-784E-4C39-9F8A-F5C535B36FD7}"/>
               </a:ext>
             </a:extLst>
           </p:cNvPr>
@@ -10048,7 +10112,7 @@
           <p:cNvPr id="5" name="s8-identity">
             <a:extLst xmlns:a="http://schemas.openxmlformats.org/drawingml/2006/main">
               <a:ext uri="{FF2B5EF4-FFF2-40B4-BE49-F238E27FC236}">
-                <a16:creationId xmlns:a16="http://schemas.microsoft.com/office/drawing/2014/main" id="{65FD84B7-B1B8-4515-B9C6-CA9ED149DED1}"/>
+                <a16:creationId xmlns:a16="http://schemas.microsoft.com/office/drawing/2014/main" id="{C1BB020C-A737-45B0-AAB5-B4EAF399C67A}"/>
               </a:ext>
             </a:extLst>
           </p:cNvPr>
@@ -10106,7 +10170,7 @@
           <p:cNvPr id="6" name="core-no-0">
             <a:extLst xmlns:a="http://schemas.openxmlformats.org/drawingml/2006/main">
               <a:ext uri="{FF2B5EF4-FFF2-40B4-BE49-F238E27FC236}">
-                <a16:creationId xmlns:a16="http://schemas.microsoft.com/office/drawing/2014/main" id="{D33F54E2-17EC-44EB-8BCE-B9A53C4348B7}"/>
+                <a16:creationId xmlns:a16="http://schemas.microsoft.com/office/drawing/2014/main" id="{1816ECCE-90B6-4BD6-AF0F-8E7474D78172}"/>
               </a:ext>
             </a:extLst>
           </p:cNvPr>
@@ -10138,7 +10202,7 @@
             <a:pPr algn="l">
               <a:defRPr sz="2250" b="1">
                 <a:solidFill>
-                  <a:srgbClr val="E5783F"/>
+                  <a:srgbClr val="9A3F16"/>
                 </a:solidFill>
                 <a:latin typeface="PingFang SC"/>
                 <a:ea typeface="PingFang SC"/>
@@ -10148,7 +10212,7 @@
             <a:r>
               <a:rPr sz="2250" b="1">
                 <a:solidFill>
-                  <a:srgbClr val="E5783F"/>
+                  <a:srgbClr val="9A3F16"/>
                 </a:solidFill>
                 <a:latin typeface="PingFang SC"/>
                 <a:ea typeface="PingFang SC"/>
@@ -10164,7 +10228,7 @@
           <p:cNvPr id="7" name="core-label-0">
             <a:extLst xmlns:a="http://schemas.openxmlformats.org/drawingml/2006/main">
               <a:ext uri="{FF2B5EF4-FFF2-40B4-BE49-F238E27FC236}">
-                <a16:creationId xmlns:a16="http://schemas.microsoft.com/office/drawing/2014/main" id="{5E28785C-D124-42D8-8DD9-2EFE9103C755}"/>
+                <a16:creationId xmlns:a16="http://schemas.microsoft.com/office/drawing/2014/main" id="{72EBF526-4930-4525-8775-4B497851C968}"/>
               </a:ext>
             </a:extLst>
           </p:cNvPr>
@@ -10222,7 +10286,7 @@
           <p:cNvPr id="8" name="core-body-0">
             <a:extLst xmlns:a="http://schemas.openxmlformats.org/drawingml/2006/main">
               <a:ext uri="{FF2B5EF4-FFF2-40B4-BE49-F238E27FC236}">
-                <a16:creationId xmlns:a16="http://schemas.microsoft.com/office/drawing/2014/main" id="{2937150C-AF17-45B6-8E8E-0C4B0D0168F7}"/>
+                <a16:creationId xmlns:a16="http://schemas.microsoft.com/office/drawing/2014/main" id="{B947CC5B-67C5-4F53-BA2D-7C110DDD87CC}"/>
               </a:ext>
             </a:extLst>
           </p:cNvPr>
@@ -10246,14 +10310,14 @@
           </a:solidFill>
           <a:ln xmlns:a="http://schemas.openxmlformats.org/drawingml/2006/main" w="19050">
             <a:solidFill>
-              <a:srgbClr val="E5783F"/>
+              <a:srgbClr val="9A3F16"/>
             </a:solidFill>
             <a:prstDash val="solid"/>
           </a:ln>
         </p:spPr>
         <p:txBody>
           <a:bodyPr xmlns:a="http://schemas.openxmlformats.org/drawingml/2006/main" lIns="152400" tIns="133350" rIns="152400" bIns="133350" anchor="ctr">
-            <a:normAutofit fontScale="85261"/>
+            <a:normAutofit fontScale="90943"/>
           </a:bodyPr>
           <a:lstStyle xmlns:a="http://schemas.openxmlformats.org/drawingml/2006/main"/>
           <a:p xmlns:a="http://schemas.openxmlformats.org/drawingml/2006/main">
@@ -10276,7 +10340,7 @@
                 <a:ea typeface="PingFang SC"/>
                 <a:cs typeface="PingFang SC"/>
               </a:rPr>
-              <a:t>运维对象包括机器人与充电、网络、定位基站、传感器、地图、内容库、业务接口、权限、日志和现场人员。每项都要有负责人、巡检周期、故障等级、备件或替代方案。活动高峰前应演练网络中断、设备离线…</a:t>
+              <a:t>运维对象包括机器人与充电、网络、定位基站、传感器、地图、内容库、业务接口、权限、日志和现场人员；每项都要有负责人、巡检周期、故障等级、备件或替代方案</a:t>
             </a:r>
           </a:p>
         </p:txBody>
@@ -10286,7 +10350,7 @@
           <p:cNvPr id="9" name="core-no-1">
             <a:extLst xmlns:a="http://schemas.openxmlformats.org/drawingml/2006/main">
               <a:ext uri="{FF2B5EF4-FFF2-40B4-BE49-F238E27FC236}">
-                <a16:creationId xmlns:a16="http://schemas.microsoft.com/office/drawing/2014/main" id="{0471C0AA-B383-4B0E-B0B6-DD5015A469CF}"/>
+                <a16:creationId xmlns:a16="http://schemas.microsoft.com/office/drawing/2014/main" id="{748264BA-981C-4D02-8616-7B3D446BD902}"/>
               </a:ext>
             </a:extLst>
           </p:cNvPr>
@@ -10318,7 +10382,7 @@
             <a:pPr algn="l">
               <a:defRPr sz="2250" b="1">
                 <a:solidFill>
-                  <a:srgbClr val="E5783F"/>
+                  <a:srgbClr val="9A3F16"/>
                 </a:solidFill>
                 <a:latin typeface="PingFang SC"/>
                 <a:ea typeface="PingFang SC"/>
@@ -10328,7 +10392,7 @@
             <a:r>
               <a:rPr sz="2250" b="1">
                 <a:solidFill>
-                  <a:srgbClr val="E5783F"/>
+                  <a:srgbClr val="9A3F16"/>
                 </a:solidFill>
                 <a:latin typeface="PingFang SC"/>
                 <a:ea typeface="PingFang SC"/>
@@ -10344,7 +10408,7 @@
           <p:cNvPr id="10" name="core-body-1">
             <a:extLst xmlns:a="http://schemas.openxmlformats.org/drawingml/2006/main">
               <a:ext uri="{FF2B5EF4-FFF2-40B4-BE49-F238E27FC236}">
-                <a16:creationId xmlns:a16="http://schemas.microsoft.com/office/drawing/2014/main" id="{A6FC6212-F1C4-469B-92C9-CB46200343A2}"/>
+                <a16:creationId xmlns:a16="http://schemas.microsoft.com/office/drawing/2014/main" id="{694A74B5-CF85-4C43-92F5-4AA5BC3E2E6E}"/>
               </a:ext>
             </a:extLst>
           </p:cNvPr>
@@ -10398,7 +10462,7 @@
                 <a:ea typeface="PingFang SC"/>
                 <a:cs typeface="PingFang SC"/>
               </a:rPr>
-              <a:t>系统更新要经过版本、测试、灰度与回退。内容更新检查事实和版权，地图更新进行现场走测，模型更新重跑问答和安全样本。日志只保留诊断与改进所需的信息，并按期限删除…</a:t>
+              <a:t>系统更新要经过版本、测试、灰度与回退；内容更新检查事实和版权；地图更新进行现场走测；模型更新重跑问答和安全样本；日志只保留诊断与改进所需的信息</a:t>
             </a:r>
           </a:p>
         </p:txBody>
@@ -10408,7 +10472,7 @@
           <p:cNvPr id="11" name="core-no-2">
             <a:extLst xmlns:a="http://schemas.openxmlformats.org/drawingml/2006/main">
               <a:ext uri="{FF2B5EF4-FFF2-40B4-BE49-F238E27FC236}">
-                <a16:creationId xmlns:a16="http://schemas.microsoft.com/office/drawing/2014/main" id="{84DC8BE0-454D-4A64-82E8-F51C0AD894CD}"/>
+                <a16:creationId xmlns:a16="http://schemas.microsoft.com/office/drawing/2014/main" id="{54AD8A2D-EBA3-4CF0-A226-5E0E5498F95A}"/>
               </a:ext>
             </a:extLst>
           </p:cNvPr>
@@ -10440,7 +10504,7 @@
             <a:pPr algn="l">
               <a:defRPr sz="2250" b="1">
                 <a:solidFill>
-                  <a:srgbClr val="E5783F"/>
+                  <a:srgbClr val="9A3F16"/>
                 </a:solidFill>
                 <a:latin typeface="PingFang SC"/>
                 <a:ea typeface="PingFang SC"/>
@@ -10450,7 +10514,7 @@
             <a:r>
               <a:rPr sz="2250" b="1">
                 <a:solidFill>
-                  <a:srgbClr val="E5783F"/>
+                  <a:srgbClr val="9A3F16"/>
                 </a:solidFill>
                 <a:latin typeface="PingFang SC"/>
                 <a:ea typeface="PingFang SC"/>
@@ -10466,7 +10530,7 @@
           <p:cNvPr id="12" name="core-body-2">
             <a:extLst xmlns:a="http://schemas.openxmlformats.org/drawingml/2006/main">
               <a:ext uri="{FF2B5EF4-FFF2-40B4-BE49-F238E27FC236}">
-                <a16:creationId xmlns:a16="http://schemas.microsoft.com/office/drawing/2014/main" id="{8C448C66-A267-46E3-AA2B-14C586C30983}"/>
+                <a16:creationId xmlns:a16="http://schemas.microsoft.com/office/drawing/2014/main" id="{2DFD6F49-8E69-4AD8-8B53-24174279D631}"/>
               </a:ext>
             </a:extLst>
           </p:cNvPr>
@@ -10530,7 +10594,7 @@
           <p:cNvPr id="13" name="s8-takeaway-rule">
             <a:extLst xmlns:a="http://schemas.openxmlformats.org/drawingml/2006/main">
               <a:ext uri="{FF2B5EF4-FFF2-40B4-BE49-F238E27FC236}">
-                <a16:creationId xmlns:a16="http://schemas.microsoft.com/office/drawing/2014/main" id="{5E78A422-9DEB-4DAE-8084-0540428F084C}"/>
+                <a16:creationId xmlns:a16="http://schemas.microsoft.com/office/drawing/2014/main" id="{F50FC19E-F282-401D-BAE5-BC0B5A073756}"/>
               </a:ext>
             </a:extLst>
           </p:cNvPr>
@@ -10563,7 +10627,7 @@
           <p:cNvPr id="14" name="s8-takeaway">
             <a:extLst xmlns:a="http://schemas.openxmlformats.org/drawingml/2006/main">
               <a:ext uri="{FF2B5EF4-FFF2-40B4-BE49-F238E27FC236}">
-                <a16:creationId xmlns:a16="http://schemas.microsoft.com/office/drawing/2014/main" id="{5D02AD7E-6BB6-4241-8A73-C8D46309E013}"/>
+                <a16:creationId xmlns:a16="http://schemas.microsoft.com/office/drawing/2014/main" id="{8FDE51F9-D3E3-48D0-B5FE-157F4860F3E7}"/>
               </a:ext>
             </a:extLst>
           </p:cNvPr>
@@ -10619,7 +10683,7 @@
     </p:spTree>
     <p:extLst>
       <p:ext uri="{BB962C8B-B14F-4D97-AF65-F5344CB8AC3E}">
-        <p14:creationId xmlns:p14="http://schemas.microsoft.com/office/powerpoint/2010/main" val="1098243783"/>
+        <p14:creationId xmlns:p14="http://schemas.microsoft.com/office/powerpoint/2010/main" val="1143999203"/>
       </p:ext>
     </p:extLst>
   </p:cSld>
@@ -10650,7 +10714,7 @@
           <p:cNvPr id="1" name="s9-rule">
             <a:extLst xmlns:a="http://schemas.openxmlformats.org/drawingml/2006/main">
               <a:ext uri="{FF2B5EF4-FFF2-40B4-BE49-F238E27FC236}">
-                <a16:creationId xmlns:a16="http://schemas.microsoft.com/office/drawing/2014/main" id="{6C1EF6DC-FE92-424F-850C-ED0077C94837}"/>
+                <a16:creationId xmlns:a16="http://schemas.microsoft.com/office/drawing/2014/main" id="{26340B16-B80B-4F4B-8D4F-EDDE0A5FF157}"/>
               </a:ext>
             </a:extLst>
           </p:cNvPr>
@@ -10683,7 +10747,7 @@
           <p:cNvPr id="2" name="s9-eyebrow">
             <a:extLst xmlns:a="http://schemas.openxmlformats.org/drawingml/2006/main">
               <a:ext uri="{FF2B5EF4-FFF2-40B4-BE49-F238E27FC236}">
-                <a16:creationId xmlns:a16="http://schemas.microsoft.com/office/drawing/2014/main" id="{87C3C3F6-3723-47D2-BF62-C7F75934C884}"/>
+                <a16:creationId xmlns:a16="http://schemas.microsoft.com/office/drawing/2014/main" id="{F0A9C6AC-624A-40EE-9AA4-3626B036B2D9}"/>
               </a:ext>
             </a:extLst>
           </p:cNvPr>
@@ -10741,7 +10805,7 @@
           <p:cNvPr id="3" name="s9-title">
             <a:extLst xmlns:a="http://schemas.openxmlformats.org/drawingml/2006/main">
               <a:ext uri="{FF2B5EF4-FFF2-40B4-BE49-F238E27FC236}">
-                <a16:creationId xmlns:a16="http://schemas.microsoft.com/office/drawing/2014/main" id="{DE7FDB03-8619-4619-A2F9-05583BA9E897}"/>
+                <a16:creationId xmlns:a16="http://schemas.microsoft.com/office/drawing/2014/main" id="{541DF6C3-F1C0-4C1A-B7D1-F2287A41330F}"/>
               </a:ext>
             </a:extLst>
           </p:cNvPr>
@@ -10789,7 +10853,7 @@
                 <a:ea typeface="PingFang SC"/>
                 <a:cs typeface="PingFang SC"/>
               </a:rPr>
-              <a:t>展厅主题路线的一天必须经过边界验证</a:t>
+              <a:t>共享地图让路线、讲解与临时关闭同步更新</a:t>
             </a:r>
           </a:p>
         </p:txBody>
@@ -10799,7 +10863,7 @@
           <p:cNvPr id="4" name="s9-footer">
             <a:extLst xmlns:a="http://schemas.openxmlformats.org/drawingml/2006/main">
               <a:ext uri="{FF2B5EF4-FFF2-40B4-BE49-F238E27FC236}">
-                <a16:creationId xmlns:a16="http://schemas.microsoft.com/office/drawing/2014/main" id="{852D16C5-1C04-4264-9DFD-946FCC17BE12}"/>
+                <a16:creationId xmlns:a16="http://schemas.microsoft.com/office/drawing/2014/main" id="{13DFFE81-AD9F-4828-80D4-7A8B6B711B83}"/>
               </a:ext>
             </a:extLst>
           </p:cNvPr>
@@ -10830,7 +10894,7 @@
           <p:cNvPr id="5" name="s9-identity">
             <a:extLst xmlns:a="http://schemas.openxmlformats.org/drawingml/2006/main">
               <a:ext uri="{FF2B5EF4-FFF2-40B4-BE49-F238E27FC236}">
-                <a16:creationId xmlns:a16="http://schemas.microsoft.com/office/drawing/2014/main" id="{741DAD17-53B7-4ED3-B3A8-E098FBD51F9F}"/>
+                <a16:creationId xmlns:a16="http://schemas.microsoft.com/office/drawing/2014/main" id="{622D7906-DF7B-4FB1-AEA9-6D15AA9BADAA}"/>
               </a:ext>
             </a:extLst>
           </p:cNvPr>
@@ -10888,7 +10952,7 @@
           <p:cNvPr id="6" name="case-title">
             <a:extLst xmlns:a="http://schemas.openxmlformats.org/drawingml/2006/main">
               <a:ext uri="{FF2B5EF4-FFF2-40B4-BE49-F238E27FC236}">
-                <a16:creationId xmlns:a16="http://schemas.microsoft.com/office/drawing/2014/main" id="{1AA4DBE1-1F1C-4A1A-A137-2989A062DDB0}"/>
+                <a16:creationId xmlns:a16="http://schemas.microsoft.com/office/drawing/2014/main" id="{981F5BEF-7CAF-4D34-A014-1619F28EF4A1}"/>
               </a:ext>
             </a:extLst>
           </p:cNvPr>
@@ -10952,7 +11016,7 @@
           <p:cNvPr id="7" name="case-row-0">
             <a:extLst xmlns:a="http://schemas.openxmlformats.org/drawingml/2006/main">
               <a:ext uri="{FF2B5EF4-FFF2-40B4-BE49-F238E27FC236}">
-                <a16:creationId xmlns:a16="http://schemas.microsoft.com/office/drawing/2014/main" id="{B0D85898-BBDD-41DB-92A4-2A3D79D4FB6E}"/>
+                <a16:creationId xmlns:a16="http://schemas.microsoft.com/office/drawing/2014/main" id="{2E2DE6D4-F898-4EE4-897C-4C368C28FE21}"/>
               </a:ext>
             </a:extLst>
           </p:cNvPr>
@@ -11016,7 +11080,7 @@
           <p:cNvPr id="8" name="case-row-1">
             <a:extLst xmlns:a="http://schemas.openxmlformats.org/drawingml/2006/main">
               <a:ext uri="{FF2B5EF4-FFF2-40B4-BE49-F238E27FC236}">
-                <a16:creationId xmlns:a16="http://schemas.microsoft.com/office/drawing/2014/main" id="{7BD4A2A8-7559-4D79-8915-C5B02E055533}"/>
+                <a16:creationId xmlns:a16="http://schemas.microsoft.com/office/drawing/2014/main" id="{982E3977-9D7C-48B2-828C-100223D287C1}"/>
               </a:ext>
             </a:extLst>
           </p:cNvPr>
@@ -11080,7 +11144,7 @@
           <p:cNvPr id="9" name="case-row-2">
             <a:extLst xmlns:a="http://schemas.openxmlformats.org/drawingml/2006/main">
               <a:ext uri="{FF2B5EF4-FFF2-40B4-BE49-F238E27FC236}">
-                <a16:creationId xmlns:a16="http://schemas.microsoft.com/office/drawing/2014/main" id="{BBA0B2CB-0AC5-447E-BE61-2C10ADCC7561}"/>
+                <a16:creationId xmlns:a16="http://schemas.microsoft.com/office/drawing/2014/main" id="{D0B6BF6D-A5E7-4EFC-A382-EE56D0F2D0ED}"/>
               </a:ext>
             </a:extLst>
           </p:cNvPr>
@@ -11144,7 +11208,7 @@
           <p:cNvPr id="10" name="case-row-3">
             <a:extLst xmlns:a="http://schemas.openxmlformats.org/drawingml/2006/main">
               <a:ext uri="{FF2B5EF4-FFF2-40B4-BE49-F238E27FC236}">
-                <a16:creationId xmlns:a16="http://schemas.microsoft.com/office/drawing/2014/main" id="{66002442-9E39-4A02-B0DD-27A7FBE04C5E}"/>
+                <a16:creationId xmlns:a16="http://schemas.microsoft.com/office/drawing/2014/main" id="{5AA543A0-715A-4898-88E8-D4D92D682F4D}"/>
               </a:ext>
             </a:extLst>
           </p:cNvPr>
@@ -11168,7 +11232,7 @@
           </a:solidFill>
           <a:ln xmlns:a="http://schemas.openxmlformats.org/drawingml/2006/main" w="9525">
             <a:solidFill>
-              <a:srgbClr val="E5783F"/>
+              <a:srgbClr val="9A3F16"/>
             </a:solidFill>
             <a:prstDash val="solid"/>
           </a:ln>
@@ -11208,7 +11272,7 @@
           <p:cNvPr id="11" name="s9-takeaway-rule">
             <a:extLst xmlns:a="http://schemas.openxmlformats.org/drawingml/2006/main">
               <a:ext uri="{FF2B5EF4-FFF2-40B4-BE49-F238E27FC236}">
-                <a16:creationId xmlns:a16="http://schemas.microsoft.com/office/drawing/2014/main" id="{63FC7722-EAE6-4870-860A-DB8243CE6DB7}"/>
+                <a16:creationId xmlns:a16="http://schemas.microsoft.com/office/drawing/2014/main" id="{15E6F9CC-6808-4611-B4AF-B9C8A76F60DC}"/>
               </a:ext>
             </a:extLst>
           </p:cNvPr>
@@ -11241,7 +11305,7 @@
           <p:cNvPr id="12" name="s9-takeaway">
             <a:extLst xmlns:a="http://schemas.openxmlformats.org/drawingml/2006/main">
               <a:ext uri="{FF2B5EF4-FFF2-40B4-BE49-F238E27FC236}">
-                <a16:creationId xmlns:a16="http://schemas.microsoft.com/office/drawing/2014/main" id="{846E4EC5-34C9-4229-A832-8BBBC0E2D50D}"/>
+                <a16:creationId xmlns:a16="http://schemas.microsoft.com/office/drawing/2014/main" id="{D2AE5C2F-032E-44A0-96B2-E9702567363F}"/>
               </a:ext>
             </a:extLst>
           </p:cNvPr>
@@ -11289,7 +11353,7 @@
                 <a:ea typeface="PingFang SC"/>
                 <a:cs typeface="PingFang SC"/>
               </a:rPr>
-              <a:t>展厅主题路线的一天必须经过边界验证</a:t>
+              <a:t>共享地图让路线、讲解与临时关闭同步更新</a:t>
             </a:r>
           </a:p>
         </p:txBody>
@@ -11297,7 +11361,7 @@
     </p:spTree>
     <p:extLst>
       <p:ext uri="{BB962C8B-B14F-4D97-AF65-F5344CB8AC3E}">
-        <p14:creationId xmlns:p14="http://schemas.microsoft.com/office/powerpoint/2010/main" val="2134660293"/>
+        <p14:creationId xmlns:p14="http://schemas.microsoft.com/office/powerpoint/2010/main" val="2028509812"/>
       </p:ext>
     </p:extLst>
   </p:cSld>

--- a/docs/public/course-assets/course-pptx/in-009.pptx
+++ b/docs/public/course-assets/course-pptx/in-009.pptx
@@ -2,25 +2,25 @@
 <file path=ppt/presentation.xml><?xml version="1.0" encoding="utf-8"?>
 <p:presentation xmlns:p="http://schemas.openxmlformats.org/presentationml/2006/main">
   <p:sldMasterIdLst>
-    <p:sldMasterId xmlns:r="http://schemas.openxmlformats.org/officeDocument/2006/relationships" id="2147483648" r:id="Re4af1516abef4f34"/>
+    <p:sldMasterId xmlns:r="http://schemas.openxmlformats.org/officeDocument/2006/relationships" id="2147483648" r:id="R2ce9519bb49f4f3c"/>
   </p:sldMasterIdLst>
   <p:notesMasterIdLst>
-    <p:notesMasterId xmlns:r="http://schemas.openxmlformats.org/officeDocument/2006/relationships" r:id="Rbaf27e9de4554c0f"/>
+    <p:notesMasterId xmlns:r="http://schemas.openxmlformats.org/officeDocument/2006/relationships" r:id="Rb98be871ee724be9"/>
   </p:notesMasterIdLst>
   <p:sldIdLst>
-    <p:sldId xmlns:r="http://schemas.openxmlformats.org/officeDocument/2006/relationships" id="256" r:id="R36911a7c2804483f"/>
-    <p:sldId xmlns:r="http://schemas.openxmlformats.org/officeDocument/2006/relationships" id="257" r:id="R14492666b6fe42d6"/>
-    <p:sldId xmlns:r="http://schemas.openxmlformats.org/officeDocument/2006/relationships" id="258" r:id="R42b6cc83b62840d5"/>
-    <p:sldId xmlns:r="http://schemas.openxmlformats.org/officeDocument/2006/relationships" id="259" r:id="R567423042c374ffa"/>
-    <p:sldId xmlns:r="http://schemas.openxmlformats.org/officeDocument/2006/relationships" id="260" r:id="R212054dbc17c4552"/>
-    <p:sldId xmlns:r="http://schemas.openxmlformats.org/officeDocument/2006/relationships" id="261" r:id="R543c53a9600d44ee"/>
-    <p:sldId xmlns:r="http://schemas.openxmlformats.org/officeDocument/2006/relationships" id="262" r:id="R532ffd849d414898"/>
-    <p:sldId xmlns:r="http://schemas.openxmlformats.org/officeDocument/2006/relationships" id="263" r:id="R11dbb40b457b477c"/>
-    <p:sldId xmlns:r="http://schemas.openxmlformats.org/officeDocument/2006/relationships" id="264" r:id="R334e5fa25cdd44df"/>
-    <p:sldId xmlns:r="http://schemas.openxmlformats.org/officeDocument/2006/relationships" id="265" r:id="R530d9b6ffeb94e50"/>
-    <p:sldId xmlns:r="http://schemas.openxmlformats.org/officeDocument/2006/relationships" id="266" r:id="Recf09f30b5b14625"/>
-    <p:sldId xmlns:r="http://schemas.openxmlformats.org/officeDocument/2006/relationships" id="267" r:id="Rf35b56bbaa78487e"/>
-    <p:sldId xmlns:r="http://schemas.openxmlformats.org/officeDocument/2006/relationships" id="268" r:id="R756fe8d0bae748aa"/>
+    <p:sldId xmlns:r="http://schemas.openxmlformats.org/officeDocument/2006/relationships" id="256" r:id="R94e3c9bbd13e4469"/>
+    <p:sldId xmlns:r="http://schemas.openxmlformats.org/officeDocument/2006/relationships" id="257" r:id="Rdbc8d16813044a81"/>
+    <p:sldId xmlns:r="http://schemas.openxmlformats.org/officeDocument/2006/relationships" id="258" r:id="R71c309fdc84542e6"/>
+    <p:sldId xmlns:r="http://schemas.openxmlformats.org/officeDocument/2006/relationships" id="259" r:id="Ref15a6cf0e3a4af7"/>
+    <p:sldId xmlns:r="http://schemas.openxmlformats.org/officeDocument/2006/relationships" id="260" r:id="R55e119c04621420e"/>
+    <p:sldId xmlns:r="http://schemas.openxmlformats.org/officeDocument/2006/relationships" id="261" r:id="Rb1d671708f044fd1"/>
+    <p:sldId xmlns:r="http://schemas.openxmlformats.org/officeDocument/2006/relationships" id="262" r:id="R0c285fb66dee4c6b"/>
+    <p:sldId xmlns:r="http://schemas.openxmlformats.org/officeDocument/2006/relationships" id="263" r:id="Rbde5199a20db4b5f"/>
+    <p:sldId xmlns:r="http://schemas.openxmlformats.org/officeDocument/2006/relationships" id="264" r:id="R6694f50beaf0437d"/>
+    <p:sldId xmlns:r="http://schemas.openxmlformats.org/officeDocument/2006/relationships" id="265" r:id="Raaffba40f1ca478b"/>
+    <p:sldId xmlns:r="http://schemas.openxmlformats.org/officeDocument/2006/relationships" id="266" r:id="R76b7e0148453423b"/>
+    <p:sldId xmlns:r="http://schemas.openxmlformats.org/officeDocument/2006/relationships" id="267" r:id="Rf6a7ea691dd348d2"/>
+    <p:sldId xmlns:r="http://schemas.openxmlformats.org/officeDocument/2006/relationships" id="268" r:id="R328d8b0333034bed"/>
   </p:sldIdLst>
   <p:sldSz cx="12192000" cy="6858000"/>
   <p:notesSz cx="6858000" cy="9144000"/>
@@ -1405,7 +1405,7 @@
   </p:cSld>
   <p:clrMap bg1="lt1" tx1="dk1" bg2="lt2" tx2="dk2" accent1="accent1" accent2="accent2" accent3="accent3" accent4="accent4" accent5="accent5" accent6="accent6" hlink="hlink" folHlink="folHlink"/>
   <p:sldLayoutIdLst>
-    <p:sldLayoutId xmlns:r="http://schemas.openxmlformats.org/officeDocument/2006/relationships" id="2147483649" r:id="R2d7ad5a46fda4a20"/>
+    <p:sldLayoutId xmlns:r="http://schemas.openxmlformats.org/officeDocument/2006/relationships" id="2147483649" r:id="Re1f478c73c2c459e"/>
   </p:sldLayoutIdLst>
   <p:txStyles>
     <p:titleStyle>
@@ -1956,7 +1956,7 @@
           <p:cNvPr id="1" name="cover-rule">
             <a:extLst xmlns:a="http://schemas.openxmlformats.org/drawingml/2006/main">
               <a:ext uri="{FF2B5EF4-FFF2-40B4-BE49-F238E27FC236}">
-                <a16:creationId xmlns:a16="http://schemas.microsoft.com/office/drawing/2014/main" id="{74F10B2B-6DE8-4DA0-9E59-CD4C37CE7050}"/>
+                <a16:creationId xmlns:a16="http://schemas.microsoft.com/office/drawing/2014/main" id="{4442EB8C-4D2B-4011-AAD1-9056C282FF2E}"/>
               </a:ext>
             </a:extLst>
           </p:cNvPr>
@@ -1989,7 +1989,7 @@
           <p:cNvPr id="2" name="cover-ring-1">
             <a:extLst xmlns:a="http://schemas.openxmlformats.org/drawingml/2006/main">
               <a:ext uri="{FF2B5EF4-FFF2-40B4-BE49-F238E27FC236}">
-                <a16:creationId xmlns:a16="http://schemas.microsoft.com/office/drawing/2014/main" id="{F726086B-1C93-4AE1-B153-71821EE3EB0E}"/>
+                <a16:creationId xmlns:a16="http://schemas.microsoft.com/office/drawing/2014/main" id="{2929E5CD-B922-49A6-991D-B666F217C43A}"/>
               </a:ext>
             </a:extLst>
           </p:cNvPr>
@@ -2020,7 +2020,7 @@
           <p:cNvPr id="3" name="cover-ring-2">
             <a:extLst xmlns:a="http://schemas.openxmlformats.org/drawingml/2006/main">
               <a:ext uri="{FF2B5EF4-FFF2-40B4-BE49-F238E27FC236}">
-                <a16:creationId xmlns:a16="http://schemas.microsoft.com/office/drawing/2014/main" id="{9BAD4855-56B6-49DC-A9BB-4A00AEFDEC66}"/>
+                <a16:creationId xmlns:a16="http://schemas.microsoft.com/office/drawing/2014/main" id="{9B4E23E1-C968-4BF8-83F0-893339BA3FD8}"/>
               </a:ext>
             </a:extLst>
           </p:cNvPr>
@@ -2051,7 +2051,7 @@
           <p:cNvPr id="4" name="cover-core">
             <a:extLst xmlns:a="http://schemas.openxmlformats.org/drawingml/2006/main">
               <a:ext uri="{FF2B5EF4-FFF2-40B4-BE49-F238E27FC236}">
-                <a16:creationId xmlns:a16="http://schemas.microsoft.com/office/drawing/2014/main" id="{2D072D37-5F5C-4D1B-B5F4-924A3862E22B}"/>
+                <a16:creationId xmlns:a16="http://schemas.microsoft.com/office/drawing/2014/main" id="{BC0AE3B1-EA19-4409-9F73-B3B1370F5258}"/>
               </a:ext>
             </a:extLst>
           </p:cNvPr>
@@ -2084,7 +2084,7 @@
           <p:cNvPr id="5" name="cover-line-1">
             <a:extLst xmlns:a="http://schemas.openxmlformats.org/drawingml/2006/main">
               <a:ext uri="{FF2B5EF4-FFF2-40B4-BE49-F238E27FC236}">
-                <a16:creationId xmlns:a16="http://schemas.microsoft.com/office/drawing/2014/main" id="{4BD1FCB0-6E58-49A0-B89E-AFD4B68C1984}"/>
+                <a16:creationId xmlns:a16="http://schemas.microsoft.com/office/drawing/2014/main" id="{D2BA5167-E254-4430-9165-8FB671EEE106}"/>
               </a:ext>
             </a:extLst>
           </p:cNvPr>
@@ -2115,7 +2115,7 @@
           <p:cNvPr id="6" name="cover-line-2">
             <a:extLst xmlns:a="http://schemas.openxmlformats.org/drawingml/2006/main">
               <a:ext uri="{FF2B5EF4-FFF2-40B4-BE49-F238E27FC236}">
-                <a16:creationId xmlns:a16="http://schemas.microsoft.com/office/drawing/2014/main" id="{2B6CEE48-22DC-49F7-990E-5BB7551F58D9}"/>
+                <a16:creationId xmlns:a16="http://schemas.microsoft.com/office/drawing/2014/main" id="{D770B090-4D57-4403-A7D9-EDA7A3943465}"/>
               </a:ext>
             </a:extLst>
           </p:cNvPr>
@@ -2146,7 +2146,7 @@
           <p:cNvPr id="7" name="cover-eyebrow">
             <a:extLst xmlns:a="http://schemas.openxmlformats.org/drawingml/2006/main">
               <a:ext uri="{FF2B5EF4-FFF2-40B4-BE49-F238E27FC236}">
-                <a16:creationId xmlns:a16="http://schemas.microsoft.com/office/drawing/2014/main" id="{28EAFEBB-5B5B-4A9A-A949-0D040BBCF13F}"/>
+                <a16:creationId xmlns:a16="http://schemas.microsoft.com/office/drawing/2014/main" id="{29EF1538-8F45-4B52-89DB-D966A3BF4D48}"/>
               </a:ext>
             </a:extLst>
           </p:cNvPr>
@@ -2204,7 +2204,7 @@
           <p:cNvPr id="8" name="cover-title">
             <a:extLst xmlns:a="http://schemas.openxmlformats.org/drawingml/2006/main">
               <a:ext uri="{FF2B5EF4-FFF2-40B4-BE49-F238E27FC236}">
-                <a16:creationId xmlns:a16="http://schemas.microsoft.com/office/drawing/2014/main" id="{DCAA744B-7597-4B3A-B0F2-3275AB83099A}"/>
+                <a16:creationId xmlns:a16="http://schemas.microsoft.com/office/drawing/2014/main" id="{9F0BB977-FB68-4053-8423-B9EB04F5CA2E}"/>
               </a:ext>
             </a:extLst>
           </p:cNvPr>
@@ -2262,7 +2262,7 @@
           <p:cNvPr id="9" name="cover-subtitle">
             <a:extLst xmlns:a="http://schemas.openxmlformats.org/drawingml/2006/main">
               <a:ext uri="{FF2B5EF4-FFF2-40B4-BE49-F238E27FC236}">
-                <a16:creationId xmlns:a16="http://schemas.microsoft.com/office/drawing/2014/main" id="{DAC525D1-BB58-486E-8E16-CC3647A7044D}"/>
+                <a16:creationId xmlns:a16="http://schemas.microsoft.com/office/drawing/2014/main" id="{B8DF22D4-C3FD-4CC9-8BAA-DD2241CD6711}"/>
               </a:ext>
             </a:extLst>
           </p:cNvPr>
@@ -2324,7 +2324,7 @@
           <p:cNvPr id="10" name="cover-lead">
             <a:extLst xmlns:a="http://schemas.openxmlformats.org/drawingml/2006/main">
               <a:ext uri="{FF2B5EF4-FFF2-40B4-BE49-F238E27FC236}">
-                <a16:creationId xmlns:a16="http://schemas.microsoft.com/office/drawing/2014/main" id="{C35DA056-0042-4D43-9BF2-FCBC644249F6}"/>
+                <a16:creationId xmlns:a16="http://schemas.microsoft.com/office/drawing/2014/main" id="{7C2F8701-16AF-4F4B-BEE0-6AAC51CC919E}"/>
               </a:ext>
             </a:extLst>
           </p:cNvPr>
@@ -2382,7 +2382,7 @@
           <p:cNvPr id="11" name="cover-course">
             <a:extLst xmlns:a="http://schemas.openxmlformats.org/drawingml/2006/main">
               <a:ext uri="{FF2B5EF4-FFF2-40B4-BE49-F238E27FC236}">
-                <a16:creationId xmlns:a16="http://schemas.microsoft.com/office/drawing/2014/main" id="{4CCEF49A-389C-4D15-A770-5C82F149F8B7}"/>
+                <a16:creationId xmlns:a16="http://schemas.microsoft.com/office/drawing/2014/main" id="{86C3A817-519D-43AC-B7A0-D70FFDBFF265}"/>
               </a:ext>
             </a:extLst>
           </p:cNvPr>
@@ -2440,7 +2440,7 @@
           <p:cNvPr id="12" name="cover-id">
             <a:extLst xmlns:a="http://schemas.openxmlformats.org/drawingml/2006/main">
               <a:ext uri="{FF2B5EF4-FFF2-40B4-BE49-F238E27FC236}">
-                <a16:creationId xmlns:a16="http://schemas.microsoft.com/office/drawing/2014/main" id="{7A515E1C-FB2A-49CA-85B3-04ACAD057298}"/>
+                <a16:creationId xmlns:a16="http://schemas.microsoft.com/office/drawing/2014/main" id="{45A09FFA-CBA2-42F1-A8A0-D730341E0310}"/>
               </a:ext>
             </a:extLst>
           </p:cNvPr>
@@ -2496,7 +2496,7 @@
     </p:spTree>
     <p:extLst>
       <p:ext uri="{BB962C8B-B14F-4D97-AF65-F5344CB8AC3E}">
-        <p14:creationId xmlns:p14="http://schemas.microsoft.com/office/powerpoint/2010/main" val="427725955"/>
+        <p14:creationId xmlns:p14="http://schemas.microsoft.com/office/powerpoint/2010/main" val="218327506"/>
       </p:ext>
     </p:extLst>
   </p:cSld>
@@ -2527,7 +2527,7 @@
           <p:cNvPr id="1" name="s10-rule">
             <a:extLst xmlns:a="http://schemas.openxmlformats.org/drawingml/2006/main">
               <a:ext uri="{FF2B5EF4-FFF2-40B4-BE49-F238E27FC236}">
-                <a16:creationId xmlns:a16="http://schemas.microsoft.com/office/drawing/2014/main" id="{EB146700-DFDE-4037-A6E2-05E759B9E6DC}"/>
+                <a16:creationId xmlns:a16="http://schemas.microsoft.com/office/drawing/2014/main" id="{8DA52334-7F79-4F79-90AE-D5F644B70A7D}"/>
               </a:ext>
             </a:extLst>
           </p:cNvPr>
@@ -2560,7 +2560,7 @@
           <p:cNvPr id="2" name="s10-eyebrow">
             <a:extLst xmlns:a="http://schemas.openxmlformats.org/drawingml/2006/main">
               <a:ext uri="{FF2B5EF4-FFF2-40B4-BE49-F238E27FC236}">
-                <a16:creationId xmlns:a16="http://schemas.microsoft.com/office/drawing/2014/main" id="{BE0E815D-F1A4-4688-AE1D-466899450C2B}"/>
+                <a16:creationId xmlns:a16="http://schemas.microsoft.com/office/drawing/2014/main" id="{837F9AB6-2CF5-40D3-991C-C297C412B6AF}"/>
               </a:ext>
             </a:extLst>
           </p:cNvPr>
@@ -2618,7 +2618,7 @@
           <p:cNvPr id="3" name="s10-title">
             <a:extLst xmlns:a="http://schemas.openxmlformats.org/drawingml/2006/main">
               <a:ext uri="{FF2B5EF4-FFF2-40B4-BE49-F238E27FC236}">
-                <a16:creationId xmlns:a16="http://schemas.microsoft.com/office/drawing/2014/main" id="{5C8D91D9-FCE4-4030-9CFC-F4C402EB4C3B}"/>
+                <a16:creationId xmlns:a16="http://schemas.microsoft.com/office/drawing/2014/main" id="{E4448DE7-B133-4DCA-B7F7-897E51ACDAA1}"/>
               </a:ext>
             </a:extLst>
           </p:cNvPr>
@@ -2676,7 +2676,7 @@
           <p:cNvPr id="4" name="s10-footer">
             <a:extLst xmlns:a="http://schemas.openxmlformats.org/drawingml/2006/main">
               <a:ext uri="{FF2B5EF4-FFF2-40B4-BE49-F238E27FC236}">
-                <a16:creationId xmlns:a16="http://schemas.microsoft.com/office/drawing/2014/main" id="{92EB38CA-F489-49DC-80DE-CADE877132C6}"/>
+                <a16:creationId xmlns:a16="http://schemas.microsoft.com/office/drawing/2014/main" id="{F2F9AA29-3078-4105-BDC1-2AD6DEF41489}"/>
               </a:ext>
             </a:extLst>
           </p:cNvPr>
@@ -2707,7 +2707,7 @@
           <p:cNvPr id="5" name="s10-identity">
             <a:extLst xmlns:a="http://schemas.openxmlformats.org/drawingml/2006/main">
               <a:ext uri="{FF2B5EF4-FFF2-40B4-BE49-F238E27FC236}">
-                <a16:creationId xmlns:a16="http://schemas.microsoft.com/office/drawing/2014/main" id="{0C49D0C5-76EB-409D-8357-F8FA74576425}"/>
+                <a16:creationId xmlns:a16="http://schemas.microsoft.com/office/drawing/2014/main" id="{34B8763F-E992-483B-A45E-D8D507A7A8CF}"/>
               </a:ext>
             </a:extLst>
           </p:cNvPr>
@@ -2765,7 +2765,7 @@
           <p:cNvPr id="6" name="case-title">
             <a:extLst xmlns:a="http://schemas.openxmlformats.org/drawingml/2006/main">
               <a:ext uri="{FF2B5EF4-FFF2-40B4-BE49-F238E27FC236}">
-                <a16:creationId xmlns:a16="http://schemas.microsoft.com/office/drawing/2014/main" id="{1281590B-7CE5-482C-A4E5-705970BB1AFB}"/>
+                <a16:creationId xmlns:a16="http://schemas.microsoft.com/office/drawing/2014/main" id="{D0835BC0-4B03-4A60-8FB7-4ED6874B3D1F}"/>
               </a:ext>
             </a:extLst>
           </p:cNvPr>
@@ -2829,7 +2829,7 @@
           <p:cNvPr id="7" name="case-row-0">
             <a:extLst xmlns:a="http://schemas.openxmlformats.org/drawingml/2006/main">
               <a:ext uri="{FF2B5EF4-FFF2-40B4-BE49-F238E27FC236}">
-                <a16:creationId xmlns:a16="http://schemas.microsoft.com/office/drawing/2014/main" id="{2E90E14C-3C76-4D64-A15B-E8C7DB87D77A}"/>
+                <a16:creationId xmlns:a16="http://schemas.microsoft.com/office/drawing/2014/main" id="{A60095F1-93CD-422B-99C4-BD5ECB25CBC4}"/>
               </a:ext>
             </a:extLst>
           </p:cNvPr>
@@ -2893,7 +2893,7 @@
           <p:cNvPr id="8" name="case-row-1">
             <a:extLst xmlns:a="http://schemas.openxmlformats.org/drawingml/2006/main">
               <a:ext uri="{FF2B5EF4-FFF2-40B4-BE49-F238E27FC236}">
-                <a16:creationId xmlns:a16="http://schemas.microsoft.com/office/drawing/2014/main" id="{0C5587F0-71E3-4D91-A96B-59CC6271FD02}"/>
+                <a16:creationId xmlns:a16="http://schemas.microsoft.com/office/drawing/2014/main" id="{FFC2E6C8-6FCC-4559-9E49-6D5AB68DD8D2}"/>
               </a:ext>
             </a:extLst>
           </p:cNvPr>
@@ -2957,7 +2957,7 @@
           <p:cNvPr id="9" name="case-row-2">
             <a:extLst xmlns:a="http://schemas.openxmlformats.org/drawingml/2006/main">
               <a:ext uri="{FF2B5EF4-FFF2-40B4-BE49-F238E27FC236}">
-                <a16:creationId xmlns:a16="http://schemas.microsoft.com/office/drawing/2014/main" id="{C4F6CD6F-1456-4D4E-9717-9F99877372F8}"/>
+                <a16:creationId xmlns:a16="http://schemas.microsoft.com/office/drawing/2014/main" id="{FF515717-0BE0-44FB-97EB-479AB52D5424}"/>
               </a:ext>
             </a:extLst>
           </p:cNvPr>
@@ -3021,7 +3021,7 @@
           <p:cNvPr id="10" name="s10-takeaway-rule">
             <a:extLst xmlns:a="http://schemas.openxmlformats.org/drawingml/2006/main">
               <a:ext uri="{FF2B5EF4-FFF2-40B4-BE49-F238E27FC236}">
-                <a16:creationId xmlns:a16="http://schemas.microsoft.com/office/drawing/2014/main" id="{28A8C7A4-22F4-4C69-AC3B-3FC6FFB0BF4D}"/>
+                <a16:creationId xmlns:a16="http://schemas.microsoft.com/office/drawing/2014/main" id="{14FEFEFD-F3FE-4A5E-A7EC-7671DE63D20B}"/>
               </a:ext>
             </a:extLst>
           </p:cNvPr>
@@ -3054,7 +3054,7 @@
           <p:cNvPr id="11" name="s10-takeaway">
             <a:extLst xmlns:a="http://schemas.openxmlformats.org/drawingml/2006/main">
               <a:ext uri="{FF2B5EF4-FFF2-40B4-BE49-F238E27FC236}">
-                <a16:creationId xmlns:a16="http://schemas.microsoft.com/office/drawing/2014/main" id="{7B553296-D708-4BC2-8B90-63E2ED8FCFDD}"/>
+                <a16:creationId xmlns:a16="http://schemas.microsoft.com/office/drawing/2014/main" id="{8DE66297-B36D-4423-969E-789A2DEF78F3}"/>
               </a:ext>
             </a:extLst>
           </p:cNvPr>
@@ -3110,7 +3110,7 @@
     </p:spTree>
     <p:extLst>
       <p:ext uri="{BB962C8B-B14F-4D97-AF65-F5344CB8AC3E}">
-        <p14:creationId xmlns:p14="http://schemas.microsoft.com/office/powerpoint/2010/main" val="640933912"/>
+        <p14:creationId xmlns:p14="http://schemas.microsoft.com/office/powerpoint/2010/main" val="774278636"/>
       </p:ext>
     </p:extLst>
   </p:cSld>
@@ -3141,7 +3141,7 @@
           <p:cNvPr id="1" name="s11-rule">
             <a:extLst xmlns:a="http://schemas.openxmlformats.org/drawingml/2006/main">
               <a:ext uri="{FF2B5EF4-FFF2-40B4-BE49-F238E27FC236}">
-                <a16:creationId xmlns:a16="http://schemas.microsoft.com/office/drawing/2014/main" id="{6FC51A46-11ED-4029-B718-E9FC2ACBDC51}"/>
+                <a16:creationId xmlns:a16="http://schemas.microsoft.com/office/drawing/2014/main" id="{13399D4F-79B3-44E3-95EF-149AD443C003}"/>
               </a:ext>
             </a:extLst>
           </p:cNvPr>
@@ -3174,7 +3174,7 @@
           <p:cNvPr id="2" name="s11-eyebrow">
             <a:extLst xmlns:a="http://schemas.openxmlformats.org/drawingml/2006/main">
               <a:ext uri="{FF2B5EF4-FFF2-40B4-BE49-F238E27FC236}">
-                <a16:creationId xmlns:a16="http://schemas.microsoft.com/office/drawing/2014/main" id="{B4018ADF-8492-43BC-9A53-B97D11F67888}"/>
+                <a16:creationId xmlns:a16="http://schemas.microsoft.com/office/drawing/2014/main" id="{928A6229-8E72-49DC-83CA-922A72CAAA8D}"/>
               </a:ext>
             </a:extLst>
           </p:cNvPr>
@@ -3232,7 +3232,7 @@
           <p:cNvPr id="3" name="s11-title">
             <a:extLst xmlns:a="http://schemas.openxmlformats.org/drawingml/2006/main">
               <a:ext uri="{FF2B5EF4-FFF2-40B4-BE49-F238E27FC236}">
-                <a16:creationId xmlns:a16="http://schemas.microsoft.com/office/drawing/2014/main" id="{A63C9D0F-73DF-43DE-8482-F5A48BC39477}"/>
+                <a16:creationId xmlns:a16="http://schemas.microsoft.com/office/drawing/2014/main" id="{B4D399EA-16FA-4A61-BAAD-92C11E2259C7}"/>
               </a:ext>
             </a:extLst>
           </p:cNvPr>
@@ -3290,7 +3290,7 @@
           <p:cNvPr id="4" name="s11-footer">
             <a:extLst xmlns:a="http://schemas.openxmlformats.org/drawingml/2006/main">
               <a:ext uri="{FF2B5EF4-FFF2-40B4-BE49-F238E27FC236}">
-                <a16:creationId xmlns:a16="http://schemas.microsoft.com/office/drawing/2014/main" id="{914AE7B0-F528-41BD-B518-101F7D8AA17A}"/>
+                <a16:creationId xmlns:a16="http://schemas.microsoft.com/office/drawing/2014/main" id="{D21C46E7-49DF-4C06-B184-33B64E353C1C}"/>
               </a:ext>
             </a:extLst>
           </p:cNvPr>
@@ -3321,7 +3321,7 @@
           <p:cNvPr id="5" name="s11-identity">
             <a:extLst xmlns:a="http://schemas.openxmlformats.org/drawingml/2006/main">
               <a:ext uri="{FF2B5EF4-FFF2-40B4-BE49-F238E27FC236}">
-                <a16:creationId xmlns:a16="http://schemas.microsoft.com/office/drawing/2014/main" id="{CF3595D0-EAD4-46E9-B4DE-F06377DEBC35}"/>
+                <a16:creationId xmlns:a16="http://schemas.microsoft.com/office/drawing/2014/main" id="{1984849C-AFC4-4FC9-8604-106694C33D20}"/>
               </a:ext>
             </a:extLst>
           </p:cNvPr>
@@ -3379,7 +3379,7 @@
           <p:cNvPr id="6" name="practice-circle-0">
             <a:extLst xmlns:a="http://schemas.openxmlformats.org/drawingml/2006/main">
               <a:ext uri="{FF2B5EF4-FFF2-40B4-BE49-F238E27FC236}">
-                <a16:creationId xmlns:a16="http://schemas.microsoft.com/office/drawing/2014/main" id="{DBF35111-155D-4FFA-A06A-887073C04C5E}"/>
+                <a16:creationId xmlns:a16="http://schemas.microsoft.com/office/drawing/2014/main" id="{400065E1-CFC5-44B6-A2A9-9DE92A43DCE8}"/>
               </a:ext>
             </a:extLst>
           </p:cNvPr>
@@ -3412,7 +3412,7 @@
           <p:cNvPr id="7" name="practice-number-0">
             <a:extLst xmlns:a="http://schemas.openxmlformats.org/drawingml/2006/main">
               <a:ext uri="{FF2B5EF4-FFF2-40B4-BE49-F238E27FC236}">
-                <a16:creationId xmlns:a16="http://schemas.microsoft.com/office/drawing/2014/main" id="{AEA04388-7FDF-4CDA-BE8B-9DF0CABBF5B5}"/>
+                <a16:creationId xmlns:a16="http://schemas.microsoft.com/office/drawing/2014/main" id="{A31E11E4-B2F3-4B58-9D0A-DEF8BE18C58F}"/>
               </a:ext>
             </a:extLst>
           </p:cNvPr>
@@ -3470,7 +3470,7 @@
           <p:cNvPr id="8" name="practice-item-0">
             <a:extLst xmlns:a="http://schemas.openxmlformats.org/drawingml/2006/main">
               <a:ext uri="{FF2B5EF4-FFF2-40B4-BE49-F238E27FC236}">
-                <a16:creationId xmlns:a16="http://schemas.microsoft.com/office/drawing/2014/main" id="{3A4BAAA1-0A02-42D2-A0DF-18964BF73C31}"/>
+                <a16:creationId xmlns:a16="http://schemas.microsoft.com/office/drawing/2014/main" id="{01DBD3FD-18D5-4A8F-BBE9-518388659C94}"/>
               </a:ext>
             </a:extLst>
           </p:cNvPr>
@@ -3534,7 +3534,7 @@
           <p:cNvPr id="9" name="practice-connector-0">
             <a:extLst xmlns:a="http://schemas.openxmlformats.org/drawingml/2006/main">
               <a:ext uri="{FF2B5EF4-FFF2-40B4-BE49-F238E27FC236}">
-                <a16:creationId xmlns:a16="http://schemas.microsoft.com/office/drawing/2014/main" id="{39034BA9-5C13-4E2E-868B-EECBF1804090}"/>
+                <a16:creationId xmlns:a16="http://schemas.microsoft.com/office/drawing/2014/main" id="{DA7B3054-B303-47E1-9E0B-6664716E548C}"/>
               </a:ext>
             </a:extLst>
           </p:cNvPr>
@@ -3565,7 +3565,7 @@
           <p:cNvPr id="10" name="practice-circle-1">
             <a:extLst xmlns:a="http://schemas.openxmlformats.org/drawingml/2006/main">
               <a:ext uri="{FF2B5EF4-FFF2-40B4-BE49-F238E27FC236}">
-                <a16:creationId xmlns:a16="http://schemas.microsoft.com/office/drawing/2014/main" id="{503D9F27-67AD-4F09-9EFB-37B244DB9236}"/>
+                <a16:creationId xmlns:a16="http://schemas.microsoft.com/office/drawing/2014/main" id="{8F602580-9917-4C20-BEBD-318409366905}"/>
               </a:ext>
             </a:extLst>
           </p:cNvPr>
@@ -3598,7 +3598,7 @@
           <p:cNvPr id="11" name="practice-number-1">
             <a:extLst xmlns:a="http://schemas.openxmlformats.org/drawingml/2006/main">
               <a:ext uri="{FF2B5EF4-FFF2-40B4-BE49-F238E27FC236}">
-                <a16:creationId xmlns:a16="http://schemas.microsoft.com/office/drawing/2014/main" id="{F4864203-0F44-4F66-9A6A-AECCC6755AAD}"/>
+                <a16:creationId xmlns:a16="http://schemas.microsoft.com/office/drawing/2014/main" id="{470E6379-0492-422E-9677-D15565B13C44}"/>
               </a:ext>
             </a:extLst>
           </p:cNvPr>
@@ -3656,7 +3656,7 @@
           <p:cNvPr id="12" name="practice-item-1">
             <a:extLst xmlns:a="http://schemas.openxmlformats.org/drawingml/2006/main">
               <a:ext uri="{FF2B5EF4-FFF2-40B4-BE49-F238E27FC236}">
-                <a16:creationId xmlns:a16="http://schemas.microsoft.com/office/drawing/2014/main" id="{745F9F48-5F28-4560-8FAB-005951F40815}"/>
+                <a16:creationId xmlns:a16="http://schemas.microsoft.com/office/drawing/2014/main" id="{E208B746-EA1B-4731-8CB3-533BA7D7718A}"/>
               </a:ext>
             </a:extLst>
           </p:cNvPr>
@@ -3720,7 +3720,7 @@
           <p:cNvPr id="13" name="practice-connector-1">
             <a:extLst xmlns:a="http://schemas.openxmlformats.org/drawingml/2006/main">
               <a:ext uri="{FF2B5EF4-FFF2-40B4-BE49-F238E27FC236}">
-                <a16:creationId xmlns:a16="http://schemas.microsoft.com/office/drawing/2014/main" id="{79CE02A6-4978-43B9-8664-F7AE6706FDAD}"/>
+                <a16:creationId xmlns:a16="http://schemas.microsoft.com/office/drawing/2014/main" id="{D9DCB1E2-3EDC-4CC9-95D7-52DA9E78DC32}"/>
               </a:ext>
             </a:extLst>
           </p:cNvPr>
@@ -3751,7 +3751,7 @@
           <p:cNvPr id="14" name="practice-circle-2">
             <a:extLst xmlns:a="http://schemas.openxmlformats.org/drawingml/2006/main">
               <a:ext uri="{FF2B5EF4-FFF2-40B4-BE49-F238E27FC236}">
-                <a16:creationId xmlns:a16="http://schemas.microsoft.com/office/drawing/2014/main" id="{04BA8D56-3B78-42F4-9F9C-7300498C8EB0}"/>
+                <a16:creationId xmlns:a16="http://schemas.microsoft.com/office/drawing/2014/main" id="{6B72C844-33A7-405C-9C0E-139079E804CA}"/>
               </a:ext>
             </a:extLst>
           </p:cNvPr>
@@ -3784,7 +3784,7 @@
           <p:cNvPr id="15" name="practice-number-2">
             <a:extLst xmlns:a="http://schemas.openxmlformats.org/drawingml/2006/main">
               <a:ext uri="{FF2B5EF4-FFF2-40B4-BE49-F238E27FC236}">
-                <a16:creationId xmlns:a16="http://schemas.microsoft.com/office/drawing/2014/main" id="{41C279A7-95CE-467B-AB53-B943F7015FBC}"/>
+                <a16:creationId xmlns:a16="http://schemas.microsoft.com/office/drawing/2014/main" id="{B1884FDC-5920-4DA9-A3B2-FCB800FA0DC3}"/>
               </a:ext>
             </a:extLst>
           </p:cNvPr>
@@ -3842,7 +3842,7 @@
           <p:cNvPr id="16" name="practice-item-2">
             <a:extLst xmlns:a="http://schemas.openxmlformats.org/drawingml/2006/main">
               <a:ext uri="{FF2B5EF4-FFF2-40B4-BE49-F238E27FC236}">
-                <a16:creationId xmlns:a16="http://schemas.microsoft.com/office/drawing/2014/main" id="{CD46EBF2-B3AA-42F3-A815-067A93505E5A}"/>
+                <a16:creationId xmlns:a16="http://schemas.microsoft.com/office/drawing/2014/main" id="{B2C00FD2-4B84-4649-BF4B-67F1BE16BD2D}"/>
               </a:ext>
             </a:extLst>
           </p:cNvPr>
@@ -3904,7 +3904,7 @@
     </p:spTree>
     <p:extLst>
       <p:ext uri="{BB962C8B-B14F-4D97-AF65-F5344CB8AC3E}">
-        <p14:creationId xmlns:p14="http://schemas.microsoft.com/office/powerpoint/2010/main" val="1549653193"/>
+        <p14:creationId xmlns:p14="http://schemas.microsoft.com/office/powerpoint/2010/main" val="1919845223"/>
       </p:ext>
     </p:extLst>
   </p:cSld>
@@ -3935,7 +3935,7 @@
           <p:cNvPr id="1" name="s12-rule">
             <a:extLst xmlns:a="http://schemas.openxmlformats.org/drawingml/2006/main">
               <a:ext uri="{FF2B5EF4-FFF2-40B4-BE49-F238E27FC236}">
-                <a16:creationId xmlns:a16="http://schemas.microsoft.com/office/drawing/2014/main" id="{9BDB3AC7-DAF1-402B-BA6D-CFB68896345A}"/>
+                <a16:creationId xmlns:a16="http://schemas.microsoft.com/office/drawing/2014/main" id="{90907665-515B-4030-B287-47F5607665B3}"/>
               </a:ext>
             </a:extLst>
           </p:cNvPr>
@@ -3968,7 +3968,7 @@
           <p:cNvPr id="2" name="s12-eyebrow">
             <a:extLst xmlns:a="http://schemas.openxmlformats.org/drawingml/2006/main">
               <a:ext uri="{FF2B5EF4-FFF2-40B4-BE49-F238E27FC236}">
-                <a16:creationId xmlns:a16="http://schemas.microsoft.com/office/drawing/2014/main" id="{90185FA6-F773-466E-AF8E-27B5943A09AF}"/>
+                <a16:creationId xmlns:a16="http://schemas.microsoft.com/office/drawing/2014/main" id="{9B77399F-1BA4-4C93-B582-5FC93C944C74}"/>
               </a:ext>
             </a:extLst>
           </p:cNvPr>
@@ -4026,7 +4026,7 @@
           <p:cNvPr id="3" name="s12-title">
             <a:extLst xmlns:a="http://schemas.openxmlformats.org/drawingml/2006/main">
               <a:ext uri="{FF2B5EF4-FFF2-40B4-BE49-F238E27FC236}">
-                <a16:creationId xmlns:a16="http://schemas.microsoft.com/office/drawing/2014/main" id="{E565D740-1C0B-49F3-A632-0048278D13D2}"/>
+                <a16:creationId xmlns:a16="http://schemas.microsoft.com/office/drawing/2014/main" id="{5B5A562C-F7EA-49CA-8D81-CCD943EF1348}"/>
               </a:ext>
             </a:extLst>
           </p:cNvPr>
@@ -4084,7 +4084,7 @@
           <p:cNvPr id="4" name="s12-footer">
             <a:extLst xmlns:a="http://schemas.openxmlformats.org/drawingml/2006/main">
               <a:ext uri="{FF2B5EF4-FFF2-40B4-BE49-F238E27FC236}">
-                <a16:creationId xmlns:a16="http://schemas.microsoft.com/office/drawing/2014/main" id="{4DA66F5B-0CC2-4C6B-9AA7-252FCCCF8A78}"/>
+                <a16:creationId xmlns:a16="http://schemas.microsoft.com/office/drawing/2014/main" id="{9AD67728-5F8F-41A0-BC71-75B9843AB48C}"/>
               </a:ext>
             </a:extLst>
           </p:cNvPr>
@@ -4115,7 +4115,7 @@
           <p:cNvPr id="5" name="s12-identity">
             <a:extLst xmlns:a="http://schemas.openxmlformats.org/drawingml/2006/main">
               <a:ext uri="{FF2B5EF4-FFF2-40B4-BE49-F238E27FC236}">
-                <a16:creationId xmlns:a16="http://schemas.microsoft.com/office/drawing/2014/main" id="{4ED33DB1-AB63-441E-9C85-469C08B9F4C4}"/>
+                <a16:creationId xmlns:a16="http://schemas.microsoft.com/office/drawing/2014/main" id="{A2372B37-066A-4DF4-83F1-6D5C04EA4EB4}"/>
               </a:ext>
             </a:extLst>
           </p:cNvPr>
@@ -4173,7 +4173,7 @@
           <p:cNvPr id="6" name="recap-circle-0">
             <a:extLst xmlns:a="http://schemas.openxmlformats.org/drawingml/2006/main">
               <a:ext uri="{FF2B5EF4-FFF2-40B4-BE49-F238E27FC236}">
-                <a16:creationId xmlns:a16="http://schemas.microsoft.com/office/drawing/2014/main" id="{B8D4ABD1-7525-4A2B-9AC0-BB39F40CB6A5}"/>
+                <a16:creationId xmlns:a16="http://schemas.microsoft.com/office/drawing/2014/main" id="{26F1ED60-E35A-4398-A153-444002D1E699}"/>
               </a:ext>
             </a:extLst>
           </p:cNvPr>
@@ -4206,7 +4206,7 @@
           <p:cNvPr id="7" name="recap-number-0">
             <a:extLst xmlns:a="http://schemas.openxmlformats.org/drawingml/2006/main">
               <a:ext uri="{FF2B5EF4-FFF2-40B4-BE49-F238E27FC236}">
-                <a16:creationId xmlns:a16="http://schemas.microsoft.com/office/drawing/2014/main" id="{06D14DDE-E1EB-47C1-BA9E-8E04E7613C24}"/>
+                <a16:creationId xmlns:a16="http://schemas.microsoft.com/office/drawing/2014/main" id="{16DADB32-CEEC-4931-8D51-7CE27D2D0C2A}"/>
               </a:ext>
             </a:extLst>
           </p:cNvPr>
@@ -4264,7 +4264,7 @@
           <p:cNvPr id="8" name="recap-item-0">
             <a:extLst xmlns:a="http://schemas.openxmlformats.org/drawingml/2006/main">
               <a:ext uri="{FF2B5EF4-FFF2-40B4-BE49-F238E27FC236}">
-                <a16:creationId xmlns:a16="http://schemas.microsoft.com/office/drawing/2014/main" id="{5E4DD291-51EC-489B-8337-66E8FB2F174B}"/>
+                <a16:creationId xmlns:a16="http://schemas.microsoft.com/office/drawing/2014/main" id="{636E2BA6-8A8C-4EFE-82E3-8666A5121CB6}"/>
               </a:ext>
             </a:extLst>
           </p:cNvPr>
@@ -4328,7 +4328,7 @@
           <p:cNvPr id="9" name="recap-connector-0">
             <a:extLst xmlns:a="http://schemas.openxmlformats.org/drawingml/2006/main">
               <a:ext uri="{FF2B5EF4-FFF2-40B4-BE49-F238E27FC236}">
-                <a16:creationId xmlns:a16="http://schemas.microsoft.com/office/drawing/2014/main" id="{F036E790-D3BC-4781-B98D-FD58669106ED}"/>
+                <a16:creationId xmlns:a16="http://schemas.microsoft.com/office/drawing/2014/main" id="{4F6316CA-906F-43DD-AC05-98941DAB7C2A}"/>
               </a:ext>
             </a:extLst>
           </p:cNvPr>
@@ -4359,7 +4359,7 @@
           <p:cNvPr id="10" name="recap-circle-1">
             <a:extLst xmlns:a="http://schemas.openxmlformats.org/drawingml/2006/main">
               <a:ext uri="{FF2B5EF4-FFF2-40B4-BE49-F238E27FC236}">
-                <a16:creationId xmlns:a16="http://schemas.microsoft.com/office/drawing/2014/main" id="{72D84879-9CB5-416A-A777-0F13BA591942}"/>
+                <a16:creationId xmlns:a16="http://schemas.microsoft.com/office/drawing/2014/main" id="{A5B001DF-83D1-44AD-9680-B7CD95B31554}"/>
               </a:ext>
             </a:extLst>
           </p:cNvPr>
@@ -4392,7 +4392,7 @@
           <p:cNvPr id="11" name="recap-number-1">
             <a:extLst xmlns:a="http://schemas.openxmlformats.org/drawingml/2006/main">
               <a:ext uri="{FF2B5EF4-FFF2-40B4-BE49-F238E27FC236}">
-                <a16:creationId xmlns:a16="http://schemas.microsoft.com/office/drawing/2014/main" id="{B6E82E58-4871-46D3-A7F2-79A5F77E2DEF}"/>
+                <a16:creationId xmlns:a16="http://schemas.microsoft.com/office/drawing/2014/main" id="{806E9D97-5D9B-4B2B-B8BD-D7FD2753E416}"/>
               </a:ext>
             </a:extLst>
           </p:cNvPr>
@@ -4450,7 +4450,7 @@
           <p:cNvPr id="12" name="recap-item-1">
             <a:extLst xmlns:a="http://schemas.openxmlformats.org/drawingml/2006/main">
               <a:ext uri="{FF2B5EF4-FFF2-40B4-BE49-F238E27FC236}">
-                <a16:creationId xmlns:a16="http://schemas.microsoft.com/office/drawing/2014/main" id="{B267BDFD-E12B-4BDA-B19C-63BCED3EB3D2}"/>
+                <a16:creationId xmlns:a16="http://schemas.microsoft.com/office/drawing/2014/main" id="{D95E9068-2D30-42EE-A6D8-94CD83D01D07}"/>
               </a:ext>
             </a:extLst>
           </p:cNvPr>
@@ -4514,7 +4514,7 @@
           <p:cNvPr id="13" name="recap-connector-1">
             <a:extLst xmlns:a="http://schemas.openxmlformats.org/drawingml/2006/main">
               <a:ext uri="{FF2B5EF4-FFF2-40B4-BE49-F238E27FC236}">
-                <a16:creationId xmlns:a16="http://schemas.microsoft.com/office/drawing/2014/main" id="{FF6B190B-0DE4-46A8-B06D-2190FC93E9E4}"/>
+                <a16:creationId xmlns:a16="http://schemas.microsoft.com/office/drawing/2014/main" id="{0CE22885-D98A-4569-BC73-7A5B81E17A96}"/>
               </a:ext>
             </a:extLst>
           </p:cNvPr>
@@ -4545,7 +4545,7 @@
           <p:cNvPr id="14" name="recap-circle-2">
             <a:extLst xmlns:a="http://schemas.openxmlformats.org/drawingml/2006/main">
               <a:ext uri="{FF2B5EF4-FFF2-40B4-BE49-F238E27FC236}">
-                <a16:creationId xmlns:a16="http://schemas.microsoft.com/office/drawing/2014/main" id="{7ED4BC7F-F7D0-4267-9288-314280A484F5}"/>
+                <a16:creationId xmlns:a16="http://schemas.microsoft.com/office/drawing/2014/main" id="{DF30A6DC-4422-455F-82F9-6C4FE1CD2A31}"/>
               </a:ext>
             </a:extLst>
           </p:cNvPr>
@@ -4578,7 +4578,7 @@
           <p:cNvPr id="15" name="recap-number-2">
             <a:extLst xmlns:a="http://schemas.openxmlformats.org/drawingml/2006/main">
               <a:ext uri="{FF2B5EF4-FFF2-40B4-BE49-F238E27FC236}">
-                <a16:creationId xmlns:a16="http://schemas.microsoft.com/office/drawing/2014/main" id="{7310048F-777E-495A-A143-777670001CCF}"/>
+                <a16:creationId xmlns:a16="http://schemas.microsoft.com/office/drawing/2014/main" id="{85401079-9960-4937-8E7F-F61611450578}"/>
               </a:ext>
             </a:extLst>
           </p:cNvPr>
@@ -4636,7 +4636,7 @@
           <p:cNvPr id="16" name="recap-item-2">
             <a:extLst xmlns:a="http://schemas.openxmlformats.org/drawingml/2006/main">
               <a:ext uri="{FF2B5EF4-FFF2-40B4-BE49-F238E27FC236}">
-                <a16:creationId xmlns:a16="http://schemas.microsoft.com/office/drawing/2014/main" id="{77652BD4-E40E-4046-AAC5-85AC4E1399C6}"/>
+                <a16:creationId xmlns:a16="http://schemas.microsoft.com/office/drawing/2014/main" id="{43B9C9BA-2760-4163-A8E8-9ED82A174870}"/>
               </a:ext>
             </a:extLst>
           </p:cNvPr>
@@ -4698,7 +4698,7 @@
     </p:spTree>
     <p:extLst>
       <p:ext uri="{BB962C8B-B14F-4D97-AF65-F5344CB8AC3E}">
-        <p14:creationId xmlns:p14="http://schemas.microsoft.com/office/powerpoint/2010/main" val="510858768"/>
+        <p14:creationId xmlns:p14="http://schemas.microsoft.com/office/powerpoint/2010/main" val="813416920"/>
       </p:ext>
     </p:extLst>
   </p:cSld>
@@ -4729,7 +4729,7 @@
           <p:cNvPr id="1" name="s13-rule">
             <a:extLst xmlns:a="http://schemas.openxmlformats.org/drawingml/2006/main">
               <a:ext uri="{FF2B5EF4-FFF2-40B4-BE49-F238E27FC236}">
-                <a16:creationId xmlns:a16="http://schemas.microsoft.com/office/drawing/2014/main" id="{2BA1D112-EBDB-42FD-A3CB-81659B4C5EEA}"/>
+                <a16:creationId xmlns:a16="http://schemas.microsoft.com/office/drawing/2014/main" id="{77D9A265-7E55-45F6-9E01-224075C84920}"/>
               </a:ext>
             </a:extLst>
           </p:cNvPr>
@@ -4762,7 +4762,7 @@
           <p:cNvPr id="2" name="s13-eyebrow">
             <a:extLst xmlns:a="http://schemas.openxmlformats.org/drawingml/2006/main">
               <a:ext uri="{FF2B5EF4-FFF2-40B4-BE49-F238E27FC236}">
-                <a16:creationId xmlns:a16="http://schemas.microsoft.com/office/drawing/2014/main" id="{16CAEA1B-F4BB-4409-8A2F-C901E9C98743}"/>
+                <a16:creationId xmlns:a16="http://schemas.microsoft.com/office/drawing/2014/main" id="{7A5FBE85-2F57-4668-93B7-3AEB433488F8}"/>
               </a:ext>
             </a:extLst>
           </p:cNvPr>
@@ -4820,7 +4820,7 @@
           <p:cNvPr id="3" name="s13-title">
             <a:extLst xmlns:a="http://schemas.openxmlformats.org/drawingml/2006/main">
               <a:ext uri="{FF2B5EF4-FFF2-40B4-BE49-F238E27FC236}">
-                <a16:creationId xmlns:a16="http://schemas.microsoft.com/office/drawing/2014/main" id="{4F71E3A8-7541-400B-8D06-D793942F6742}"/>
+                <a16:creationId xmlns:a16="http://schemas.microsoft.com/office/drawing/2014/main" id="{593C8991-A168-4863-8A79-415DA1E147DB}"/>
               </a:ext>
             </a:extLst>
           </p:cNvPr>
@@ -4878,7 +4878,7 @@
           <p:cNvPr id="4" name="s13-footer">
             <a:extLst xmlns:a="http://schemas.openxmlformats.org/drawingml/2006/main">
               <a:ext uri="{FF2B5EF4-FFF2-40B4-BE49-F238E27FC236}">
-                <a16:creationId xmlns:a16="http://schemas.microsoft.com/office/drawing/2014/main" id="{20F69C37-3E8F-4D72-AB64-70507C5DFB3D}"/>
+                <a16:creationId xmlns:a16="http://schemas.microsoft.com/office/drawing/2014/main" id="{24FE15AB-CCE9-458B-92C9-12CBC0CF6904}"/>
               </a:ext>
             </a:extLst>
           </p:cNvPr>
@@ -4909,7 +4909,7 @@
           <p:cNvPr id="5" name="s13-identity">
             <a:extLst xmlns:a="http://schemas.openxmlformats.org/drawingml/2006/main">
               <a:ext uri="{FF2B5EF4-FFF2-40B4-BE49-F238E27FC236}">
-                <a16:creationId xmlns:a16="http://schemas.microsoft.com/office/drawing/2014/main" id="{2A3F00CC-ACB4-4652-83B1-A2B79C409298}"/>
+                <a16:creationId xmlns:a16="http://schemas.microsoft.com/office/drawing/2014/main" id="{3AB5D815-7AC8-4EEA-BDF8-EF23C83F4C8B}"/>
               </a:ext>
             </a:extLst>
           </p:cNvPr>
@@ -4967,7 +4967,7 @@
           <p:cNvPr id="6" name="source-0">
             <a:extLst xmlns:a="http://schemas.openxmlformats.org/drawingml/2006/main">
               <a:ext uri="{FF2B5EF4-FFF2-40B4-BE49-F238E27FC236}">
-                <a16:creationId xmlns:a16="http://schemas.microsoft.com/office/drawing/2014/main" id="{3FC85677-682D-4C73-8407-DC4E53A8D8A6}"/>
+                <a16:creationId xmlns:a16="http://schemas.microsoft.com/office/drawing/2014/main" id="{5CC075FE-1A1D-4128-A854-A92549E243FB}"/>
               </a:ext>
             </a:extLst>
           </p:cNvPr>
@@ -5031,7 +5031,7 @@
           <p:cNvPr id="7" name="source-1">
             <a:extLst xmlns:a="http://schemas.openxmlformats.org/drawingml/2006/main">
               <a:ext uri="{FF2B5EF4-FFF2-40B4-BE49-F238E27FC236}">
-                <a16:creationId xmlns:a16="http://schemas.microsoft.com/office/drawing/2014/main" id="{291573D1-E651-433F-B356-2AA35E33BE00}"/>
+                <a16:creationId xmlns:a16="http://schemas.microsoft.com/office/drawing/2014/main" id="{5A53284C-52CD-487B-9333-23BB83BEE636}"/>
               </a:ext>
             </a:extLst>
           </p:cNvPr>
@@ -5095,7 +5095,7 @@
           <p:cNvPr id="8" name="source-2">
             <a:extLst xmlns:a="http://schemas.openxmlformats.org/drawingml/2006/main">
               <a:ext uri="{FF2B5EF4-FFF2-40B4-BE49-F238E27FC236}">
-                <a16:creationId xmlns:a16="http://schemas.microsoft.com/office/drawing/2014/main" id="{0CA019EE-068C-4FBB-A319-6BEFF3FFD3CA}"/>
+                <a16:creationId xmlns:a16="http://schemas.microsoft.com/office/drawing/2014/main" id="{6F1C3701-67A5-4F4A-91D6-9D26F5634C82}"/>
               </a:ext>
             </a:extLst>
           </p:cNvPr>
@@ -5159,7 +5159,7 @@
           <p:cNvPr id="9" name="source-3">
             <a:extLst xmlns:a="http://schemas.openxmlformats.org/drawingml/2006/main">
               <a:ext uri="{FF2B5EF4-FFF2-40B4-BE49-F238E27FC236}">
-                <a16:creationId xmlns:a16="http://schemas.microsoft.com/office/drawing/2014/main" id="{DEDA7E9D-82BA-4951-B69B-BD0C74BF66B9}"/>
+                <a16:creationId xmlns:a16="http://schemas.microsoft.com/office/drawing/2014/main" id="{A7165711-2D0B-4C1A-9856-4CBA99438AE7}"/>
               </a:ext>
             </a:extLst>
           </p:cNvPr>
@@ -5223,7 +5223,7 @@
           <p:cNvPr id="10" name="source-4">
             <a:extLst xmlns:a="http://schemas.openxmlformats.org/drawingml/2006/main">
               <a:ext uri="{FF2B5EF4-FFF2-40B4-BE49-F238E27FC236}">
-                <a16:creationId xmlns:a16="http://schemas.microsoft.com/office/drawing/2014/main" id="{4EB14913-76C8-47CA-AC80-6442D66B91BE}"/>
+                <a16:creationId xmlns:a16="http://schemas.microsoft.com/office/drawing/2014/main" id="{5C8F313A-53F1-42EB-9090-12AE999B1E51}"/>
               </a:ext>
             </a:extLst>
           </p:cNvPr>
@@ -5287,7 +5287,7 @@
           <p:cNvPr id="11" name="s13-takeaway-rule">
             <a:extLst xmlns:a="http://schemas.openxmlformats.org/drawingml/2006/main">
               <a:ext uri="{FF2B5EF4-FFF2-40B4-BE49-F238E27FC236}">
-                <a16:creationId xmlns:a16="http://schemas.microsoft.com/office/drawing/2014/main" id="{37278D89-F330-4DA5-ADC7-34D2C80A6FB6}"/>
+                <a16:creationId xmlns:a16="http://schemas.microsoft.com/office/drawing/2014/main" id="{13B42AA2-7602-41AC-A957-7CDB532ACD5E}"/>
               </a:ext>
             </a:extLst>
           </p:cNvPr>
@@ -5320,7 +5320,7 @@
           <p:cNvPr id="12" name="s13-takeaway">
             <a:extLst xmlns:a="http://schemas.openxmlformats.org/drawingml/2006/main">
               <a:ext uri="{FF2B5EF4-FFF2-40B4-BE49-F238E27FC236}">
-                <a16:creationId xmlns:a16="http://schemas.microsoft.com/office/drawing/2014/main" id="{29EBB81C-A2D0-4886-9BBF-8856C1959627}"/>
+                <a16:creationId xmlns:a16="http://schemas.microsoft.com/office/drawing/2014/main" id="{FAC7EB7F-B04D-4EC7-8FC6-C79EC6CDF245}"/>
               </a:ext>
             </a:extLst>
           </p:cNvPr>
@@ -5345,7 +5345,7 @@
         </p:spPr>
         <p:txBody>
           <a:bodyPr xmlns:a="http://schemas.openxmlformats.org/drawingml/2006/main" lIns="0" tIns="0" rIns="0" bIns="0" anchor="ctr">
-            <a:normAutofit fontScale="100000"/>
+            <a:normAutofit fontScale="95911"/>
           </a:bodyPr>
           <a:lstStyle xmlns:a="http://schemas.openxmlformats.org/drawingml/2006/main"/>
           <a:p xmlns:a="http://schemas.openxmlformats.org/drawingml/2006/main">
@@ -5368,7 +5368,7 @@
                 <a:ea typeface="PingFang SC"/>
                 <a:cs typeface="PingFang SC"/>
               </a:rPr>
-              <a:t>公开幻灯片只使用课程原创文字与原生图形；完整论证、链接和事实边界请见本节讲义。</a:t>
+              <a:t>课程精编页用于讲授主线；播放器中的“原课件”模式保留团队 PowerPoint 精选页、真实图片和可播放视频。</a:t>
             </a:r>
           </a:p>
         </p:txBody>
@@ -5376,7 +5376,7 @@
     </p:spTree>
     <p:extLst>
       <p:ext uri="{BB962C8B-B14F-4D97-AF65-F5344CB8AC3E}">
-        <p14:creationId xmlns:p14="http://schemas.microsoft.com/office/powerpoint/2010/main" val="1586405581"/>
+        <p14:creationId xmlns:p14="http://schemas.microsoft.com/office/powerpoint/2010/main" val="1926286341"/>
       </p:ext>
     </p:extLst>
   </p:cSld>
@@ -5407,7 +5407,7 @@
           <p:cNvPr id="1" name="s2-rule">
             <a:extLst xmlns:a="http://schemas.openxmlformats.org/drawingml/2006/main">
               <a:ext uri="{FF2B5EF4-FFF2-40B4-BE49-F238E27FC236}">
-                <a16:creationId xmlns:a16="http://schemas.microsoft.com/office/drawing/2014/main" id="{AF6867FA-2EFA-40BB-9338-3DCECBDF2861}"/>
+                <a16:creationId xmlns:a16="http://schemas.microsoft.com/office/drawing/2014/main" id="{1315C742-A5C0-41BC-92F9-85EB5758BDF6}"/>
               </a:ext>
             </a:extLst>
           </p:cNvPr>
@@ -5440,7 +5440,7 @@
           <p:cNvPr id="2" name="s2-eyebrow">
             <a:extLst xmlns:a="http://schemas.openxmlformats.org/drawingml/2006/main">
               <a:ext uri="{FF2B5EF4-FFF2-40B4-BE49-F238E27FC236}">
-                <a16:creationId xmlns:a16="http://schemas.microsoft.com/office/drawing/2014/main" id="{310EE9C7-FD9F-4281-B199-5C80AC1D20A2}"/>
+                <a16:creationId xmlns:a16="http://schemas.microsoft.com/office/drawing/2014/main" id="{A1A1CB9A-1B72-4381-8905-8A9BF4879B89}"/>
               </a:ext>
             </a:extLst>
           </p:cNvPr>
@@ -5498,7 +5498,7 @@
           <p:cNvPr id="3" name="s2-title">
             <a:extLst xmlns:a="http://schemas.openxmlformats.org/drawingml/2006/main">
               <a:ext uri="{FF2B5EF4-FFF2-40B4-BE49-F238E27FC236}">
-                <a16:creationId xmlns:a16="http://schemas.microsoft.com/office/drawing/2014/main" id="{63A86673-70D7-4060-80A6-703B69386A82}"/>
+                <a16:creationId xmlns:a16="http://schemas.microsoft.com/office/drawing/2014/main" id="{37F63961-7F3D-419B-8CE6-FB3F0763B5B9}"/>
               </a:ext>
             </a:extLst>
           </p:cNvPr>
@@ -5556,7 +5556,7 @@
           <p:cNvPr id="4" name="s2-footer">
             <a:extLst xmlns:a="http://schemas.openxmlformats.org/drawingml/2006/main">
               <a:ext uri="{FF2B5EF4-FFF2-40B4-BE49-F238E27FC236}">
-                <a16:creationId xmlns:a16="http://schemas.microsoft.com/office/drawing/2014/main" id="{1C84370F-D701-4D7F-B87A-E6999E3A8A86}"/>
+                <a16:creationId xmlns:a16="http://schemas.microsoft.com/office/drawing/2014/main" id="{C5BE793A-8307-41B4-878B-C589758237F7}"/>
               </a:ext>
             </a:extLst>
           </p:cNvPr>
@@ -5587,7 +5587,7 @@
           <p:cNvPr id="5" name="s2-identity">
             <a:extLst xmlns:a="http://schemas.openxmlformats.org/drawingml/2006/main">
               <a:ext uri="{FF2B5EF4-FFF2-40B4-BE49-F238E27FC236}">
-                <a16:creationId xmlns:a16="http://schemas.microsoft.com/office/drawing/2014/main" id="{C95C01A3-7EED-4BD3-8F1C-A1A11C620233}"/>
+                <a16:creationId xmlns:a16="http://schemas.microsoft.com/office/drawing/2014/main" id="{624A851A-6742-41F0-B0B0-5A1B1E03830F}"/>
               </a:ext>
             </a:extLst>
           </p:cNvPr>
@@ -5645,7 +5645,7 @@
           <p:cNvPr id="6" name="objective-1">
             <a:extLst xmlns:a="http://schemas.openxmlformats.org/drawingml/2006/main">
               <a:ext uri="{FF2B5EF4-FFF2-40B4-BE49-F238E27FC236}">
-                <a16:creationId xmlns:a16="http://schemas.microsoft.com/office/drawing/2014/main" id="{7387CAA8-38C2-41D8-880A-F12A34E6DD25}"/>
+                <a16:creationId xmlns:a16="http://schemas.microsoft.com/office/drawing/2014/main" id="{B3B7EE6B-C9EF-44C5-9841-474C04BDB48C}"/>
               </a:ext>
             </a:extLst>
           </p:cNvPr>
@@ -5732,7 +5732,7 @@
           <p:cNvPr id="7" name="objective-2">
             <a:extLst xmlns:a="http://schemas.openxmlformats.org/drawingml/2006/main">
               <a:ext uri="{FF2B5EF4-FFF2-40B4-BE49-F238E27FC236}">
-                <a16:creationId xmlns:a16="http://schemas.microsoft.com/office/drawing/2014/main" id="{9128F08F-60E4-4430-A341-6B1A72B089D4}"/>
+                <a16:creationId xmlns:a16="http://schemas.microsoft.com/office/drawing/2014/main" id="{7D2827D6-4A7E-4B57-9ACE-36186FBC588B}"/>
               </a:ext>
             </a:extLst>
           </p:cNvPr>
@@ -5819,7 +5819,7 @@
           <p:cNvPr id="8" name="objective-3">
             <a:extLst xmlns:a="http://schemas.openxmlformats.org/drawingml/2006/main">
               <a:ext uri="{FF2B5EF4-FFF2-40B4-BE49-F238E27FC236}">
-                <a16:creationId xmlns:a16="http://schemas.microsoft.com/office/drawing/2014/main" id="{7024F26D-3CCE-4EA5-A830-BBB011AB6B38}"/>
+                <a16:creationId xmlns:a16="http://schemas.microsoft.com/office/drawing/2014/main" id="{456918C9-18EA-41D9-B427-25516B9B7E7F}"/>
               </a:ext>
             </a:extLst>
           </p:cNvPr>
@@ -5906,7 +5906,7 @@
           <p:cNvPr id="9" name="objective-4">
             <a:extLst xmlns:a="http://schemas.openxmlformats.org/drawingml/2006/main">
               <a:ext uri="{FF2B5EF4-FFF2-40B4-BE49-F238E27FC236}">
-                <a16:creationId xmlns:a16="http://schemas.microsoft.com/office/drawing/2014/main" id="{9C215BCC-E796-4F0D-8673-1EC238B5D57F}"/>
+                <a16:creationId xmlns:a16="http://schemas.microsoft.com/office/drawing/2014/main" id="{D98A9505-31C0-4316-887C-2F1BF53E7D04}"/>
               </a:ext>
             </a:extLst>
           </p:cNvPr>
@@ -5991,7 +5991,7 @@
     </p:spTree>
     <p:extLst>
       <p:ext uri="{BB962C8B-B14F-4D97-AF65-F5344CB8AC3E}">
-        <p14:creationId xmlns:p14="http://schemas.microsoft.com/office/powerpoint/2010/main" val="285036088"/>
+        <p14:creationId xmlns:p14="http://schemas.microsoft.com/office/powerpoint/2010/main" val="771935138"/>
       </p:ext>
     </p:extLst>
   </p:cSld>
@@ -6022,7 +6022,7 @@
           <p:cNvPr id="1" name="s3-rule">
             <a:extLst xmlns:a="http://schemas.openxmlformats.org/drawingml/2006/main">
               <a:ext uri="{FF2B5EF4-FFF2-40B4-BE49-F238E27FC236}">
-                <a16:creationId xmlns:a16="http://schemas.microsoft.com/office/drawing/2014/main" id="{AE9D4EAE-2402-4201-A9DA-E05BB94BFEC1}"/>
+                <a16:creationId xmlns:a16="http://schemas.microsoft.com/office/drawing/2014/main" id="{9CC29709-7DCD-4454-A479-F6C7F66CF541}"/>
               </a:ext>
             </a:extLst>
           </p:cNvPr>
@@ -6055,7 +6055,7 @@
           <p:cNvPr id="2" name="s3-eyebrow">
             <a:extLst xmlns:a="http://schemas.openxmlformats.org/drawingml/2006/main">
               <a:ext uri="{FF2B5EF4-FFF2-40B4-BE49-F238E27FC236}">
-                <a16:creationId xmlns:a16="http://schemas.microsoft.com/office/drawing/2014/main" id="{8095A448-7CA1-4420-BE54-05E62A7B712A}"/>
+                <a16:creationId xmlns:a16="http://schemas.microsoft.com/office/drawing/2014/main" id="{0E0A2ECA-C7F7-4FBE-9138-23390AD88A42}"/>
               </a:ext>
             </a:extLst>
           </p:cNvPr>
@@ -6113,7 +6113,7 @@
           <p:cNvPr id="3" name="s3-title">
             <a:extLst xmlns:a="http://schemas.openxmlformats.org/drawingml/2006/main">
               <a:ext uri="{FF2B5EF4-FFF2-40B4-BE49-F238E27FC236}">
-                <a16:creationId xmlns:a16="http://schemas.microsoft.com/office/drawing/2014/main" id="{9E313E09-C30D-4BAA-84F3-FBC01723CEBA}"/>
+                <a16:creationId xmlns:a16="http://schemas.microsoft.com/office/drawing/2014/main" id="{7B8B5664-CFD2-495B-AFAB-3713DB6065CB}"/>
               </a:ext>
             </a:extLst>
           </p:cNvPr>
@@ -6171,7 +6171,7 @@
           <p:cNvPr id="4" name="s3-footer">
             <a:extLst xmlns:a="http://schemas.openxmlformats.org/drawingml/2006/main">
               <a:ext uri="{FF2B5EF4-FFF2-40B4-BE49-F238E27FC236}">
-                <a16:creationId xmlns:a16="http://schemas.microsoft.com/office/drawing/2014/main" id="{31F86418-A101-40F6-A853-D832A8A7C608}"/>
+                <a16:creationId xmlns:a16="http://schemas.microsoft.com/office/drawing/2014/main" id="{2BCBF481-EC76-40D7-B61D-39DA5E40F5F4}"/>
               </a:ext>
             </a:extLst>
           </p:cNvPr>
@@ -6202,7 +6202,7 @@
           <p:cNvPr id="5" name="s3-identity">
             <a:extLst xmlns:a="http://schemas.openxmlformats.org/drawingml/2006/main">
               <a:ext uri="{FF2B5EF4-FFF2-40B4-BE49-F238E27FC236}">
-                <a16:creationId xmlns:a16="http://schemas.microsoft.com/office/drawing/2014/main" id="{8370652C-6957-4DE7-81DA-130D1A65CE80}"/>
+                <a16:creationId xmlns:a16="http://schemas.microsoft.com/office/drawing/2014/main" id="{096DC104-66CA-4C84-A68F-8AD52591E6D1}"/>
               </a:ext>
             </a:extLst>
           </p:cNvPr>
@@ -6260,7 +6260,7 @@
           <p:cNvPr id="6" name="core-no-0">
             <a:extLst xmlns:a="http://schemas.openxmlformats.org/drawingml/2006/main">
               <a:ext uri="{FF2B5EF4-FFF2-40B4-BE49-F238E27FC236}">
-                <a16:creationId xmlns:a16="http://schemas.microsoft.com/office/drawing/2014/main" id="{41149FE1-CA6B-4FF9-BAE7-87B3A3DBF794}"/>
+                <a16:creationId xmlns:a16="http://schemas.microsoft.com/office/drawing/2014/main" id="{644416CC-58BD-4BA9-9600-36CEE02C0560}"/>
               </a:ext>
             </a:extLst>
           </p:cNvPr>
@@ -6318,7 +6318,7 @@
           <p:cNvPr id="7" name="core-label-0">
             <a:extLst xmlns:a="http://schemas.openxmlformats.org/drawingml/2006/main">
               <a:ext uri="{FF2B5EF4-FFF2-40B4-BE49-F238E27FC236}">
-                <a16:creationId xmlns:a16="http://schemas.microsoft.com/office/drawing/2014/main" id="{1F50B823-06A1-406B-A739-0F4346F40E6A}"/>
+                <a16:creationId xmlns:a16="http://schemas.microsoft.com/office/drawing/2014/main" id="{00A5C740-A65B-4733-BB7A-4AE8302F61C7}"/>
               </a:ext>
             </a:extLst>
           </p:cNvPr>
@@ -6376,7 +6376,7 @@
           <p:cNvPr id="8" name="core-body-0">
             <a:extLst xmlns:a="http://schemas.openxmlformats.org/drawingml/2006/main">
               <a:ext uri="{FF2B5EF4-FFF2-40B4-BE49-F238E27FC236}">
-                <a16:creationId xmlns:a16="http://schemas.microsoft.com/office/drawing/2014/main" id="{772C55EE-0584-4FC3-894B-4C3E38D2B303}"/>
+                <a16:creationId xmlns:a16="http://schemas.microsoft.com/office/drawing/2014/main" id="{591BAB86-D076-4BD5-A75F-86E6CFC1DEC4}"/>
               </a:ext>
             </a:extLst>
           </p:cNvPr>
@@ -6440,7 +6440,7 @@
           <p:cNvPr id="9" name="core-no-1">
             <a:extLst xmlns:a="http://schemas.openxmlformats.org/drawingml/2006/main">
               <a:ext uri="{FF2B5EF4-FFF2-40B4-BE49-F238E27FC236}">
-                <a16:creationId xmlns:a16="http://schemas.microsoft.com/office/drawing/2014/main" id="{4EA5BE65-F853-4874-ADE7-621B18197A30}"/>
+                <a16:creationId xmlns:a16="http://schemas.microsoft.com/office/drawing/2014/main" id="{8BCF8688-FCAA-4230-A16C-7B3DDB8D5D63}"/>
               </a:ext>
             </a:extLst>
           </p:cNvPr>
@@ -6498,7 +6498,7 @@
           <p:cNvPr id="10" name="core-body-1">
             <a:extLst xmlns:a="http://schemas.openxmlformats.org/drawingml/2006/main">
               <a:ext uri="{FF2B5EF4-FFF2-40B4-BE49-F238E27FC236}">
-                <a16:creationId xmlns:a16="http://schemas.microsoft.com/office/drawing/2014/main" id="{14E55701-5649-41E7-9FA6-CE813769B528}"/>
+                <a16:creationId xmlns:a16="http://schemas.microsoft.com/office/drawing/2014/main" id="{82AE27E7-D90E-4007-9333-4EAABCCAB811}"/>
               </a:ext>
             </a:extLst>
           </p:cNvPr>
@@ -6562,7 +6562,7 @@
           <p:cNvPr id="11" name="core-no-2">
             <a:extLst xmlns:a="http://schemas.openxmlformats.org/drawingml/2006/main">
               <a:ext uri="{FF2B5EF4-FFF2-40B4-BE49-F238E27FC236}">
-                <a16:creationId xmlns:a16="http://schemas.microsoft.com/office/drawing/2014/main" id="{54DCE34F-1BD4-4F61-A48E-02BE955D8C46}"/>
+                <a16:creationId xmlns:a16="http://schemas.microsoft.com/office/drawing/2014/main" id="{DD96CB2B-FFB4-4969-B0D4-A731F2250C41}"/>
               </a:ext>
             </a:extLst>
           </p:cNvPr>
@@ -6620,7 +6620,7 @@
           <p:cNvPr id="12" name="core-body-2">
             <a:extLst xmlns:a="http://schemas.openxmlformats.org/drawingml/2006/main">
               <a:ext uri="{FF2B5EF4-FFF2-40B4-BE49-F238E27FC236}">
-                <a16:creationId xmlns:a16="http://schemas.microsoft.com/office/drawing/2014/main" id="{4FFD71C6-8FAC-4008-8010-603C49201CA8}"/>
+                <a16:creationId xmlns:a16="http://schemas.microsoft.com/office/drawing/2014/main" id="{7EDBDDBC-FFB4-4DC3-BE6F-78FBCAD7E444}"/>
               </a:ext>
             </a:extLst>
           </p:cNvPr>
@@ -6684,7 +6684,7 @@
           <p:cNvPr id="13" name="s3-takeaway-rule">
             <a:extLst xmlns:a="http://schemas.openxmlformats.org/drawingml/2006/main">
               <a:ext uri="{FF2B5EF4-FFF2-40B4-BE49-F238E27FC236}">
-                <a16:creationId xmlns:a16="http://schemas.microsoft.com/office/drawing/2014/main" id="{ADAA611D-E9D1-4EE6-A9D0-6BA121B5ECE8}"/>
+                <a16:creationId xmlns:a16="http://schemas.microsoft.com/office/drawing/2014/main" id="{37D92C66-F588-4652-AF34-5F56F976EA50}"/>
               </a:ext>
             </a:extLst>
           </p:cNvPr>
@@ -6717,7 +6717,7 @@
           <p:cNvPr id="14" name="s3-takeaway">
             <a:extLst xmlns:a="http://schemas.openxmlformats.org/drawingml/2006/main">
               <a:ext uri="{FF2B5EF4-FFF2-40B4-BE49-F238E27FC236}">
-                <a16:creationId xmlns:a16="http://schemas.microsoft.com/office/drawing/2014/main" id="{FDD55FB6-DD3B-44FA-90C4-EF0B79B30CA1}"/>
+                <a16:creationId xmlns:a16="http://schemas.microsoft.com/office/drawing/2014/main" id="{B59E72C5-FA39-4B99-B554-8E8810EA225D}"/>
               </a:ext>
             </a:extLst>
           </p:cNvPr>
@@ -6773,7 +6773,7 @@
     </p:spTree>
     <p:extLst>
       <p:ext uri="{BB962C8B-B14F-4D97-AF65-F5344CB8AC3E}">
-        <p14:creationId xmlns:p14="http://schemas.microsoft.com/office/powerpoint/2010/main" val="861759879"/>
+        <p14:creationId xmlns:p14="http://schemas.microsoft.com/office/powerpoint/2010/main" val="1170534325"/>
       </p:ext>
     </p:extLst>
   </p:cSld>
@@ -6804,7 +6804,7 @@
           <p:cNvPr id="1" name="s4-rule">
             <a:extLst xmlns:a="http://schemas.openxmlformats.org/drawingml/2006/main">
               <a:ext uri="{FF2B5EF4-FFF2-40B4-BE49-F238E27FC236}">
-                <a16:creationId xmlns:a16="http://schemas.microsoft.com/office/drawing/2014/main" id="{904729D9-2637-4172-A8BD-9F9FB7C39802}"/>
+                <a16:creationId xmlns:a16="http://schemas.microsoft.com/office/drawing/2014/main" id="{127DA259-B2C2-4D65-A77A-795C0EEACF2C}"/>
               </a:ext>
             </a:extLst>
           </p:cNvPr>
@@ -6837,7 +6837,7 @@
           <p:cNvPr id="2" name="s4-eyebrow">
             <a:extLst xmlns:a="http://schemas.openxmlformats.org/drawingml/2006/main">
               <a:ext uri="{FF2B5EF4-FFF2-40B4-BE49-F238E27FC236}">
-                <a16:creationId xmlns:a16="http://schemas.microsoft.com/office/drawing/2014/main" id="{076CFE9F-C3ED-4487-9578-0B9EBCF51710}"/>
+                <a16:creationId xmlns:a16="http://schemas.microsoft.com/office/drawing/2014/main" id="{17677381-0F8C-4242-A685-8E08C8058D9D}"/>
               </a:ext>
             </a:extLst>
           </p:cNvPr>
@@ -6895,7 +6895,7 @@
           <p:cNvPr id="3" name="s4-title">
             <a:extLst xmlns:a="http://schemas.openxmlformats.org/drawingml/2006/main">
               <a:ext uri="{FF2B5EF4-FFF2-40B4-BE49-F238E27FC236}">
-                <a16:creationId xmlns:a16="http://schemas.microsoft.com/office/drawing/2014/main" id="{5F3B95C6-443C-44A0-9D38-A529519A138D}"/>
+                <a16:creationId xmlns:a16="http://schemas.microsoft.com/office/drawing/2014/main" id="{4D6A2D17-E3B2-4D11-B89E-C888F012E808}"/>
               </a:ext>
             </a:extLst>
           </p:cNvPr>
@@ -6953,7 +6953,7 @@
           <p:cNvPr id="4" name="s4-footer">
             <a:extLst xmlns:a="http://schemas.openxmlformats.org/drawingml/2006/main">
               <a:ext uri="{FF2B5EF4-FFF2-40B4-BE49-F238E27FC236}">
-                <a16:creationId xmlns:a16="http://schemas.microsoft.com/office/drawing/2014/main" id="{39EA06BD-4A1D-4F94-8DC2-E8D89DBE69BD}"/>
+                <a16:creationId xmlns:a16="http://schemas.microsoft.com/office/drawing/2014/main" id="{3FA3C238-E525-4075-9033-D854BF525961}"/>
               </a:ext>
             </a:extLst>
           </p:cNvPr>
@@ -6984,7 +6984,7 @@
           <p:cNvPr id="5" name="s4-identity">
             <a:extLst xmlns:a="http://schemas.openxmlformats.org/drawingml/2006/main">
               <a:ext uri="{FF2B5EF4-FFF2-40B4-BE49-F238E27FC236}">
-                <a16:creationId xmlns:a16="http://schemas.microsoft.com/office/drawing/2014/main" id="{2DFC0750-A21C-49B9-806B-6208C3B05B33}"/>
+                <a16:creationId xmlns:a16="http://schemas.microsoft.com/office/drawing/2014/main" id="{B93D52A4-9E6F-4DFC-BF6C-9C3FFD9126DF}"/>
               </a:ext>
             </a:extLst>
           </p:cNvPr>
@@ -7042,7 +7042,7 @@
           <p:cNvPr id="6" name="core-no-0">
             <a:extLst xmlns:a="http://schemas.openxmlformats.org/drawingml/2006/main">
               <a:ext uri="{FF2B5EF4-FFF2-40B4-BE49-F238E27FC236}">
-                <a16:creationId xmlns:a16="http://schemas.microsoft.com/office/drawing/2014/main" id="{94413210-C8D3-4D34-BC07-F8230C513CE9}"/>
+                <a16:creationId xmlns:a16="http://schemas.microsoft.com/office/drawing/2014/main" id="{E22CB8C4-B36C-479D-8A92-A8E1302FE2A0}"/>
               </a:ext>
             </a:extLst>
           </p:cNvPr>
@@ -7100,7 +7100,7 @@
           <p:cNvPr id="7" name="core-label-0">
             <a:extLst xmlns:a="http://schemas.openxmlformats.org/drawingml/2006/main">
               <a:ext uri="{FF2B5EF4-FFF2-40B4-BE49-F238E27FC236}">
-                <a16:creationId xmlns:a16="http://schemas.microsoft.com/office/drawing/2014/main" id="{5FF638D3-9F71-49F3-A332-AE1F2F1D67A7}"/>
+                <a16:creationId xmlns:a16="http://schemas.microsoft.com/office/drawing/2014/main" id="{FFCA4631-A96C-4E01-BDD8-8A1A6EBCB24B}"/>
               </a:ext>
             </a:extLst>
           </p:cNvPr>
@@ -7158,7 +7158,7 @@
           <p:cNvPr id="8" name="core-body-0">
             <a:extLst xmlns:a="http://schemas.openxmlformats.org/drawingml/2006/main">
               <a:ext uri="{FF2B5EF4-FFF2-40B4-BE49-F238E27FC236}">
-                <a16:creationId xmlns:a16="http://schemas.microsoft.com/office/drawing/2014/main" id="{4F13849C-C784-4C74-9E24-277BF27EC7D1}"/>
+                <a16:creationId xmlns:a16="http://schemas.microsoft.com/office/drawing/2014/main" id="{66B4B411-866A-4E69-8734-1FB1618608B4}"/>
               </a:ext>
             </a:extLst>
           </p:cNvPr>
@@ -7222,7 +7222,7 @@
           <p:cNvPr id="9" name="core-no-1">
             <a:extLst xmlns:a="http://schemas.openxmlformats.org/drawingml/2006/main">
               <a:ext uri="{FF2B5EF4-FFF2-40B4-BE49-F238E27FC236}">
-                <a16:creationId xmlns:a16="http://schemas.microsoft.com/office/drawing/2014/main" id="{6CF752CC-D854-4410-BE85-57B64F043AFF}"/>
+                <a16:creationId xmlns:a16="http://schemas.microsoft.com/office/drawing/2014/main" id="{75A12A32-3DAB-46B2-9B16-01B7872ED9AE}"/>
               </a:ext>
             </a:extLst>
           </p:cNvPr>
@@ -7280,7 +7280,7 @@
           <p:cNvPr id="10" name="core-body-1">
             <a:extLst xmlns:a="http://schemas.openxmlformats.org/drawingml/2006/main">
               <a:ext uri="{FF2B5EF4-FFF2-40B4-BE49-F238E27FC236}">
-                <a16:creationId xmlns:a16="http://schemas.microsoft.com/office/drawing/2014/main" id="{789ED20A-7DE0-4285-A637-34916AAB8CEB}"/>
+                <a16:creationId xmlns:a16="http://schemas.microsoft.com/office/drawing/2014/main" id="{2F47C865-197A-40D3-BB34-45A07FE33018}"/>
               </a:ext>
             </a:extLst>
           </p:cNvPr>
@@ -7344,7 +7344,7 @@
           <p:cNvPr id="11" name="core-no-2">
             <a:extLst xmlns:a="http://schemas.openxmlformats.org/drawingml/2006/main">
               <a:ext uri="{FF2B5EF4-FFF2-40B4-BE49-F238E27FC236}">
-                <a16:creationId xmlns:a16="http://schemas.microsoft.com/office/drawing/2014/main" id="{DD47A95E-89FF-473F-9718-961CA8467D6E}"/>
+                <a16:creationId xmlns:a16="http://schemas.microsoft.com/office/drawing/2014/main" id="{02CC0EBC-7635-44D8-A10E-83B63616CD1A}"/>
               </a:ext>
             </a:extLst>
           </p:cNvPr>
@@ -7402,7 +7402,7 @@
           <p:cNvPr id="12" name="core-body-2">
             <a:extLst xmlns:a="http://schemas.openxmlformats.org/drawingml/2006/main">
               <a:ext uri="{FF2B5EF4-FFF2-40B4-BE49-F238E27FC236}">
-                <a16:creationId xmlns:a16="http://schemas.microsoft.com/office/drawing/2014/main" id="{C3E78AFE-72CE-41DA-A758-3D1A683C0A3A}"/>
+                <a16:creationId xmlns:a16="http://schemas.microsoft.com/office/drawing/2014/main" id="{96D1C34A-C441-43B3-AD97-17263B2163DB}"/>
               </a:ext>
             </a:extLst>
           </p:cNvPr>
@@ -7466,7 +7466,7 @@
           <p:cNvPr id="13" name="s4-takeaway-rule">
             <a:extLst xmlns:a="http://schemas.openxmlformats.org/drawingml/2006/main">
               <a:ext uri="{FF2B5EF4-FFF2-40B4-BE49-F238E27FC236}">
-                <a16:creationId xmlns:a16="http://schemas.microsoft.com/office/drawing/2014/main" id="{10C84B74-B67D-4120-9E7F-165207F5ED87}"/>
+                <a16:creationId xmlns:a16="http://schemas.microsoft.com/office/drawing/2014/main" id="{7F1F8FDF-D2D6-4BAE-884A-9BE4F3A0C696}"/>
               </a:ext>
             </a:extLst>
           </p:cNvPr>
@@ -7499,7 +7499,7 @@
           <p:cNvPr id="14" name="s4-takeaway">
             <a:extLst xmlns:a="http://schemas.openxmlformats.org/drawingml/2006/main">
               <a:ext uri="{FF2B5EF4-FFF2-40B4-BE49-F238E27FC236}">
-                <a16:creationId xmlns:a16="http://schemas.microsoft.com/office/drawing/2014/main" id="{E03EB2FE-EEC1-4D13-B677-F42153B7960D}"/>
+                <a16:creationId xmlns:a16="http://schemas.microsoft.com/office/drawing/2014/main" id="{19B6FB24-58D5-4C49-875B-60855D76004E}"/>
               </a:ext>
             </a:extLst>
           </p:cNvPr>
@@ -7555,7 +7555,7 @@
     </p:spTree>
     <p:extLst>
       <p:ext uri="{BB962C8B-B14F-4D97-AF65-F5344CB8AC3E}">
-        <p14:creationId xmlns:p14="http://schemas.microsoft.com/office/powerpoint/2010/main" val="1783566863"/>
+        <p14:creationId xmlns:p14="http://schemas.microsoft.com/office/powerpoint/2010/main" val="1181866139"/>
       </p:ext>
     </p:extLst>
   </p:cSld>
@@ -7586,7 +7586,7 @@
           <p:cNvPr id="1" name="s5-rule">
             <a:extLst xmlns:a="http://schemas.openxmlformats.org/drawingml/2006/main">
               <a:ext uri="{FF2B5EF4-FFF2-40B4-BE49-F238E27FC236}">
-                <a16:creationId xmlns:a16="http://schemas.microsoft.com/office/drawing/2014/main" id="{E15D9117-369A-41A1-821B-CB6638B6D110}"/>
+                <a16:creationId xmlns:a16="http://schemas.microsoft.com/office/drawing/2014/main" id="{B98580CF-A050-412A-9E84-7DE6D818BBBD}"/>
               </a:ext>
             </a:extLst>
           </p:cNvPr>
@@ -7619,7 +7619,7 @@
           <p:cNvPr id="2" name="s5-eyebrow">
             <a:extLst xmlns:a="http://schemas.openxmlformats.org/drawingml/2006/main">
               <a:ext uri="{FF2B5EF4-FFF2-40B4-BE49-F238E27FC236}">
-                <a16:creationId xmlns:a16="http://schemas.microsoft.com/office/drawing/2014/main" id="{02B75F4C-B7B7-4724-9B3F-32A292B558CE}"/>
+                <a16:creationId xmlns:a16="http://schemas.microsoft.com/office/drawing/2014/main" id="{C2584258-D0A6-49EF-87FD-130474DBC346}"/>
               </a:ext>
             </a:extLst>
           </p:cNvPr>
@@ -7677,7 +7677,7 @@
           <p:cNvPr id="3" name="s5-title">
             <a:extLst xmlns:a="http://schemas.openxmlformats.org/drawingml/2006/main">
               <a:ext uri="{FF2B5EF4-FFF2-40B4-BE49-F238E27FC236}">
-                <a16:creationId xmlns:a16="http://schemas.microsoft.com/office/drawing/2014/main" id="{46419783-564B-4406-83E2-88A3EC833B35}"/>
+                <a16:creationId xmlns:a16="http://schemas.microsoft.com/office/drawing/2014/main" id="{79EB6F13-E0B7-44E4-A3FB-ADE97500AAED}"/>
               </a:ext>
             </a:extLst>
           </p:cNvPr>
@@ -7735,7 +7735,7 @@
           <p:cNvPr id="4" name="s5-footer">
             <a:extLst xmlns:a="http://schemas.openxmlformats.org/drawingml/2006/main">
               <a:ext uri="{FF2B5EF4-FFF2-40B4-BE49-F238E27FC236}">
-                <a16:creationId xmlns:a16="http://schemas.microsoft.com/office/drawing/2014/main" id="{36BA3AD2-21F0-455A-96D6-20C510E50170}"/>
+                <a16:creationId xmlns:a16="http://schemas.microsoft.com/office/drawing/2014/main" id="{A49D42BB-DB76-4FF6-9415-1ADA694A5EB6}"/>
               </a:ext>
             </a:extLst>
           </p:cNvPr>
@@ -7766,7 +7766,7 @@
           <p:cNvPr id="5" name="s5-identity">
             <a:extLst xmlns:a="http://schemas.openxmlformats.org/drawingml/2006/main">
               <a:ext uri="{FF2B5EF4-FFF2-40B4-BE49-F238E27FC236}">
-                <a16:creationId xmlns:a16="http://schemas.microsoft.com/office/drawing/2014/main" id="{0B1C2C2C-024A-4455-A1C5-078C6E76AD58}"/>
+                <a16:creationId xmlns:a16="http://schemas.microsoft.com/office/drawing/2014/main" id="{0738EE75-82CE-4F43-8581-8B807A689FF8}"/>
               </a:ext>
             </a:extLst>
           </p:cNvPr>
@@ -7824,7 +7824,7 @@
           <p:cNvPr id="6" name="core-no-0">
             <a:extLst xmlns:a="http://schemas.openxmlformats.org/drawingml/2006/main">
               <a:ext uri="{FF2B5EF4-FFF2-40B4-BE49-F238E27FC236}">
-                <a16:creationId xmlns:a16="http://schemas.microsoft.com/office/drawing/2014/main" id="{A91D3191-3932-4E2B-B12A-5ABAF40B7BD4}"/>
+                <a16:creationId xmlns:a16="http://schemas.microsoft.com/office/drawing/2014/main" id="{6F9FFABD-FEED-4D2A-A452-7DB49B7A3BF6}"/>
               </a:ext>
             </a:extLst>
           </p:cNvPr>
@@ -7882,7 +7882,7 @@
           <p:cNvPr id="7" name="core-label-0">
             <a:extLst xmlns:a="http://schemas.openxmlformats.org/drawingml/2006/main">
               <a:ext uri="{FF2B5EF4-FFF2-40B4-BE49-F238E27FC236}">
-                <a16:creationId xmlns:a16="http://schemas.microsoft.com/office/drawing/2014/main" id="{33953C5C-9F73-4159-9951-DB4832CBDCC8}"/>
+                <a16:creationId xmlns:a16="http://schemas.microsoft.com/office/drawing/2014/main" id="{518DD02D-6286-4875-A485-3C8DB5C4D779}"/>
               </a:ext>
             </a:extLst>
           </p:cNvPr>
@@ -7940,7 +7940,7 @@
           <p:cNvPr id="8" name="core-body-0">
             <a:extLst xmlns:a="http://schemas.openxmlformats.org/drawingml/2006/main">
               <a:ext uri="{FF2B5EF4-FFF2-40B4-BE49-F238E27FC236}">
-                <a16:creationId xmlns:a16="http://schemas.microsoft.com/office/drawing/2014/main" id="{CB314385-3D05-473E-B2C4-2C6AD5A80169}"/>
+                <a16:creationId xmlns:a16="http://schemas.microsoft.com/office/drawing/2014/main" id="{68642D50-21EA-4783-8C8D-54DD72458049}"/>
               </a:ext>
             </a:extLst>
           </p:cNvPr>
@@ -8004,7 +8004,7 @@
           <p:cNvPr id="9" name="core-no-1">
             <a:extLst xmlns:a="http://schemas.openxmlformats.org/drawingml/2006/main">
               <a:ext uri="{FF2B5EF4-FFF2-40B4-BE49-F238E27FC236}">
-                <a16:creationId xmlns:a16="http://schemas.microsoft.com/office/drawing/2014/main" id="{518EFC0D-9C01-4E1C-99E8-ECCD2A6BA921}"/>
+                <a16:creationId xmlns:a16="http://schemas.microsoft.com/office/drawing/2014/main" id="{261B4D9F-880B-4FA5-964A-242C0CA622BD}"/>
               </a:ext>
             </a:extLst>
           </p:cNvPr>
@@ -8062,7 +8062,7 @@
           <p:cNvPr id="10" name="core-body-1">
             <a:extLst xmlns:a="http://schemas.openxmlformats.org/drawingml/2006/main">
               <a:ext uri="{FF2B5EF4-FFF2-40B4-BE49-F238E27FC236}">
-                <a16:creationId xmlns:a16="http://schemas.microsoft.com/office/drawing/2014/main" id="{11F7B0A5-6889-43A9-97BA-C470C38A6963}"/>
+                <a16:creationId xmlns:a16="http://schemas.microsoft.com/office/drawing/2014/main" id="{AAFDF839-0665-4F69-9B71-ED4335188129}"/>
               </a:ext>
             </a:extLst>
           </p:cNvPr>
@@ -8126,7 +8126,7 @@
           <p:cNvPr id="11" name="core-no-2">
             <a:extLst xmlns:a="http://schemas.openxmlformats.org/drawingml/2006/main">
               <a:ext uri="{FF2B5EF4-FFF2-40B4-BE49-F238E27FC236}">
-                <a16:creationId xmlns:a16="http://schemas.microsoft.com/office/drawing/2014/main" id="{A82A8916-7497-4F9E-A226-86EF861916A4}"/>
+                <a16:creationId xmlns:a16="http://schemas.microsoft.com/office/drawing/2014/main" id="{A7E6F7C8-789F-4B50-A1F7-9204AAA46D92}"/>
               </a:ext>
             </a:extLst>
           </p:cNvPr>
@@ -8184,7 +8184,7 @@
           <p:cNvPr id="12" name="core-body-2">
             <a:extLst xmlns:a="http://schemas.openxmlformats.org/drawingml/2006/main">
               <a:ext uri="{FF2B5EF4-FFF2-40B4-BE49-F238E27FC236}">
-                <a16:creationId xmlns:a16="http://schemas.microsoft.com/office/drawing/2014/main" id="{F4444011-8A27-47C7-8631-C828481538E5}"/>
+                <a16:creationId xmlns:a16="http://schemas.microsoft.com/office/drawing/2014/main" id="{39CEB005-0326-4931-9594-08E4B2C469BB}"/>
               </a:ext>
             </a:extLst>
           </p:cNvPr>
@@ -8248,7 +8248,7 @@
           <p:cNvPr id="13" name="s5-takeaway-rule">
             <a:extLst xmlns:a="http://schemas.openxmlformats.org/drawingml/2006/main">
               <a:ext uri="{FF2B5EF4-FFF2-40B4-BE49-F238E27FC236}">
-                <a16:creationId xmlns:a16="http://schemas.microsoft.com/office/drawing/2014/main" id="{430E9DD8-4CB1-481A-874E-F1EC4DEF83BC}"/>
+                <a16:creationId xmlns:a16="http://schemas.microsoft.com/office/drawing/2014/main" id="{8D3D6705-34EA-470B-A5F3-F38368C60BB2}"/>
               </a:ext>
             </a:extLst>
           </p:cNvPr>
@@ -8281,7 +8281,7 @@
           <p:cNvPr id="14" name="s5-takeaway">
             <a:extLst xmlns:a="http://schemas.openxmlformats.org/drawingml/2006/main">
               <a:ext uri="{FF2B5EF4-FFF2-40B4-BE49-F238E27FC236}">
-                <a16:creationId xmlns:a16="http://schemas.microsoft.com/office/drawing/2014/main" id="{FE8DCA28-E994-47AA-8F98-9E56BFB027CA}"/>
+                <a16:creationId xmlns:a16="http://schemas.microsoft.com/office/drawing/2014/main" id="{BF3E60E4-0843-46F9-AA09-02342D2ACEC9}"/>
               </a:ext>
             </a:extLst>
           </p:cNvPr>
@@ -8337,7 +8337,7 @@
     </p:spTree>
     <p:extLst>
       <p:ext uri="{BB962C8B-B14F-4D97-AF65-F5344CB8AC3E}">
-        <p14:creationId xmlns:p14="http://schemas.microsoft.com/office/powerpoint/2010/main" val="672366816"/>
+        <p14:creationId xmlns:p14="http://schemas.microsoft.com/office/powerpoint/2010/main" val="1115897748"/>
       </p:ext>
     </p:extLst>
   </p:cSld>
@@ -8368,7 +8368,7 @@
           <p:cNvPr id="1" name="s6-rule">
             <a:extLst xmlns:a="http://schemas.openxmlformats.org/drawingml/2006/main">
               <a:ext uri="{FF2B5EF4-FFF2-40B4-BE49-F238E27FC236}">
-                <a16:creationId xmlns:a16="http://schemas.microsoft.com/office/drawing/2014/main" id="{5B5F310E-E132-47DE-8748-CF86A817D7A5}"/>
+                <a16:creationId xmlns:a16="http://schemas.microsoft.com/office/drawing/2014/main" id="{AA879554-7FEA-4882-9C0B-92905681845F}"/>
               </a:ext>
             </a:extLst>
           </p:cNvPr>
@@ -8401,7 +8401,7 @@
           <p:cNvPr id="2" name="s6-eyebrow">
             <a:extLst xmlns:a="http://schemas.openxmlformats.org/drawingml/2006/main">
               <a:ext uri="{FF2B5EF4-FFF2-40B4-BE49-F238E27FC236}">
-                <a16:creationId xmlns:a16="http://schemas.microsoft.com/office/drawing/2014/main" id="{CDB89FD4-E7A0-4542-B8E8-7482A9211767}"/>
+                <a16:creationId xmlns:a16="http://schemas.microsoft.com/office/drawing/2014/main" id="{FAEB68D4-0363-48FD-85B5-1852AEC66357}"/>
               </a:ext>
             </a:extLst>
           </p:cNvPr>
@@ -8459,7 +8459,7 @@
           <p:cNvPr id="3" name="s6-title">
             <a:extLst xmlns:a="http://schemas.openxmlformats.org/drawingml/2006/main">
               <a:ext uri="{FF2B5EF4-FFF2-40B4-BE49-F238E27FC236}">
-                <a16:creationId xmlns:a16="http://schemas.microsoft.com/office/drawing/2014/main" id="{0737DFEC-45B2-44EB-89FD-5CE55CB74548}"/>
+                <a16:creationId xmlns:a16="http://schemas.microsoft.com/office/drawing/2014/main" id="{24AAE885-C9E9-4975-8C2F-439BAED4A676}"/>
               </a:ext>
             </a:extLst>
           </p:cNvPr>
@@ -8517,7 +8517,7 @@
           <p:cNvPr id="4" name="s6-footer">
             <a:extLst xmlns:a="http://schemas.openxmlformats.org/drawingml/2006/main">
               <a:ext uri="{FF2B5EF4-FFF2-40B4-BE49-F238E27FC236}">
-                <a16:creationId xmlns:a16="http://schemas.microsoft.com/office/drawing/2014/main" id="{1EB9830E-966A-44C2-8455-D4084DEAB8DB}"/>
+                <a16:creationId xmlns:a16="http://schemas.microsoft.com/office/drawing/2014/main" id="{38320864-EBE4-433E-9142-A7585BF64323}"/>
               </a:ext>
             </a:extLst>
           </p:cNvPr>
@@ -8548,7 +8548,7 @@
           <p:cNvPr id="5" name="s6-identity">
             <a:extLst xmlns:a="http://schemas.openxmlformats.org/drawingml/2006/main">
               <a:ext uri="{FF2B5EF4-FFF2-40B4-BE49-F238E27FC236}">
-                <a16:creationId xmlns:a16="http://schemas.microsoft.com/office/drawing/2014/main" id="{293BE10A-BEDD-421B-BE03-F2F3631BAF2B}"/>
+                <a16:creationId xmlns:a16="http://schemas.microsoft.com/office/drawing/2014/main" id="{A8C9EC06-B01A-4F5D-91B5-3C7AA0E63786}"/>
               </a:ext>
             </a:extLst>
           </p:cNvPr>
@@ -8606,7 +8606,7 @@
           <p:cNvPr id="6" name="core-no-0">
             <a:extLst xmlns:a="http://schemas.openxmlformats.org/drawingml/2006/main">
               <a:ext uri="{FF2B5EF4-FFF2-40B4-BE49-F238E27FC236}">
-                <a16:creationId xmlns:a16="http://schemas.microsoft.com/office/drawing/2014/main" id="{AF0F52C3-6EBD-4790-A84D-93D91A4E8B55}"/>
+                <a16:creationId xmlns:a16="http://schemas.microsoft.com/office/drawing/2014/main" id="{D4AD56AE-FC27-4B00-BA20-A0C200C26330}"/>
               </a:ext>
             </a:extLst>
           </p:cNvPr>
@@ -8664,7 +8664,7 @@
           <p:cNvPr id="7" name="core-label-0">
             <a:extLst xmlns:a="http://schemas.openxmlformats.org/drawingml/2006/main">
               <a:ext uri="{FF2B5EF4-FFF2-40B4-BE49-F238E27FC236}">
-                <a16:creationId xmlns:a16="http://schemas.microsoft.com/office/drawing/2014/main" id="{1CEF7E3E-5E92-416E-A04D-529F9D4822A1}"/>
+                <a16:creationId xmlns:a16="http://schemas.microsoft.com/office/drawing/2014/main" id="{5BB6C7F4-CEFB-4C6D-9BEA-757163800CE5}"/>
               </a:ext>
             </a:extLst>
           </p:cNvPr>
@@ -8722,7 +8722,7 @@
           <p:cNvPr id="8" name="core-body-0">
             <a:extLst xmlns:a="http://schemas.openxmlformats.org/drawingml/2006/main">
               <a:ext uri="{FF2B5EF4-FFF2-40B4-BE49-F238E27FC236}">
-                <a16:creationId xmlns:a16="http://schemas.microsoft.com/office/drawing/2014/main" id="{EA61E96B-EC5C-41E7-B573-EAC23CBBA317}"/>
+                <a16:creationId xmlns:a16="http://schemas.microsoft.com/office/drawing/2014/main" id="{004C7483-E1A2-4744-80DC-344C6D9E1F26}"/>
               </a:ext>
             </a:extLst>
           </p:cNvPr>
@@ -8786,7 +8786,7 @@
           <p:cNvPr id="9" name="core-no-1">
             <a:extLst xmlns:a="http://schemas.openxmlformats.org/drawingml/2006/main">
               <a:ext uri="{FF2B5EF4-FFF2-40B4-BE49-F238E27FC236}">
-                <a16:creationId xmlns:a16="http://schemas.microsoft.com/office/drawing/2014/main" id="{12B8F596-BBF1-4DD8-B4E7-DB4D40AFEA5B}"/>
+                <a16:creationId xmlns:a16="http://schemas.microsoft.com/office/drawing/2014/main" id="{FD7A85C3-B9AD-47F5-B0B6-93DC8A6CDA8A}"/>
               </a:ext>
             </a:extLst>
           </p:cNvPr>
@@ -8844,7 +8844,7 @@
           <p:cNvPr id="10" name="core-body-1">
             <a:extLst xmlns:a="http://schemas.openxmlformats.org/drawingml/2006/main">
               <a:ext uri="{FF2B5EF4-FFF2-40B4-BE49-F238E27FC236}">
-                <a16:creationId xmlns:a16="http://schemas.microsoft.com/office/drawing/2014/main" id="{B0E0C4D2-2089-49D9-8C2C-1A3997983661}"/>
+                <a16:creationId xmlns:a16="http://schemas.microsoft.com/office/drawing/2014/main" id="{4C6ED6C3-D064-41A4-8588-18A66798E149}"/>
               </a:ext>
             </a:extLst>
           </p:cNvPr>
@@ -8908,7 +8908,7 @@
           <p:cNvPr id="11" name="core-no-2">
             <a:extLst xmlns:a="http://schemas.openxmlformats.org/drawingml/2006/main">
               <a:ext uri="{FF2B5EF4-FFF2-40B4-BE49-F238E27FC236}">
-                <a16:creationId xmlns:a16="http://schemas.microsoft.com/office/drawing/2014/main" id="{E42BF4AC-5581-4FFB-8968-2061FEAF2319}"/>
+                <a16:creationId xmlns:a16="http://schemas.microsoft.com/office/drawing/2014/main" id="{FCE9898A-6387-409E-8FBC-5D24CC001E40}"/>
               </a:ext>
             </a:extLst>
           </p:cNvPr>
@@ -8966,7 +8966,7 @@
           <p:cNvPr id="12" name="core-body-2">
             <a:extLst xmlns:a="http://schemas.openxmlformats.org/drawingml/2006/main">
               <a:ext uri="{FF2B5EF4-FFF2-40B4-BE49-F238E27FC236}">
-                <a16:creationId xmlns:a16="http://schemas.microsoft.com/office/drawing/2014/main" id="{DA0FD112-4E86-4BB9-A3C0-4EF661DA2A85}"/>
+                <a16:creationId xmlns:a16="http://schemas.microsoft.com/office/drawing/2014/main" id="{01B93262-6132-4091-A178-29B078BD7AD1}"/>
               </a:ext>
             </a:extLst>
           </p:cNvPr>
@@ -9030,7 +9030,7 @@
           <p:cNvPr id="13" name="s6-takeaway-rule">
             <a:extLst xmlns:a="http://schemas.openxmlformats.org/drawingml/2006/main">
               <a:ext uri="{FF2B5EF4-FFF2-40B4-BE49-F238E27FC236}">
-                <a16:creationId xmlns:a16="http://schemas.microsoft.com/office/drawing/2014/main" id="{5D5D4DC2-6EE2-4F8A-B25D-310C4C4313D9}"/>
+                <a16:creationId xmlns:a16="http://schemas.microsoft.com/office/drawing/2014/main" id="{8CF7B619-D21C-4E19-A1E1-6E73A7223E8B}"/>
               </a:ext>
             </a:extLst>
           </p:cNvPr>
@@ -9063,7 +9063,7 @@
           <p:cNvPr id="14" name="s6-takeaway">
             <a:extLst xmlns:a="http://schemas.openxmlformats.org/drawingml/2006/main">
               <a:ext uri="{FF2B5EF4-FFF2-40B4-BE49-F238E27FC236}">
-                <a16:creationId xmlns:a16="http://schemas.microsoft.com/office/drawing/2014/main" id="{F21B4B4C-365E-492B-A91C-37491B34548F}"/>
+                <a16:creationId xmlns:a16="http://schemas.microsoft.com/office/drawing/2014/main" id="{DD3CD782-5A82-4C54-96DA-6E6CB1CB3CAA}"/>
               </a:ext>
             </a:extLst>
           </p:cNvPr>
@@ -9119,7 +9119,7 @@
     </p:spTree>
     <p:extLst>
       <p:ext uri="{BB962C8B-B14F-4D97-AF65-F5344CB8AC3E}">
-        <p14:creationId xmlns:p14="http://schemas.microsoft.com/office/powerpoint/2010/main" val="1108289046"/>
+        <p14:creationId xmlns:p14="http://schemas.microsoft.com/office/powerpoint/2010/main" val="1032242050"/>
       </p:ext>
     </p:extLst>
   </p:cSld>
@@ -9150,7 +9150,7 @@
           <p:cNvPr id="1" name="s7-rule">
             <a:extLst xmlns:a="http://schemas.openxmlformats.org/drawingml/2006/main">
               <a:ext uri="{FF2B5EF4-FFF2-40B4-BE49-F238E27FC236}">
-                <a16:creationId xmlns:a16="http://schemas.microsoft.com/office/drawing/2014/main" id="{54F82A9F-7A21-4C71-B7B3-CFC6FF68FB74}"/>
+                <a16:creationId xmlns:a16="http://schemas.microsoft.com/office/drawing/2014/main" id="{ADB7235E-D8E7-4284-B0FE-2592E8605693}"/>
               </a:ext>
             </a:extLst>
           </p:cNvPr>
@@ -9183,7 +9183,7 @@
           <p:cNvPr id="2" name="s7-eyebrow">
             <a:extLst xmlns:a="http://schemas.openxmlformats.org/drawingml/2006/main">
               <a:ext uri="{FF2B5EF4-FFF2-40B4-BE49-F238E27FC236}">
-                <a16:creationId xmlns:a16="http://schemas.microsoft.com/office/drawing/2014/main" id="{4937717C-2325-489B-9C5F-A313E9C175AE}"/>
+                <a16:creationId xmlns:a16="http://schemas.microsoft.com/office/drawing/2014/main" id="{10E206BA-B097-47E3-BEC6-B32854992617}"/>
               </a:ext>
             </a:extLst>
           </p:cNvPr>
@@ -9241,7 +9241,7 @@
           <p:cNvPr id="3" name="s7-title">
             <a:extLst xmlns:a="http://schemas.openxmlformats.org/drawingml/2006/main">
               <a:ext uri="{FF2B5EF4-FFF2-40B4-BE49-F238E27FC236}">
-                <a16:creationId xmlns:a16="http://schemas.microsoft.com/office/drawing/2014/main" id="{8488A91D-74D3-4E89-9792-CFE98A4B1716}"/>
+                <a16:creationId xmlns:a16="http://schemas.microsoft.com/office/drawing/2014/main" id="{CB794609-AE5B-4368-97F5-BF2F7D4C264D}"/>
               </a:ext>
             </a:extLst>
           </p:cNvPr>
@@ -9299,7 +9299,7 @@
           <p:cNvPr id="4" name="s7-footer">
             <a:extLst xmlns:a="http://schemas.openxmlformats.org/drawingml/2006/main">
               <a:ext uri="{FF2B5EF4-FFF2-40B4-BE49-F238E27FC236}">
-                <a16:creationId xmlns:a16="http://schemas.microsoft.com/office/drawing/2014/main" id="{4E0FF994-5AAB-4648-A746-E3382B7D7FE4}"/>
+                <a16:creationId xmlns:a16="http://schemas.microsoft.com/office/drawing/2014/main" id="{646E4DBE-2AD9-41BA-8F3D-C9F0D5E1092E}"/>
               </a:ext>
             </a:extLst>
           </p:cNvPr>
@@ -9330,7 +9330,7 @@
           <p:cNvPr id="5" name="s7-identity">
             <a:extLst xmlns:a="http://schemas.openxmlformats.org/drawingml/2006/main">
               <a:ext uri="{FF2B5EF4-FFF2-40B4-BE49-F238E27FC236}">
-                <a16:creationId xmlns:a16="http://schemas.microsoft.com/office/drawing/2014/main" id="{03479402-3E12-4487-BAC5-D173098733BB}"/>
+                <a16:creationId xmlns:a16="http://schemas.microsoft.com/office/drawing/2014/main" id="{27B82BE7-A1D3-4066-9060-92B460CCB7AA}"/>
               </a:ext>
             </a:extLst>
           </p:cNvPr>
@@ -9388,7 +9388,7 @@
           <p:cNvPr id="6" name="core-no-0">
             <a:extLst xmlns:a="http://schemas.openxmlformats.org/drawingml/2006/main">
               <a:ext uri="{FF2B5EF4-FFF2-40B4-BE49-F238E27FC236}">
-                <a16:creationId xmlns:a16="http://schemas.microsoft.com/office/drawing/2014/main" id="{5A744919-CE78-4797-87E1-AD1F17427AAC}"/>
+                <a16:creationId xmlns:a16="http://schemas.microsoft.com/office/drawing/2014/main" id="{1F9884CC-2C52-4E18-91E9-1950A1AAD619}"/>
               </a:ext>
             </a:extLst>
           </p:cNvPr>
@@ -9446,7 +9446,7 @@
           <p:cNvPr id="7" name="core-label-0">
             <a:extLst xmlns:a="http://schemas.openxmlformats.org/drawingml/2006/main">
               <a:ext uri="{FF2B5EF4-FFF2-40B4-BE49-F238E27FC236}">
-                <a16:creationId xmlns:a16="http://schemas.microsoft.com/office/drawing/2014/main" id="{43ED1E32-7DB5-4C6F-8D0D-5D4D8F477EAC}"/>
+                <a16:creationId xmlns:a16="http://schemas.microsoft.com/office/drawing/2014/main" id="{7132D4D4-D6E7-4A08-AD34-D951A20289B7}"/>
               </a:ext>
             </a:extLst>
           </p:cNvPr>
@@ -9504,7 +9504,7 @@
           <p:cNvPr id="8" name="core-body-0">
             <a:extLst xmlns:a="http://schemas.openxmlformats.org/drawingml/2006/main">
               <a:ext uri="{FF2B5EF4-FFF2-40B4-BE49-F238E27FC236}">
-                <a16:creationId xmlns:a16="http://schemas.microsoft.com/office/drawing/2014/main" id="{227627D6-E41F-4754-B458-9609FACF27A8}"/>
+                <a16:creationId xmlns:a16="http://schemas.microsoft.com/office/drawing/2014/main" id="{AF02D934-093D-419C-A12D-9A7895E7E1A8}"/>
               </a:ext>
             </a:extLst>
           </p:cNvPr>
@@ -9568,7 +9568,7 @@
           <p:cNvPr id="9" name="core-no-1">
             <a:extLst xmlns:a="http://schemas.openxmlformats.org/drawingml/2006/main">
               <a:ext uri="{FF2B5EF4-FFF2-40B4-BE49-F238E27FC236}">
-                <a16:creationId xmlns:a16="http://schemas.microsoft.com/office/drawing/2014/main" id="{06720A33-2B7C-47A2-B4B2-CB40A7051704}"/>
+                <a16:creationId xmlns:a16="http://schemas.microsoft.com/office/drawing/2014/main" id="{69D5F843-8DB5-4145-89D2-18854193EF0A}"/>
               </a:ext>
             </a:extLst>
           </p:cNvPr>
@@ -9626,7 +9626,7 @@
           <p:cNvPr id="10" name="core-body-1">
             <a:extLst xmlns:a="http://schemas.openxmlformats.org/drawingml/2006/main">
               <a:ext uri="{FF2B5EF4-FFF2-40B4-BE49-F238E27FC236}">
-                <a16:creationId xmlns:a16="http://schemas.microsoft.com/office/drawing/2014/main" id="{698CFB76-FA5C-446B-8BCF-7373D7ECC588}"/>
+                <a16:creationId xmlns:a16="http://schemas.microsoft.com/office/drawing/2014/main" id="{CF1532F8-9156-4790-8897-BC75C185E0E7}"/>
               </a:ext>
             </a:extLst>
           </p:cNvPr>
@@ -9690,7 +9690,7 @@
           <p:cNvPr id="11" name="core-no-2">
             <a:extLst xmlns:a="http://schemas.openxmlformats.org/drawingml/2006/main">
               <a:ext uri="{FF2B5EF4-FFF2-40B4-BE49-F238E27FC236}">
-                <a16:creationId xmlns:a16="http://schemas.microsoft.com/office/drawing/2014/main" id="{BE3CBBA7-AF42-4007-8EF3-A68C2607AABF}"/>
+                <a16:creationId xmlns:a16="http://schemas.microsoft.com/office/drawing/2014/main" id="{BD383B71-7966-482A-8981-8DEFD9368037}"/>
               </a:ext>
             </a:extLst>
           </p:cNvPr>
@@ -9748,7 +9748,7 @@
           <p:cNvPr id="12" name="core-body-2">
             <a:extLst xmlns:a="http://schemas.openxmlformats.org/drawingml/2006/main">
               <a:ext uri="{FF2B5EF4-FFF2-40B4-BE49-F238E27FC236}">
-                <a16:creationId xmlns:a16="http://schemas.microsoft.com/office/drawing/2014/main" id="{EB53ABCF-D5BC-4785-A29F-614EE0D1F15E}"/>
+                <a16:creationId xmlns:a16="http://schemas.microsoft.com/office/drawing/2014/main" id="{BF7668C4-1FCF-4109-B1C9-5A8659C5BB60}"/>
               </a:ext>
             </a:extLst>
           </p:cNvPr>
@@ -9812,7 +9812,7 @@
           <p:cNvPr id="13" name="s7-takeaway-rule">
             <a:extLst xmlns:a="http://schemas.openxmlformats.org/drawingml/2006/main">
               <a:ext uri="{FF2B5EF4-FFF2-40B4-BE49-F238E27FC236}">
-                <a16:creationId xmlns:a16="http://schemas.microsoft.com/office/drawing/2014/main" id="{2E340A7C-4E63-4448-9CCE-746CBC3599E3}"/>
+                <a16:creationId xmlns:a16="http://schemas.microsoft.com/office/drawing/2014/main" id="{B3EC8569-876B-47A7-A046-4EB1BE81C145}"/>
               </a:ext>
             </a:extLst>
           </p:cNvPr>
@@ -9845,7 +9845,7 @@
           <p:cNvPr id="14" name="s7-takeaway">
             <a:extLst xmlns:a="http://schemas.openxmlformats.org/drawingml/2006/main">
               <a:ext uri="{FF2B5EF4-FFF2-40B4-BE49-F238E27FC236}">
-                <a16:creationId xmlns:a16="http://schemas.microsoft.com/office/drawing/2014/main" id="{0FFCF442-A0D8-4140-A6D8-0BE9DAB21A65}"/>
+                <a16:creationId xmlns:a16="http://schemas.microsoft.com/office/drawing/2014/main" id="{58B57EC5-ACC7-4478-9062-B0C54E97B427}"/>
               </a:ext>
             </a:extLst>
           </p:cNvPr>
@@ -9901,7 +9901,7 @@
     </p:spTree>
     <p:extLst>
       <p:ext uri="{BB962C8B-B14F-4D97-AF65-F5344CB8AC3E}">
-        <p14:creationId xmlns:p14="http://schemas.microsoft.com/office/powerpoint/2010/main" val="136562460"/>
+        <p14:creationId xmlns:p14="http://schemas.microsoft.com/office/powerpoint/2010/main" val="1979706113"/>
       </p:ext>
     </p:extLst>
   </p:cSld>
@@ -9932,7 +9932,7 @@
           <p:cNvPr id="1" name="s8-rule">
             <a:extLst xmlns:a="http://schemas.openxmlformats.org/drawingml/2006/main">
               <a:ext uri="{FF2B5EF4-FFF2-40B4-BE49-F238E27FC236}">
-                <a16:creationId xmlns:a16="http://schemas.microsoft.com/office/drawing/2014/main" id="{644F81B7-7343-44BA-A581-5CC92B6F4F51}"/>
+                <a16:creationId xmlns:a16="http://schemas.microsoft.com/office/drawing/2014/main" id="{8D42092F-A0F3-46A0-9755-3BC761FD4183}"/>
               </a:ext>
             </a:extLst>
           </p:cNvPr>
@@ -9965,7 +9965,7 @@
           <p:cNvPr id="2" name="s8-eyebrow">
             <a:extLst xmlns:a="http://schemas.openxmlformats.org/drawingml/2006/main">
               <a:ext uri="{FF2B5EF4-FFF2-40B4-BE49-F238E27FC236}">
-                <a16:creationId xmlns:a16="http://schemas.microsoft.com/office/drawing/2014/main" id="{7F7C075C-4428-4912-B3E0-EF332E2021DB}"/>
+                <a16:creationId xmlns:a16="http://schemas.microsoft.com/office/drawing/2014/main" id="{AAFC5240-8C7C-422D-B983-C0F303000BB7}"/>
               </a:ext>
             </a:extLst>
           </p:cNvPr>
@@ -10023,7 +10023,7 @@
           <p:cNvPr id="3" name="s8-title">
             <a:extLst xmlns:a="http://schemas.openxmlformats.org/drawingml/2006/main">
               <a:ext uri="{FF2B5EF4-FFF2-40B4-BE49-F238E27FC236}">
-                <a16:creationId xmlns:a16="http://schemas.microsoft.com/office/drawing/2014/main" id="{6401D681-D2AD-48F8-8E96-BAD3A9EAC40A}"/>
+                <a16:creationId xmlns:a16="http://schemas.microsoft.com/office/drawing/2014/main" id="{E5BD48BF-1311-4D29-B918-0E2EDFCF7944}"/>
               </a:ext>
             </a:extLst>
           </p:cNvPr>
@@ -10081,7 +10081,7 @@
           <p:cNvPr id="4" name="s8-footer">
             <a:extLst xmlns:a="http://schemas.openxmlformats.org/drawingml/2006/main">
               <a:ext uri="{FF2B5EF4-FFF2-40B4-BE49-F238E27FC236}">
-                <a16:creationId xmlns:a16="http://schemas.microsoft.com/office/drawing/2014/main" id="{C51AD06C-784E-4C39-9F8A-F5C535B36FD7}"/>
+                <a16:creationId xmlns:a16="http://schemas.microsoft.com/office/drawing/2014/main" id="{43555549-105A-4221-8E61-11CA2C3005A7}"/>
               </a:ext>
             </a:extLst>
           </p:cNvPr>
@@ -10112,7 +10112,7 @@
           <p:cNvPr id="5" name="s8-identity">
             <a:extLst xmlns:a="http://schemas.openxmlformats.org/drawingml/2006/main">
               <a:ext uri="{FF2B5EF4-FFF2-40B4-BE49-F238E27FC236}">
-                <a16:creationId xmlns:a16="http://schemas.microsoft.com/office/drawing/2014/main" id="{C1BB020C-A737-45B0-AAB5-B4EAF399C67A}"/>
+                <a16:creationId xmlns:a16="http://schemas.microsoft.com/office/drawing/2014/main" id="{CEA0654E-0AB1-4318-9E1D-8B0406C492CA}"/>
               </a:ext>
             </a:extLst>
           </p:cNvPr>
@@ -10170,7 +10170,7 @@
           <p:cNvPr id="6" name="core-no-0">
             <a:extLst xmlns:a="http://schemas.openxmlformats.org/drawingml/2006/main">
               <a:ext uri="{FF2B5EF4-FFF2-40B4-BE49-F238E27FC236}">
-                <a16:creationId xmlns:a16="http://schemas.microsoft.com/office/drawing/2014/main" id="{1816ECCE-90B6-4BD6-AF0F-8E7474D78172}"/>
+                <a16:creationId xmlns:a16="http://schemas.microsoft.com/office/drawing/2014/main" id="{0E6D0678-2ADB-4D93-BBD1-1B426044052A}"/>
               </a:ext>
             </a:extLst>
           </p:cNvPr>
@@ -10228,7 +10228,7 @@
           <p:cNvPr id="7" name="core-label-0">
             <a:extLst xmlns:a="http://schemas.openxmlformats.org/drawingml/2006/main">
               <a:ext uri="{FF2B5EF4-FFF2-40B4-BE49-F238E27FC236}">
-                <a16:creationId xmlns:a16="http://schemas.microsoft.com/office/drawing/2014/main" id="{72EBF526-4930-4525-8775-4B497851C968}"/>
+                <a16:creationId xmlns:a16="http://schemas.microsoft.com/office/drawing/2014/main" id="{B06AA6D9-6775-4002-969A-532E4F536254}"/>
               </a:ext>
             </a:extLst>
           </p:cNvPr>
@@ -10286,7 +10286,7 @@
           <p:cNvPr id="8" name="core-body-0">
             <a:extLst xmlns:a="http://schemas.openxmlformats.org/drawingml/2006/main">
               <a:ext uri="{FF2B5EF4-FFF2-40B4-BE49-F238E27FC236}">
-                <a16:creationId xmlns:a16="http://schemas.microsoft.com/office/drawing/2014/main" id="{B947CC5B-67C5-4F53-BA2D-7C110DDD87CC}"/>
+                <a16:creationId xmlns:a16="http://schemas.microsoft.com/office/drawing/2014/main" id="{BB7806BE-15E4-4F91-BF3D-A74D592C768B}"/>
               </a:ext>
             </a:extLst>
           </p:cNvPr>
@@ -10350,7 +10350,7 @@
           <p:cNvPr id="9" name="core-no-1">
             <a:extLst xmlns:a="http://schemas.openxmlformats.org/drawingml/2006/main">
               <a:ext uri="{FF2B5EF4-FFF2-40B4-BE49-F238E27FC236}">
-                <a16:creationId xmlns:a16="http://schemas.microsoft.com/office/drawing/2014/main" id="{748264BA-981C-4D02-8616-7B3D446BD902}"/>
+                <a16:creationId xmlns:a16="http://schemas.microsoft.com/office/drawing/2014/main" id="{200802E2-87DD-4A03-8376-A3E7ED94D60C}"/>
               </a:ext>
             </a:extLst>
           </p:cNvPr>
@@ -10408,7 +10408,7 @@
           <p:cNvPr id="10" name="core-body-1">
             <a:extLst xmlns:a="http://schemas.openxmlformats.org/drawingml/2006/main">
               <a:ext uri="{FF2B5EF4-FFF2-40B4-BE49-F238E27FC236}">
-                <a16:creationId xmlns:a16="http://schemas.microsoft.com/office/drawing/2014/main" id="{694A74B5-CF85-4C43-92F5-4AA5BC3E2E6E}"/>
+                <a16:creationId xmlns:a16="http://schemas.microsoft.com/office/drawing/2014/main" id="{CF7D9CB4-8BEA-4909-8117-6454560B8D9F}"/>
               </a:ext>
             </a:extLst>
           </p:cNvPr>
@@ -10472,7 +10472,7 @@
           <p:cNvPr id="11" name="core-no-2">
             <a:extLst xmlns:a="http://schemas.openxmlformats.org/drawingml/2006/main">
               <a:ext uri="{FF2B5EF4-FFF2-40B4-BE49-F238E27FC236}">
-                <a16:creationId xmlns:a16="http://schemas.microsoft.com/office/drawing/2014/main" id="{54AD8A2D-EBA3-4CF0-A226-5E0E5498F95A}"/>
+                <a16:creationId xmlns:a16="http://schemas.microsoft.com/office/drawing/2014/main" id="{94AC048E-0D11-4ACA-9305-D6F1E5657A42}"/>
               </a:ext>
             </a:extLst>
           </p:cNvPr>
@@ -10530,7 +10530,7 @@
           <p:cNvPr id="12" name="core-body-2">
             <a:extLst xmlns:a="http://schemas.openxmlformats.org/drawingml/2006/main">
               <a:ext uri="{FF2B5EF4-FFF2-40B4-BE49-F238E27FC236}">
-                <a16:creationId xmlns:a16="http://schemas.microsoft.com/office/drawing/2014/main" id="{2DFD6F49-8E69-4AD8-8B53-24174279D631}"/>
+                <a16:creationId xmlns:a16="http://schemas.microsoft.com/office/drawing/2014/main" id="{EF95517B-6BB9-4710-8619-9BDEAA9F3936}"/>
               </a:ext>
             </a:extLst>
           </p:cNvPr>
@@ -10594,7 +10594,7 @@
           <p:cNvPr id="13" name="s8-takeaway-rule">
             <a:extLst xmlns:a="http://schemas.openxmlformats.org/drawingml/2006/main">
               <a:ext uri="{FF2B5EF4-FFF2-40B4-BE49-F238E27FC236}">
-                <a16:creationId xmlns:a16="http://schemas.microsoft.com/office/drawing/2014/main" id="{F50FC19E-F282-401D-BAE5-BC0B5A073756}"/>
+                <a16:creationId xmlns:a16="http://schemas.microsoft.com/office/drawing/2014/main" id="{C719058A-8DA8-4232-9FF3-632FAEAFF505}"/>
               </a:ext>
             </a:extLst>
           </p:cNvPr>
@@ -10627,7 +10627,7 @@
           <p:cNvPr id="14" name="s8-takeaway">
             <a:extLst xmlns:a="http://schemas.openxmlformats.org/drawingml/2006/main">
               <a:ext uri="{FF2B5EF4-FFF2-40B4-BE49-F238E27FC236}">
-                <a16:creationId xmlns:a16="http://schemas.microsoft.com/office/drawing/2014/main" id="{8FDE51F9-D3E3-48D0-B5FE-157F4860F3E7}"/>
+                <a16:creationId xmlns:a16="http://schemas.microsoft.com/office/drawing/2014/main" id="{A9D80442-00A3-4F36-B7DA-AD0D89920362}"/>
               </a:ext>
             </a:extLst>
           </p:cNvPr>
@@ -10683,7 +10683,7 @@
     </p:spTree>
     <p:extLst>
       <p:ext uri="{BB962C8B-B14F-4D97-AF65-F5344CB8AC3E}">
-        <p14:creationId xmlns:p14="http://schemas.microsoft.com/office/powerpoint/2010/main" val="1143999203"/>
+        <p14:creationId xmlns:p14="http://schemas.microsoft.com/office/powerpoint/2010/main" val="615132967"/>
       </p:ext>
     </p:extLst>
   </p:cSld>
@@ -10714,7 +10714,7 @@
           <p:cNvPr id="1" name="s9-rule">
             <a:extLst xmlns:a="http://schemas.openxmlformats.org/drawingml/2006/main">
               <a:ext uri="{FF2B5EF4-FFF2-40B4-BE49-F238E27FC236}">
-                <a16:creationId xmlns:a16="http://schemas.microsoft.com/office/drawing/2014/main" id="{26340B16-B80B-4F4B-8D4F-EDDE0A5FF157}"/>
+                <a16:creationId xmlns:a16="http://schemas.microsoft.com/office/drawing/2014/main" id="{6C5FEF25-AA87-4F4F-8D28-08F202CA0B1B}"/>
               </a:ext>
             </a:extLst>
           </p:cNvPr>
@@ -10747,7 +10747,7 @@
           <p:cNvPr id="2" name="s9-eyebrow">
             <a:extLst xmlns:a="http://schemas.openxmlformats.org/drawingml/2006/main">
               <a:ext uri="{FF2B5EF4-FFF2-40B4-BE49-F238E27FC236}">
-                <a16:creationId xmlns:a16="http://schemas.microsoft.com/office/drawing/2014/main" id="{F0A9C6AC-624A-40EE-9AA4-3626B036B2D9}"/>
+                <a16:creationId xmlns:a16="http://schemas.microsoft.com/office/drawing/2014/main" id="{9FE503D5-9BCF-4498-A816-9FCD7FF52BBB}"/>
               </a:ext>
             </a:extLst>
           </p:cNvPr>
@@ -10805,7 +10805,7 @@
           <p:cNvPr id="3" name="s9-title">
             <a:extLst xmlns:a="http://schemas.openxmlformats.org/drawingml/2006/main">
               <a:ext uri="{FF2B5EF4-FFF2-40B4-BE49-F238E27FC236}">
-                <a16:creationId xmlns:a16="http://schemas.microsoft.com/office/drawing/2014/main" id="{541DF6C3-F1C0-4C1A-B7D1-F2287A41330F}"/>
+                <a16:creationId xmlns:a16="http://schemas.microsoft.com/office/drawing/2014/main" id="{AE5EAD9A-258C-4A5D-A06D-E979C5130098}"/>
               </a:ext>
             </a:extLst>
           </p:cNvPr>
@@ -10863,7 +10863,7 @@
           <p:cNvPr id="4" name="s9-footer">
             <a:extLst xmlns:a="http://schemas.openxmlformats.org/drawingml/2006/main">
               <a:ext uri="{FF2B5EF4-FFF2-40B4-BE49-F238E27FC236}">
-                <a16:creationId xmlns:a16="http://schemas.microsoft.com/office/drawing/2014/main" id="{13DFFE81-AD9F-4828-80D4-7A8B6B711B83}"/>
+                <a16:creationId xmlns:a16="http://schemas.microsoft.com/office/drawing/2014/main" id="{41D81A68-B7CC-4EEA-A8A6-CCEDDEA993D1}"/>
               </a:ext>
             </a:extLst>
           </p:cNvPr>
@@ -10894,7 +10894,7 @@
           <p:cNvPr id="5" name="s9-identity">
             <a:extLst xmlns:a="http://schemas.openxmlformats.org/drawingml/2006/main">
               <a:ext uri="{FF2B5EF4-FFF2-40B4-BE49-F238E27FC236}">
-                <a16:creationId xmlns:a16="http://schemas.microsoft.com/office/drawing/2014/main" id="{622D7906-DF7B-4FB1-AEA9-6D15AA9BADAA}"/>
+                <a16:creationId xmlns:a16="http://schemas.microsoft.com/office/drawing/2014/main" id="{1DDF4F63-6059-4605-BE07-5E9ACE37E6D3}"/>
               </a:ext>
             </a:extLst>
           </p:cNvPr>
@@ -10952,7 +10952,7 @@
           <p:cNvPr id="6" name="case-title">
             <a:extLst xmlns:a="http://schemas.openxmlformats.org/drawingml/2006/main">
               <a:ext uri="{FF2B5EF4-FFF2-40B4-BE49-F238E27FC236}">
-                <a16:creationId xmlns:a16="http://schemas.microsoft.com/office/drawing/2014/main" id="{981F5BEF-7CAF-4D34-A014-1619F28EF4A1}"/>
+                <a16:creationId xmlns:a16="http://schemas.microsoft.com/office/drawing/2014/main" id="{099E7B81-9D61-4126-A5E5-46F2A496ABF1}"/>
               </a:ext>
             </a:extLst>
           </p:cNvPr>
@@ -11016,7 +11016,7 @@
           <p:cNvPr id="7" name="case-row-0">
             <a:extLst xmlns:a="http://schemas.openxmlformats.org/drawingml/2006/main">
               <a:ext uri="{FF2B5EF4-FFF2-40B4-BE49-F238E27FC236}">
-                <a16:creationId xmlns:a16="http://schemas.microsoft.com/office/drawing/2014/main" id="{2E2DE6D4-F898-4EE4-897C-4C368C28FE21}"/>
+                <a16:creationId xmlns:a16="http://schemas.microsoft.com/office/drawing/2014/main" id="{4B45A3F5-AEA1-4ECE-BFAE-0215D91C747F}"/>
               </a:ext>
             </a:extLst>
           </p:cNvPr>
@@ -11080,7 +11080,7 @@
           <p:cNvPr id="8" name="case-row-1">
             <a:extLst xmlns:a="http://schemas.openxmlformats.org/drawingml/2006/main">
               <a:ext uri="{FF2B5EF4-FFF2-40B4-BE49-F238E27FC236}">
-                <a16:creationId xmlns:a16="http://schemas.microsoft.com/office/drawing/2014/main" id="{982E3977-9D7C-48B2-828C-100223D287C1}"/>
+                <a16:creationId xmlns:a16="http://schemas.microsoft.com/office/drawing/2014/main" id="{D3A2F7A0-E171-4317-AF65-BD1FD851276D}"/>
               </a:ext>
             </a:extLst>
           </p:cNvPr>
@@ -11144,7 +11144,7 @@
           <p:cNvPr id="9" name="case-row-2">
             <a:extLst xmlns:a="http://schemas.openxmlformats.org/drawingml/2006/main">
               <a:ext uri="{FF2B5EF4-FFF2-40B4-BE49-F238E27FC236}">
-                <a16:creationId xmlns:a16="http://schemas.microsoft.com/office/drawing/2014/main" id="{D0B6BF6D-A5E7-4EFC-A382-EE56D0F2D0ED}"/>
+                <a16:creationId xmlns:a16="http://schemas.microsoft.com/office/drawing/2014/main" id="{36C79834-454F-4BFC-A319-E397459919CF}"/>
               </a:ext>
             </a:extLst>
           </p:cNvPr>
@@ -11208,7 +11208,7 @@
           <p:cNvPr id="10" name="case-row-3">
             <a:extLst xmlns:a="http://schemas.openxmlformats.org/drawingml/2006/main">
               <a:ext uri="{FF2B5EF4-FFF2-40B4-BE49-F238E27FC236}">
-                <a16:creationId xmlns:a16="http://schemas.microsoft.com/office/drawing/2014/main" id="{5AA543A0-715A-4898-88E8-D4D92D682F4D}"/>
+                <a16:creationId xmlns:a16="http://schemas.microsoft.com/office/drawing/2014/main" id="{2809A8AE-5A0D-453B-A06F-F4A6D81697BD}"/>
               </a:ext>
             </a:extLst>
           </p:cNvPr>
@@ -11272,7 +11272,7 @@
           <p:cNvPr id="11" name="s9-takeaway-rule">
             <a:extLst xmlns:a="http://schemas.openxmlformats.org/drawingml/2006/main">
               <a:ext uri="{FF2B5EF4-FFF2-40B4-BE49-F238E27FC236}">
-                <a16:creationId xmlns:a16="http://schemas.microsoft.com/office/drawing/2014/main" id="{15E6F9CC-6808-4611-B4AF-B9C8A76F60DC}"/>
+                <a16:creationId xmlns:a16="http://schemas.microsoft.com/office/drawing/2014/main" id="{1E954506-F90C-468E-AD92-843660A05E37}"/>
               </a:ext>
             </a:extLst>
           </p:cNvPr>
@@ -11305,7 +11305,7 @@
           <p:cNvPr id="12" name="s9-takeaway">
             <a:extLst xmlns:a="http://schemas.openxmlformats.org/drawingml/2006/main">
               <a:ext uri="{FF2B5EF4-FFF2-40B4-BE49-F238E27FC236}">
-                <a16:creationId xmlns:a16="http://schemas.microsoft.com/office/drawing/2014/main" id="{D2AE5C2F-032E-44A0-96B2-E9702567363F}"/>
+                <a16:creationId xmlns:a16="http://schemas.microsoft.com/office/drawing/2014/main" id="{D2C2090F-1DFF-421A-925F-A2BB7DEBAE3F}"/>
               </a:ext>
             </a:extLst>
           </p:cNvPr>
@@ -11361,7 +11361,7 @@
     </p:spTree>
     <p:extLst>
       <p:ext uri="{BB962C8B-B14F-4D97-AF65-F5344CB8AC3E}">
-        <p14:creationId xmlns:p14="http://schemas.microsoft.com/office/powerpoint/2010/main" val="2028509812"/>
+        <p14:creationId xmlns:p14="http://schemas.microsoft.com/office/powerpoint/2010/main" val="1746575228"/>
       </p:ext>
     </p:extLst>
   </p:cSld>

--- a/docs/public/course-assets/course-pptx/in-009.pptx
+++ b/docs/public/course-assets/course-pptx/in-009.pptx
@@ -2,25 +2,25 @@
 <file path=ppt/presentation.xml><?xml version="1.0" encoding="utf-8"?>
 <p:presentation xmlns:p="http://schemas.openxmlformats.org/presentationml/2006/main">
   <p:sldMasterIdLst>
-    <p:sldMasterId xmlns:r="http://schemas.openxmlformats.org/officeDocument/2006/relationships" id="2147483648" r:id="R2ce9519bb49f4f3c"/>
+    <p:sldMasterId xmlns:r="http://schemas.openxmlformats.org/officeDocument/2006/relationships" id="2147483648" r:id="R658eec2cb4874176"/>
   </p:sldMasterIdLst>
   <p:notesMasterIdLst>
-    <p:notesMasterId xmlns:r="http://schemas.openxmlformats.org/officeDocument/2006/relationships" r:id="Rb98be871ee724be9"/>
+    <p:notesMasterId xmlns:r="http://schemas.openxmlformats.org/officeDocument/2006/relationships" r:id="R7e1b67813d2c4b4a"/>
   </p:notesMasterIdLst>
   <p:sldIdLst>
-    <p:sldId xmlns:r="http://schemas.openxmlformats.org/officeDocument/2006/relationships" id="256" r:id="R94e3c9bbd13e4469"/>
-    <p:sldId xmlns:r="http://schemas.openxmlformats.org/officeDocument/2006/relationships" id="257" r:id="Rdbc8d16813044a81"/>
-    <p:sldId xmlns:r="http://schemas.openxmlformats.org/officeDocument/2006/relationships" id="258" r:id="R71c309fdc84542e6"/>
-    <p:sldId xmlns:r="http://schemas.openxmlformats.org/officeDocument/2006/relationships" id="259" r:id="Ref15a6cf0e3a4af7"/>
-    <p:sldId xmlns:r="http://schemas.openxmlformats.org/officeDocument/2006/relationships" id="260" r:id="R55e119c04621420e"/>
-    <p:sldId xmlns:r="http://schemas.openxmlformats.org/officeDocument/2006/relationships" id="261" r:id="Rb1d671708f044fd1"/>
-    <p:sldId xmlns:r="http://schemas.openxmlformats.org/officeDocument/2006/relationships" id="262" r:id="R0c285fb66dee4c6b"/>
-    <p:sldId xmlns:r="http://schemas.openxmlformats.org/officeDocument/2006/relationships" id="263" r:id="Rbde5199a20db4b5f"/>
-    <p:sldId xmlns:r="http://schemas.openxmlformats.org/officeDocument/2006/relationships" id="264" r:id="R6694f50beaf0437d"/>
-    <p:sldId xmlns:r="http://schemas.openxmlformats.org/officeDocument/2006/relationships" id="265" r:id="Raaffba40f1ca478b"/>
-    <p:sldId xmlns:r="http://schemas.openxmlformats.org/officeDocument/2006/relationships" id="266" r:id="R76b7e0148453423b"/>
-    <p:sldId xmlns:r="http://schemas.openxmlformats.org/officeDocument/2006/relationships" id="267" r:id="Rf6a7ea691dd348d2"/>
-    <p:sldId xmlns:r="http://schemas.openxmlformats.org/officeDocument/2006/relationships" id="268" r:id="R328d8b0333034bed"/>
+    <p:sldId xmlns:r="http://schemas.openxmlformats.org/officeDocument/2006/relationships" id="256" r:id="R1d7a952111a24155"/>
+    <p:sldId xmlns:r="http://schemas.openxmlformats.org/officeDocument/2006/relationships" id="257" r:id="R1107068347274a9f"/>
+    <p:sldId xmlns:r="http://schemas.openxmlformats.org/officeDocument/2006/relationships" id="258" r:id="Rc8047d9a4cc64216"/>
+    <p:sldId xmlns:r="http://schemas.openxmlformats.org/officeDocument/2006/relationships" id="259" r:id="R2d7fd8c3f5d04b66"/>
+    <p:sldId xmlns:r="http://schemas.openxmlformats.org/officeDocument/2006/relationships" id="260" r:id="R69cd1cd985aa4f49"/>
+    <p:sldId xmlns:r="http://schemas.openxmlformats.org/officeDocument/2006/relationships" id="261" r:id="Re552848f980b4c37"/>
+    <p:sldId xmlns:r="http://schemas.openxmlformats.org/officeDocument/2006/relationships" id="262" r:id="Rd70f6cf3ee074805"/>
+    <p:sldId xmlns:r="http://schemas.openxmlformats.org/officeDocument/2006/relationships" id="263" r:id="R0fb5b0ad10cc4971"/>
+    <p:sldId xmlns:r="http://schemas.openxmlformats.org/officeDocument/2006/relationships" id="264" r:id="Rd859a905d4414bf8"/>
+    <p:sldId xmlns:r="http://schemas.openxmlformats.org/officeDocument/2006/relationships" id="265" r:id="Ra919e8c59f814eb5"/>
+    <p:sldId xmlns:r="http://schemas.openxmlformats.org/officeDocument/2006/relationships" id="266" r:id="R247e84605a0c4265"/>
+    <p:sldId xmlns:r="http://schemas.openxmlformats.org/officeDocument/2006/relationships" id="267" r:id="R0975285458fc4ba2"/>
+    <p:sldId xmlns:r="http://schemas.openxmlformats.org/officeDocument/2006/relationships" id="268" r:id="Rb9b58cb3e95a4140"/>
   </p:sldIdLst>
   <p:sldSz cx="12192000" cy="6858000"/>
   <p:notesSz cx="6858000" cy="9144000"/>
@@ -1405,7 +1405,7 @@
   </p:cSld>
   <p:clrMap bg1="lt1" tx1="dk1" bg2="lt2" tx2="dk2" accent1="accent1" accent2="accent2" accent3="accent3" accent4="accent4" accent5="accent5" accent6="accent6" hlink="hlink" folHlink="folHlink"/>
   <p:sldLayoutIdLst>
-    <p:sldLayoutId xmlns:r="http://schemas.openxmlformats.org/officeDocument/2006/relationships" id="2147483649" r:id="Re1f478c73c2c459e"/>
+    <p:sldLayoutId xmlns:r="http://schemas.openxmlformats.org/officeDocument/2006/relationships" id="2147483649" r:id="R04162d9da97649a3"/>
   </p:sldLayoutIdLst>
   <p:txStyles>
     <p:titleStyle>
@@ -1956,7 +1956,7 @@
           <p:cNvPr id="1" name="cover-rule">
             <a:extLst xmlns:a="http://schemas.openxmlformats.org/drawingml/2006/main">
               <a:ext uri="{FF2B5EF4-FFF2-40B4-BE49-F238E27FC236}">
-                <a16:creationId xmlns:a16="http://schemas.microsoft.com/office/drawing/2014/main" id="{4442EB8C-4D2B-4011-AAD1-9056C282FF2E}"/>
+                <a16:creationId xmlns:a16="http://schemas.microsoft.com/office/drawing/2014/main" id="{C76AC8F2-2D9A-4A1C-A032-A6BE5F459E62}"/>
               </a:ext>
             </a:extLst>
           </p:cNvPr>
@@ -1989,7 +1989,7 @@
           <p:cNvPr id="2" name="cover-ring-1">
             <a:extLst xmlns:a="http://schemas.openxmlformats.org/drawingml/2006/main">
               <a:ext uri="{FF2B5EF4-FFF2-40B4-BE49-F238E27FC236}">
-                <a16:creationId xmlns:a16="http://schemas.microsoft.com/office/drawing/2014/main" id="{2929E5CD-B922-49A6-991D-B666F217C43A}"/>
+                <a16:creationId xmlns:a16="http://schemas.microsoft.com/office/drawing/2014/main" id="{15F5641E-28DA-4BCF-8B71-950EC5DA3C9C}"/>
               </a:ext>
             </a:extLst>
           </p:cNvPr>
@@ -2020,7 +2020,7 @@
           <p:cNvPr id="3" name="cover-ring-2">
             <a:extLst xmlns:a="http://schemas.openxmlformats.org/drawingml/2006/main">
               <a:ext uri="{FF2B5EF4-FFF2-40B4-BE49-F238E27FC236}">
-                <a16:creationId xmlns:a16="http://schemas.microsoft.com/office/drawing/2014/main" id="{9B4E23E1-C968-4BF8-83F0-893339BA3FD8}"/>
+                <a16:creationId xmlns:a16="http://schemas.microsoft.com/office/drawing/2014/main" id="{587B3395-2A9E-42D1-A37B-C6DF5533B442}"/>
               </a:ext>
             </a:extLst>
           </p:cNvPr>
@@ -2051,7 +2051,7 @@
           <p:cNvPr id="4" name="cover-core">
             <a:extLst xmlns:a="http://schemas.openxmlformats.org/drawingml/2006/main">
               <a:ext uri="{FF2B5EF4-FFF2-40B4-BE49-F238E27FC236}">
-                <a16:creationId xmlns:a16="http://schemas.microsoft.com/office/drawing/2014/main" id="{BC0AE3B1-EA19-4409-9F73-B3B1370F5258}"/>
+                <a16:creationId xmlns:a16="http://schemas.microsoft.com/office/drawing/2014/main" id="{E1D719E1-C4EC-44C2-9500-4C89CFAC59F8}"/>
               </a:ext>
             </a:extLst>
           </p:cNvPr>
@@ -2084,7 +2084,7 @@
           <p:cNvPr id="5" name="cover-line-1">
             <a:extLst xmlns:a="http://schemas.openxmlformats.org/drawingml/2006/main">
               <a:ext uri="{FF2B5EF4-FFF2-40B4-BE49-F238E27FC236}">
-                <a16:creationId xmlns:a16="http://schemas.microsoft.com/office/drawing/2014/main" id="{D2BA5167-E254-4430-9165-8FB671EEE106}"/>
+                <a16:creationId xmlns:a16="http://schemas.microsoft.com/office/drawing/2014/main" id="{79F0E7AF-29FD-4914-8BF4-CE1B7A00B06B}"/>
               </a:ext>
             </a:extLst>
           </p:cNvPr>
@@ -2115,7 +2115,7 @@
           <p:cNvPr id="6" name="cover-line-2">
             <a:extLst xmlns:a="http://schemas.openxmlformats.org/drawingml/2006/main">
               <a:ext uri="{FF2B5EF4-FFF2-40B4-BE49-F238E27FC236}">
-                <a16:creationId xmlns:a16="http://schemas.microsoft.com/office/drawing/2014/main" id="{D770B090-4D57-4403-A7D9-EDA7A3943465}"/>
+                <a16:creationId xmlns:a16="http://schemas.microsoft.com/office/drawing/2014/main" id="{A49F3538-B8A7-48F5-A532-0D86062E031C}"/>
               </a:ext>
             </a:extLst>
           </p:cNvPr>
@@ -2146,7 +2146,7 @@
           <p:cNvPr id="7" name="cover-eyebrow">
             <a:extLst xmlns:a="http://schemas.openxmlformats.org/drawingml/2006/main">
               <a:ext uri="{FF2B5EF4-FFF2-40B4-BE49-F238E27FC236}">
-                <a16:creationId xmlns:a16="http://schemas.microsoft.com/office/drawing/2014/main" id="{29EF1538-8F45-4B52-89DB-D966A3BF4D48}"/>
+                <a16:creationId xmlns:a16="http://schemas.microsoft.com/office/drawing/2014/main" id="{A72CA1F1-DE63-4BBF-9F44-6BE3D394F05C}"/>
               </a:ext>
             </a:extLst>
           </p:cNvPr>
@@ -2204,7 +2204,7 @@
           <p:cNvPr id="8" name="cover-title">
             <a:extLst xmlns:a="http://schemas.openxmlformats.org/drawingml/2006/main">
               <a:ext uri="{FF2B5EF4-FFF2-40B4-BE49-F238E27FC236}">
-                <a16:creationId xmlns:a16="http://schemas.microsoft.com/office/drawing/2014/main" id="{9F0BB977-FB68-4053-8423-B9EB04F5CA2E}"/>
+                <a16:creationId xmlns:a16="http://schemas.microsoft.com/office/drawing/2014/main" id="{A5FCC806-64C1-4BF6-8EB6-523638473362}"/>
               </a:ext>
             </a:extLst>
           </p:cNvPr>
@@ -2262,7 +2262,7 @@
           <p:cNvPr id="9" name="cover-subtitle">
             <a:extLst xmlns:a="http://schemas.openxmlformats.org/drawingml/2006/main">
               <a:ext uri="{FF2B5EF4-FFF2-40B4-BE49-F238E27FC236}">
-                <a16:creationId xmlns:a16="http://schemas.microsoft.com/office/drawing/2014/main" id="{B8DF22D4-C3FD-4CC9-8BAA-DD2241CD6711}"/>
+                <a16:creationId xmlns:a16="http://schemas.microsoft.com/office/drawing/2014/main" id="{03178E05-2EFA-4B8C-9F4A-53D092D81E70}"/>
               </a:ext>
             </a:extLst>
           </p:cNvPr>
@@ -2324,7 +2324,7 @@
           <p:cNvPr id="10" name="cover-lead">
             <a:extLst xmlns:a="http://schemas.openxmlformats.org/drawingml/2006/main">
               <a:ext uri="{FF2B5EF4-FFF2-40B4-BE49-F238E27FC236}">
-                <a16:creationId xmlns:a16="http://schemas.microsoft.com/office/drawing/2014/main" id="{7C2F8701-16AF-4F4B-BEE0-6AAC51CC919E}"/>
+                <a16:creationId xmlns:a16="http://schemas.microsoft.com/office/drawing/2014/main" id="{EE14963D-C095-4B6C-8F47-2A48973D29D2}"/>
               </a:ext>
             </a:extLst>
           </p:cNvPr>
@@ -2382,7 +2382,7 @@
           <p:cNvPr id="11" name="cover-course">
             <a:extLst xmlns:a="http://schemas.openxmlformats.org/drawingml/2006/main">
               <a:ext uri="{FF2B5EF4-FFF2-40B4-BE49-F238E27FC236}">
-                <a16:creationId xmlns:a16="http://schemas.microsoft.com/office/drawing/2014/main" id="{86C3A817-519D-43AC-B7A0-D70FFDBFF265}"/>
+                <a16:creationId xmlns:a16="http://schemas.microsoft.com/office/drawing/2014/main" id="{0CABFBA7-4C2B-40CB-8AA5-C9A861DC182F}"/>
               </a:ext>
             </a:extLst>
           </p:cNvPr>
@@ -2440,7 +2440,7 @@
           <p:cNvPr id="12" name="cover-id">
             <a:extLst xmlns:a="http://schemas.openxmlformats.org/drawingml/2006/main">
               <a:ext uri="{FF2B5EF4-FFF2-40B4-BE49-F238E27FC236}">
-                <a16:creationId xmlns:a16="http://schemas.microsoft.com/office/drawing/2014/main" id="{45A09FFA-CBA2-42F1-A8A0-D730341E0310}"/>
+                <a16:creationId xmlns:a16="http://schemas.microsoft.com/office/drawing/2014/main" id="{0601D510-2B4D-44CE-BB64-F7C772EF67AC}"/>
               </a:ext>
             </a:extLst>
           </p:cNvPr>
@@ -2496,7 +2496,7 @@
     </p:spTree>
     <p:extLst>
       <p:ext uri="{BB962C8B-B14F-4D97-AF65-F5344CB8AC3E}">
-        <p14:creationId xmlns:p14="http://schemas.microsoft.com/office/powerpoint/2010/main" val="218327506"/>
+        <p14:creationId xmlns:p14="http://schemas.microsoft.com/office/powerpoint/2010/main" val="784216298"/>
       </p:ext>
     </p:extLst>
   </p:cSld>
@@ -2527,7 +2527,7 @@
           <p:cNvPr id="1" name="s10-rule">
             <a:extLst xmlns:a="http://schemas.openxmlformats.org/drawingml/2006/main">
               <a:ext uri="{FF2B5EF4-FFF2-40B4-BE49-F238E27FC236}">
-                <a16:creationId xmlns:a16="http://schemas.microsoft.com/office/drawing/2014/main" id="{8DA52334-7F79-4F79-90AE-D5F644B70A7D}"/>
+                <a16:creationId xmlns:a16="http://schemas.microsoft.com/office/drawing/2014/main" id="{87A03802-353F-43D6-A858-48AC8B59D5BA}"/>
               </a:ext>
             </a:extLst>
           </p:cNvPr>
@@ -2560,7 +2560,7 @@
           <p:cNvPr id="2" name="s10-eyebrow">
             <a:extLst xmlns:a="http://schemas.openxmlformats.org/drawingml/2006/main">
               <a:ext uri="{FF2B5EF4-FFF2-40B4-BE49-F238E27FC236}">
-                <a16:creationId xmlns:a16="http://schemas.microsoft.com/office/drawing/2014/main" id="{837F9AB6-2CF5-40D3-991C-C297C412B6AF}"/>
+                <a16:creationId xmlns:a16="http://schemas.microsoft.com/office/drawing/2014/main" id="{7A9C1A38-F23C-4ECE-A77C-268CFFD628D5}"/>
               </a:ext>
             </a:extLst>
           </p:cNvPr>
@@ -2618,7 +2618,7 @@
           <p:cNvPr id="3" name="s10-title">
             <a:extLst xmlns:a="http://schemas.openxmlformats.org/drawingml/2006/main">
               <a:ext uri="{FF2B5EF4-FFF2-40B4-BE49-F238E27FC236}">
-                <a16:creationId xmlns:a16="http://schemas.microsoft.com/office/drawing/2014/main" id="{E4448DE7-B133-4DCA-B7F7-897E51ACDAA1}"/>
+                <a16:creationId xmlns:a16="http://schemas.microsoft.com/office/drawing/2014/main" id="{AE0B63A5-3AC8-4E72-917A-61A76739F39D}"/>
               </a:ext>
             </a:extLst>
           </p:cNvPr>
@@ -2676,7 +2676,7 @@
           <p:cNvPr id="4" name="s10-footer">
             <a:extLst xmlns:a="http://schemas.openxmlformats.org/drawingml/2006/main">
               <a:ext uri="{FF2B5EF4-FFF2-40B4-BE49-F238E27FC236}">
-                <a16:creationId xmlns:a16="http://schemas.microsoft.com/office/drawing/2014/main" id="{F2F9AA29-3078-4105-BDC1-2AD6DEF41489}"/>
+                <a16:creationId xmlns:a16="http://schemas.microsoft.com/office/drawing/2014/main" id="{84950256-E855-4A88-ACD7-5552EE5B5152}"/>
               </a:ext>
             </a:extLst>
           </p:cNvPr>
@@ -2707,7 +2707,7 @@
           <p:cNvPr id="5" name="s10-identity">
             <a:extLst xmlns:a="http://schemas.openxmlformats.org/drawingml/2006/main">
               <a:ext uri="{FF2B5EF4-FFF2-40B4-BE49-F238E27FC236}">
-                <a16:creationId xmlns:a16="http://schemas.microsoft.com/office/drawing/2014/main" id="{34B8763F-E992-483B-A45E-D8D507A7A8CF}"/>
+                <a16:creationId xmlns:a16="http://schemas.microsoft.com/office/drawing/2014/main" id="{FB1B0E21-C96A-488D-A32A-2063F9C1B9F2}"/>
               </a:ext>
             </a:extLst>
           </p:cNvPr>
@@ -2765,7 +2765,7 @@
           <p:cNvPr id="6" name="case-title">
             <a:extLst xmlns:a="http://schemas.openxmlformats.org/drawingml/2006/main">
               <a:ext uri="{FF2B5EF4-FFF2-40B4-BE49-F238E27FC236}">
-                <a16:creationId xmlns:a16="http://schemas.microsoft.com/office/drawing/2014/main" id="{D0835BC0-4B03-4A60-8FB7-4ED6874B3D1F}"/>
+                <a16:creationId xmlns:a16="http://schemas.microsoft.com/office/drawing/2014/main" id="{30F358DE-80F2-439E-A929-C4CF85544DFC}"/>
               </a:ext>
             </a:extLst>
           </p:cNvPr>
@@ -2829,7 +2829,7 @@
           <p:cNvPr id="7" name="case-row-0">
             <a:extLst xmlns:a="http://schemas.openxmlformats.org/drawingml/2006/main">
               <a:ext uri="{FF2B5EF4-FFF2-40B4-BE49-F238E27FC236}">
-                <a16:creationId xmlns:a16="http://schemas.microsoft.com/office/drawing/2014/main" id="{A60095F1-93CD-422B-99C4-BD5ECB25CBC4}"/>
+                <a16:creationId xmlns:a16="http://schemas.microsoft.com/office/drawing/2014/main" id="{0E3806F2-1A35-47D9-989A-794C9A22657A}"/>
               </a:ext>
             </a:extLst>
           </p:cNvPr>
@@ -2893,7 +2893,7 @@
           <p:cNvPr id="8" name="case-row-1">
             <a:extLst xmlns:a="http://schemas.openxmlformats.org/drawingml/2006/main">
               <a:ext uri="{FF2B5EF4-FFF2-40B4-BE49-F238E27FC236}">
-                <a16:creationId xmlns:a16="http://schemas.microsoft.com/office/drawing/2014/main" id="{FFC2E6C8-6FCC-4559-9E49-6D5AB68DD8D2}"/>
+                <a16:creationId xmlns:a16="http://schemas.microsoft.com/office/drawing/2014/main" id="{162DB31B-F09B-4B4E-95F5-FEF72B7A3B79}"/>
               </a:ext>
             </a:extLst>
           </p:cNvPr>
@@ -2957,7 +2957,7 @@
           <p:cNvPr id="9" name="case-row-2">
             <a:extLst xmlns:a="http://schemas.openxmlformats.org/drawingml/2006/main">
               <a:ext uri="{FF2B5EF4-FFF2-40B4-BE49-F238E27FC236}">
-                <a16:creationId xmlns:a16="http://schemas.microsoft.com/office/drawing/2014/main" id="{FF515717-0BE0-44FB-97EB-479AB52D5424}"/>
+                <a16:creationId xmlns:a16="http://schemas.microsoft.com/office/drawing/2014/main" id="{C2F6972A-582A-4414-806A-D38808B96B3E}"/>
               </a:ext>
             </a:extLst>
           </p:cNvPr>
@@ -3021,7 +3021,7 @@
           <p:cNvPr id="10" name="s10-takeaway-rule">
             <a:extLst xmlns:a="http://schemas.openxmlformats.org/drawingml/2006/main">
               <a:ext uri="{FF2B5EF4-FFF2-40B4-BE49-F238E27FC236}">
-                <a16:creationId xmlns:a16="http://schemas.microsoft.com/office/drawing/2014/main" id="{14FEFEFD-F3FE-4A5E-A7EC-7671DE63D20B}"/>
+                <a16:creationId xmlns:a16="http://schemas.microsoft.com/office/drawing/2014/main" id="{2F029D15-0042-4335-BED7-0FD741A4C282}"/>
               </a:ext>
             </a:extLst>
           </p:cNvPr>
@@ -3054,7 +3054,7 @@
           <p:cNvPr id="11" name="s10-takeaway">
             <a:extLst xmlns:a="http://schemas.openxmlformats.org/drawingml/2006/main">
               <a:ext uri="{FF2B5EF4-FFF2-40B4-BE49-F238E27FC236}">
-                <a16:creationId xmlns:a16="http://schemas.microsoft.com/office/drawing/2014/main" id="{8DE66297-B36D-4423-969E-789A2DEF78F3}"/>
+                <a16:creationId xmlns:a16="http://schemas.microsoft.com/office/drawing/2014/main" id="{A8CBFB84-AA94-496A-9ED8-A462085E28C2}"/>
               </a:ext>
             </a:extLst>
           </p:cNvPr>
@@ -3110,7 +3110,7 @@
     </p:spTree>
     <p:extLst>
       <p:ext uri="{BB962C8B-B14F-4D97-AF65-F5344CB8AC3E}">
-        <p14:creationId xmlns:p14="http://schemas.microsoft.com/office/powerpoint/2010/main" val="774278636"/>
+        <p14:creationId xmlns:p14="http://schemas.microsoft.com/office/powerpoint/2010/main" val="204259388"/>
       </p:ext>
     </p:extLst>
   </p:cSld>
@@ -3141,7 +3141,7 @@
           <p:cNvPr id="1" name="s11-rule">
             <a:extLst xmlns:a="http://schemas.openxmlformats.org/drawingml/2006/main">
               <a:ext uri="{FF2B5EF4-FFF2-40B4-BE49-F238E27FC236}">
-                <a16:creationId xmlns:a16="http://schemas.microsoft.com/office/drawing/2014/main" id="{13399D4F-79B3-44E3-95EF-149AD443C003}"/>
+                <a16:creationId xmlns:a16="http://schemas.microsoft.com/office/drawing/2014/main" id="{97D5A954-C7D1-4CA8-8FE1-808ECB2296FA}"/>
               </a:ext>
             </a:extLst>
           </p:cNvPr>
@@ -3174,7 +3174,7 @@
           <p:cNvPr id="2" name="s11-eyebrow">
             <a:extLst xmlns:a="http://schemas.openxmlformats.org/drawingml/2006/main">
               <a:ext uri="{FF2B5EF4-FFF2-40B4-BE49-F238E27FC236}">
-                <a16:creationId xmlns:a16="http://schemas.microsoft.com/office/drawing/2014/main" id="{928A6229-8E72-49DC-83CA-922A72CAAA8D}"/>
+                <a16:creationId xmlns:a16="http://schemas.microsoft.com/office/drawing/2014/main" id="{975A4AFD-9631-40ED-9092-C86B7AF931DF}"/>
               </a:ext>
             </a:extLst>
           </p:cNvPr>
@@ -3232,7 +3232,7 @@
           <p:cNvPr id="3" name="s11-title">
             <a:extLst xmlns:a="http://schemas.openxmlformats.org/drawingml/2006/main">
               <a:ext uri="{FF2B5EF4-FFF2-40B4-BE49-F238E27FC236}">
-                <a16:creationId xmlns:a16="http://schemas.microsoft.com/office/drawing/2014/main" id="{B4D399EA-16FA-4A61-BAAD-92C11E2259C7}"/>
+                <a16:creationId xmlns:a16="http://schemas.microsoft.com/office/drawing/2014/main" id="{CE7D3FFB-CC92-4114-B0F4-74F68A7E6621}"/>
               </a:ext>
             </a:extLst>
           </p:cNvPr>
@@ -3290,7 +3290,7 @@
           <p:cNvPr id="4" name="s11-footer">
             <a:extLst xmlns:a="http://schemas.openxmlformats.org/drawingml/2006/main">
               <a:ext uri="{FF2B5EF4-FFF2-40B4-BE49-F238E27FC236}">
-                <a16:creationId xmlns:a16="http://schemas.microsoft.com/office/drawing/2014/main" id="{D21C46E7-49DF-4C06-B184-33B64E353C1C}"/>
+                <a16:creationId xmlns:a16="http://schemas.microsoft.com/office/drawing/2014/main" id="{9BE0B95E-3AE9-4FB5-8930-9631BCB4C4AA}"/>
               </a:ext>
             </a:extLst>
           </p:cNvPr>
@@ -3321,7 +3321,7 @@
           <p:cNvPr id="5" name="s11-identity">
             <a:extLst xmlns:a="http://schemas.openxmlformats.org/drawingml/2006/main">
               <a:ext uri="{FF2B5EF4-FFF2-40B4-BE49-F238E27FC236}">
-                <a16:creationId xmlns:a16="http://schemas.microsoft.com/office/drawing/2014/main" id="{1984849C-AFC4-4FC9-8604-106694C33D20}"/>
+                <a16:creationId xmlns:a16="http://schemas.microsoft.com/office/drawing/2014/main" id="{900A08F1-955A-4B1B-BF8D-343C6FC9EA11}"/>
               </a:ext>
             </a:extLst>
           </p:cNvPr>
@@ -3379,7 +3379,7 @@
           <p:cNvPr id="6" name="practice-circle-0">
             <a:extLst xmlns:a="http://schemas.openxmlformats.org/drawingml/2006/main">
               <a:ext uri="{FF2B5EF4-FFF2-40B4-BE49-F238E27FC236}">
-                <a16:creationId xmlns:a16="http://schemas.microsoft.com/office/drawing/2014/main" id="{400065E1-CFC5-44B6-A2A9-9DE92A43DCE8}"/>
+                <a16:creationId xmlns:a16="http://schemas.microsoft.com/office/drawing/2014/main" id="{B80A0A67-DB40-48F5-9A79-9889BE4DD73D}"/>
               </a:ext>
             </a:extLst>
           </p:cNvPr>
@@ -3412,7 +3412,7 @@
           <p:cNvPr id="7" name="practice-number-0">
             <a:extLst xmlns:a="http://schemas.openxmlformats.org/drawingml/2006/main">
               <a:ext uri="{FF2B5EF4-FFF2-40B4-BE49-F238E27FC236}">
-                <a16:creationId xmlns:a16="http://schemas.microsoft.com/office/drawing/2014/main" id="{A31E11E4-B2F3-4B58-9D0A-DEF8BE18C58F}"/>
+                <a16:creationId xmlns:a16="http://schemas.microsoft.com/office/drawing/2014/main" id="{35436911-53DE-4F5E-8E76-3E3BB3E1F0B6}"/>
               </a:ext>
             </a:extLst>
           </p:cNvPr>
@@ -3470,7 +3470,7 @@
           <p:cNvPr id="8" name="practice-item-0">
             <a:extLst xmlns:a="http://schemas.openxmlformats.org/drawingml/2006/main">
               <a:ext uri="{FF2B5EF4-FFF2-40B4-BE49-F238E27FC236}">
-                <a16:creationId xmlns:a16="http://schemas.microsoft.com/office/drawing/2014/main" id="{01DBD3FD-18D5-4A8F-BBE9-518388659C94}"/>
+                <a16:creationId xmlns:a16="http://schemas.microsoft.com/office/drawing/2014/main" id="{0880C6AA-DB08-452C-856E-0FFA6CEC2F4F}"/>
               </a:ext>
             </a:extLst>
           </p:cNvPr>
@@ -3534,7 +3534,7 @@
           <p:cNvPr id="9" name="practice-connector-0">
             <a:extLst xmlns:a="http://schemas.openxmlformats.org/drawingml/2006/main">
               <a:ext uri="{FF2B5EF4-FFF2-40B4-BE49-F238E27FC236}">
-                <a16:creationId xmlns:a16="http://schemas.microsoft.com/office/drawing/2014/main" id="{DA7B3054-B303-47E1-9E0B-6664716E548C}"/>
+                <a16:creationId xmlns:a16="http://schemas.microsoft.com/office/drawing/2014/main" id="{6AFF7CCA-0E7E-4A2E-86A4-BF562613F6AF}"/>
               </a:ext>
             </a:extLst>
           </p:cNvPr>
@@ -3565,7 +3565,7 @@
           <p:cNvPr id="10" name="practice-circle-1">
             <a:extLst xmlns:a="http://schemas.openxmlformats.org/drawingml/2006/main">
               <a:ext uri="{FF2B5EF4-FFF2-40B4-BE49-F238E27FC236}">
-                <a16:creationId xmlns:a16="http://schemas.microsoft.com/office/drawing/2014/main" id="{8F602580-9917-4C20-BEBD-318409366905}"/>
+                <a16:creationId xmlns:a16="http://schemas.microsoft.com/office/drawing/2014/main" id="{66355E54-355F-4CEC-960A-6D2E51761964}"/>
               </a:ext>
             </a:extLst>
           </p:cNvPr>
@@ -3598,7 +3598,7 @@
           <p:cNvPr id="11" name="practice-number-1">
             <a:extLst xmlns:a="http://schemas.openxmlformats.org/drawingml/2006/main">
               <a:ext uri="{FF2B5EF4-FFF2-40B4-BE49-F238E27FC236}">
-                <a16:creationId xmlns:a16="http://schemas.microsoft.com/office/drawing/2014/main" id="{470E6379-0492-422E-9677-D15565B13C44}"/>
+                <a16:creationId xmlns:a16="http://schemas.microsoft.com/office/drawing/2014/main" id="{7BB0AD4D-3BD3-474C-94D7-E1C005CD21F7}"/>
               </a:ext>
             </a:extLst>
           </p:cNvPr>
@@ -3656,7 +3656,7 @@
           <p:cNvPr id="12" name="practice-item-1">
             <a:extLst xmlns:a="http://schemas.openxmlformats.org/drawingml/2006/main">
               <a:ext uri="{FF2B5EF4-FFF2-40B4-BE49-F238E27FC236}">
-                <a16:creationId xmlns:a16="http://schemas.microsoft.com/office/drawing/2014/main" id="{E208B746-EA1B-4731-8CB3-533BA7D7718A}"/>
+                <a16:creationId xmlns:a16="http://schemas.microsoft.com/office/drawing/2014/main" id="{AEECA297-217E-492A-BDA1-F425325DC4D2}"/>
               </a:ext>
             </a:extLst>
           </p:cNvPr>
@@ -3720,7 +3720,7 @@
           <p:cNvPr id="13" name="practice-connector-1">
             <a:extLst xmlns:a="http://schemas.openxmlformats.org/drawingml/2006/main">
               <a:ext uri="{FF2B5EF4-FFF2-40B4-BE49-F238E27FC236}">
-                <a16:creationId xmlns:a16="http://schemas.microsoft.com/office/drawing/2014/main" id="{D9DCB1E2-3EDC-4CC9-95D7-52DA9E78DC32}"/>
+                <a16:creationId xmlns:a16="http://schemas.microsoft.com/office/drawing/2014/main" id="{3D648C23-45D4-415C-988D-FDC90698CF2A}"/>
               </a:ext>
             </a:extLst>
           </p:cNvPr>
@@ -3751,7 +3751,7 @@
           <p:cNvPr id="14" name="practice-circle-2">
             <a:extLst xmlns:a="http://schemas.openxmlformats.org/drawingml/2006/main">
               <a:ext uri="{FF2B5EF4-FFF2-40B4-BE49-F238E27FC236}">
-                <a16:creationId xmlns:a16="http://schemas.microsoft.com/office/drawing/2014/main" id="{6B72C844-33A7-405C-9C0E-139079E804CA}"/>
+                <a16:creationId xmlns:a16="http://schemas.microsoft.com/office/drawing/2014/main" id="{5F296749-683B-41EB-8801-B1A130A61682}"/>
               </a:ext>
             </a:extLst>
           </p:cNvPr>
@@ -3784,7 +3784,7 @@
           <p:cNvPr id="15" name="practice-number-2">
             <a:extLst xmlns:a="http://schemas.openxmlformats.org/drawingml/2006/main">
               <a:ext uri="{FF2B5EF4-FFF2-40B4-BE49-F238E27FC236}">
-                <a16:creationId xmlns:a16="http://schemas.microsoft.com/office/drawing/2014/main" id="{B1884FDC-5920-4DA9-A3B2-FCB800FA0DC3}"/>
+                <a16:creationId xmlns:a16="http://schemas.microsoft.com/office/drawing/2014/main" id="{93238CD4-6ED9-4F70-B605-1E067213F2F8}"/>
               </a:ext>
             </a:extLst>
           </p:cNvPr>
@@ -3842,7 +3842,7 @@
           <p:cNvPr id="16" name="practice-item-2">
             <a:extLst xmlns:a="http://schemas.openxmlformats.org/drawingml/2006/main">
               <a:ext uri="{FF2B5EF4-FFF2-40B4-BE49-F238E27FC236}">
-                <a16:creationId xmlns:a16="http://schemas.microsoft.com/office/drawing/2014/main" id="{B2C00FD2-4B84-4649-BF4B-67F1BE16BD2D}"/>
+                <a16:creationId xmlns:a16="http://schemas.microsoft.com/office/drawing/2014/main" id="{D50BBB5D-F799-46B4-86EE-2684601094AA}"/>
               </a:ext>
             </a:extLst>
           </p:cNvPr>
@@ -3904,7 +3904,7 @@
     </p:spTree>
     <p:extLst>
       <p:ext uri="{BB962C8B-B14F-4D97-AF65-F5344CB8AC3E}">
-        <p14:creationId xmlns:p14="http://schemas.microsoft.com/office/powerpoint/2010/main" val="1919845223"/>
+        <p14:creationId xmlns:p14="http://schemas.microsoft.com/office/powerpoint/2010/main" val="785069942"/>
       </p:ext>
     </p:extLst>
   </p:cSld>
@@ -3935,7 +3935,7 @@
           <p:cNvPr id="1" name="s12-rule">
             <a:extLst xmlns:a="http://schemas.openxmlformats.org/drawingml/2006/main">
               <a:ext uri="{FF2B5EF4-FFF2-40B4-BE49-F238E27FC236}">
-                <a16:creationId xmlns:a16="http://schemas.microsoft.com/office/drawing/2014/main" id="{90907665-515B-4030-B287-47F5607665B3}"/>
+                <a16:creationId xmlns:a16="http://schemas.microsoft.com/office/drawing/2014/main" id="{7BA41E99-1DF8-48C1-8316-03E08928B421}"/>
               </a:ext>
             </a:extLst>
           </p:cNvPr>
@@ -3968,7 +3968,7 @@
           <p:cNvPr id="2" name="s12-eyebrow">
             <a:extLst xmlns:a="http://schemas.openxmlformats.org/drawingml/2006/main">
               <a:ext uri="{FF2B5EF4-FFF2-40B4-BE49-F238E27FC236}">
-                <a16:creationId xmlns:a16="http://schemas.microsoft.com/office/drawing/2014/main" id="{9B77399F-1BA4-4C93-B582-5FC93C944C74}"/>
+                <a16:creationId xmlns:a16="http://schemas.microsoft.com/office/drawing/2014/main" id="{7C07C08E-F155-4699-A0BE-6041FA5ADD85}"/>
               </a:ext>
             </a:extLst>
           </p:cNvPr>
@@ -4026,7 +4026,7 @@
           <p:cNvPr id="3" name="s12-title">
             <a:extLst xmlns:a="http://schemas.openxmlformats.org/drawingml/2006/main">
               <a:ext uri="{FF2B5EF4-FFF2-40B4-BE49-F238E27FC236}">
-                <a16:creationId xmlns:a16="http://schemas.microsoft.com/office/drawing/2014/main" id="{5B5A562C-F7EA-49CA-8D81-CCD943EF1348}"/>
+                <a16:creationId xmlns:a16="http://schemas.microsoft.com/office/drawing/2014/main" id="{41E3F35E-2345-47E5-9ACA-BB45717078ED}"/>
               </a:ext>
             </a:extLst>
           </p:cNvPr>
@@ -4084,7 +4084,7 @@
           <p:cNvPr id="4" name="s12-footer">
             <a:extLst xmlns:a="http://schemas.openxmlformats.org/drawingml/2006/main">
               <a:ext uri="{FF2B5EF4-FFF2-40B4-BE49-F238E27FC236}">
-                <a16:creationId xmlns:a16="http://schemas.microsoft.com/office/drawing/2014/main" id="{9AD67728-5F8F-41A0-BC71-75B9843AB48C}"/>
+                <a16:creationId xmlns:a16="http://schemas.microsoft.com/office/drawing/2014/main" id="{9BCEEB7E-6833-4060-8F0C-037472CD962B}"/>
               </a:ext>
             </a:extLst>
           </p:cNvPr>
@@ -4115,7 +4115,7 @@
           <p:cNvPr id="5" name="s12-identity">
             <a:extLst xmlns:a="http://schemas.openxmlformats.org/drawingml/2006/main">
               <a:ext uri="{FF2B5EF4-FFF2-40B4-BE49-F238E27FC236}">
-                <a16:creationId xmlns:a16="http://schemas.microsoft.com/office/drawing/2014/main" id="{A2372B37-066A-4DF4-83F1-6D5C04EA4EB4}"/>
+                <a16:creationId xmlns:a16="http://schemas.microsoft.com/office/drawing/2014/main" id="{8604F928-163C-414F-ACBF-A14A3B1A2723}"/>
               </a:ext>
             </a:extLst>
           </p:cNvPr>
@@ -4173,7 +4173,7 @@
           <p:cNvPr id="6" name="recap-circle-0">
             <a:extLst xmlns:a="http://schemas.openxmlformats.org/drawingml/2006/main">
               <a:ext uri="{FF2B5EF4-FFF2-40B4-BE49-F238E27FC236}">
-                <a16:creationId xmlns:a16="http://schemas.microsoft.com/office/drawing/2014/main" id="{26F1ED60-E35A-4398-A153-444002D1E699}"/>
+                <a16:creationId xmlns:a16="http://schemas.microsoft.com/office/drawing/2014/main" id="{9A5012CB-A836-457E-A6EE-5F8DC8E32AAC}"/>
               </a:ext>
             </a:extLst>
           </p:cNvPr>
@@ -4206,7 +4206,7 @@
           <p:cNvPr id="7" name="recap-number-0">
             <a:extLst xmlns:a="http://schemas.openxmlformats.org/drawingml/2006/main">
               <a:ext uri="{FF2B5EF4-FFF2-40B4-BE49-F238E27FC236}">
-                <a16:creationId xmlns:a16="http://schemas.microsoft.com/office/drawing/2014/main" id="{16DADB32-CEEC-4931-8D51-7CE27D2D0C2A}"/>
+                <a16:creationId xmlns:a16="http://schemas.microsoft.com/office/drawing/2014/main" id="{F1BED77C-FA4C-4E48-ADD4-9F62DE96799D}"/>
               </a:ext>
             </a:extLst>
           </p:cNvPr>
@@ -4264,7 +4264,7 @@
           <p:cNvPr id="8" name="recap-item-0">
             <a:extLst xmlns:a="http://schemas.openxmlformats.org/drawingml/2006/main">
               <a:ext uri="{FF2B5EF4-FFF2-40B4-BE49-F238E27FC236}">
-                <a16:creationId xmlns:a16="http://schemas.microsoft.com/office/drawing/2014/main" id="{636E2BA6-8A8C-4EFE-82E3-8666A5121CB6}"/>
+                <a16:creationId xmlns:a16="http://schemas.microsoft.com/office/drawing/2014/main" id="{7BA900E9-3011-4BEA-8374-BFC6EA82B615}"/>
               </a:ext>
             </a:extLst>
           </p:cNvPr>
@@ -4328,7 +4328,7 @@
           <p:cNvPr id="9" name="recap-connector-0">
             <a:extLst xmlns:a="http://schemas.openxmlformats.org/drawingml/2006/main">
               <a:ext uri="{FF2B5EF4-FFF2-40B4-BE49-F238E27FC236}">
-                <a16:creationId xmlns:a16="http://schemas.microsoft.com/office/drawing/2014/main" id="{4F6316CA-906F-43DD-AC05-98941DAB7C2A}"/>
+                <a16:creationId xmlns:a16="http://schemas.microsoft.com/office/drawing/2014/main" id="{A2BB4408-679E-4EBC-AC82-771A806EE6EC}"/>
               </a:ext>
             </a:extLst>
           </p:cNvPr>
@@ -4359,7 +4359,7 @@
           <p:cNvPr id="10" name="recap-circle-1">
             <a:extLst xmlns:a="http://schemas.openxmlformats.org/drawingml/2006/main">
               <a:ext uri="{FF2B5EF4-FFF2-40B4-BE49-F238E27FC236}">
-                <a16:creationId xmlns:a16="http://schemas.microsoft.com/office/drawing/2014/main" id="{A5B001DF-83D1-44AD-9680-B7CD95B31554}"/>
+                <a16:creationId xmlns:a16="http://schemas.microsoft.com/office/drawing/2014/main" id="{6A766178-F43C-4776-B35D-BB7278AB5A6F}"/>
               </a:ext>
             </a:extLst>
           </p:cNvPr>
@@ -4392,7 +4392,7 @@
           <p:cNvPr id="11" name="recap-number-1">
             <a:extLst xmlns:a="http://schemas.openxmlformats.org/drawingml/2006/main">
               <a:ext uri="{FF2B5EF4-FFF2-40B4-BE49-F238E27FC236}">
-                <a16:creationId xmlns:a16="http://schemas.microsoft.com/office/drawing/2014/main" id="{806E9D97-5D9B-4B2B-B8BD-D7FD2753E416}"/>
+                <a16:creationId xmlns:a16="http://schemas.microsoft.com/office/drawing/2014/main" id="{20A291B1-E812-47DD-8EEF-56C0BECBF654}"/>
               </a:ext>
             </a:extLst>
           </p:cNvPr>
@@ -4450,7 +4450,7 @@
           <p:cNvPr id="12" name="recap-item-1">
             <a:extLst xmlns:a="http://schemas.openxmlformats.org/drawingml/2006/main">
               <a:ext uri="{FF2B5EF4-FFF2-40B4-BE49-F238E27FC236}">
-                <a16:creationId xmlns:a16="http://schemas.microsoft.com/office/drawing/2014/main" id="{D95E9068-2D30-42EE-A6D8-94CD83D01D07}"/>
+                <a16:creationId xmlns:a16="http://schemas.microsoft.com/office/drawing/2014/main" id="{19987C9F-B1BA-47A8-B3C8-FF5A0E9DAB0B}"/>
               </a:ext>
             </a:extLst>
           </p:cNvPr>
@@ -4514,7 +4514,7 @@
           <p:cNvPr id="13" name="recap-connector-1">
             <a:extLst xmlns:a="http://schemas.openxmlformats.org/drawingml/2006/main">
               <a:ext uri="{FF2B5EF4-FFF2-40B4-BE49-F238E27FC236}">
-                <a16:creationId xmlns:a16="http://schemas.microsoft.com/office/drawing/2014/main" id="{0CE22885-D98A-4569-BC73-7A5B81E17A96}"/>
+                <a16:creationId xmlns:a16="http://schemas.microsoft.com/office/drawing/2014/main" id="{4B10B4FA-5AAC-47B3-ADE5-E7AE372ECAA2}"/>
               </a:ext>
             </a:extLst>
           </p:cNvPr>
@@ -4545,7 +4545,7 @@
           <p:cNvPr id="14" name="recap-circle-2">
             <a:extLst xmlns:a="http://schemas.openxmlformats.org/drawingml/2006/main">
               <a:ext uri="{FF2B5EF4-FFF2-40B4-BE49-F238E27FC236}">
-                <a16:creationId xmlns:a16="http://schemas.microsoft.com/office/drawing/2014/main" id="{DF30A6DC-4422-455F-82F9-6C4FE1CD2A31}"/>
+                <a16:creationId xmlns:a16="http://schemas.microsoft.com/office/drawing/2014/main" id="{65A6E816-7638-4F19-8E78-02CDB52CB2C9}"/>
               </a:ext>
             </a:extLst>
           </p:cNvPr>
@@ -4578,7 +4578,7 @@
           <p:cNvPr id="15" name="recap-number-2">
             <a:extLst xmlns:a="http://schemas.openxmlformats.org/drawingml/2006/main">
               <a:ext uri="{FF2B5EF4-FFF2-40B4-BE49-F238E27FC236}">
-                <a16:creationId xmlns:a16="http://schemas.microsoft.com/office/drawing/2014/main" id="{85401079-9960-4937-8E7F-F61611450578}"/>
+                <a16:creationId xmlns:a16="http://schemas.microsoft.com/office/drawing/2014/main" id="{F197D226-C5B1-4E26-A2BE-E5B9D80B9EB6}"/>
               </a:ext>
             </a:extLst>
           </p:cNvPr>
@@ -4636,7 +4636,7 @@
           <p:cNvPr id="16" name="recap-item-2">
             <a:extLst xmlns:a="http://schemas.openxmlformats.org/drawingml/2006/main">
               <a:ext uri="{FF2B5EF4-FFF2-40B4-BE49-F238E27FC236}">
-                <a16:creationId xmlns:a16="http://schemas.microsoft.com/office/drawing/2014/main" id="{43B9C9BA-2760-4163-A8E8-9ED82A174870}"/>
+                <a16:creationId xmlns:a16="http://schemas.microsoft.com/office/drawing/2014/main" id="{E72140D7-DD9D-4F8F-A92D-CF8B09858BF3}"/>
               </a:ext>
             </a:extLst>
           </p:cNvPr>
@@ -4698,7 +4698,7 @@
     </p:spTree>
     <p:extLst>
       <p:ext uri="{BB962C8B-B14F-4D97-AF65-F5344CB8AC3E}">
-        <p14:creationId xmlns:p14="http://schemas.microsoft.com/office/powerpoint/2010/main" val="813416920"/>
+        <p14:creationId xmlns:p14="http://schemas.microsoft.com/office/powerpoint/2010/main" val="15527876"/>
       </p:ext>
     </p:extLst>
   </p:cSld>
@@ -4729,7 +4729,7 @@
           <p:cNvPr id="1" name="s13-rule">
             <a:extLst xmlns:a="http://schemas.openxmlformats.org/drawingml/2006/main">
               <a:ext uri="{FF2B5EF4-FFF2-40B4-BE49-F238E27FC236}">
-                <a16:creationId xmlns:a16="http://schemas.microsoft.com/office/drawing/2014/main" id="{77D9A265-7E55-45F6-9E01-224075C84920}"/>
+                <a16:creationId xmlns:a16="http://schemas.microsoft.com/office/drawing/2014/main" id="{CF14897B-429D-47BE-A460-5339C7F8BAF8}"/>
               </a:ext>
             </a:extLst>
           </p:cNvPr>
@@ -4762,7 +4762,7 @@
           <p:cNvPr id="2" name="s13-eyebrow">
             <a:extLst xmlns:a="http://schemas.openxmlformats.org/drawingml/2006/main">
               <a:ext uri="{FF2B5EF4-FFF2-40B4-BE49-F238E27FC236}">
-                <a16:creationId xmlns:a16="http://schemas.microsoft.com/office/drawing/2014/main" id="{7A5FBE85-2F57-4668-93B7-3AEB433488F8}"/>
+                <a16:creationId xmlns:a16="http://schemas.microsoft.com/office/drawing/2014/main" id="{7ED16634-A2E9-47AB-8B9F-4878F6637EB5}"/>
               </a:ext>
             </a:extLst>
           </p:cNvPr>
@@ -4820,7 +4820,7 @@
           <p:cNvPr id="3" name="s13-title">
             <a:extLst xmlns:a="http://schemas.openxmlformats.org/drawingml/2006/main">
               <a:ext uri="{FF2B5EF4-FFF2-40B4-BE49-F238E27FC236}">
-                <a16:creationId xmlns:a16="http://schemas.microsoft.com/office/drawing/2014/main" id="{593C8991-A168-4863-8A79-415DA1E147DB}"/>
+                <a16:creationId xmlns:a16="http://schemas.microsoft.com/office/drawing/2014/main" id="{52E472B2-2966-475D-A8A7-B816D38560D4}"/>
               </a:ext>
             </a:extLst>
           </p:cNvPr>
@@ -4878,7 +4878,7 @@
           <p:cNvPr id="4" name="s13-footer">
             <a:extLst xmlns:a="http://schemas.openxmlformats.org/drawingml/2006/main">
               <a:ext uri="{FF2B5EF4-FFF2-40B4-BE49-F238E27FC236}">
-                <a16:creationId xmlns:a16="http://schemas.microsoft.com/office/drawing/2014/main" id="{24FE15AB-CCE9-458B-92C9-12CBC0CF6904}"/>
+                <a16:creationId xmlns:a16="http://schemas.microsoft.com/office/drawing/2014/main" id="{F96F2672-6CAA-4717-B84A-4AFE81ECFF96}"/>
               </a:ext>
             </a:extLst>
           </p:cNvPr>
@@ -4909,7 +4909,7 @@
           <p:cNvPr id="5" name="s13-identity">
             <a:extLst xmlns:a="http://schemas.openxmlformats.org/drawingml/2006/main">
               <a:ext uri="{FF2B5EF4-FFF2-40B4-BE49-F238E27FC236}">
-                <a16:creationId xmlns:a16="http://schemas.microsoft.com/office/drawing/2014/main" id="{3AB5D815-7AC8-4EEA-BDF8-EF23C83F4C8B}"/>
+                <a16:creationId xmlns:a16="http://schemas.microsoft.com/office/drawing/2014/main" id="{F9F949FA-C647-41B7-BE75-87FEF57F7C89}"/>
               </a:ext>
             </a:extLst>
           </p:cNvPr>
@@ -4967,7 +4967,7 @@
           <p:cNvPr id="6" name="source-0">
             <a:extLst xmlns:a="http://schemas.openxmlformats.org/drawingml/2006/main">
               <a:ext uri="{FF2B5EF4-FFF2-40B4-BE49-F238E27FC236}">
-                <a16:creationId xmlns:a16="http://schemas.microsoft.com/office/drawing/2014/main" id="{5CC075FE-1A1D-4128-A854-A92549E243FB}"/>
+                <a16:creationId xmlns:a16="http://schemas.microsoft.com/office/drawing/2014/main" id="{8F6FC3A2-991C-4FDF-A8F0-CFD262A72CEF}"/>
               </a:ext>
             </a:extLst>
           </p:cNvPr>
@@ -5031,7 +5031,7 @@
           <p:cNvPr id="7" name="source-1">
             <a:extLst xmlns:a="http://schemas.openxmlformats.org/drawingml/2006/main">
               <a:ext uri="{FF2B5EF4-FFF2-40B4-BE49-F238E27FC236}">
-                <a16:creationId xmlns:a16="http://schemas.microsoft.com/office/drawing/2014/main" id="{5A53284C-52CD-487B-9333-23BB83BEE636}"/>
+                <a16:creationId xmlns:a16="http://schemas.microsoft.com/office/drawing/2014/main" id="{527A3D60-8EFE-41D1-B121-E27BDD1E2240}"/>
               </a:ext>
             </a:extLst>
           </p:cNvPr>
@@ -5095,7 +5095,7 @@
           <p:cNvPr id="8" name="source-2">
             <a:extLst xmlns:a="http://schemas.openxmlformats.org/drawingml/2006/main">
               <a:ext uri="{FF2B5EF4-FFF2-40B4-BE49-F238E27FC236}">
-                <a16:creationId xmlns:a16="http://schemas.microsoft.com/office/drawing/2014/main" id="{6F1C3701-67A5-4F4A-91D6-9D26F5634C82}"/>
+                <a16:creationId xmlns:a16="http://schemas.microsoft.com/office/drawing/2014/main" id="{448553F9-3224-408D-87B3-39BCF2FB5020}"/>
               </a:ext>
             </a:extLst>
           </p:cNvPr>
@@ -5159,7 +5159,7 @@
           <p:cNvPr id="9" name="source-3">
             <a:extLst xmlns:a="http://schemas.openxmlformats.org/drawingml/2006/main">
               <a:ext uri="{FF2B5EF4-FFF2-40B4-BE49-F238E27FC236}">
-                <a16:creationId xmlns:a16="http://schemas.microsoft.com/office/drawing/2014/main" id="{A7165711-2D0B-4C1A-9856-4CBA99438AE7}"/>
+                <a16:creationId xmlns:a16="http://schemas.microsoft.com/office/drawing/2014/main" id="{97F94958-050C-4157-A15D-B960BE8D6FBB}"/>
               </a:ext>
             </a:extLst>
           </p:cNvPr>
@@ -5223,7 +5223,7 @@
           <p:cNvPr id="10" name="source-4">
             <a:extLst xmlns:a="http://schemas.openxmlformats.org/drawingml/2006/main">
               <a:ext uri="{FF2B5EF4-FFF2-40B4-BE49-F238E27FC236}">
-                <a16:creationId xmlns:a16="http://schemas.microsoft.com/office/drawing/2014/main" id="{5C8F313A-53F1-42EB-9090-12AE999B1E51}"/>
+                <a16:creationId xmlns:a16="http://schemas.microsoft.com/office/drawing/2014/main" id="{09655161-0A27-4591-8165-72DAAAE3BFEE}"/>
               </a:ext>
             </a:extLst>
           </p:cNvPr>
@@ -5287,7 +5287,7 @@
           <p:cNvPr id="11" name="s13-takeaway-rule">
             <a:extLst xmlns:a="http://schemas.openxmlformats.org/drawingml/2006/main">
               <a:ext uri="{FF2B5EF4-FFF2-40B4-BE49-F238E27FC236}">
-                <a16:creationId xmlns:a16="http://schemas.microsoft.com/office/drawing/2014/main" id="{13B42AA2-7602-41AC-A957-7CDB532ACD5E}"/>
+                <a16:creationId xmlns:a16="http://schemas.microsoft.com/office/drawing/2014/main" id="{0CBCEEEB-B26E-4AB6-8538-45B7AF2B74A1}"/>
               </a:ext>
             </a:extLst>
           </p:cNvPr>
@@ -5320,7 +5320,7 @@
           <p:cNvPr id="12" name="s13-takeaway">
             <a:extLst xmlns:a="http://schemas.openxmlformats.org/drawingml/2006/main">
               <a:ext uri="{FF2B5EF4-FFF2-40B4-BE49-F238E27FC236}">
-                <a16:creationId xmlns:a16="http://schemas.microsoft.com/office/drawing/2014/main" id="{FAC7EB7F-B04D-4EC7-8FC6-C79EC6CDF245}"/>
+                <a16:creationId xmlns:a16="http://schemas.microsoft.com/office/drawing/2014/main" id="{026D6451-1963-40DE-B81A-0C3C276613AB}"/>
               </a:ext>
             </a:extLst>
           </p:cNvPr>
@@ -5345,7 +5345,7 @@
         </p:spPr>
         <p:txBody>
           <a:bodyPr xmlns:a="http://schemas.openxmlformats.org/drawingml/2006/main" lIns="0" tIns="0" rIns="0" bIns="0" anchor="ctr">
-            <a:normAutofit fontScale="95911"/>
+            <a:normAutofit fontScale="100000"/>
           </a:bodyPr>
           <a:lstStyle xmlns:a="http://schemas.openxmlformats.org/drawingml/2006/main"/>
           <a:p xmlns:a="http://schemas.openxmlformats.org/drawingml/2006/main">
@@ -5368,7 +5368,7 @@
                 <a:ea typeface="PingFang SC"/>
                 <a:cs typeface="PingFang SC"/>
               </a:rPr>
-              <a:t>课程精编页用于讲授主线；播放器中的“原课件”模式保留团队 PowerPoint 精选页、真实图片和可播放视频。</a:t>
+              <a:t>课程正文与幻灯片共享同一知识主线，图片和视频用于帮助理解本节概念与案例。</a:t>
             </a:r>
           </a:p>
         </p:txBody>
@@ -5376,7 +5376,7 @@
     </p:spTree>
     <p:extLst>
       <p:ext uri="{BB962C8B-B14F-4D97-AF65-F5344CB8AC3E}">
-        <p14:creationId xmlns:p14="http://schemas.microsoft.com/office/powerpoint/2010/main" val="1926286341"/>
+        <p14:creationId xmlns:p14="http://schemas.microsoft.com/office/powerpoint/2010/main" val="2119846854"/>
       </p:ext>
     </p:extLst>
   </p:cSld>
@@ -5407,7 +5407,7 @@
           <p:cNvPr id="1" name="s2-rule">
             <a:extLst xmlns:a="http://schemas.openxmlformats.org/drawingml/2006/main">
               <a:ext uri="{FF2B5EF4-FFF2-40B4-BE49-F238E27FC236}">
-                <a16:creationId xmlns:a16="http://schemas.microsoft.com/office/drawing/2014/main" id="{1315C742-A5C0-41BC-92F9-85EB5758BDF6}"/>
+                <a16:creationId xmlns:a16="http://schemas.microsoft.com/office/drawing/2014/main" id="{8D33D6E1-08DF-4779-BB56-D3FB89021F86}"/>
               </a:ext>
             </a:extLst>
           </p:cNvPr>
@@ -5440,7 +5440,7 @@
           <p:cNvPr id="2" name="s2-eyebrow">
             <a:extLst xmlns:a="http://schemas.openxmlformats.org/drawingml/2006/main">
               <a:ext uri="{FF2B5EF4-FFF2-40B4-BE49-F238E27FC236}">
-                <a16:creationId xmlns:a16="http://schemas.microsoft.com/office/drawing/2014/main" id="{A1A1CB9A-1B72-4381-8905-8A9BF4879B89}"/>
+                <a16:creationId xmlns:a16="http://schemas.microsoft.com/office/drawing/2014/main" id="{66123421-56DB-4146-B049-4EE99D4B9A49}"/>
               </a:ext>
             </a:extLst>
           </p:cNvPr>
@@ -5498,7 +5498,7 @@
           <p:cNvPr id="3" name="s2-title">
             <a:extLst xmlns:a="http://schemas.openxmlformats.org/drawingml/2006/main">
               <a:ext uri="{FF2B5EF4-FFF2-40B4-BE49-F238E27FC236}">
-                <a16:creationId xmlns:a16="http://schemas.microsoft.com/office/drawing/2014/main" id="{37F63961-7F3D-419B-8CE6-FB3F0763B5B9}"/>
+                <a16:creationId xmlns:a16="http://schemas.microsoft.com/office/drawing/2014/main" id="{8A9F8943-BE67-4F40-9A81-BB5CED305844}"/>
               </a:ext>
             </a:extLst>
           </p:cNvPr>
@@ -5556,7 +5556,7 @@
           <p:cNvPr id="4" name="s2-footer">
             <a:extLst xmlns:a="http://schemas.openxmlformats.org/drawingml/2006/main">
               <a:ext uri="{FF2B5EF4-FFF2-40B4-BE49-F238E27FC236}">
-                <a16:creationId xmlns:a16="http://schemas.microsoft.com/office/drawing/2014/main" id="{C5BE793A-8307-41B4-878B-C589758237F7}"/>
+                <a16:creationId xmlns:a16="http://schemas.microsoft.com/office/drawing/2014/main" id="{998FEB27-385B-4452-8577-36BE1AB4D35A}"/>
               </a:ext>
             </a:extLst>
           </p:cNvPr>
@@ -5587,7 +5587,7 @@
           <p:cNvPr id="5" name="s2-identity">
             <a:extLst xmlns:a="http://schemas.openxmlformats.org/drawingml/2006/main">
               <a:ext uri="{FF2B5EF4-FFF2-40B4-BE49-F238E27FC236}">
-                <a16:creationId xmlns:a16="http://schemas.microsoft.com/office/drawing/2014/main" id="{624A851A-6742-41F0-B0B0-5A1B1E03830F}"/>
+                <a16:creationId xmlns:a16="http://schemas.microsoft.com/office/drawing/2014/main" id="{E20BF493-9A4B-45EA-8F6C-BBB156908E45}"/>
               </a:ext>
             </a:extLst>
           </p:cNvPr>
@@ -5645,7 +5645,7 @@
           <p:cNvPr id="6" name="objective-1">
             <a:extLst xmlns:a="http://schemas.openxmlformats.org/drawingml/2006/main">
               <a:ext uri="{FF2B5EF4-FFF2-40B4-BE49-F238E27FC236}">
-                <a16:creationId xmlns:a16="http://schemas.microsoft.com/office/drawing/2014/main" id="{B3B7EE6B-C9EF-44C5-9841-474C04BDB48C}"/>
+                <a16:creationId xmlns:a16="http://schemas.microsoft.com/office/drawing/2014/main" id="{DAFB53C1-847D-4023-ACA5-380470CE4846}"/>
               </a:ext>
             </a:extLst>
           </p:cNvPr>
@@ -5732,7 +5732,7 @@
           <p:cNvPr id="7" name="objective-2">
             <a:extLst xmlns:a="http://schemas.openxmlformats.org/drawingml/2006/main">
               <a:ext uri="{FF2B5EF4-FFF2-40B4-BE49-F238E27FC236}">
-                <a16:creationId xmlns:a16="http://schemas.microsoft.com/office/drawing/2014/main" id="{7D2827D6-4A7E-4B57-9ACE-36186FBC588B}"/>
+                <a16:creationId xmlns:a16="http://schemas.microsoft.com/office/drawing/2014/main" id="{E811DC6B-5D7B-401A-8E7E-81A103F611B0}"/>
               </a:ext>
             </a:extLst>
           </p:cNvPr>
@@ -5819,7 +5819,7 @@
           <p:cNvPr id="8" name="objective-3">
             <a:extLst xmlns:a="http://schemas.openxmlformats.org/drawingml/2006/main">
               <a:ext uri="{FF2B5EF4-FFF2-40B4-BE49-F238E27FC236}">
-                <a16:creationId xmlns:a16="http://schemas.microsoft.com/office/drawing/2014/main" id="{456918C9-18EA-41D9-B427-25516B9B7E7F}"/>
+                <a16:creationId xmlns:a16="http://schemas.microsoft.com/office/drawing/2014/main" id="{2A26EA30-9037-43C3-A9EF-0BFB212AD18A}"/>
               </a:ext>
             </a:extLst>
           </p:cNvPr>
@@ -5906,7 +5906,7 @@
           <p:cNvPr id="9" name="objective-4">
             <a:extLst xmlns:a="http://schemas.openxmlformats.org/drawingml/2006/main">
               <a:ext uri="{FF2B5EF4-FFF2-40B4-BE49-F238E27FC236}">
-                <a16:creationId xmlns:a16="http://schemas.microsoft.com/office/drawing/2014/main" id="{D98A9505-31C0-4316-887C-2F1BF53E7D04}"/>
+                <a16:creationId xmlns:a16="http://schemas.microsoft.com/office/drawing/2014/main" id="{32DC6FDC-8239-47C6-9492-1162E04D10B2}"/>
               </a:ext>
             </a:extLst>
           </p:cNvPr>
@@ -5991,7 +5991,7 @@
     </p:spTree>
     <p:extLst>
       <p:ext uri="{BB962C8B-B14F-4D97-AF65-F5344CB8AC3E}">
-        <p14:creationId xmlns:p14="http://schemas.microsoft.com/office/powerpoint/2010/main" val="771935138"/>
+        <p14:creationId xmlns:p14="http://schemas.microsoft.com/office/powerpoint/2010/main" val="2065204331"/>
       </p:ext>
     </p:extLst>
   </p:cSld>
@@ -6022,7 +6022,7 @@
           <p:cNvPr id="1" name="s3-rule">
             <a:extLst xmlns:a="http://schemas.openxmlformats.org/drawingml/2006/main">
               <a:ext uri="{FF2B5EF4-FFF2-40B4-BE49-F238E27FC236}">
-                <a16:creationId xmlns:a16="http://schemas.microsoft.com/office/drawing/2014/main" id="{9CC29709-7DCD-4454-A479-F6C7F66CF541}"/>
+                <a16:creationId xmlns:a16="http://schemas.microsoft.com/office/drawing/2014/main" id="{18799B36-0909-4225-BC17-4720C7C8490E}"/>
               </a:ext>
             </a:extLst>
           </p:cNvPr>
@@ -6055,7 +6055,7 @@
           <p:cNvPr id="2" name="s3-eyebrow">
             <a:extLst xmlns:a="http://schemas.openxmlformats.org/drawingml/2006/main">
               <a:ext uri="{FF2B5EF4-FFF2-40B4-BE49-F238E27FC236}">
-                <a16:creationId xmlns:a16="http://schemas.microsoft.com/office/drawing/2014/main" id="{0E0A2ECA-C7F7-4FBE-9138-23390AD88A42}"/>
+                <a16:creationId xmlns:a16="http://schemas.microsoft.com/office/drawing/2014/main" id="{0BEC5F6E-56BF-4A9A-807A-481C5EB817A7}"/>
               </a:ext>
             </a:extLst>
           </p:cNvPr>
@@ -6113,7 +6113,7 @@
           <p:cNvPr id="3" name="s3-title">
             <a:extLst xmlns:a="http://schemas.openxmlformats.org/drawingml/2006/main">
               <a:ext uri="{FF2B5EF4-FFF2-40B4-BE49-F238E27FC236}">
-                <a16:creationId xmlns:a16="http://schemas.microsoft.com/office/drawing/2014/main" id="{7B8B5664-CFD2-495B-AFAB-3713DB6065CB}"/>
+                <a16:creationId xmlns:a16="http://schemas.microsoft.com/office/drawing/2014/main" id="{CB028496-5F01-4D8E-8A17-2FA68FC3B8E7}"/>
               </a:ext>
             </a:extLst>
           </p:cNvPr>
@@ -6171,7 +6171,7 @@
           <p:cNvPr id="4" name="s3-footer">
             <a:extLst xmlns:a="http://schemas.openxmlformats.org/drawingml/2006/main">
               <a:ext uri="{FF2B5EF4-FFF2-40B4-BE49-F238E27FC236}">
-                <a16:creationId xmlns:a16="http://schemas.microsoft.com/office/drawing/2014/main" id="{2BCBF481-EC76-40D7-B61D-39DA5E40F5F4}"/>
+                <a16:creationId xmlns:a16="http://schemas.microsoft.com/office/drawing/2014/main" id="{C8610E37-610E-4739-B1EA-57E085A85349}"/>
               </a:ext>
             </a:extLst>
           </p:cNvPr>
@@ -6202,7 +6202,7 @@
           <p:cNvPr id="5" name="s3-identity">
             <a:extLst xmlns:a="http://schemas.openxmlformats.org/drawingml/2006/main">
               <a:ext uri="{FF2B5EF4-FFF2-40B4-BE49-F238E27FC236}">
-                <a16:creationId xmlns:a16="http://schemas.microsoft.com/office/drawing/2014/main" id="{096DC104-66CA-4C84-A68F-8AD52591E6D1}"/>
+                <a16:creationId xmlns:a16="http://schemas.microsoft.com/office/drawing/2014/main" id="{6A2B18A6-72F3-49E7-B57F-AB971B71311C}"/>
               </a:ext>
             </a:extLst>
           </p:cNvPr>
@@ -6260,7 +6260,7 @@
           <p:cNvPr id="6" name="core-no-0">
             <a:extLst xmlns:a="http://schemas.openxmlformats.org/drawingml/2006/main">
               <a:ext uri="{FF2B5EF4-FFF2-40B4-BE49-F238E27FC236}">
-                <a16:creationId xmlns:a16="http://schemas.microsoft.com/office/drawing/2014/main" id="{644416CC-58BD-4BA9-9600-36CEE02C0560}"/>
+                <a16:creationId xmlns:a16="http://schemas.microsoft.com/office/drawing/2014/main" id="{44649854-7D5F-4951-825E-FF160DC614E5}"/>
               </a:ext>
             </a:extLst>
           </p:cNvPr>
@@ -6318,7 +6318,7 @@
           <p:cNvPr id="7" name="core-label-0">
             <a:extLst xmlns:a="http://schemas.openxmlformats.org/drawingml/2006/main">
               <a:ext uri="{FF2B5EF4-FFF2-40B4-BE49-F238E27FC236}">
-                <a16:creationId xmlns:a16="http://schemas.microsoft.com/office/drawing/2014/main" id="{00A5C740-A65B-4733-BB7A-4AE8302F61C7}"/>
+                <a16:creationId xmlns:a16="http://schemas.microsoft.com/office/drawing/2014/main" id="{1A05086E-A9F9-4DA1-B081-EA0AD9F2CC6C}"/>
               </a:ext>
             </a:extLst>
           </p:cNvPr>
@@ -6376,7 +6376,7 @@
           <p:cNvPr id="8" name="core-body-0">
             <a:extLst xmlns:a="http://schemas.openxmlformats.org/drawingml/2006/main">
               <a:ext uri="{FF2B5EF4-FFF2-40B4-BE49-F238E27FC236}">
-                <a16:creationId xmlns:a16="http://schemas.microsoft.com/office/drawing/2014/main" id="{591BAB86-D076-4BD5-A75F-86E6CFC1DEC4}"/>
+                <a16:creationId xmlns:a16="http://schemas.microsoft.com/office/drawing/2014/main" id="{ACA0374A-8632-4E39-8738-8BE175E83BE6}"/>
               </a:ext>
             </a:extLst>
           </p:cNvPr>
@@ -6440,7 +6440,7 @@
           <p:cNvPr id="9" name="core-no-1">
             <a:extLst xmlns:a="http://schemas.openxmlformats.org/drawingml/2006/main">
               <a:ext uri="{FF2B5EF4-FFF2-40B4-BE49-F238E27FC236}">
-                <a16:creationId xmlns:a16="http://schemas.microsoft.com/office/drawing/2014/main" id="{8BCF8688-FCAA-4230-A16C-7B3DDB8D5D63}"/>
+                <a16:creationId xmlns:a16="http://schemas.microsoft.com/office/drawing/2014/main" id="{C80915E8-2776-45C8-A49C-D7C3D250E6A8}"/>
               </a:ext>
             </a:extLst>
           </p:cNvPr>
@@ -6498,7 +6498,7 @@
           <p:cNvPr id="10" name="core-body-1">
             <a:extLst xmlns:a="http://schemas.openxmlformats.org/drawingml/2006/main">
               <a:ext uri="{FF2B5EF4-FFF2-40B4-BE49-F238E27FC236}">
-                <a16:creationId xmlns:a16="http://schemas.microsoft.com/office/drawing/2014/main" id="{82AE27E7-D90E-4007-9333-4EAABCCAB811}"/>
+                <a16:creationId xmlns:a16="http://schemas.microsoft.com/office/drawing/2014/main" id="{B86C4A7F-EB49-42E3-B63E-DC9609FABC98}"/>
               </a:ext>
             </a:extLst>
           </p:cNvPr>
@@ -6562,7 +6562,7 @@
           <p:cNvPr id="11" name="core-no-2">
             <a:extLst xmlns:a="http://schemas.openxmlformats.org/drawingml/2006/main">
               <a:ext uri="{FF2B5EF4-FFF2-40B4-BE49-F238E27FC236}">
-                <a16:creationId xmlns:a16="http://schemas.microsoft.com/office/drawing/2014/main" id="{DD96CB2B-FFB4-4969-B0D4-A731F2250C41}"/>
+                <a16:creationId xmlns:a16="http://schemas.microsoft.com/office/drawing/2014/main" id="{253CC4FA-DAD7-4E25-828B-34EFC26489DA}"/>
               </a:ext>
             </a:extLst>
           </p:cNvPr>
@@ -6620,7 +6620,7 @@
           <p:cNvPr id="12" name="core-body-2">
             <a:extLst xmlns:a="http://schemas.openxmlformats.org/drawingml/2006/main">
               <a:ext uri="{FF2B5EF4-FFF2-40B4-BE49-F238E27FC236}">
-                <a16:creationId xmlns:a16="http://schemas.microsoft.com/office/drawing/2014/main" id="{7EDBDDBC-FFB4-4DC3-BE6F-78FBCAD7E444}"/>
+                <a16:creationId xmlns:a16="http://schemas.microsoft.com/office/drawing/2014/main" id="{E26B9F6A-9FDC-44E6-ACC3-8C8E43BD8D52}"/>
               </a:ext>
             </a:extLst>
           </p:cNvPr>
@@ -6684,7 +6684,7 @@
           <p:cNvPr id="13" name="s3-takeaway-rule">
             <a:extLst xmlns:a="http://schemas.openxmlformats.org/drawingml/2006/main">
               <a:ext uri="{FF2B5EF4-FFF2-40B4-BE49-F238E27FC236}">
-                <a16:creationId xmlns:a16="http://schemas.microsoft.com/office/drawing/2014/main" id="{37D92C66-F588-4652-AF34-5F56F976EA50}"/>
+                <a16:creationId xmlns:a16="http://schemas.microsoft.com/office/drawing/2014/main" id="{DCE0AADF-6F01-42D1-8104-56B79C20C13A}"/>
               </a:ext>
             </a:extLst>
           </p:cNvPr>
@@ -6717,7 +6717,7 @@
           <p:cNvPr id="14" name="s3-takeaway">
             <a:extLst xmlns:a="http://schemas.openxmlformats.org/drawingml/2006/main">
               <a:ext uri="{FF2B5EF4-FFF2-40B4-BE49-F238E27FC236}">
-                <a16:creationId xmlns:a16="http://schemas.microsoft.com/office/drawing/2014/main" id="{B59E72C5-FA39-4B99-B554-8E8810EA225D}"/>
+                <a16:creationId xmlns:a16="http://schemas.microsoft.com/office/drawing/2014/main" id="{E876C2B1-6CAE-419A-BB48-C8E610C313D7}"/>
               </a:ext>
             </a:extLst>
           </p:cNvPr>
@@ -6773,7 +6773,7 @@
     </p:spTree>
     <p:extLst>
       <p:ext uri="{BB962C8B-B14F-4D97-AF65-F5344CB8AC3E}">
-        <p14:creationId xmlns:p14="http://schemas.microsoft.com/office/powerpoint/2010/main" val="1170534325"/>
+        <p14:creationId xmlns:p14="http://schemas.microsoft.com/office/powerpoint/2010/main" val="619985706"/>
       </p:ext>
     </p:extLst>
   </p:cSld>
@@ -6804,7 +6804,7 @@
           <p:cNvPr id="1" name="s4-rule">
             <a:extLst xmlns:a="http://schemas.openxmlformats.org/drawingml/2006/main">
               <a:ext uri="{FF2B5EF4-FFF2-40B4-BE49-F238E27FC236}">
-                <a16:creationId xmlns:a16="http://schemas.microsoft.com/office/drawing/2014/main" id="{127DA259-B2C2-4D65-A77A-795C0EEACF2C}"/>
+                <a16:creationId xmlns:a16="http://schemas.microsoft.com/office/drawing/2014/main" id="{3C2F95EB-5965-4155-B0B6-F944EB42B1F9}"/>
               </a:ext>
             </a:extLst>
           </p:cNvPr>
@@ -6837,7 +6837,7 @@
           <p:cNvPr id="2" name="s4-eyebrow">
             <a:extLst xmlns:a="http://schemas.openxmlformats.org/drawingml/2006/main">
               <a:ext uri="{FF2B5EF4-FFF2-40B4-BE49-F238E27FC236}">
-                <a16:creationId xmlns:a16="http://schemas.microsoft.com/office/drawing/2014/main" id="{17677381-0F8C-4242-A685-8E08C8058D9D}"/>
+                <a16:creationId xmlns:a16="http://schemas.microsoft.com/office/drawing/2014/main" id="{88401073-3F25-4A21-AFCB-0EDF0D8B9DD3}"/>
               </a:ext>
             </a:extLst>
           </p:cNvPr>
@@ -6895,7 +6895,7 @@
           <p:cNvPr id="3" name="s4-title">
             <a:extLst xmlns:a="http://schemas.openxmlformats.org/drawingml/2006/main">
               <a:ext uri="{FF2B5EF4-FFF2-40B4-BE49-F238E27FC236}">
-                <a16:creationId xmlns:a16="http://schemas.microsoft.com/office/drawing/2014/main" id="{4D6A2D17-E3B2-4D11-B89E-C888F012E808}"/>
+                <a16:creationId xmlns:a16="http://schemas.microsoft.com/office/drawing/2014/main" id="{4640B81E-E6B1-448F-9322-DBF5957C8C26}"/>
               </a:ext>
             </a:extLst>
           </p:cNvPr>
@@ -6953,7 +6953,7 @@
           <p:cNvPr id="4" name="s4-footer">
             <a:extLst xmlns:a="http://schemas.openxmlformats.org/drawingml/2006/main">
               <a:ext uri="{FF2B5EF4-FFF2-40B4-BE49-F238E27FC236}">
-                <a16:creationId xmlns:a16="http://schemas.microsoft.com/office/drawing/2014/main" id="{3FA3C238-E525-4075-9033-D854BF525961}"/>
+                <a16:creationId xmlns:a16="http://schemas.microsoft.com/office/drawing/2014/main" id="{925DA51A-28D4-4E34-91A4-2949FFA0BA35}"/>
               </a:ext>
             </a:extLst>
           </p:cNvPr>
@@ -6984,7 +6984,7 @@
           <p:cNvPr id="5" name="s4-identity">
             <a:extLst xmlns:a="http://schemas.openxmlformats.org/drawingml/2006/main">
               <a:ext uri="{FF2B5EF4-FFF2-40B4-BE49-F238E27FC236}">
-                <a16:creationId xmlns:a16="http://schemas.microsoft.com/office/drawing/2014/main" id="{B93D52A4-9E6F-4DFC-BF6C-9C3FFD9126DF}"/>
+                <a16:creationId xmlns:a16="http://schemas.microsoft.com/office/drawing/2014/main" id="{721EB2DF-A55D-4214-B1E5-61231ED44799}"/>
               </a:ext>
             </a:extLst>
           </p:cNvPr>
@@ -7042,7 +7042,7 @@
           <p:cNvPr id="6" name="core-no-0">
             <a:extLst xmlns:a="http://schemas.openxmlformats.org/drawingml/2006/main">
               <a:ext uri="{FF2B5EF4-FFF2-40B4-BE49-F238E27FC236}">
-                <a16:creationId xmlns:a16="http://schemas.microsoft.com/office/drawing/2014/main" id="{E22CB8C4-B36C-479D-8A92-A8E1302FE2A0}"/>
+                <a16:creationId xmlns:a16="http://schemas.microsoft.com/office/drawing/2014/main" id="{F0A97EA0-C90C-43F2-893F-353F5DFE2A25}"/>
               </a:ext>
             </a:extLst>
           </p:cNvPr>
@@ -7100,7 +7100,7 @@
           <p:cNvPr id="7" name="core-label-0">
             <a:extLst xmlns:a="http://schemas.openxmlformats.org/drawingml/2006/main">
               <a:ext uri="{FF2B5EF4-FFF2-40B4-BE49-F238E27FC236}">
-                <a16:creationId xmlns:a16="http://schemas.microsoft.com/office/drawing/2014/main" id="{FFCA4631-A96C-4E01-BDD8-8A1A6EBCB24B}"/>
+                <a16:creationId xmlns:a16="http://schemas.microsoft.com/office/drawing/2014/main" id="{BA8F6FBB-6053-48BE-9927-A2084E4BE62F}"/>
               </a:ext>
             </a:extLst>
           </p:cNvPr>
@@ -7158,7 +7158,7 @@
           <p:cNvPr id="8" name="core-body-0">
             <a:extLst xmlns:a="http://schemas.openxmlformats.org/drawingml/2006/main">
               <a:ext uri="{FF2B5EF4-FFF2-40B4-BE49-F238E27FC236}">
-                <a16:creationId xmlns:a16="http://schemas.microsoft.com/office/drawing/2014/main" id="{66B4B411-866A-4E69-8734-1FB1618608B4}"/>
+                <a16:creationId xmlns:a16="http://schemas.microsoft.com/office/drawing/2014/main" id="{FBC586F5-9538-46B4-AF89-320D083D3B20}"/>
               </a:ext>
             </a:extLst>
           </p:cNvPr>
@@ -7222,7 +7222,7 @@
           <p:cNvPr id="9" name="core-no-1">
             <a:extLst xmlns:a="http://schemas.openxmlformats.org/drawingml/2006/main">
               <a:ext uri="{FF2B5EF4-FFF2-40B4-BE49-F238E27FC236}">
-                <a16:creationId xmlns:a16="http://schemas.microsoft.com/office/drawing/2014/main" id="{75A12A32-3DAB-46B2-9B16-01B7872ED9AE}"/>
+                <a16:creationId xmlns:a16="http://schemas.microsoft.com/office/drawing/2014/main" id="{A0FEDC96-0A89-47B0-8A4F-DB5E5C820E99}"/>
               </a:ext>
             </a:extLst>
           </p:cNvPr>
@@ -7280,7 +7280,7 @@
           <p:cNvPr id="10" name="core-body-1">
             <a:extLst xmlns:a="http://schemas.openxmlformats.org/drawingml/2006/main">
               <a:ext uri="{FF2B5EF4-FFF2-40B4-BE49-F238E27FC236}">
-                <a16:creationId xmlns:a16="http://schemas.microsoft.com/office/drawing/2014/main" id="{2F47C865-197A-40D3-BB34-45A07FE33018}"/>
+                <a16:creationId xmlns:a16="http://schemas.microsoft.com/office/drawing/2014/main" id="{9216D338-B3C6-48AB-BE07-55FFCBD80E37}"/>
               </a:ext>
             </a:extLst>
           </p:cNvPr>
@@ -7344,7 +7344,7 @@
           <p:cNvPr id="11" name="core-no-2">
             <a:extLst xmlns:a="http://schemas.openxmlformats.org/drawingml/2006/main">
               <a:ext uri="{FF2B5EF4-FFF2-40B4-BE49-F238E27FC236}">
-                <a16:creationId xmlns:a16="http://schemas.microsoft.com/office/drawing/2014/main" id="{02CC0EBC-7635-44D8-A10E-83B63616CD1A}"/>
+                <a16:creationId xmlns:a16="http://schemas.microsoft.com/office/drawing/2014/main" id="{38F39498-F4E7-4555-960E-814B27031120}"/>
               </a:ext>
             </a:extLst>
           </p:cNvPr>
@@ -7402,7 +7402,7 @@
           <p:cNvPr id="12" name="core-body-2">
             <a:extLst xmlns:a="http://schemas.openxmlformats.org/drawingml/2006/main">
               <a:ext uri="{FF2B5EF4-FFF2-40B4-BE49-F238E27FC236}">
-                <a16:creationId xmlns:a16="http://schemas.microsoft.com/office/drawing/2014/main" id="{96D1C34A-C441-43B3-AD97-17263B2163DB}"/>
+                <a16:creationId xmlns:a16="http://schemas.microsoft.com/office/drawing/2014/main" id="{0BB00B06-B274-4A20-8F7B-CE06076EC339}"/>
               </a:ext>
             </a:extLst>
           </p:cNvPr>
@@ -7466,7 +7466,7 @@
           <p:cNvPr id="13" name="s4-takeaway-rule">
             <a:extLst xmlns:a="http://schemas.openxmlformats.org/drawingml/2006/main">
               <a:ext uri="{FF2B5EF4-FFF2-40B4-BE49-F238E27FC236}">
-                <a16:creationId xmlns:a16="http://schemas.microsoft.com/office/drawing/2014/main" id="{7F1F8FDF-D2D6-4BAE-884A-9BE4F3A0C696}"/>
+                <a16:creationId xmlns:a16="http://schemas.microsoft.com/office/drawing/2014/main" id="{5E67FDE8-F0EC-48CE-8F9A-A2B72BC4FEDD}"/>
               </a:ext>
             </a:extLst>
           </p:cNvPr>
@@ -7499,7 +7499,7 @@
           <p:cNvPr id="14" name="s4-takeaway">
             <a:extLst xmlns:a="http://schemas.openxmlformats.org/drawingml/2006/main">
               <a:ext uri="{FF2B5EF4-FFF2-40B4-BE49-F238E27FC236}">
-                <a16:creationId xmlns:a16="http://schemas.microsoft.com/office/drawing/2014/main" id="{19B6FB24-58D5-4C49-875B-60855D76004E}"/>
+                <a16:creationId xmlns:a16="http://schemas.microsoft.com/office/drawing/2014/main" id="{FB5BBE84-9F8B-40D2-B037-6DAB77E7DE76}"/>
               </a:ext>
             </a:extLst>
           </p:cNvPr>
@@ -7555,7 +7555,7 @@
     </p:spTree>
     <p:extLst>
       <p:ext uri="{BB962C8B-B14F-4D97-AF65-F5344CB8AC3E}">
-        <p14:creationId xmlns:p14="http://schemas.microsoft.com/office/powerpoint/2010/main" val="1181866139"/>
+        <p14:creationId xmlns:p14="http://schemas.microsoft.com/office/powerpoint/2010/main" val="641397015"/>
       </p:ext>
     </p:extLst>
   </p:cSld>
@@ -7586,7 +7586,7 @@
           <p:cNvPr id="1" name="s5-rule">
             <a:extLst xmlns:a="http://schemas.openxmlformats.org/drawingml/2006/main">
               <a:ext uri="{FF2B5EF4-FFF2-40B4-BE49-F238E27FC236}">
-                <a16:creationId xmlns:a16="http://schemas.microsoft.com/office/drawing/2014/main" id="{B98580CF-A050-412A-9E84-7DE6D818BBBD}"/>
+                <a16:creationId xmlns:a16="http://schemas.microsoft.com/office/drawing/2014/main" id="{257751AB-7246-42FA-8361-B77323D11B92}"/>
               </a:ext>
             </a:extLst>
           </p:cNvPr>
@@ -7619,7 +7619,7 @@
           <p:cNvPr id="2" name="s5-eyebrow">
             <a:extLst xmlns:a="http://schemas.openxmlformats.org/drawingml/2006/main">
               <a:ext uri="{FF2B5EF4-FFF2-40B4-BE49-F238E27FC236}">
-                <a16:creationId xmlns:a16="http://schemas.microsoft.com/office/drawing/2014/main" id="{C2584258-D0A6-49EF-87FD-130474DBC346}"/>
+                <a16:creationId xmlns:a16="http://schemas.microsoft.com/office/drawing/2014/main" id="{3568A94E-5ADF-4320-A249-04E60ECC701A}"/>
               </a:ext>
             </a:extLst>
           </p:cNvPr>
@@ -7677,7 +7677,7 @@
           <p:cNvPr id="3" name="s5-title">
             <a:extLst xmlns:a="http://schemas.openxmlformats.org/drawingml/2006/main">
               <a:ext uri="{FF2B5EF4-FFF2-40B4-BE49-F238E27FC236}">
-                <a16:creationId xmlns:a16="http://schemas.microsoft.com/office/drawing/2014/main" id="{79EB6F13-E0B7-44E4-A3FB-ADE97500AAED}"/>
+                <a16:creationId xmlns:a16="http://schemas.microsoft.com/office/drawing/2014/main" id="{B13259E2-FA50-460B-A2C7-CF6525A3D27E}"/>
               </a:ext>
             </a:extLst>
           </p:cNvPr>
@@ -7735,7 +7735,7 @@
           <p:cNvPr id="4" name="s5-footer">
             <a:extLst xmlns:a="http://schemas.openxmlformats.org/drawingml/2006/main">
               <a:ext uri="{FF2B5EF4-FFF2-40B4-BE49-F238E27FC236}">
-                <a16:creationId xmlns:a16="http://schemas.microsoft.com/office/drawing/2014/main" id="{A49D42BB-DB76-4FF6-9415-1ADA694A5EB6}"/>
+                <a16:creationId xmlns:a16="http://schemas.microsoft.com/office/drawing/2014/main" id="{A7F93426-A50C-4039-8204-CC25A25E3BE9}"/>
               </a:ext>
             </a:extLst>
           </p:cNvPr>
@@ -7766,7 +7766,7 @@
           <p:cNvPr id="5" name="s5-identity">
             <a:extLst xmlns:a="http://schemas.openxmlformats.org/drawingml/2006/main">
               <a:ext uri="{FF2B5EF4-FFF2-40B4-BE49-F238E27FC236}">
-                <a16:creationId xmlns:a16="http://schemas.microsoft.com/office/drawing/2014/main" id="{0738EE75-82CE-4F43-8581-8B807A689FF8}"/>
+                <a16:creationId xmlns:a16="http://schemas.microsoft.com/office/drawing/2014/main" id="{BC0B8750-111C-4C70-BC1C-7ADD6AD24005}"/>
               </a:ext>
             </a:extLst>
           </p:cNvPr>
@@ -7824,7 +7824,7 @@
           <p:cNvPr id="6" name="core-no-0">
             <a:extLst xmlns:a="http://schemas.openxmlformats.org/drawingml/2006/main">
               <a:ext uri="{FF2B5EF4-FFF2-40B4-BE49-F238E27FC236}">
-                <a16:creationId xmlns:a16="http://schemas.microsoft.com/office/drawing/2014/main" id="{6F9FFABD-FEED-4D2A-A452-7DB49B7A3BF6}"/>
+                <a16:creationId xmlns:a16="http://schemas.microsoft.com/office/drawing/2014/main" id="{42DAC628-FDAA-4F09-8B50-ABC9375668AE}"/>
               </a:ext>
             </a:extLst>
           </p:cNvPr>
@@ -7882,7 +7882,7 @@
           <p:cNvPr id="7" name="core-label-0">
             <a:extLst xmlns:a="http://schemas.openxmlformats.org/drawingml/2006/main">
               <a:ext uri="{FF2B5EF4-FFF2-40B4-BE49-F238E27FC236}">
-                <a16:creationId xmlns:a16="http://schemas.microsoft.com/office/drawing/2014/main" id="{518DD02D-6286-4875-A485-3C8DB5C4D779}"/>
+                <a16:creationId xmlns:a16="http://schemas.microsoft.com/office/drawing/2014/main" id="{9AC7ABF2-5DE9-4A23-80E1-B080A97DC30C}"/>
               </a:ext>
             </a:extLst>
           </p:cNvPr>
@@ -7940,7 +7940,7 @@
           <p:cNvPr id="8" name="core-body-0">
             <a:extLst xmlns:a="http://schemas.openxmlformats.org/drawingml/2006/main">
               <a:ext uri="{FF2B5EF4-FFF2-40B4-BE49-F238E27FC236}">
-                <a16:creationId xmlns:a16="http://schemas.microsoft.com/office/drawing/2014/main" id="{68642D50-21EA-4783-8C8D-54DD72458049}"/>
+                <a16:creationId xmlns:a16="http://schemas.microsoft.com/office/drawing/2014/main" id="{444E1184-4B11-484C-A749-8C0BA9AD7658}"/>
               </a:ext>
             </a:extLst>
           </p:cNvPr>
@@ -8004,7 +8004,7 @@
           <p:cNvPr id="9" name="core-no-1">
             <a:extLst xmlns:a="http://schemas.openxmlformats.org/drawingml/2006/main">
               <a:ext uri="{FF2B5EF4-FFF2-40B4-BE49-F238E27FC236}">
-                <a16:creationId xmlns:a16="http://schemas.microsoft.com/office/drawing/2014/main" id="{261B4D9F-880B-4FA5-964A-242C0CA622BD}"/>
+                <a16:creationId xmlns:a16="http://schemas.microsoft.com/office/drawing/2014/main" id="{26022534-408A-444D-8DCB-DEF3F51AA40A}"/>
               </a:ext>
             </a:extLst>
           </p:cNvPr>
@@ -8062,7 +8062,7 @@
           <p:cNvPr id="10" name="core-body-1">
             <a:extLst xmlns:a="http://schemas.openxmlformats.org/drawingml/2006/main">
               <a:ext uri="{FF2B5EF4-FFF2-40B4-BE49-F238E27FC236}">
-                <a16:creationId xmlns:a16="http://schemas.microsoft.com/office/drawing/2014/main" id="{AAFDF839-0665-4F69-9B71-ED4335188129}"/>
+                <a16:creationId xmlns:a16="http://schemas.microsoft.com/office/drawing/2014/main" id="{C3546330-478D-49BF-B988-D9EA3939CFC5}"/>
               </a:ext>
             </a:extLst>
           </p:cNvPr>
@@ -8126,7 +8126,7 @@
           <p:cNvPr id="11" name="core-no-2">
             <a:extLst xmlns:a="http://schemas.openxmlformats.org/drawingml/2006/main">
               <a:ext uri="{FF2B5EF4-FFF2-40B4-BE49-F238E27FC236}">
-                <a16:creationId xmlns:a16="http://schemas.microsoft.com/office/drawing/2014/main" id="{A7E6F7C8-789F-4B50-A1F7-9204AAA46D92}"/>
+                <a16:creationId xmlns:a16="http://schemas.microsoft.com/office/drawing/2014/main" id="{B7CAA33F-9085-4E9B-A044-E05AD88B1452}"/>
               </a:ext>
             </a:extLst>
           </p:cNvPr>
@@ -8184,7 +8184,7 @@
           <p:cNvPr id="12" name="core-body-2">
             <a:extLst xmlns:a="http://schemas.openxmlformats.org/drawingml/2006/main">
               <a:ext uri="{FF2B5EF4-FFF2-40B4-BE49-F238E27FC236}">
-                <a16:creationId xmlns:a16="http://schemas.microsoft.com/office/drawing/2014/main" id="{39CEB005-0326-4931-9594-08E4B2C469BB}"/>
+                <a16:creationId xmlns:a16="http://schemas.microsoft.com/office/drawing/2014/main" id="{CCCD3546-0E13-4162-90DC-011BB0FB1A1E}"/>
               </a:ext>
             </a:extLst>
           </p:cNvPr>
@@ -8248,7 +8248,7 @@
           <p:cNvPr id="13" name="s5-takeaway-rule">
             <a:extLst xmlns:a="http://schemas.openxmlformats.org/drawingml/2006/main">
               <a:ext uri="{FF2B5EF4-FFF2-40B4-BE49-F238E27FC236}">
-                <a16:creationId xmlns:a16="http://schemas.microsoft.com/office/drawing/2014/main" id="{8D3D6705-34EA-470B-A5F3-F38368C60BB2}"/>
+                <a16:creationId xmlns:a16="http://schemas.microsoft.com/office/drawing/2014/main" id="{488695C6-16FC-4244-A91A-B9E0485648F4}"/>
               </a:ext>
             </a:extLst>
           </p:cNvPr>
@@ -8281,7 +8281,7 @@
           <p:cNvPr id="14" name="s5-takeaway">
             <a:extLst xmlns:a="http://schemas.openxmlformats.org/drawingml/2006/main">
               <a:ext uri="{FF2B5EF4-FFF2-40B4-BE49-F238E27FC236}">
-                <a16:creationId xmlns:a16="http://schemas.microsoft.com/office/drawing/2014/main" id="{BF3E60E4-0843-46F9-AA09-02342D2ACEC9}"/>
+                <a16:creationId xmlns:a16="http://schemas.microsoft.com/office/drawing/2014/main" id="{0ECF8392-7B53-4803-A166-012D73B15033}"/>
               </a:ext>
             </a:extLst>
           </p:cNvPr>
@@ -8337,7 +8337,7 @@
     </p:spTree>
     <p:extLst>
       <p:ext uri="{BB962C8B-B14F-4D97-AF65-F5344CB8AC3E}">
-        <p14:creationId xmlns:p14="http://schemas.microsoft.com/office/powerpoint/2010/main" val="1115897748"/>
+        <p14:creationId xmlns:p14="http://schemas.microsoft.com/office/powerpoint/2010/main" val="719853619"/>
       </p:ext>
     </p:extLst>
   </p:cSld>
@@ -8368,7 +8368,7 @@
           <p:cNvPr id="1" name="s6-rule">
             <a:extLst xmlns:a="http://schemas.openxmlformats.org/drawingml/2006/main">
               <a:ext uri="{FF2B5EF4-FFF2-40B4-BE49-F238E27FC236}">
-                <a16:creationId xmlns:a16="http://schemas.microsoft.com/office/drawing/2014/main" id="{AA879554-7FEA-4882-9C0B-92905681845F}"/>
+                <a16:creationId xmlns:a16="http://schemas.microsoft.com/office/drawing/2014/main" id="{21F848F7-A9F4-4327-AA34-4C86B136A5CB}"/>
               </a:ext>
             </a:extLst>
           </p:cNvPr>
@@ -8401,7 +8401,7 @@
           <p:cNvPr id="2" name="s6-eyebrow">
             <a:extLst xmlns:a="http://schemas.openxmlformats.org/drawingml/2006/main">
               <a:ext uri="{FF2B5EF4-FFF2-40B4-BE49-F238E27FC236}">
-                <a16:creationId xmlns:a16="http://schemas.microsoft.com/office/drawing/2014/main" id="{FAEB68D4-0363-48FD-85B5-1852AEC66357}"/>
+                <a16:creationId xmlns:a16="http://schemas.microsoft.com/office/drawing/2014/main" id="{89CF74F5-3099-4939-B843-EAFFE191C029}"/>
               </a:ext>
             </a:extLst>
           </p:cNvPr>
@@ -8459,7 +8459,7 @@
           <p:cNvPr id="3" name="s6-title">
             <a:extLst xmlns:a="http://schemas.openxmlformats.org/drawingml/2006/main">
               <a:ext uri="{FF2B5EF4-FFF2-40B4-BE49-F238E27FC236}">
-                <a16:creationId xmlns:a16="http://schemas.microsoft.com/office/drawing/2014/main" id="{24AAE885-C9E9-4975-8C2F-439BAED4A676}"/>
+                <a16:creationId xmlns:a16="http://schemas.microsoft.com/office/drawing/2014/main" id="{2D8C8A46-80AA-451C-B176-BF1464789397}"/>
               </a:ext>
             </a:extLst>
           </p:cNvPr>
@@ -8517,7 +8517,7 @@
           <p:cNvPr id="4" name="s6-footer">
             <a:extLst xmlns:a="http://schemas.openxmlformats.org/drawingml/2006/main">
               <a:ext uri="{FF2B5EF4-FFF2-40B4-BE49-F238E27FC236}">
-                <a16:creationId xmlns:a16="http://schemas.microsoft.com/office/drawing/2014/main" id="{38320864-EBE4-433E-9142-A7585BF64323}"/>
+                <a16:creationId xmlns:a16="http://schemas.microsoft.com/office/drawing/2014/main" id="{362AC037-53AB-4246-98BB-9B54C9069B70}"/>
               </a:ext>
             </a:extLst>
           </p:cNvPr>
@@ -8548,7 +8548,7 @@
           <p:cNvPr id="5" name="s6-identity">
             <a:extLst xmlns:a="http://schemas.openxmlformats.org/drawingml/2006/main">
               <a:ext uri="{FF2B5EF4-FFF2-40B4-BE49-F238E27FC236}">
-                <a16:creationId xmlns:a16="http://schemas.microsoft.com/office/drawing/2014/main" id="{A8C9EC06-B01A-4F5D-91B5-3C7AA0E63786}"/>
+                <a16:creationId xmlns:a16="http://schemas.microsoft.com/office/drawing/2014/main" id="{BBB60870-9029-4188-A4E0-1DE2F1957540}"/>
               </a:ext>
             </a:extLst>
           </p:cNvPr>
@@ -8606,7 +8606,7 @@
           <p:cNvPr id="6" name="core-no-0">
             <a:extLst xmlns:a="http://schemas.openxmlformats.org/drawingml/2006/main">
               <a:ext uri="{FF2B5EF4-FFF2-40B4-BE49-F238E27FC236}">
-                <a16:creationId xmlns:a16="http://schemas.microsoft.com/office/drawing/2014/main" id="{D4AD56AE-FC27-4B00-BA20-A0C200C26330}"/>
+                <a16:creationId xmlns:a16="http://schemas.microsoft.com/office/drawing/2014/main" id="{C7C94CC0-B6E2-4B23-8446-5B8E1FCC1284}"/>
               </a:ext>
             </a:extLst>
           </p:cNvPr>
@@ -8664,7 +8664,7 @@
           <p:cNvPr id="7" name="core-label-0">
             <a:extLst xmlns:a="http://schemas.openxmlformats.org/drawingml/2006/main">
               <a:ext uri="{FF2B5EF4-FFF2-40B4-BE49-F238E27FC236}">
-                <a16:creationId xmlns:a16="http://schemas.microsoft.com/office/drawing/2014/main" id="{5BB6C7F4-CEFB-4C6D-9BEA-757163800CE5}"/>
+                <a16:creationId xmlns:a16="http://schemas.microsoft.com/office/drawing/2014/main" id="{AE85DD0C-310E-47E8-BDA5-D572FB714FEC}"/>
               </a:ext>
             </a:extLst>
           </p:cNvPr>
@@ -8722,7 +8722,7 @@
           <p:cNvPr id="8" name="core-body-0">
             <a:extLst xmlns:a="http://schemas.openxmlformats.org/drawingml/2006/main">
               <a:ext uri="{FF2B5EF4-FFF2-40B4-BE49-F238E27FC236}">
-                <a16:creationId xmlns:a16="http://schemas.microsoft.com/office/drawing/2014/main" id="{004C7483-E1A2-4744-80DC-344C6D9E1F26}"/>
+                <a16:creationId xmlns:a16="http://schemas.microsoft.com/office/drawing/2014/main" id="{27070A8D-F064-4E4E-92F6-ED8BFFEBF419}"/>
               </a:ext>
             </a:extLst>
           </p:cNvPr>
@@ -8786,7 +8786,7 @@
           <p:cNvPr id="9" name="core-no-1">
             <a:extLst xmlns:a="http://schemas.openxmlformats.org/drawingml/2006/main">
               <a:ext uri="{FF2B5EF4-FFF2-40B4-BE49-F238E27FC236}">
-                <a16:creationId xmlns:a16="http://schemas.microsoft.com/office/drawing/2014/main" id="{FD7A85C3-B9AD-47F5-B0B6-93DC8A6CDA8A}"/>
+                <a16:creationId xmlns:a16="http://schemas.microsoft.com/office/drawing/2014/main" id="{8FFBFC4D-BFAA-475F-9402-707D9F309119}"/>
               </a:ext>
             </a:extLst>
           </p:cNvPr>
@@ -8844,7 +8844,7 @@
           <p:cNvPr id="10" name="core-body-1">
             <a:extLst xmlns:a="http://schemas.openxmlformats.org/drawingml/2006/main">
               <a:ext uri="{FF2B5EF4-FFF2-40B4-BE49-F238E27FC236}">
-                <a16:creationId xmlns:a16="http://schemas.microsoft.com/office/drawing/2014/main" id="{4C6ED6C3-D064-41A4-8588-18A66798E149}"/>
+                <a16:creationId xmlns:a16="http://schemas.microsoft.com/office/drawing/2014/main" id="{8C48417A-D31D-43E5-8651-794F7C51421A}"/>
               </a:ext>
             </a:extLst>
           </p:cNvPr>
@@ -8908,7 +8908,7 @@
           <p:cNvPr id="11" name="core-no-2">
             <a:extLst xmlns:a="http://schemas.openxmlformats.org/drawingml/2006/main">
               <a:ext uri="{FF2B5EF4-FFF2-40B4-BE49-F238E27FC236}">
-                <a16:creationId xmlns:a16="http://schemas.microsoft.com/office/drawing/2014/main" id="{FCE9898A-6387-409E-8FBC-5D24CC001E40}"/>
+                <a16:creationId xmlns:a16="http://schemas.microsoft.com/office/drawing/2014/main" id="{7D0E22B3-8842-497F-86B4-D1FF7958EBED}"/>
               </a:ext>
             </a:extLst>
           </p:cNvPr>
@@ -8966,7 +8966,7 @@
           <p:cNvPr id="12" name="core-body-2">
             <a:extLst xmlns:a="http://schemas.openxmlformats.org/drawingml/2006/main">
               <a:ext uri="{FF2B5EF4-FFF2-40B4-BE49-F238E27FC236}">
-                <a16:creationId xmlns:a16="http://schemas.microsoft.com/office/drawing/2014/main" id="{01B93262-6132-4091-A178-29B078BD7AD1}"/>
+                <a16:creationId xmlns:a16="http://schemas.microsoft.com/office/drawing/2014/main" id="{926C9CD0-2F5E-404B-BB36-409313875722}"/>
               </a:ext>
             </a:extLst>
           </p:cNvPr>
@@ -9030,7 +9030,7 @@
           <p:cNvPr id="13" name="s6-takeaway-rule">
             <a:extLst xmlns:a="http://schemas.openxmlformats.org/drawingml/2006/main">
               <a:ext uri="{FF2B5EF4-FFF2-40B4-BE49-F238E27FC236}">
-                <a16:creationId xmlns:a16="http://schemas.microsoft.com/office/drawing/2014/main" id="{8CF7B619-D21C-4E19-A1E1-6E73A7223E8B}"/>
+                <a16:creationId xmlns:a16="http://schemas.microsoft.com/office/drawing/2014/main" id="{C0974C96-8297-47A8-A49C-1F59BBC1BA31}"/>
               </a:ext>
             </a:extLst>
           </p:cNvPr>
@@ -9063,7 +9063,7 @@
           <p:cNvPr id="14" name="s6-takeaway">
             <a:extLst xmlns:a="http://schemas.openxmlformats.org/drawingml/2006/main">
               <a:ext uri="{FF2B5EF4-FFF2-40B4-BE49-F238E27FC236}">
-                <a16:creationId xmlns:a16="http://schemas.microsoft.com/office/drawing/2014/main" id="{DD3CD782-5A82-4C54-96DA-6E6CB1CB3CAA}"/>
+                <a16:creationId xmlns:a16="http://schemas.microsoft.com/office/drawing/2014/main" id="{F90B85B2-E49D-49C6-B042-0541E069B4A0}"/>
               </a:ext>
             </a:extLst>
           </p:cNvPr>
@@ -9119,7 +9119,7 @@
     </p:spTree>
     <p:extLst>
       <p:ext uri="{BB962C8B-B14F-4D97-AF65-F5344CB8AC3E}">
-        <p14:creationId xmlns:p14="http://schemas.microsoft.com/office/powerpoint/2010/main" val="1032242050"/>
+        <p14:creationId xmlns:p14="http://schemas.microsoft.com/office/powerpoint/2010/main" val="1541285293"/>
       </p:ext>
     </p:extLst>
   </p:cSld>
@@ -9150,7 +9150,7 @@
           <p:cNvPr id="1" name="s7-rule">
             <a:extLst xmlns:a="http://schemas.openxmlformats.org/drawingml/2006/main">
               <a:ext uri="{FF2B5EF4-FFF2-40B4-BE49-F238E27FC236}">
-                <a16:creationId xmlns:a16="http://schemas.microsoft.com/office/drawing/2014/main" id="{ADB7235E-D8E7-4284-B0FE-2592E8605693}"/>
+                <a16:creationId xmlns:a16="http://schemas.microsoft.com/office/drawing/2014/main" id="{6279B3A4-FA1D-4E76-813C-05C72DC2D208}"/>
               </a:ext>
             </a:extLst>
           </p:cNvPr>
@@ -9183,7 +9183,7 @@
           <p:cNvPr id="2" name="s7-eyebrow">
             <a:extLst xmlns:a="http://schemas.openxmlformats.org/drawingml/2006/main">
               <a:ext uri="{FF2B5EF4-FFF2-40B4-BE49-F238E27FC236}">
-                <a16:creationId xmlns:a16="http://schemas.microsoft.com/office/drawing/2014/main" id="{10E206BA-B097-47E3-BEC6-B32854992617}"/>
+                <a16:creationId xmlns:a16="http://schemas.microsoft.com/office/drawing/2014/main" id="{B0699C66-7964-4927-96FD-3664E55F4AAA}"/>
               </a:ext>
             </a:extLst>
           </p:cNvPr>
@@ -9241,7 +9241,7 @@
           <p:cNvPr id="3" name="s7-title">
             <a:extLst xmlns:a="http://schemas.openxmlformats.org/drawingml/2006/main">
               <a:ext uri="{FF2B5EF4-FFF2-40B4-BE49-F238E27FC236}">
-                <a16:creationId xmlns:a16="http://schemas.microsoft.com/office/drawing/2014/main" id="{CB794609-AE5B-4368-97F5-BF2F7D4C264D}"/>
+                <a16:creationId xmlns:a16="http://schemas.microsoft.com/office/drawing/2014/main" id="{74405467-3679-4B94-9B1D-D5763DA690FD}"/>
               </a:ext>
             </a:extLst>
           </p:cNvPr>
@@ -9299,7 +9299,7 @@
           <p:cNvPr id="4" name="s7-footer">
             <a:extLst xmlns:a="http://schemas.openxmlformats.org/drawingml/2006/main">
               <a:ext uri="{FF2B5EF4-FFF2-40B4-BE49-F238E27FC236}">
-                <a16:creationId xmlns:a16="http://schemas.microsoft.com/office/drawing/2014/main" id="{646E4DBE-2AD9-41BA-8F3D-C9F0D5E1092E}"/>
+                <a16:creationId xmlns:a16="http://schemas.microsoft.com/office/drawing/2014/main" id="{CC6A8810-B98E-475A-8DDD-1CF680C8DCE2}"/>
               </a:ext>
             </a:extLst>
           </p:cNvPr>
@@ -9330,7 +9330,7 @@
           <p:cNvPr id="5" name="s7-identity">
             <a:extLst xmlns:a="http://schemas.openxmlformats.org/drawingml/2006/main">
               <a:ext uri="{FF2B5EF4-FFF2-40B4-BE49-F238E27FC236}">
-                <a16:creationId xmlns:a16="http://schemas.microsoft.com/office/drawing/2014/main" id="{27B82BE7-A1D3-4066-9060-92B460CCB7AA}"/>
+                <a16:creationId xmlns:a16="http://schemas.microsoft.com/office/drawing/2014/main" id="{0DB0730A-A70E-4BDC-9877-3CC0C7BB9A6C}"/>
               </a:ext>
             </a:extLst>
           </p:cNvPr>
@@ -9388,7 +9388,7 @@
           <p:cNvPr id="6" name="core-no-0">
             <a:extLst xmlns:a="http://schemas.openxmlformats.org/drawingml/2006/main">
               <a:ext uri="{FF2B5EF4-FFF2-40B4-BE49-F238E27FC236}">
-                <a16:creationId xmlns:a16="http://schemas.microsoft.com/office/drawing/2014/main" id="{1F9884CC-2C52-4E18-91E9-1950A1AAD619}"/>
+                <a16:creationId xmlns:a16="http://schemas.microsoft.com/office/drawing/2014/main" id="{F8EBCC86-53A3-4EF8-8B0D-ACACDDC10B61}"/>
               </a:ext>
             </a:extLst>
           </p:cNvPr>
@@ -9446,7 +9446,7 @@
           <p:cNvPr id="7" name="core-label-0">
             <a:extLst xmlns:a="http://schemas.openxmlformats.org/drawingml/2006/main">
               <a:ext uri="{FF2B5EF4-FFF2-40B4-BE49-F238E27FC236}">
-                <a16:creationId xmlns:a16="http://schemas.microsoft.com/office/drawing/2014/main" id="{7132D4D4-D6E7-4A08-AD34-D951A20289B7}"/>
+                <a16:creationId xmlns:a16="http://schemas.microsoft.com/office/drawing/2014/main" id="{1FB33DFA-38D5-4814-AE01-4CEF990A7A1C}"/>
               </a:ext>
             </a:extLst>
           </p:cNvPr>
@@ -9504,7 +9504,7 @@
           <p:cNvPr id="8" name="core-body-0">
             <a:extLst xmlns:a="http://schemas.openxmlformats.org/drawingml/2006/main">
               <a:ext uri="{FF2B5EF4-FFF2-40B4-BE49-F238E27FC236}">
-                <a16:creationId xmlns:a16="http://schemas.microsoft.com/office/drawing/2014/main" id="{AF02D934-093D-419C-A12D-9A7895E7E1A8}"/>
+                <a16:creationId xmlns:a16="http://schemas.microsoft.com/office/drawing/2014/main" id="{8CAEF7B3-29E9-49AE-A2A5-084C9C738078}"/>
               </a:ext>
             </a:extLst>
           </p:cNvPr>
@@ -9568,7 +9568,7 @@
           <p:cNvPr id="9" name="core-no-1">
             <a:extLst xmlns:a="http://schemas.openxmlformats.org/drawingml/2006/main">
               <a:ext uri="{FF2B5EF4-FFF2-40B4-BE49-F238E27FC236}">
-                <a16:creationId xmlns:a16="http://schemas.microsoft.com/office/drawing/2014/main" id="{69D5F843-8DB5-4145-89D2-18854193EF0A}"/>
+                <a16:creationId xmlns:a16="http://schemas.microsoft.com/office/drawing/2014/main" id="{59B51069-0CF7-4035-883C-C788EF54BCF1}"/>
               </a:ext>
             </a:extLst>
           </p:cNvPr>
@@ -9626,7 +9626,7 @@
           <p:cNvPr id="10" name="core-body-1">
             <a:extLst xmlns:a="http://schemas.openxmlformats.org/drawingml/2006/main">
               <a:ext uri="{FF2B5EF4-FFF2-40B4-BE49-F238E27FC236}">
-                <a16:creationId xmlns:a16="http://schemas.microsoft.com/office/drawing/2014/main" id="{CF1532F8-9156-4790-8897-BC75C185E0E7}"/>
+                <a16:creationId xmlns:a16="http://schemas.microsoft.com/office/drawing/2014/main" id="{767775E4-FA5D-4788-9EC7-B714C81ABB54}"/>
               </a:ext>
             </a:extLst>
           </p:cNvPr>
@@ -9690,7 +9690,7 @@
           <p:cNvPr id="11" name="core-no-2">
             <a:extLst xmlns:a="http://schemas.openxmlformats.org/drawingml/2006/main">
               <a:ext uri="{FF2B5EF4-FFF2-40B4-BE49-F238E27FC236}">
-                <a16:creationId xmlns:a16="http://schemas.microsoft.com/office/drawing/2014/main" id="{BD383B71-7966-482A-8981-8DEFD9368037}"/>
+                <a16:creationId xmlns:a16="http://schemas.microsoft.com/office/drawing/2014/main" id="{7F4E1C07-FF6C-4FD9-A452-384593D4333F}"/>
               </a:ext>
             </a:extLst>
           </p:cNvPr>
@@ -9748,7 +9748,7 @@
           <p:cNvPr id="12" name="core-body-2">
             <a:extLst xmlns:a="http://schemas.openxmlformats.org/drawingml/2006/main">
               <a:ext uri="{FF2B5EF4-FFF2-40B4-BE49-F238E27FC236}">
-                <a16:creationId xmlns:a16="http://schemas.microsoft.com/office/drawing/2014/main" id="{BF7668C4-1FCF-4109-B1C9-5A8659C5BB60}"/>
+                <a16:creationId xmlns:a16="http://schemas.microsoft.com/office/drawing/2014/main" id="{3A59F667-7B61-4866-874B-DD71FDA9289B}"/>
               </a:ext>
             </a:extLst>
           </p:cNvPr>
@@ -9812,7 +9812,7 @@
           <p:cNvPr id="13" name="s7-takeaway-rule">
             <a:extLst xmlns:a="http://schemas.openxmlformats.org/drawingml/2006/main">
               <a:ext uri="{FF2B5EF4-FFF2-40B4-BE49-F238E27FC236}">
-                <a16:creationId xmlns:a16="http://schemas.microsoft.com/office/drawing/2014/main" id="{B3EC8569-876B-47A7-A046-4EB1BE81C145}"/>
+                <a16:creationId xmlns:a16="http://schemas.microsoft.com/office/drawing/2014/main" id="{86A7E81F-30CE-438F-A8E6-AF2F6BB104A1}"/>
               </a:ext>
             </a:extLst>
           </p:cNvPr>
@@ -9845,7 +9845,7 @@
           <p:cNvPr id="14" name="s7-takeaway">
             <a:extLst xmlns:a="http://schemas.openxmlformats.org/drawingml/2006/main">
               <a:ext uri="{FF2B5EF4-FFF2-40B4-BE49-F238E27FC236}">
-                <a16:creationId xmlns:a16="http://schemas.microsoft.com/office/drawing/2014/main" id="{58B57EC5-ACC7-4478-9062-B0C54E97B427}"/>
+                <a16:creationId xmlns:a16="http://schemas.microsoft.com/office/drawing/2014/main" id="{CB2AF5DE-64DC-4FD8-A149-32A740DDDA8E}"/>
               </a:ext>
             </a:extLst>
           </p:cNvPr>
@@ -9901,7 +9901,7 @@
     </p:spTree>
     <p:extLst>
       <p:ext uri="{BB962C8B-B14F-4D97-AF65-F5344CB8AC3E}">
-        <p14:creationId xmlns:p14="http://schemas.microsoft.com/office/powerpoint/2010/main" val="1979706113"/>
+        <p14:creationId xmlns:p14="http://schemas.microsoft.com/office/powerpoint/2010/main" val="606658073"/>
       </p:ext>
     </p:extLst>
   </p:cSld>
@@ -9932,7 +9932,7 @@
           <p:cNvPr id="1" name="s8-rule">
             <a:extLst xmlns:a="http://schemas.openxmlformats.org/drawingml/2006/main">
               <a:ext uri="{FF2B5EF4-FFF2-40B4-BE49-F238E27FC236}">
-                <a16:creationId xmlns:a16="http://schemas.microsoft.com/office/drawing/2014/main" id="{8D42092F-A0F3-46A0-9755-3BC761FD4183}"/>
+                <a16:creationId xmlns:a16="http://schemas.microsoft.com/office/drawing/2014/main" id="{3DE783D3-30D5-4D29-A2AE-F53A4D484A10}"/>
               </a:ext>
             </a:extLst>
           </p:cNvPr>
@@ -9965,7 +9965,7 @@
           <p:cNvPr id="2" name="s8-eyebrow">
             <a:extLst xmlns:a="http://schemas.openxmlformats.org/drawingml/2006/main">
               <a:ext uri="{FF2B5EF4-FFF2-40B4-BE49-F238E27FC236}">
-                <a16:creationId xmlns:a16="http://schemas.microsoft.com/office/drawing/2014/main" id="{AAFC5240-8C7C-422D-B983-C0F303000BB7}"/>
+                <a16:creationId xmlns:a16="http://schemas.microsoft.com/office/drawing/2014/main" id="{D4847A1B-FD24-41FD-B1BC-B31E3340567F}"/>
               </a:ext>
             </a:extLst>
           </p:cNvPr>
@@ -10023,7 +10023,7 @@
           <p:cNvPr id="3" name="s8-title">
             <a:extLst xmlns:a="http://schemas.openxmlformats.org/drawingml/2006/main">
               <a:ext uri="{FF2B5EF4-FFF2-40B4-BE49-F238E27FC236}">
-                <a16:creationId xmlns:a16="http://schemas.microsoft.com/office/drawing/2014/main" id="{E5BD48BF-1311-4D29-B918-0E2EDFCF7944}"/>
+                <a16:creationId xmlns:a16="http://schemas.microsoft.com/office/drawing/2014/main" id="{B1CEA434-E7A0-47FF-91DE-E36F48974C86}"/>
               </a:ext>
             </a:extLst>
           </p:cNvPr>
@@ -10081,7 +10081,7 @@
           <p:cNvPr id="4" name="s8-footer">
             <a:extLst xmlns:a="http://schemas.openxmlformats.org/drawingml/2006/main">
               <a:ext uri="{FF2B5EF4-FFF2-40B4-BE49-F238E27FC236}">
-                <a16:creationId xmlns:a16="http://schemas.microsoft.com/office/drawing/2014/main" id="{43555549-105A-4221-8E61-11CA2C3005A7}"/>
+                <a16:creationId xmlns:a16="http://schemas.microsoft.com/office/drawing/2014/main" id="{ADE9DF44-F4AE-4730-AC3D-92AE52D16667}"/>
               </a:ext>
             </a:extLst>
           </p:cNvPr>
@@ -10112,7 +10112,7 @@
           <p:cNvPr id="5" name="s8-identity">
             <a:extLst xmlns:a="http://schemas.openxmlformats.org/drawingml/2006/main">
               <a:ext uri="{FF2B5EF4-FFF2-40B4-BE49-F238E27FC236}">
-                <a16:creationId xmlns:a16="http://schemas.microsoft.com/office/drawing/2014/main" id="{CEA0654E-0AB1-4318-9E1D-8B0406C492CA}"/>
+                <a16:creationId xmlns:a16="http://schemas.microsoft.com/office/drawing/2014/main" id="{D11305EB-F0A6-43C4-82A6-0F85AB226E02}"/>
               </a:ext>
             </a:extLst>
           </p:cNvPr>
@@ -10170,7 +10170,7 @@
           <p:cNvPr id="6" name="core-no-0">
             <a:extLst xmlns:a="http://schemas.openxmlformats.org/drawingml/2006/main">
               <a:ext uri="{FF2B5EF4-FFF2-40B4-BE49-F238E27FC236}">
-                <a16:creationId xmlns:a16="http://schemas.microsoft.com/office/drawing/2014/main" id="{0E6D0678-2ADB-4D93-BBD1-1B426044052A}"/>
+                <a16:creationId xmlns:a16="http://schemas.microsoft.com/office/drawing/2014/main" id="{CDF8C2A6-8D91-4578-9111-7D0BA1821FED}"/>
               </a:ext>
             </a:extLst>
           </p:cNvPr>
@@ -10228,7 +10228,7 @@
           <p:cNvPr id="7" name="core-label-0">
             <a:extLst xmlns:a="http://schemas.openxmlformats.org/drawingml/2006/main">
               <a:ext uri="{FF2B5EF4-FFF2-40B4-BE49-F238E27FC236}">
-                <a16:creationId xmlns:a16="http://schemas.microsoft.com/office/drawing/2014/main" id="{B06AA6D9-6775-4002-969A-532E4F536254}"/>
+                <a16:creationId xmlns:a16="http://schemas.microsoft.com/office/drawing/2014/main" id="{EA3BFD5C-B510-4228-A368-AF8423F7B15B}"/>
               </a:ext>
             </a:extLst>
           </p:cNvPr>
@@ -10286,7 +10286,7 @@
           <p:cNvPr id="8" name="core-body-0">
             <a:extLst xmlns:a="http://schemas.openxmlformats.org/drawingml/2006/main">
               <a:ext uri="{FF2B5EF4-FFF2-40B4-BE49-F238E27FC236}">
-                <a16:creationId xmlns:a16="http://schemas.microsoft.com/office/drawing/2014/main" id="{BB7806BE-15E4-4F91-BF3D-A74D592C768B}"/>
+                <a16:creationId xmlns:a16="http://schemas.microsoft.com/office/drawing/2014/main" id="{C41705C5-8BB9-4D8A-9295-E95CFAAF0089}"/>
               </a:ext>
             </a:extLst>
           </p:cNvPr>
@@ -10350,7 +10350,7 @@
           <p:cNvPr id="9" name="core-no-1">
             <a:extLst xmlns:a="http://schemas.openxmlformats.org/drawingml/2006/main">
               <a:ext uri="{FF2B5EF4-FFF2-40B4-BE49-F238E27FC236}">
-                <a16:creationId xmlns:a16="http://schemas.microsoft.com/office/drawing/2014/main" id="{200802E2-87DD-4A03-8376-A3E7ED94D60C}"/>
+                <a16:creationId xmlns:a16="http://schemas.microsoft.com/office/drawing/2014/main" id="{1BB6A3F1-3E9C-4FDF-9E40-E5303A49C97C}"/>
               </a:ext>
             </a:extLst>
           </p:cNvPr>
@@ -10408,7 +10408,7 @@
           <p:cNvPr id="10" name="core-body-1">
             <a:extLst xmlns:a="http://schemas.openxmlformats.org/drawingml/2006/main">
               <a:ext uri="{FF2B5EF4-FFF2-40B4-BE49-F238E27FC236}">
-                <a16:creationId xmlns:a16="http://schemas.microsoft.com/office/drawing/2014/main" id="{CF7D9CB4-8BEA-4909-8117-6454560B8D9F}"/>
+                <a16:creationId xmlns:a16="http://schemas.microsoft.com/office/drawing/2014/main" id="{A5B72BCC-859E-4D2B-9C82-0E2FC9DD846D}"/>
               </a:ext>
             </a:extLst>
           </p:cNvPr>
@@ -10472,7 +10472,7 @@
           <p:cNvPr id="11" name="core-no-2">
             <a:extLst xmlns:a="http://schemas.openxmlformats.org/drawingml/2006/main">
               <a:ext uri="{FF2B5EF4-FFF2-40B4-BE49-F238E27FC236}">
-                <a16:creationId xmlns:a16="http://schemas.microsoft.com/office/drawing/2014/main" id="{94AC048E-0D11-4ACA-9305-D6F1E5657A42}"/>
+                <a16:creationId xmlns:a16="http://schemas.microsoft.com/office/drawing/2014/main" id="{18306A7D-3296-4CF7-9D9F-1975EABA156A}"/>
               </a:ext>
             </a:extLst>
           </p:cNvPr>
@@ -10530,7 +10530,7 @@
           <p:cNvPr id="12" name="core-body-2">
             <a:extLst xmlns:a="http://schemas.openxmlformats.org/drawingml/2006/main">
               <a:ext uri="{FF2B5EF4-FFF2-40B4-BE49-F238E27FC236}">
-                <a16:creationId xmlns:a16="http://schemas.microsoft.com/office/drawing/2014/main" id="{EF95517B-6BB9-4710-8619-9BDEAA9F3936}"/>
+                <a16:creationId xmlns:a16="http://schemas.microsoft.com/office/drawing/2014/main" id="{0C8AA9F5-4DC1-4CC9-9F23-4417EF26C189}"/>
               </a:ext>
             </a:extLst>
           </p:cNvPr>
@@ -10594,7 +10594,7 @@
           <p:cNvPr id="13" name="s8-takeaway-rule">
             <a:extLst xmlns:a="http://schemas.openxmlformats.org/drawingml/2006/main">
               <a:ext uri="{FF2B5EF4-FFF2-40B4-BE49-F238E27FC236}">
-                <a16:creationId xmlns:a16="http://schemas.microsoft.com/office/drawing/2014/main" id="{C719058A-8DA8-4232-9FF3-632FAEAFF505}"/>
+                <a16:creationId xmlns:a16="http://schemas.microsoft.com/office/drawing/2014/main" id="{990444D1-D29A-494E-8D29-FC2535AD8C0D}"/>
               </a:ext>
             </a:extLst>
           </p:cNvPr>
@@ -10627,7 +10627,7 @@
           <p:cNvPr id="14" name="s8-takeaway">
             <a:extLst xmlns:a="http://schemas.openxmlformats.org/drawingml/2006/main">
               <a:ext uri="{FF2B5EF4-FFF2-40B4-BE49-F238E27FC236}">
-                <a16:creationId xmlns:a16="http://schemas.microsoft.com/office/drawing/2014/main" id="{A9D80442-00A3-4F36-B7DA-AD0D89920362}"/>
+                <a16:creationId xmlns:a16="http://schemas.microsoft.com/office/drawing/2014/main" id="{561C16BE-29E8-4FBB-9258-E7D9D9C0CA87}"/>
               </a:ext>
             </a:extLst>
           </p:cNvPr>
@@ -10683,7 +10683,7 @@
     </p:spTree>
     <p:extLst>
       <p:ext uri="{BB962C8B-B14F-4D97-AF65-F5344CB8AC3E}">
-        <p14:creationId xmlns:p14="http://schemas.microsoft.com/office/powerpoint/2010/main" val="615132967"/>
+        <p14:creationId xmlns:p14="http://schemas.microsoft.com/office/powerpoint/2010/main" val="333678999"/>
       </p:ext>
     </p:extLst>
   </p:cSld>
@@ -10714,7 +10714,7 @@
           <p:cNvPr id="1" name="s9-rule">
             <a:extLst xmlns:a="http://schemas.openxmlformats.org/drawingml/2006/main">
               <a:ext uri="{FF2B5EF4-FFF2-40B4-BE49-F238E27FC236}">
-                <a16:creationId xmlns:a16="http://schemas.microsoft.com/office/drawing/2014/main" id="{6C5FEF25-AA87-4F4F-8D28-08F202CA0B1B}"/>
+                <a16:creationId xmlns:a16="http://schemas.microsoft.com/office/drawing/2014/main" id="{4B1299EF-D910-4CC7-8E03-3ACEFFB11B35}"/>
               </a:ext>
             </a:extLst>
           </p:cNvPr>
@@ -10747,7 +10747,7 @@
           <p:cNvPr id="2" name="s9-eyebrow">
             <a:extLst xmlns:a="http://schemas.openxmlformats.org/drawingml/2006/main">
               <a:ext uri="{FF2B5EF4-FFF2-40B4-BE49-F238E27FC236}">
-                <a16:creationId xmlns:a16="http://schemas.microsoft.com/office/drawing/2014/main" id="{9FE503D5-9BCF-4498-A816-9FCD7FF52BBB}"/>
+                <a16:creationId xmlns:a16="http://schemas.microsoft.com/office/drawing/2014/main" id="{DED4642F-3825-47B5-9308-402A60C3846F}"/>
               </a:ext>
             </a:extLst>
           </p:cNvPr>
@@ -10805,7 +10805,7 @@
           <p:cNvPr id="3" name="s9-title">
             <a:extLst xmlns:a="http://schemas.openxmlformats.org/drawingml/2006/main">
               <a:ext uri="{FF2B5EF4-FFF2-40B4-BE49-F238E27FC236}">
-                <a16:creationId xmlns:a16="http://schemas.microsoft.com/office/drawing/2014/main" id="{AE5EAD9A-258C-4A5D-A06D-E979C5130098}"/>
+                <a16:creationId xmlns:a16="http://schemas.microsoft.com/office/drawing/2014/main" id="{92A6E8A8-922F-4CD3-BC80-856F978302F0}"/>
               </a:ext>
             </a:extLst>
           </p:cNvPr>
@@ -10863,7 +10863,7 @@
           <p:cNvPr id="4" name="s9-footer">
             <a:extLst xmlns:a="http://schemas.openxmlformats.org/drawingml/2006/main">
               <a:ext uri="{FF2B5EF4-FFF2-40B4-BE49-F238E27FC236}">
-                <a16:creationId xmlns:a16="http://schemas.microsoft.com/office/drawing/2014/main" id="{41D81A68-B7CC-4EEA-A8A6-CCEDDEA993D1}"/>
+                <a16:creationId xmlns:a16="http://schemas.microsoft.com/office/drawing/2014/main" id="{B9C2117C-4580-43B0-976A-A30872B752F6}"/>
               </a:ext>
             </a:extLst>
           </p:cNvPr>
@@ -10894,7 +10894,7 @@
           <p:cNvPr id="5" name="s9-identity">
             <a:extLst xmlns:a="http://schemas.openxmlformats.org/drawingml/2006/main">
               <a:ext uri="{FF2B5EF4-FFF2-40B4-BE49-F238E27FC236}">
-                <a16:creationId xmlns:a16="http://schemas.microsoft.com/office/drawing/2014/main" id="{1DDF4F63-6059-4605-BE07-5E9ACE37E6D3}"/>
+                <a16:creationId xmlns:a16="http://schemas.microsoft.com/office/drawing/2014/main" id="{7E59B5A1-73BA-463D-83BD-AE097AE86851}"/>
               </a:ext>
             </a:extLst>
           </p:cNvPr>
@@ -10952,7 +10952,7 @@
           <p:cNvPr id="6" name="case-title">
             <a:extLst xmlns:a="http://schemas.openxmlformats.org/drawingml/2006/main">
               <a:ext uri="{FF2B5EF4-FFF2-40B4-BE49-F238E27FC236}">
-                <a16:creationId xmlns:a16="http://schemas.microsoft.com/office/drawing/2014/main" id="{099E7B81-9D61-4126-A5E5-46F2A496ABF1}"/>
+                <a16:creationId xmlns:a16="http://schemas.microsoft.com/office/drawing/2014/main" id="{32570B27-40DC-49B4-BEE1-8B5AF004A5FB}"/>
               </a:ext>
             </a:extLst>
           </p:cNvPr>
@@ -11016,7 +11016,7 @@
           <p:cNvPr id="7" name="case-row-0">
             <a:extLst xmlns:a="http://schemas.openxmlformats.org/drawingml/2006/main">
               <a:ext uri="{FF2B5EF4-FFF2-40B4-BE49-F238E27FC236}">
-                <a16:creationId xmlns:a16="http://schemas.microsoft.com/office/drawing/2014/main" id="{4B45A3F5-AEA1-4ECE-BFAE-0215D91C747F}"/>
+                <a16:creationId xmlns:a16="http://schemas.microsoft.com/office/drawing/2014/main" id="{D6167766-3A84-4016-A339-1FFBD3156945}"/>
               </a:ext>
             </a:extLst>
           </p:cNvPr>
@@ -11080,7 +11080,7 @@
           <p:cNvPr id="8" name="case-row-1">
             <a:extLst xmlns:a="http://schemas.openxmlformats.org/drawingml/2006/main">
               <a:ext uri="{FF2B5EF4-FFF2-40B4-BE49-F238E27FC236}">
-                <a16:creationId xmlns:a16="http://schemas.microsoft.com/office/drawing/2014/main" id="{D3A2F7A0-E171-4317-AF65-BD1FD851276D}"/>
+                <a16:creationId xmlns:a16="http://schemas.microsoft.com/office/drawing/2014/main" id="{063F1453-2F1F-462C-8A7B-80D1F97922A9}"/>
               </a:ext>
             </a:extLst>
           </p:cNvPr>
@@ -11144,7 +11144,7 @@
           <p:cNvPr id="9" name="case-row-2">
             <a:extLst xmlns:a="http://schemas.openxmlformats.org/drawingml/2006/main">
               <a:ext uri="{FF2B5EF4-FFF2-40B4-BE49-F238E27FC236}">
-                <a16:creationId xmlns:a16="http://schemas.microsoft.com/office/drawing/2014/main" id="{36C79834-454F-4BFC-A319-E397459919CF}"/>
+                <a16:creationId xmlns:a16="http://schemas.microsoft.com/office/drawing/2014/main" id="{B04C8221-78BD-4406-A2AA-362AC1F150CA}"/>
               </a:ext>
             </a:extLst>
           </p:cNvPr>
@@ -11208,7 +11208,7 @@
           <p:cNvPr id="10" name="case-row-3">
             <a:extLst xmlns:a="http://schemas.openxmlformats.org/drawingml/2006/main">
               <a:ext uri="{FF2B5EF4-FFF2-40B4-BE49-F238E27FC236}">
-                <a16:creationId xmlns:a16="http://schemas.microsoft.com/office/drawing/2014/main" id="{2809A8AE-5A0D-453B-A06F-F4A6D81697BD}"/>
+                <a16:creationId xmlns:a16="http://schemas.microsoft.com/office/drawing/2014/main" id="{1A5C1546-7DEB-4A91-8B32-84B78C45AF21}"/>
               </a:ext>
             </a:extLst>
           </p:cNvPr>
@@ -11272,7 +11272,7 @@
           <p:cNvPr id="11" name="s9-takeaway-rule">
             <a:extLst xmlns:a="http://schemas.openxmlformats.org/drawingml/2006/main">
               <a:ext uri="{FF2B5EF4-FFF2-40B4-BE49-F238E27FC236}">
-                <a16:creationId xmlns:a16="http://schemas.microsoft.com/office/drawing/2014/main" id="{1E954506-F90C-468E-AD92-843660A05E37}"/>
+                <a16:creationId xmlns:a16="http://schemas.microsoft.com/office/drawing/2014/main" id="{4516E56B-4E36-4357-ACED-32FC9BE5C081}"/>
               </a:ext>
             </a:extLst>
           </p:cNvPr>
@@ -11305,7 +11305,7 @@
           <p:cNvPr id="12" name="s9-takeaway">
             <a:extLst xmlns:a="http://schemas.openxmlformats.org/drawingml/2006/main">
               <a:ext uri="{FF2B5EF4-FFF2-40B4-BE49-F238E27FC236}">
-                <a16:creationId xmlns:a16="http://schemas.microsoft.com/office/drawing/2014/main" id="{D2C2090F-1DFF-421A-925F-A2BB7DEBAE3F}"/>
+                <a16:creationId xmlns:a16="http://schemas.microsoft.com/office/drawing/2014/main" id="{C9583820-C5E6-4335-9AF1-CE6F7DED6B31}"/>
               </a:ext>
             </a:extLst>
           </p:cNvPr>
@@ -11361,7 +11361,7 @@
     </p:spTree>
     <p:extLst>
       <p:ext uri="{BB962C8B-B14F-4D97-AF65-F5344CB8AC3E}">
-        <p14:creationId xmlns:p14="http://schemas.microsoft.com/office/powerpoint/2010/main" val="1746575228"/>
+        <p14:creationId xmlns:p14="http://schemas.microsoft.com/office/powerpoint/2010/main" val="1103914923"/>
       </p:ext>
     </p:extLst>
   </p:cSld>
